--- a/templates/report.master.pptx
+++ b/templates/report.master.pptx
@@ -5175,7 +5175,7 @@
       </p:cxnSp>
       <p:sp>
         <p:nvSpPr>
-          <p:cNvPr id="5" name="ZoneTexte 30">
+          <p:cNvPr id="5" name="slot.footer-copyright">
             <a:extLst>
               <a:ext uri="{FF2B5EF4-FFF2-40B4-BE49-F238E27FC236}">
                 <a16:creationId xmlns:a16="http://schemas.microsoft.com/office/drawing/2014/main" id="{A2FEA1FF-9F37-6219-3F4E-99D834B28FEB}"/>
@@ -5229,7 +5229,7 @@
       </p:sp>
       <p:sp>
         <p:nvSpPr>
-          <p:cNvPr id="8" name="ZoneTexte 7">
+          <p:cNvPr id="8" name="slot.footer-logo">
             <a:extLst>
               <a:ext uri="{FF2B5EF4-FFF2-40B4-BE49-F238E27FC236}">
                 <a16:creationId xmlns:a16="http://schemas.microsoft.com/office/drawing/2014/main" id="{E8981164-199B-BE71-F7D8-B1188DFC07F2}"/>
@@ -5881,7 +5881,7 @@
       </p:sp>
       <p:sp>
         <p:nvSpPr>
-          <p:cNvPr id="8" name="ZoneTexte 30">
+          <p:cNvPr id="8" name="slot.footer-copyright">
             <a:extLst>
               <a:ext uri="{FF2B5EF4-FFF2-40B4-BE49-F238E27FC236}">
                 <a16:creationId xmlns:a16="http://schemas.microsoft.com/office/drawing/2014/main" id="{E150FD5F-C13D-5321-DE4B-E1FDA4387569}"/>
@@ -5935,7 +5935,7 @@
       </p:sp>
       <p:sp>
         <p:nvSpPr>
-          <p:cNvPr id="12" name="ZoneTexte 11">
+          <p:cNvPr id="12" name="slot.footer-logo">
             <a:extLst>
               <a:ext uri="{FF2B5EF4-FFF2-40B4-BE49-F238E27FC236}">
                 <a16:creationId xmlns:a16="http://schemas.microsoft.com/office/drawing/2014/main" id="{8AF61725-8811-F4AA-3B06-802B815FDF5F}"/>
@@ -7250,7 +7250,7 @@
       </p:sp>
       <p:sp>
         <p:nvSpPr>
-          <p:cNvPr id="4" name="ZoneTexte 30">
+          <p:cNvPr id="4" name="slot.footer-copyright">
             <a:extLst>
               <a:ext uri="{FF2B5EF4-FFF2-40B4-BE49-F238E27FC236}">
                 <a16:creationId xmlns:a16="http://schemas.microsoft.com/office/drawing/2014/main" id="{C6A98321-E2FB-BA54-2C7C-C6FAE635B1A9}"/>
@@ -7304,7 +7304,7 @@
       </p:sp>
       <p:sp>
         <p:nvSpPr>
-          <p:cNvPr id="8" name="ZoneTexte 7">
+          <p:cNvPr id="8" name="slot.footer-logo">
             <a:extLst>
               <a:ext uri="{FF2B5EF4-FFF2-40B4-BE49-F238E27FC236}">
                 <a16:creationId xmlns:a16="http://schemas.microsoft.com/office/drawing/2014/main" id="{EF472C68-8BBB-B295-F133-C34823F6F4A8}"/>
@@ -8047,7 +8047,7 @@
       </p:cxnSp>
       <p:sp>
         <p:nvSpPr>
-          <p:cNvPr id="8" name="Espace réservé du numéro de diapositive 5">
+          <p:cNvPr id="8" name="slot.footer-page">
             <a:extLst>
               <a:ext uri="{FF2B5EF4-FFF2-40B4-BE49-F238E27FC236}">
                 <a16:creationId xmlns:a16="http://schemas.microsoft.com/office/drawing/2014/main" id="{510C2F0B-2799-67BD-FD30-3323FE6E8D3F}"/>
@@ -8081,7 +8081,7 @@
       </p:sp>
       <p:sp>
         <p:nvSpPr>
-          <p:cNvPr id="15" name="Espace réservé du contenu 6">
+          <p:cNvPr id="15" name="slot.source">
             <a:extLst>
               <a:ext uri="{FF2B5EF4-FFF2-40B4-BE49-F238E27FC236}">
                 <a16:creationId xmlns:a16="http://schemas.microsoft.com/office/drawing/2014/main" id="{BB6B3779-78D5-9210-1459-E20DFD83BF8E}"/>
@@ -8148,7 +8148,7 @@
       </p:sp>
       <p:sp>
         <p:nvSpPr>
-          <p:cNvPr id="7" name="ZoneTexte 30">
+          <p:cNvPr id="7" name="slot.footer-copyright">
             <a:extLst>
               <a:ext uri="{FF2B5EF4-FFF2-40B4-BE49-F238E27FC236}">
                 <a16:creationId xmlns:a16="http://schemas.microsoft.com/office/drawing/2014/main" id="{9A6DF3F5-8564-E129-6554-B6EDA6853068}"/>
@@ -8202,7 +8202,7 @@
       </p:sp>
       <p:sp>
         <p:nvSpPr>
-          <p:cNvPr id="9" name="ZoneTexte 8">
+          <p:cNvPr id="9" name="slot.footer-logo">
             <a:extLst>
               <a:ext uri="{FF2B5EF4-FFF2-40B4-BE49-F238E27FC236}">
                 <a16:creationId xmlns:a16="http://schemas.microsoft.com/office/drawing/2014/main" id="{06395C06-3B11-8812-966B-5A6B6AA95084}"/>
@@ -8945,7 +8945,7 @@
       </p:cxnSp>
       <p:sp>
         <p:nvSpPr>
-          <p:cNvPr id="11" name="Espace réservé du numéro de diapositive 5">
+          <p:cNvPr id="11" name="slot.footer-page">
             <a:extLst>
               <a:ext uri="{FF2B5EF4-FFF2-40B4-BE49-F238E27FC236}">
                 <a16:creationId xmlns:a16="http://schemas.microsoft.com/office/drawing/2014/main" id="{B083480F-4AEB-CC56-9E28-75B8E7A55047}"/>
@@ -8979,7 +8979,7 @@
       </p:sp>
       <p:sp>
         <p:nvSpPr>
-          <p:cNvPr id="19" name="Espace réservé du contenu 6">
+          <p:cNvPr id="19" name="slot.source">
             <a:extLst>
               <a:ext uri="{FF2B5EF4-FFF2-40B4-BE49-F238E27FC236}">
                 <a16:creationId xmlns:a16="http://schemas.microsoft.com/office/drawing/2014/main" id="{47DD7148-9127-86A3-6944-6DF6931A959F}"/>
@@ -9046,7 +9046,7 @@
       </p:sp>
       <p:sp>
         <p:nvSpPr>
-          <p:cNvPr id="7" name="ZoneTexte 30">
+          <p:cNvPr id="7" name="slot.footer-copyright">
             <a:extLst>
               <a:ext uri="{FF2B5EF4-FFF2-40B4-BE49-F238E27FC236}">
                 <a16:creationId xmlns:a16="http://schemas.microsoft.com/office/drawing/2014/main" id="{69C38BEF-2317-F24E-C3B1-1AA0A6810398}"/>
@@ -9100,7 +9100,7 @@
       </p:sp>
       <p:sp>
         <p:nvSpPr>
-          <p:cNvPr id="8" name="ZoneTexte 7">
+          <p:cNvPr id="8" name="slot.footer-logo">
             <a:extLst>
               <a:ext uri="{FF2B5EF4-FFF2-40B4-BE49-F238E27FC236}">
                 <a16:creationId xmlns:a16="http://schemas.microsoft.com/office/drawing/2014/main" id="{A2FB2DD0-93CC-F92C-4E8C-5BA3458E25C3}"/>
@@ -9450,7 +9450,7 @@
       </p:sp>
       <p:sp>
         <p:nvSpPr>
-          <p:cNvPr id="5" name="Espace réservé du texte 4">
+          <p:cNvPr id="5" name="slot.subtitle-2">
             <a:extLst>
               <a:ext uri="{FF2B5EF4-FFF2-40B4-BE49-F238E27FC236}">
                 <a16:creationId xmlns:a16="http://schemas.microsoft.com/office/drawing/2014/main" id="{2D35804D-7044-B129-7E2C-ED3868BD4F80}"/>
@@ -9541,7 +9541,7 @@
       </p:sp>
       <p:sp>
         <p:nvSpPr>
-          <p:cNvPr id="6" name="Espace réservé du contenu 5">
+          <p:cNvPr id="6" name="slot.body">
             <a:extLst>
               <a:ext uri="{FF2B5EF4-FFF2-40B4-BE49-F238E27FC236}">
                 <a16:creationId xmlns:a16="http://schemas.microsoft.com/office/drawing/2014/main" id="{C56BF488-D9DF-64BA-30D9-77D4A3CB1561}"/>
@@ -9871,7 +9871,7 @@
       </p:sp>
       <p:sp>
         <p:nvSpPr>
-          <p:cNvPr id="4" name="ZoneTexte 30">
+          <p:cNvPr id="4" name="slot.footer-copyright">
             <a:extLst>
               <a:ext uri="{FF2B5EF4-FFF2-40B4-BE49-F238E27FC236}">
                 <a16:creationId xmlns:a16="http://schemas.microsoft.com/office/drawing/2014/main" id="{B9EA91B6-6CF2-5B80-F0AE-B0ED5165D982}"/>
@@ -9925,7 +9925,7 @@
       </p:sp>
       <p:sp>
         <p:nvSpPr>
-          <p:cNvPr id="7" name="ZoneTexte 6">
+          <p:cNvPr id="7" name="slot.footer-logo">
             <a:extLst>
               <a:ext uri="{FF2B5EF4-FFF2-40B4-BE49-F238E27FC236}">
                 <a16:creationId xmlns:a16="http://schemas.microsoft.com/office/drawing/2014/main" id="{4C9F5E73-E5D7-0B11-9227-681DA930D820}"/>
@@ -10280,7 +10280,7 @@
       </p:sp>
       <p:sp>
         <p:nvSpPr>
-          <p:cNvPr id="5" name="Espace réservé du texte 4">
+          <p:cNvPr id="5" name="slot.subtitle-2">
             <a:extLst>
               <a:ext uri="{FF2B5EF4-FFF2-40B4-BE49-F238E27FC236}">
                 <a16:creationId xmlns:a16="http://schemas.microsoft.com/office/drawing/2014/main" id="{2D35804D-7044-B129-7E2C-ED3868BD4F80}"/>
@@ -10371,7 +10371,7 @@
       </p:sp>
       <p:sp>
         <p:nvSpPr>
-          <p:cNvPr id="6" name="Espace réservé du contenu 5">
+          <p:cNvPr id="6" name="slot.body">
             <a:extLst>
               <a:ext uri="{FF2B5EF4-FFF2-40B4-BE49-F238E27FC236}">
                 <a16:creationId xmlns:a16="http://schemas.microsoft.com/office/drawing/2014/main" id="{C56BF488-D9DF-64BA-30D9-77D4A3CB1561}"/>
@@ -10738,7 +10738,7 @@
       </p:sp>
       <p:sp>
         <p:nvSpPr>
-          <p:cNvPr id="7" name="ZoneTexte 30">
+          <p:cNvPr id="7" name="slot.footer-copyright">
             <a:extLst>
               <a:ext uri="{FF2B5EF4-FFF2-40B4-BE49-F238E27FC236}">
                 <a16:creationId xmlns:a16="http://schemas.microsoft.com/office/drawing/2014/main" id="{1BF41F40-595B-48CD-E781-95878742749D}"/>
@@ -10792,7 +10792,7 @@
       </p:sp>
       <p:sp>
         <p:nvSpPr>
-          <p:cNvPr id="9" name="ZoneTexte 8">
+          <p:cNvPr id="9" name="slot.footer-logo">
             <a:extLst>
               <a:ext uri="{FF2B5EF4-FFF2-40B4-BE49-F238E27FC236}">
                 <a16:creationId xmlns:a16="http://schemas.microsoft.com/office/drawing/2014/main" id="{EEBE6346-AC0F-95D1-CFD8-CB8054A615A5}"/>
@@ -11602,7 +11602,7 @@
       </p:cxnSp>
       <p:sp>
         <p:nvSpPr>
-          <p:cNvPr id="11" name="Espace réservé du numéro de diapositive 5">
+          <p:cNvPr id="11" name="slot.footer-page">
             <a:extLst>
               <a:ext uri="{FF2B5EF4-FFF2-40B4-BE49-F238E27FC236}">
                 <a16:creationId xmlns:a16="http://schemas.microsoft.com/office/drawing/2014/main" id="{EF3FC79F-B88C-8E01-0898-E0B4EFE85FEE}"/>
@@ -11645,7 +11645,7 @@
       </p:sp>
       <p:sp>
         <p:nvSpPr>
-          <p:cNvPr id="22" name="Espace réservé du contenu 6">
+          <p:cNvPr id="22" name="slot.source">
             <a:extLst>
               <a:ext uri="{FF2B5EF4-FFF2-40B4-BE49-F238E27FC236}">
                 <a16:creationId xmlns:a16="http://schemas.microsoft.com/office/drawing/2014/main" id="{BD45DD6B-1B35-99CF-127B-561BE4952E16}"/>
@@ -11712,7 +11712,7 @@
       </p:sp>
       <p:sp>
         <p:nvSpPr>
-          <p:cNvPr id="9" name="ZoneTexte 30">
+          <p:cNvPr id="9" name="slot.footer-copyright">
             <a:extLst>
               <a:ext uri="{FF2B5EF4-FFF2-40B4-BE49-F238E27FC236}">
                 <a16:creationId xmlns:a16="http://schemas.microsoft.com/office/drawing/2014/main" id="{E76FB809-1B2B-CCF6-24BB-429FDD2D7B24}"/>
@@ -11766,7 +11766,7 @@
       </p:sp>
       <p:sp>
         <p:nvSpPr>
-          <p:cNvPr id="14" name="ZoneTexte 13">
+          <p:cNvPr id="14" name="slot.footer-logo">
             <a:extLst>
               <a:ext uri="{FF2B5EF4-FFF2-40B4-BE49-F238E27FC236}">
                 <a16:creationId xmlns:a16="http://schemas.microsoft.com/office/drawing/2014/main" id="{003096E9-3812-E7EE-F73E-A45B1A3882EE}"/>
@@ -12577,7 +12577,7 @@
       </p:cxnSp>
       <p:sp>
         <p:nvSpPr>
-          <p:cNvPr id="8" name="Espace réservé du numéro de diapositive 5">
+          <p:cNvPr id="8" name="slot.footer-page">
             <a:extLst>
               <a:ext uri="{FF2B5EF4-FFF2-40B4-BE49-F238E27FC236}">
                 <a16:creationId xmlns:a16="http://schemas.microsoft.com/office/drawing/2014/main" id="{CF0FD329-A27E-51A3-480F-9C04DED50C30}"/>
@@ -12620,7 +12620,7 @@
       </p:sp>
       <p:sp>
         <p:nvSpPr>
-          <p:cNvPr id="20" name="Espace réservé du contenu 6">
+          <p:cNvPr id="20" name="slot.source">
             <a:extLst>
               <a:ext uri="{FF2B5EF4-FFF2-40B4-BE49-F238E27FC236}">
                 <a16:creationId xmlns:a16="http://schemas.microsoft.com/office/drawing/2014/main" id="{19D01319-1A5E-43BA-3540-3F52885879BC}"/>
@@ -12687,7 +12687,7 @@
       </p:sp>
       <p:sp>
         <p:nvSpPr>
-          <p:cNvPr id="9" name="ZoneTexte 30">
+          <p:cNvPr id="9" name="slot.footer-copyright">
             <a:extLst>
               <a:ext uri="{FF2B5EF4-FFF2-40B4-BE49-F238E27FC236}">
                 <a16:creationId xmlns:a16="http://schemas.microsoft.com/office/drawing/2014/main" id="{39D24033-DF4D-0ED7-1A57-92CACF576185}"/>
@@ -12741,7 +12741,7 @@
       </p:sp>
       <p:sp>
         <p:nvSpPr>
-          <p:cNvPr id="12" name="ZoneTexte 11">
+          <p:cNvPr id="12" name="slot.footer-logo">
             <a:extLst>
               <a:ext uri="{FF2B5EF4-FFF2-40B4-BE49-F238E27FC236}">
                 <a16:creationId xmlns:a16="http://schemas.microsoft.com/office/drawing/2014/main" id="{378E3F20-EC2E-870A-570B-4022DDD01109}"/>
@@ -13094,7 +13094,7 @@
       </p:sp>
       <p:sp>
         <p:nvSpPr>
-          <p:cNvPr id="4" name="ZoneTexte 30">
+          <p:cNvPr id="4" name="slot.footer-copyright">
             <a:extLst>
               <a:ext uri="{FF2B5EF4-FFF2-40B4-BE49-F238E27FC236}">
                 <a16:creationId xmlns:a16="http://schemas.microsoft.com/office/drawing/2014/main" id="{6F36171D-B542-2086-9241-E71F1886F35F}"/>
@@ -13148,7 +13148,7 @@
       </p:sp>
       <p:sp>
         <p:nvSpPr>
-          <p:cNvPr id="5" name="ZoneTexte 4">
+          <p:cNvPr id="5" name="slot.footer-logo">
             <a:extLst>
               <a:ext uri="{FF2B5EF4-FFF2-40B4-BE49-F238E27FC236}">
                 <a16:creationId xmlns:a16="http://schemas.microsoft.com/office/drawing/2014/main" id="{D41DD35C-CF64-510B-4D2D-9A5073A838A6}"/>
@@ -13515,7 +13515,7 @@
       </p:sp>
       <p:sp>
         <p:nvSpPr>
-          <p:cNvPr id="5" name="Espace réservé du texte 4">
+          <p:cNvPr id="5" name="slot.subtitle-2">
             <a:extLst>
               <a:ext uri="{FF2B5EF4-FFF2-40B4-BE49-F238E27FC236}">
                 <a16:creationId xmlns:a16="http://schemas.microsoft.com/office/drawing/2014/main" id="{2D35804D-7044-B129-7E2C-ED3868BD4F80}"/>
@@ -13606,7 +13606,7 @@
       </p:sp>
       <p:sp>
         <p:nvSpPr>
-          <p:cNvPr id="6" name="Espace réservé du contenu 5">
+          <p:cNvPr id="6" name="slot.body">
             <a:extLst>
               <a:ext uri="{FF2B5EF4-FFF2-40B4-BE49-F238E27FC236}">
                 <a16:creationId xmlns:a16="http://schemas.microsoft.com/office/drawing/2014/main" id="{C56BF488-D9DF-64BA-30D9-77D4A3CB1561}"/>
@@ -13872,7 +13872,7 @@
       </p:sp>
       <p:sp>
         <p:nvSpPr>
-          <p:cNvPr id="4" name="ZoneTexte 30">
+          <p:cNvPr id="4" name="slot.footer-copyright">
             <a:extLst>
               <a:ext uri="{FF2B5EF4-FFF2-40B4-BE49-F238E27FC236}">
                 <a16:creationId xmlns:a16="http://schemas.microsoft.com/office/drawing/2014/main" id="{15305BAF-50BD-584B-DC74-C009508EB3DC}"/>
@@ -13926,7 +13926,7 @@
       </p:sp>
       <p:sp>
         <p:nvSpPr>
-          <p:cNvPr id="9" name="ZoneTexte 8">
+          <p:cNvPr id="9" name="slot.footer-logo">
             <a:extLst>
               <a:ext uri="{FF2B5EF4-FFF2-40B4-BE49-F238E27FC236}">
                 <a16:creationId xmlns:a16="http://schemas.microsoft.com/office/drawing/2014/main" id="{746F6E4E-77DF-D5C8-6FC4-15CBB7325373}"/>
@@ -14291,7 +14291,7 @@
       </p:sp>
       <p:sp>
         <p:nvSpPr>
-          <p:cNvPr id="20" name="Espace réservé du texte 4">
+          <p:cNvPr id="20" name="slot.subtitle-2">
             <a:extLst>
               <a:ext uri="{FF2B5EF4-FFF2-40B4-BE49-F238E27FC236}">
                 <a16:creationId xmlns:a16="http://schemas.microsoft.com/office/drawing/2014/main" id="{310C5BB4-05F5-13FD-06D5-F7F90D3D7573}"/>
@@ -14382,7 +14382,7 @@
       </p:sp>
       <p:sp>
         <p:nvSpPr>
-          <p:cNvPr id="23" name="Espace réservé du contenu 5">
+          <p:cNvPr id="23" name="slot.body">
             <a:extLst>
               <a:ext uri="{FF2B5EF4-FFF2-40B4-BE49-F238E27FC236}">
                 <a16:creationId xmlns:a16="http://schemas.microsoft.com/office/drawing/2014/main" id="{75B3DDDB-0FFF-0BA0-DC0E-79048AFFC69C}"/>
@@ -14767,7 +14767,7 @@
       </p:sp>
       <p:sp>
         <p:nvSpPr>
-          <p:cNvPr id="4" name="ZoneTexte 30">
+          <p:cNvPr id="4" name="slot.footer-copyright">
             <a:extLst>
               <a:ext uri="{FF2B5EF4-FFF2-40B4-BE49-F238E27FC236}">
                 <a16:creationId xmlns:a16="http://schemas.microsoft.com/office/drawing/2014/main" id="{2DDB37EA-A3C9-8886-2554-B4F3286733E9}"/>
@@ -14821,7 +14821,7 @@
       </p:sp>
       <p:sp>
         <p:nvSpPr>
-          <p:cNvPr id="5" name="ZoneTexte 4">
+          <p:cNvPr id="5" name="slot.footer-logo">
             <a:extLst>
               <a:ext uri="{FF2B5EF4-FFF2-40B4-BE49-F238E27FC236}">
                 <a16:creationId xmlns:a16="http://schemas.microsoft.com/office/drawing/2014/main" id="{4171C2A4-A825-1321-2CCC-00A293AF826E}"/>
@@ -15467,7 +15467,7 @@
       </p:sp>
       <p:sp>
         <p:nvSpPr>
-          <p:cNvPr id="5" name="ZoneTexte 30">
+          <p:cNvPr id="5" name="slot.footer-copyright">
             <a:extLst>
               <a:ext uri="{FF2B5EF4-FFF2-40B4-BE49-F238E27FC236}">
                 <a16:creationId xmlns:a16="http://schemas.microsoft.com/office/drawing/2014/main" id="{E99671A2-29BC-C486-4FDD-535AB808C56F}"/>
@@ -15521,7 +15521,7 @@
       </p:sp>
       <p:sp>
         <p:nvSpPr>
-          <p:cNvPr id="6" name="ZoneTexte 5">
+          <p:cNvPr id="6" name="slot.footer-logo">
             <a:extLst>
               <a:ext uri="{FF2B5EF4-FFF2-40B4-BE49-F238E27FC236}">
                 <a16:creationId xmlns:a16="http://schemas.microsoft.com/office/drawing/2014/main" id="{1F03ADAA-DE4B-1668-3DA4-78AC64CFC6AC}"/>
@@ -16079,7 +16079,7 @@
       </p:sp>
       <p:sp>
         <p:nvSpPr>
-          <p:cNvPr id="6" name="ZoneTexte 30">
+          <p:cNvPr id="6" name="slot.footer-copyright">
             <a:extLst>
               <a:ext uri="{FF2B5EF4-FFF2-40B4-BE49-F238E27FC236}">
                 <a16:creationId xmlns:a16="http://schemas.microsoft.com/office/drawing/2014/main" id="{4DF8E504-CA60-F860-96A9-F4BC5E46CA41}"/>
@@ -16133,7 +16133,7 @@
       </p:sp>
       <p:sp>
         <p:nvSpPr>
-          <p:cNvPr id="7" name="ZoneTexte 6">
+          <p:cNvPr id="7" name="slot.footer-logo">
             <a:extLst>
               <a:ext uri="{FF2B5EF4-FFF2-40B4-BE49-F238E27FC236}">
                 <a16:creationId xmlns:a16="http://schemas.microsoft.com/office/drawing/2014/main" id="{BB9E44C8-0E14-E627-B39C-3CC292226220}"/>
@@ -16715,7 +16715,7 @@
       </p:cxnSp>
       <p:sp>
         <p:nvSpPr>
-          <p:cNvPr id="12" name="Espace réservé du numéro de diapositive 5">
+          <p:cNvPr id="12" name="slot.footer-page">
             <a:extLst>
               <a:ext uri="{FF2B5EF4-FFF2-40B4-BE49-F238E27FC236}">
                 <a16:creationId xmlns:a16="http://schemas.microsoft.com/office/drawing/2014/main" id="{B1FB7D05-838F-532B-0B3B-5466C302AAE2}"/>
@@ -16749,7 +16749,7 @@
       </p:sp>
       <p:sp>
         <p:nvSpPr>
-          <p:cNvPr id="18" name="Espace réservé du contenu 6">
+          <p:cNvPr id="18" name="slot.source">
             <a:extLst>
               <a:ext uri="{FF2B5EF4-FFF2-40B4-BE49-F238E27FC236}">
                 <a16:creationId xmlns:a16="http://schemas.microsoft.com/office/drawing/2014/main" id="{DD6D06F4-9510-38A2-079C-836FA0E25990}"/>
@@ -16816,7 +16816,7 @@
       </p:sp>
       <p:sp>
         <p:nvSpPr>
-          <p:cNvPr id="8" name="ZoneTexte 30">
+          <p:cNvPr id="8" name="slot.footer-copyright">
             <a:extLst>
               <a:ext uri="{FF2B5EF4-FFF2-40B4-BE49-F238E27FC236}">
                 <a16:creationId xmlns:a16="http://schemas.microsoft.com/office/drawing/2014/main" id="{3047539A-0BFC-5BB9-0072-5DE19483ABBF}"/>
@@ -16870,7 +16870,7 @@
       </p:sp>
       <p:sp>
         <p:nvSpPr>
-          <p:cNvPr id="9" name="ZoneTexte 8">
+          <p:cNvPr id="9" name="slot.footer-logo">
             <a:extLst>
               <a:ext uri="{FF2B5EF4-FFF2-40B4-BE49-F238E27FC236}">
                 <a16:creationId xmlns:a16="http://schemas.microsoft.com/office/drawing/2014/main" id="{247E3550-5CD6-33B5-5444-8A45D9F8FAC0}"/>
@@ -17653,7 +17653,7 @@
       </p:cxnSp>
       <p:sp>
         <p:nvSpPr>
-          <p:cNvPr id="16" name="Espace réservé du numéro de diapositive 5">
+          <p:cNvPr id="16" name="slot.footer-page">
             <a:extLst>
               <a:ext uri="{FF2B5EF4-FFF2-40B4-BE49-F238E27FC236}">
                 <a16:creationId xmlns:a16="http://schemas.microsoft.com/office/drawing/2014/main" id="{9591EC4D-D015-BB3F-B075-780ADAD4923D}"/>
@@ -17687,7 +17687,7 @@
       </p:sp>
       <p:sp>
         <p:nvSpPr>
-          <p:cNvPr id="23" name="Espace réservé du contenu 6">
+          <p:cNvPr id="23" name="slot.source">
             <a:extLst>
               <a:ext uri="{FF2B5EF4-FFF2-40B4-BE49-F238E27FC236}">
                 <a16:creationId xmlns:a16="http://schemas.microsoft.com/office/drawing/2014/main" id="{57B7AFE9-1481-AAAB-096A-34F44FCF4189}"/>
@@ -17754,7 +17754,7 @@
       </p:sp>
       <p:sp>
         <p:nvSpPr>
-          <p:cNvPr id="8" name="ZoneTexte 30">
+          <p:cNvPr id="8" name="slot.footer-copyright">
             <a:extLst>
               <a:ext uri="{FF2B5EF4-FFF2-40B4-BE49-F238E27FC236}">
                 <a16:creationId xmlns:a16="http://schemas.microsoft.com/office/drawing/2014/main" id="{AE48B899-D254-33FF-13F7-FB3591FAB6B1}"/>
@@ -17808,7 +17808,7 @@
       </p:sp>
       <p:sp>
         <p:nvSpPr>
-          <p:cNvPr id="9" name="ZoneTexte 8">
+          <p:cNvPr id="9" name="slot.footer-logo">
             <a:extLst>
               <a:ext uri="{FF2B5EF4-FFF2-40B4-BE49-F238E27FC236}">
                 <a16:creationId xmlns:a16="http://schemas.microsoft.com/office/drawing/2014/main" id="{5079D28D-C0D1-A414-D61D-CDD866EB1576}"/>
@@ -19902,7 +19902,7 @@
       </p:grpSpPr>
       <p:sp>
         <p:nvSpPr>
-          <p:cNvPr id="2" name="Espace réservé pour une image  1">
+          <p:cNvPr id="2" name="slot.image">
             <a:extLst>
               <a:ext uri="{FF2B5EF4-FFF2-40B4-BE49-F238E27FC236}">
                 <a16:creationId xmlns:a16="http://schemas.microsoft.com/office/drawing/2014/main" id="{E0BCE59B-D444-7A18-DCCB-70AFE1EA42FF}"/>
@@ -19927,7 +19927,7 @@
       </p:sp>
       <p:sp>
         <p:nvSpPr>
-          <p:cNvPr id="3" name="Titre 2">
+          <p:cNvPr id="3" name="slot.title">
             <a:extLst>
               <a:ext uri="{FF2B5EF4-FFF2-40B4-BE49-F238E27FC236}">
                 <a16:creationId xmlns:a16="http://schemas.microsoft.com/office/drawing/2014/main" id="{7ACAD432-3BA2-C857-1F08-57EFA4F2680E}"/>
@@ -19952,7 +19952,7 @@
       </p:sp>
       <p:sp>
         <p:nvSpPr>
-          <p:cNvPr id="4" name="Sous-titre 3">
+          <p:cNvPr id="4" name="slot.subtitle">
             <a:extLst>
               <a:ext uri="{FF2B5EF4-FFF2-40B4-BE49-F238E27FC236}">
                 <a16:creationId xmlns:a16="http://schemas.microsoft.com/office/drawing/2014/main" id="{A7B49F1B-6722-9095-525C-4E4E2657BDB4}"/>
@@ -19977,7 +19977,7 @@
       </p:sp>
       <p:sp>
         <p:nvSpPr>
-          <p:cNvPr id="5" name="Espace réservé du texte 4">
+          <p:cNvPr id="5" name="slot.body">
             <a:extLst>
               <a:ext uri="{FF2B5EF4-FFF2-40B4-BE49-F238E27FC236}">
                 <a16:creationId xmlns:a16="http://schemas.microsoft.com/office/drawing/2014/main" id="{4CBFC38C-423B-3DD8-A88D-A1A1A9C3A913}"/>
@@ -20038,7 +20038,7 @@
       </p:grpSpPr>
       <p:sp>
         <p:nvSpPr>
-          <p:cNvPr id="11" name="Titre 10">
+          <p:cNvPr id="11" name="slot.title">
             <a:extLst>
               <a:ext uri="{FF2B5EF4-FFF2-40B4-BE49-F238E27FC236}">
                 <a16:creationId xmlns:a16="http://schemas.microsoft.com/office/drawing/2014/main" id="{5B9B5EFF-D6C0-5F6D-B181-93D9A1EEA543}"/>
@@ -20063,7 +20063,7 @@
       </p:sp>
       <p:graphicFrame>
         <p:nvGraphicFramePr>
-          <p:cNvPr id="2" name="Espace réservé du contenu 1">
+          <p:cNvPr id="2" name="slot.chart">
             <a:extLst>
               <a:ext uri="{FF2B5EF4-FFF2-40B4-BE49-F238E27FC236}">
                 <a16:creationId xmlns:a16="http://schemas.microsoft.com/office/drawing/2014/main" id="{6856BEA8-6434-0F26-881F-058CB793B77E}"/>
@@ -20094,7 +20094,7 @@
       </p:graphicFrame>
       <p:sp>
         <p:nvSpPr>
-          <p:cNvPr id="4" name="Espace réservé du numéro de diapositive 3">
+          <p:cNvPr id="4" name="slot.footer-page">
             <a:extLst>
               <a:ext uri="{FF2B5EF4-FFF2-40B4-BE49-F238E27FC236}">
                 <a16:creationId xmlns:a16="http://schemas.microsoft.com/office/drawing/2014/main" id="{A97A835A-87A2-B939-1DD1-F196BE144C01}"/>
@@ -20123,7 +20123,7 @@
       </p:sp>
       <p:sp>
         <p:nvSpPr>
-          <p:cNvPr id="12" name="Espace réservé du contenu 11">
+          <p:cNvPr id="12" name="slot.source">
             <a:extLst>
               <a:ext uri="{FF2B5EF4-FFF2-40B4-BE49-F238E27FC236}">
                 <a16:creationId xmlns:a16="http://schemas.microsoft.com/office/drawing/2014/main" id="{BBB8D210-4F84-AB0E-C916-9C28A9514921}"/>
@@ -20148,7 +20148,7 @@
       </p:sp>
       <p:sp>
         <p:nvSpPr>
-          <p:cNvPr id="10" name="Espace réservé du contenu 5">
+          <p:cNvPr id="10" name="slot.body-right">
             <a:extLst>
               <a:ext uri="{FF2B5EF4-FFF2-40B4-BE49-F238E27FC236}">
                 <a16:creationId xmlns:a16="http://schemas.microsoft.com/office/drawing/2014/main" id="{12965206-88B4-0F47-8E28-3FA959B2EF16}"/>
@@ -20387,7 +20387,7 @@
       </p:sp>
       <p:sp>
         <p:nvSpPr>
-          <p:cNvPr id="13" name="Espace réservé du contenu 5">
+          <p:cNvPr id="13" name="slot.chart-title">
             <a:extLst>
               <a:ext uri="{FF2B5EF4-FFF2-40B4-BE49-F238E27FC236}">
                 <a16:creationId xmlns:a16="http://schemas.microsoft.com/office/drawing/2014/main" id="{4B04BF95-50FB-9DF2-7E0A-AC1BBEDAB16D}"/>
@@ -20675,7 +20675,7 @@
       </p:grpSpPr>
       <p:sp>
         <p:nvSpPr>
-          <p:cNvPr id="6" name="Titre 5">
+          <p:cNvPr id="6" name="slot.title">
             <a:extLst>
               <a:ext uri="{FF2B5EF4-FFF2-40B4-BE49-F238E27FC236}">
                 <a16:creationId xmlns:a16="http://schemas.microsoft.com/office/drawing/2014/main" id="{BBC5BA43-0109-A451-0B17-1344EBBD7B3B}"/>
@@ -20700,7 +20700,7 @@
       </p:sp>
       <p:sp>
         <p:nvSpPr>
-          <p:cNvPr id="7" name="Espace réservé du contenu 6">
+          <p:cNvPr id="7" name="slot.body-left">
             <a:extLst>
               <a:ext uri="{FF2B5EF4-FFF2-40B4-BE49-F238E27FC236}">
                 <a16:creationId xmlns:a16="http://schemas.microsoft.com/office/drawing/2014/main" id="{F9A39B9F-8FE3-C5E4-66EB-23D6B854B01A}"/>
@@ -20725,7 +20725,7 @@
       </p:sp>
       <p:sp>
         <p:nvSpPr>
-          <p:cNvPr id="8" name="Espace réservé du contenu 7">
+          <p:cNvPr id="8" name="slot.body-left">
             <a:extLst>
               <a:ext uri="{FF2B5EF4-FFF2-40B4-BE49-F238E27FC236}">
                 <a16:creationId xmlns:a16="http://schemas.microsoft.com/office/drawing/2014/main" id="{37886110-4BF1-3B19-47FC-1B3A623E68F4}"/>
@@ -20750,7 +20750,7 @@
       </p:sp>
       <p:sp>
         <p:nvSpPr>
-          <p:cNvPr id="4" name="Espace réservé du numéro de diapositive 3">
+          <p:cNvPr id="4" name="slot.footer-page">
             <a:extLst>
               <a:ext uri="{FF2B5EF4-FFF2-40B4-BE49-F238E27FC236}">
                 <a16:creationId xmlns:a16="http://schemas.microsoft.com/office/drawing/2014/main" id="{955021DA-9147-47DF-2270-FA79520AA834}"/>
@@ -20779,7 +20779,7 @@
       </p:sp>
       <p:sp>
         <p:nvSpPr>
-          <p:cNvPr id="9" name="Espace réservé du contenu 8">
+          <p:cNvPr id="9" name="slot.source">
             <a:extLst>
               <a:ext uri="{FF2B5EF4-FFF2-40B4-BE49-F238E27FC236}">
                 <a16:creationId xmlns:a16="http://schemas.microsoft.com/office/drawing/2014/main" id="{08669132-B2E9-C7FD-0E5A-195E1E90B39F}"/>
@@ -20834,7 +20834,7 @@
       </p:grpSpPr>
       <p:sp>
         <p:nvSpPr>
-          <p:cNvPr id="2" name="Titre 1">
+          <p:cNvPr id="2" name="slot.title">
             <a:extLst>
               <a:ext uri="{FF2B5EF4-FFF2-40B4-BE49-F238E27FC236}">
                 <a16:creationId xmlns:a16="http://schemas.microsoft.com/office/drawing/2014/main" id="{A1B13B95-550F-B65B-3507-ADE3B9DA9E32}"/>
@@ -20859,7 +20859,7 @@
       </p:sp>
       <p:sp>
         <p:nvSpPr>
-          <p:cNvPr id="3" name="Espace réservé du texte 2">
+          <p:cNvPr id="3" name="slot.subtitle-left">
             <a:extLst>
               <a:ext uri="{FF2B5EF4-FFF2-40B4-BE49-F238E27FC236}">
                 <a16:creationId xmlns:a16="http://schemas.microsoft.com/office/drawing/2014/main" id="{472AF4BA-3A94-A6AA-75ED-51F19EF10D87}"/>
@@ -20884,7 +20884,7 @@
       </p:sp>
       <p:sp>
         <p:nvSpPr>
-          <p:cNvPr id="4" name="Espace réservé du contenu 3">
+          <p:cNvPr id="4" name="slot.body-left">
             <a:extLst>
               <a:ext uri="{FF2B5EF4-FFF2-40B4-BE49-F238E27FC236}">
                 <a16:creationId xmlns:a16="http://schemas.microsoft.com/office/drawing/2014/main" id="{B0ABFD61-CD4F-EC1A-5115-45CDDC420BF3}"/>
@@ -20909,7 +20909,7 @@
       </p:sp>
       <p:sp>
         <p:nvSpPr>
-          <p:cNvPr id="5" name="Espace réservé du texte 4">
+          <p:cNvPr id="5" name="slot.subtitle-right">
             <a:extLst>
               <a:ext uri="{FF2B5EF4-FFF2-40B4-BE49-F238E27FC236}">
                 <a16:creationId xmlns:a16="http://schemas.microsoft.com/office/drawing/2014/main" id="{DE696CA1-6E07-520A-1327-ED245650AA9E}"/>
@@ -20934,7 +20934,7 @@
       </p:sp>
       <p:sp>
         <p:nvSpPr>
-          <p:cNvPr id="6" name="Espace réservé du contenu 5">
+          <p:cNvPr id="6" name="slot.body-right">
             <a:extLst>
               <a:ext uri="{FF2B5EF4-FFF2-40B4-BE49-F238E27FC236}">
                 <a16:creationId xmlns:a16="http://schemas.microsoft.com/office/drawing/2014/main" id="{8C3FD960-175C-64AD-76A4-03C56B091E11}"/>
@@ -21043,7 +21043,7 @@
       </p:grpSpPr>
       <p:sp>
         <p:nvSpPr>
-          <p:cNvPr id="2" name="Titre 1">
+          <p:cNvPr id="2" name="slot.title">
             <a:extLst>
               <a:ext uri="{FF2B5EF4-FFF2-40B4-BE49-F238E27FC236}">
                 <a16:creationId xmlns:a16="http://schemas.microsoft.com/office/drawing/2014/main" id="{96382BF3-A58D-9FCC-73D2-D23B8E3097D6}"/>
@@ -21068,7 +21068,7 @@
       </p:sp>
       <p:sp>
         <p:nvSpPr>
-          <p:cNvPr id="3" name="Espace réservé du texte 2">
+          <p:cNvPr id="3" name="slot.subtitle-left">
             <a:extLst>
               <a:ext uri="{FF2B5EF4-FFF2-40B4-BE49-F238E27FC236}">
                 <a16:creationId xmlns:a16="http://schemas.microsoft.com/office/drawing/2014/main" id="{507C86A9-5AA4-5FEE-279D-DB62E9AF5A84}"/>
@@ -21093,7 +21093,7 @@
       </p:sp>
       <p:sp>
         <p:nvSpPr>
-          <p:cNvPr id="4" name="Espace réservé du contenu 3">
+          <p:cNvPr id="4" name="slot.body-left">
             <a:extLst>
               <a:ext uri="{FF2B5EF4-FFF2-40B4-BE49-F238E27FC236}">
                 <a16:creationId xmlns:a16="http://schemas.microsoft.com/office/drawing/2014/main" id="{1615B9A0-C888-2906-494C-2BE85967A792}"/>
@@ -21118,7 +21118,7 @@
       </p:sp>
       <p:sp>
         <p:nvSpPr>
-          <p:cNvPr id="5" name="Espace réservé du texte 4">
+          <p:cNvPr id="5" name="slot.subtitle-center">
             <a:extLst>
               <a:ext uri="{FF2B5EF4-FFF2-40B4-BE49-F238E27FC236}">
                 <a16:creationId xmlns:a16="http://schemas.microsoft.com/office/drawing/2014/main" id="{899EBAB0-D7CA-FCF6-5AE7-F3182BDD73D7}"/>
@@ -21143,7 +21143,7 @@
       </p:sp>
       <p:sp>
         <p:nvSpPr>
-          <p:cNvPr id="6" name="Espace réservé du contenu 5">
+          <p:cNvPr id="6" name="slot.body-right">
             <a:extLst>
               <a:ext uri="{FF2B5EF4-FFF2-40B4-BE49-F238E27FC236}">
                 <a16:creationId xmlns:a16="http://schemas.microsoft.com/office/drawing/2014/main" id="{15A49452-0460-60CD-1237-4332D2B7D644}"/>
@@ -21252,7 +21252,7 @@
       </p:grpSpPr>
       <p:sp>
         <p:nvSpPr>
-          <p:cNvPr id="2" name="Titre 1">
+          <p:cNvPr id="2" name="slot.title">
             <a:extLst>
               <a:ext uri="{FF2B5EF4-FFF2-40B4-BE49-F238E27FC236}">
                 <a16:creationId xmlns:a16="http://schemas.microsoft.com/office/drawing/2014/main" id="{642C1C7A-2951-8460-E931-5812BA57EE8A}"/>
@@ -21277,7 +21277,7 @@
       </p:sp>
       <p:sp>
         <p:nvSpPr>
-          <p:cNvPr id="3" name="Espace réservé du texte 2">
+          <p:cNvPr id="3" name="slot.subtitle-1">
             <a:extLst>
               <a:ext uri="{FF2B5EF4-FFF2-40B4-BE49-F238E27FC236}">
                 <a16:creationId xmlns:a16="http://schemas.microsoft.com/office/drawing/2014/main" id="{4BE58D27-D33D-9A6A-261A-FC37592CCB76}"/>
@@ -21352,7 +21352,7 @@
       </p:sp>
       <p:sp>
         <p:nvSpPr>
-          <p:cNvPr id="6" name="Espace réservé du numéro de diapositive 5">
+          <p:cNvPr id="6" name="slot.footer-page">
             <a:extLst>
               <a:ext uri="{FF2B5EF4-FFF2-40B4-BE49-F238E27FC236}">
                 <a16:creationId xmlns:a16="http://schemas.microsoft.com/office/drawing/2014/main" id="{5A64BB6A-ABB8-43B5-C4FE-21B96FB0BB2E}"/>
@@ -21381,7 +21381,7 @@
       </p:sp>
       <p:sp>
         <p:nvSpPr>
-          <p:cNvPr id="7" name="Espace réservé du contenu 6">
+          <p:cNvPr id="7" name="slot.source">
             <a:extLst>
               <a:ext uri="{FF2B5EF4-FFF2-40B4-BE49-F238E27FC236}">
                 <a16:creationId xmlns:a16="http://schemas.microsoft.com/office/drawing/2014/main" id="{86E2B333-DEEF-7099-9A0E-5BCFE4306828}"/>
@@ -21436,7 +21436,7 @@
       </p:grpSpPr>
       <p:sp>
         <p:nvSpPr>
-          <p:cNvPr id="2" name="Titre 1">
+          <p:cNvPr id="2" name="slot.title">
             <a:extLst>
               <a:ext uri="{FF2B5EF4-FFF2-40B4-BE49-F238E27FC236}">
                 <a16:creationId xmlns:a16="http://schemas.microsoft.com/office/drawing/2014/main" id="{F04B6622-6B31-137C-3057-BEC114E1EA0A}"/>
@@ -21461,7 +21461,7 @@
       </p:sp>
       <p:sp>
         <p:nvSpPr>
-          <p:cNvPr id="3" name="Espace réservé du texte 2">
+          <p:cNvPr id="3" name="slot.subtitle-left">
             <a:extLst>
               <a:ext uri="{FF2B5EF4-FFF2-40B4-BE49-F238E27FC236}">
                 <a16:creationId xmlns:a16="http://schemas.microsoft.com/office/drawing/2014/main" id="{9BECFB8F-18AF-4F46-A86C-FEBFF34FBD84}"/>
@@ -21486,7 +21486,7 @@
       </p:sp>
       <p:sp>
         <p:nvSpPr>
-          <p:cNvPr id="4" name="Espace réservé du contenu 3">
+          <p:cNvPr id="4" name="slot.body-left">
             <a:extLst>
               <a:ext uri="{FF2B5EF4-FFF2-40B4-BE49-F238E27FC236}">
                 <a16:creationId xmlns:a16="http://schemas.microsoft.com/office/drawing/2014/main" id="{92B2C9B2-1C38-1A3B-A3B6-94D76323AA00}"/>
@@ -21511,7 +21511,7 @@
       </p:sp>
       <p:sp>
         <p:nvSpPr>
-          <p:cNvPr id="5" name="Espace réservé du texte 4">
+          <p:cNvPr id="5" name="slot.subtitle-right">
             <a:extLst>
               <a:ext uri="{FF2B5EF4-FFF2-40B4-BE49-F238E27FC236}">
                 <a16:creationId xmlns:a16="http://schemas.microsoft.com/office/drawing/2014/main" id="{F2F573AA-32F1-9474-AA0B-5F748B545775}"/>
@@ -21536,7 +21536,7 @@
       </p:sp>
       <p:sp>
         <p:nvSpPr>
-          <p:cNvPr id="6" name="Espace réservé du contenu 5">
+          <p:cNvPr id="6" name="slot.body-right">
             <a:extLst>
               <a:ext uri="{FF2B5EF4-FFF2-40B4-BE49-F238E27FC236}">
                 <a16:creationId xmlns:a16="http://schemas.microsoft.com/office/drawing/2014/main" id="{209746BB-053D-5EAC-CCE0-A0561FCC3E14}"/>
@@ -21561,7 +21561,7 @@
       </p:sp>
       <p:sp>
         <p:nvSpPr>
-          <p:cNvPr id="7" name="Espace réservé du texte 6">
+          <p:cNvPr id="7" name="slot.subtitle-middle">
             <a:extLst>
               <a:ext uri="{FF2B5EF4-FFF2-40B4-BE49-F238E27FC236}">
                 <a16:creationId xmlns:a16="http://schemas.microsoft.com/office/drawing/2014/main" id="{82EE0964-0DD7-A113-68C6-51DE83E049B7}"/>
@@ -21586,7 +21586,7 @@
       </p:sp>
       <p:sp>
         <p:nvSpPr>
-          <p:cNvPr id="8" name="Espace réservé du contenu 7">
+          <p:cNvPr id="8" name="slot.body-center">
             <a:extLst>
               <a:ext uri="{FF2B5EF4-FFF2-40B4-BE49-F238E27FC236}">
                 <a16:creationId xmlns:a16="http://schemas.microsoft.com/office/drawing/2014/main" id="{4E8625F8-C8B3-70DA-59F3-2E8F89562010}"/>
@@ -21695,7 +21695,7 @@
       </p:grpSpPr>
       <p:sp>
         <p:nvSpPr>
-          <p:cNvPr id="2" name="Titre 1">
+          <p:cNvPr id="2" name="slot.title">
             <a:extLst>
               <a:ext uri="{FF2B5EF4-FFF2-40B4-BE49-F238E27FC236}">
                 <a16:creationId xmlns:a16="http://schemas.microsoft.com/office/drawing/2014/main" id="{3F90EC06-30A6-F2AF-B561-806978C6E639}"/>
@@ -21720,7 +21720,7 @@
       </p:sp>
       <p:sp>
         <p:nvSpPr>
-          <p:cNvPr id="3" name="Espace réservé du contenu 2">
+          <p:cNvPr id="3" name="slot.body-left">
             <a:extLst>
               <a:ext uri="{FF2B5EF4-FFF2-40B4-BE49-F238E27FC236}">
                 <a16:creationId xmlns:a16="http://schemas.microsoft.com/office/drawing/2014/main" id="{BF51E751-4D1F-8AFF-4DDB-151A4B82F877}"/>
@@ -21745,7 +21745,7 @@
       </p:sp>
       <p:sp>
         <p:nvSpPr>
-          <p:cNvPr id="4" name="Espace réservé du numéro de diapositive 3">
+          <p:cNvPr id="4" name="slot.footer-page">
             <a:extLst>
               <a:ext uri="{FF2B5EF4-FFF2-40B4-BE49-F238E27FC236}">
                 <a16:creationId xmlns:a16="http://schemas.microsoft.com/office/drawing/2014/main" id="{0E735BF3-7AFE-76C1-631C-652548B2CDC7}"/>
@@ -21805,7 +21805,7 @@
       </p:grpSpPr>
       <p:sp>
         <p:nvSpPr>
-          <p:cNvPr id="2" name="Titre 1">
+          <p:cNvPr id="2" name="slot.title">
             <a:extLst>
               <a:ext uri="{FF2B5EF4-FFF2-40B4-BE49-F238E27FC236}">
                 <a16:creationId xmlns:a16="http://schemas.microsoft.com/office/drawing/2014/main" id="{09AD6002-5264-FF81-5C58-8257C5BE35E0}"/>
@@ -21830,7 +21830,7 @@
       </p:sp>
       <p:sp>
         <p:nvSpPr>
-          <p:cNvPr id="3" name="Espace réservé du texte 2">
+          <p:cNvPr id="3" name="slot.subtitle-left">
             <a:extLst>
               <a:ext uri="{FF2B5EF4-FFF2-40B4-BE49-F238E27FC236}">
                 <a16:creationId xmlns:a16="http://schemas.microsoft.com/office/drawing/2014/main" id="{3DA0BAAF-9233-FECD-C9A4-9D6BB9CB133F}"/>
@@ -21855,7 +21855,7 @@
       </p:sp>
       <p:sp>
         <p:nvSpPr>
-          <p:cNvPr id="4" name="Espace réservé du contenu 3">
+          <p:cNvPr id="4" name="slot.body-left">
             <a:extLst>
               <a:ext uri="{FF2B5EF4-FFF2-40B4-BE49-F238E27FC236}">
                 <a16:creationId xmlns:a16="http://schemas.microsoft.com/office/drawing/2014/main" id="{9F86A069-0F52-B4CB-EABB-F7F2BE1DDC39}"/>
@@ -21880,7 +21880,7 @@
       </p:sp>
       <p:sp>
         <p:nvSpPr>
-          <p:cNvPr id="5" name="Espace réservé du texte 4">
+          <p:cNvPr id="5" name="slot.subtitle-center">
             <a:extLst>
               <a:ext uri="{FF2B5EF4-FFF2-40B4-BE49-F238E27FC236}">
                 <a16:creationId xmlns:a16="http://schemas.microsoft.com/office/drawing/2014/main" id="{3F8F4092-5C55-47A8-80BF-15DB6F705E87}"/>
@@ -21905,7 +21905,7 @@
       </p:sp>
       <p:sp>
         <p:nvSpPr>
-          <p:cNvPr id="6" name="Espace réservé du contenu 5">
+          <p:cNvPr id="6" name="slot.body-right">
             <a:extLst>
               <a:ext uri="{FF2B5EF4-FFF2-40B4-BE49-F238E27FC236}">
                 <a16:creationId xmlns:a16="http://schemas.microsoft.com/office/drawing/2014/main" id="{4FD0BBC1-AF6B-7FB2-8131-9CFFE5B4F720}"/>
@@ -22014,7 +22014,7 @@
       </p:grpSpPr>
       <p:sp>
         <p:nvSpPr>
-          <p:cNvPr id="2" name="Espace réservé du numéro de diapositive 1">
+          <p:cNvPr id="2" name="slot.footer-page">
             <a:extLst>
               <a:ext uri="{FF2B5EF4-FFF2-40B4-BE49-F238E27FC236}">
                 <a16:creationId xmlns:a16="http://schemas.microsoft.com/office/drawing/2014/main" id="{F8C126C1-B24A-39D2-94A0-FFACD11454AA}"/>
@@ -22043,7 +22043,7 @@
       </p:sp>
       <p:sp>
         <p:nvSpPr>
-          <p:cNvPr id="3" name="Espace réservé du contenu 2">
+          <p:cNvPr id="3" name="slot.source">
             <a:extLst>
               <a:ext uri="{FF2B5EF4-FFF2-40B4-BE49-F238E27FC236}">
                 <a16:creationId xmlns:a16="http://schemas.microsoft.com/office/drawing/2014/main" id="{EDAB797B-BD47-F8EB-9C7B-5DD0CFEBADB8}"/>
@@ -22098,7 +22098,7 @@
       </p:grpSpPr>
       <p:sp>
         <p:nvSpPr>
-          <p:cNvPr id="2" name="Titre 1">
+          <p:cNvPr id="2" name="slot.title">
             <a:extLst>
               <a:ext uri="{FF2B5EF4-FFF2-40B4-BE49-F238E27FC236}">
                 <a16:creationId xmlns:a16="http://schemas.microsoft.com/office/drawing/2014/main" id="{374C00EF-B038-0C65-A241-7BA2006BD93D}"/>
@@ -22123,7 +22123,7 @@
       </p:sp>
       <p:sp>
         <p:nvSpPr>
-          <p:cNvPr id="3" name="Sous-titre 2">
+          <p:cNvPr id="3" name="slot.subtitle">
             <a:extLst>
               <a:ext uri="{FF2B5EF4-FFF2-40B4-BE49-F238E27FC236}">
                 <a16:creationId xmlns:a16="http://schemas.microsoft.com/office/drawing/2014/main" id="{B200C2F0-0A4E-E4B1-6889-CCD71BAA093E}"/>
@@ -22148,7 +22148,7 @@
       </p:sp>
       <p:sp>
         <p:nvSpPr>
-          <p:cNvPr id="4" name="Espace réservé du texte 3">
+          <p:cNvPr id="4" name="slot.body">
             <a:extLst>
               <a:ext uri="{FF2B5EF4-FFF2-40B4-BE49-F238E27FC236}">
                 <a16:creationId xmlns:a16="http://schemas.microsoft.com/office/drawing/2014/main" id="{64EDA83A-70CF-2093-E08B-6577F07B93B0}"/>
@@ -22173,7 +22173,7 @@
       </p:sp>
       <p:sp>
         <p:nvSpPr>
-          <p:cNvPr id="5" name="Espace réservé pour une image  4">
+          <p:cNvPr id="5" name="slot.image">
             <a:extLst>
               <a:ext uri="{FF2B5EF4-FFF2-40B4-BE49-F238E27FC236}">
                 <a16:creationId xmlns:a16="http://schemas.microsoft.com/office/drawing/2014/main" id="{03704343-FDF9-0B04-E26C-C52FDAC38AE3}"/>
@@ -22228,7 +22228,7 @@
       </p:grpSpPr>
       <p:sp>
         <p:nvSpPr>
-          <p:cNvPr id="2" name="Titre 1">
+          <p:cNvPr id="2" name="slot.section-title">
             <a:extLst>
               <a:ext uri="{FF2B5EF4-FFF2-40B4-BE49-F238E27FC236}">
                 <a16:creationId xmlns:a16="http://schemas.microsoft.com/office/drawing/2014/main" id="{F1BC0C3D-26C5-B176-7BFF-6520034413BA}"/>
@@ -22253,7 +22253,7 @@
       </p:sp>
       <p:sp>
         <p:nvSpPr>
-          <p:cNvPr id="3" name="Sous-titre 2">
+          <p:cNvPr id="3" name="slot.subtitle">
             <a:extLst>
               <a:ext uri="{FF2B5EF4-FFF2-40B4-BE49-F238E27FC236}">
                 <a16:creationId xmlns:a16="http://schemas.microsoft.com/office/drawing/2014/main" id="{72D99522-BBC2-339A-157B-E266188B49E5}"/>
@@ -22308,7 +22308,7 @@
       </p:grpSpPr>
       <p:sp>
         <p:nvSpPr>
-          <p:cNvPr id="2" name="Titre 1">
+          <p:cNvPr id="2" name="slot.section-title">
             <a:extLst>
               <a:ext uri="{FF2B5EF4-FFF2-40B4-BE49-F238E27FC236}">
                 <a16:creationId xmlns:a16="http://schemas.microsoft.com/office/drawing/2014/main" id="{7ABCA97C-1EB3-759D-152E-F5D49FB8B12D}"/>
@@ -22333,7 +22333,7 @@
       </p:sp>
       <p:sp>
         <p:nvSpPr>
-          <p:cNvPr id="3" name="Sous-titre 2">
+          <p:cNvPr id="3" name="slot.subtitle">
             <a:extLst>
               <a:ext uri="{FF2B5EF4-FFF2-40B4-BE49-F238E27FC236}">
                 <a16:creationId xmlns:a16="http://schemas.microsoft.com/office/drawing/2014/main" id="{10574AA7-F19E-53D0-15C6-BAED9DD9AE99}"/>
@@ -22388,7 +22388,7 @@
       </p:grpSpPr>
       <p:sp>
         <p:nvSpPr>
-          <p:cNvPr id="2" name="Titre 1">
+          <p:cNvPr id="2" name="slot.title">
             <a:extLst>
               <a:ext uri="{FF2B5EF4-FFF2-40B4-BE49-F238E27FC236}">
                 <a16:creationId xmlns:a16="http://schemas.microsoft.com/office/drawing/2014/main" id="{3557F5E2-DE24-B1BE-806A-41DFD0EA573B}"/>
@@ -22413,7 +22413,7 @@
       </p:sp>
       <p:sp>
         <p:nvSpPr>
-          <p:cNvPr id="3" name="Espace réservé du numéro de diapositive 2">
+          <p:cNvPr id="3" name="slot.footer-page">
             <a:extLst>
               <a:ext uri="{FF2B5EF4-FFF2-40B4-BE49-F238E27FC236}">
                 <a16:creationId xmlns:a16="http://schemas.microsoft.com/office/drawing/2014/main" id="{E389FC4E-69D2-CB98-99E0-8235C5DF4832}"/>
@@ -22442,7 +22442,7 @@
       </p:sp>
       <p:sp>
         <p:nvSpPr>
-          <p:cNvPr id="4" name="Espace réservé du contenu 3">
+          <p:cNvPr id="4" name="slot.body-left">
             <a:extLst>
               <a:ext uri="{FF2B5EF4-FFF2-40B4-BE49-F238E27FC236}">
                 <a16:creationId xmlns:a16="http://schemas.microsoft.com/office/drawing/2014/main" id="{57014636-1242-DAAA-256A-ED368B606BEC}"/>
@@ -22497,7 +22497,7 @@
       </p:grpSpPr>
       <p:sp>
         <p:nvSpPr>
-          <p:cNvPr id="2" name="Titre 1">
+          <p:cNvPr id="2" name="slot.title">
             <a:extLst>
               <a:ext uri="{FF2B5EF4-FFF2-40B4-BE49-F238E27FC236}">
                 <a16:creationId xmlns:a16="http://schemas.microsoft.com/office/drawing/2014/main" id="{AD338188-5DE4-C5CB-FE17-B4AE4BD42079}"/>
@@ -22522,7 +22522,7 @@
       </p:sp>
       <p:sp>
         <p:nvSpPr>
-          <p:cNvPr id="3" name="Espace réservé du texte 2">
+          <p:cNvPr id="3" name="slot.subtitle-1">
             <a:extLst>
               <a:ext uri="{FF2B5EF4-FFF2-40B4-BE49-F238E27FC236}">
                 <a16:creationId xmlns:a16="http://schemas.microsoft.com/office/drawing/2014/main" id="{57F5E41D-FE93-0A76-9D73-D1E1F79C27F3}"/>
@@ -22597,7 +22597,7 @@
       </p:sp>
       <p:sp>
         <p:nvSpPr>
-          <p:cNvPr id="6" name="Espace réservé du numéro de diapositive 5">
+          <p:cNvPr id="6" name="slot.footer-page">
             <a:extLst>
               <a:ext uri="{FF2B5EF4-FFF2-40B4-BE49-F238E27FC236}">
                 <a16:creationId xmlns:a16="http://schemas.microsoft.com/office/drawing/2014/main" id="{93029647-4684-D393-CF0A-BF12BF20539B}"/>
@@ -22626,7 +22626,7 @@
       </p:sp>
       <p:sp>
         <p:nvSpPr>
-          <p:cNvPr id="7" name="Espace réservé du contenu 6">
+          <p:cNvPr id="7" name="slot.source">
             <a:extLst>
               <a:ext uri="{FF2B5EF4-FFF2-40B4-BE49-F238E27FC236}">
                 <a16:creationId xmlns:a16="http://schemas.microsoft.com/office/drawing/2014/main" id="{7D007424-99FE-9625-45E0-4F3C4A8FB982}"/>
@@ -22681,7 +22681,7 @@
       </p:grpSpPr>
       <p:sp>
         <p:nvSpPr>
-          <p:cNvPr id="2" name="Titre 1">
+          <p:cNvPr id="2" name="slot.title">
             <a:extLst>
               <a:ext uri="{FF2B5EF4-FFF2-40B4-BE49-F238E27FC236}">
                 <a16:creationId xmlns:a16="http://schemas.microsoft.com/office/drawing/2014/main" id="{60196F93-28B3-0AC4-E12E-B919C02EDE9E}"/>
@@ -22706,7 +22706,7 @@
       </p:sp>
       <p:sp>
         <p:nvSpPr>
-          <p:cNvPr id="3" name="Espace réservé du texte 2">
+          <p:cNvPr id="3" name="slot.subtitle-left">
             <a:extLst>
               <a:ext uri="{FF2B5EF4-FFF2-40B4-BE49-F238E27FC236}">
                 <a16:creationId xmlns:a16="http://schemas.microsoft.com/office/drawing/2014/main" id="{F5334444-FCDF-1684-3FB8-353DDE1A56F3}"/>
@@ -22731,7 +22731,7 @@
       </p:sp>
       <p:sp>
         <p:nvSpPr>
-          <p:cNvPr id="4" name="Espace réservé du contenu 3">
+          <p:cNvPr id="4" name="slot.body-left">
             <a:extLst>
               <a:ext uri="{FF2B5EF4-FFF2-40B4-BE49-F238E27FC236}">
                 <a16:creationId xmlns:a16="http://schemas.microsoft.com/office/drawing/2014/main" id="{FD352B93-713D-7B29-0C96-707BE1CD5EB1}"/>
@@ -22756,7 +22756,7 @@
       </p:sp>
       <p:sp>
         <p:nvSpPr>
-          <p:cNvPr id="5" name="Espace réservé du texte 4">
+          <p:cNvPr id="5" name="slot.subtitle-right">
             <a:extLst>
               <a:ext uri="{FF2B5EF4-FFF2-40B4-BE49-F238E27FC236}">
                 <a16:creationId xmlns:a16="http://schemas.microsoft.com/office/drawing/2014/main" id="{2155886C-20D1-8079-4E2C-A73C6BE8B440}"/>
@@ -22781,7 +22781,7 @@
       </p:sp>
       <p:sp>
         <p:nvSpPr>
-          <p:cNvPr id="6" name="Espace réservé du contenu 5">
+          <p:cNvPr id="6" name="slot.body-right">
             <a:extLst>
               <a:ext uri="{FF2B5EF4-FFF2-40B4-BE49-F238E27FC236}">
                 <a16:creationId xmlns:a16="http://schemas.microsoft.com/office/drawing/2014/main" id="{F79C5220-BA0D-98C6-8A4B-CC116CD16EFD}"/>
@@ -22891,7 +22891,7 @@
       </p:grpSpPr>
       <p:sp>
         <p:nvSpPr>
-          <p:cNvPr id="2" name="Titre 1">
+          <p:cNvPr id="2" name="slot.title">
             <a:extLst>
               <a:ext uri="{FF2B5EF4-FFF2-40B4-BE49-F238E27FC236}">
                 <a16:creationId xmlns:a16="http://schemas.microsoft.com/office/drawing/2014/main" id="{A1CFCE2F-EEED-699F-16B7-14583F29EE31}"/>
@@ -22916,7 +22916,7 @@
       </p:sp>
       <p:sp>
         <p:nvSpPr>
-          <p:cNvPr id="3" name="Espace réservé du texte 2">
+          <p:cNvPr id="3" name="slot.subtitle-left">
             <a:extLst>
               <a:ext uri="{FF2B5EF4-FFF2-40B4-BE49-F238E27FC236}">
                 <a16:creationId xmlns:a16="http://schemas.microsoft.com/office/drawing/2014/main" id="{52EE0DEE-BE02-0E60-46F1-9B17BE9DCC2C}"/>
@@ -22941,7 +22941,7 @@
       </p:sp>
       <p:sp>
         <p:nvSpPr>
-          <p:cNvPr id="4" name="Espace réservé du contenu 3">
+          <p:cNvPr id="4" name="slot.body-left">
             <a:extLst>
               <a:ext uri="{FF2B5EF4-FFF2-40B4-BE49-F238E27FC236}">
                 <a16:creationId xmlns:a16="http://schemas.microsoft.com/office/drawing/2014/main" id="{6DEB6691-49FC-D5CD-00E2-956161A686E3}"/>
@@ -22966,7 +22966,7 @@
       </p:sp>
       <p:sp>
         <p:nvSpPr>
-          <p:cNvPr id="5" name="Espace réservé du texte 4">
+          <p:cNvPr id="5" name="slot.subtitle-center">
             <a:extLst>
               <a:ext uri="{FF2B5EF4-FFF2-40B4-BE49-F238E27FC236}">
                 <a16:creationId xmlns:a16="http://schemas.microsoft.com/office/drawing/2014/main" id="{A6481CB5-EAF6-34D0-38D2-004DF250D138}"/>
@@ -22991,7 +22991,7 @@
       </p:sp>
       <p:sp>
         <p:nvSpPr>
-          <p:cNvPr id="6" name="Espace réservé du contenu 5">
+          <p:cNvPr id="6" name="slot.body-right">
             <a:extLst>
               <a:ext uri="{FF2B5EF4-FFF2-40B4-BE49-F238E27FC236}">
                 <a16:creationId xmlns:a16="http://schemas.microsoft.com/office/drawing/2014/main" id="{CCBAEE9E-9656-7330-1450-08204C79A982}"/>
@@ -23101,7 +23101,7 @@
       </p:grpSpPr>
       <p:sp>
         <p:nvSpPr>
-          <p:cNvPr id="2" name="Titre 1">
+          <p:cNvPr id="2" name="slot.title">
             <a:extLst>
               <a:ext uri="{FF2B5EF4-FFF2-40B4-BE49-F238E27FC236}">
                 <a16:creationId xmlns:a16="http://schemas.microsoft.com/office/drawing/2014/main" id="{4E843E8F-F946-1ADE-FB37-0EBF4D9CBEF8}"/>
@@ -23126,7 +23126,7 @@
       </p:sp>
       <p:sp>
         <p:nvSpPr>
-          <p:cNvPr id="3" name="Espace réservé du texte 2">
+          <p:cNvPr id="3" name="slot.subtitle-1">
             <a:extLst>
               <a:ext uri="{FF2B5EF4-FFF2-40B4-BE49-F238E27FC236}">
                 <a16:creationId xmlns:a16="http://schemas.microsoft.com/office/drawing/2014/main" id="{1675CAD6-9E20-BF63-6D76-BAE57FC8D65D}"/>
@@ -23201,7 +23201,7 @@
       </p:sp>
       <p:sp>
         <p:nvSpPr>
-          <p:cNvPr id="6" name="Espace réservé du numéro de diapositive 5">
+          <p:cNvPr id="6" name="slot.footer-page">
             <a:extLst>
               <a:ext uri="{FF2B5EF4-FFF2-40B4-BE49-F238E27FC236}">
                 <a16:creationId xmlns:a16="http://schemas.microsoft.com/office/drawing/2014/main" id="{0CF94BA1-CADC-3BB5-F63F-E912932EAE7F}"/>
@@ -23231,7 +23231,7 @@
       </p:sp>
       <p:sp>
         <p:nvSpPr>
-          <p:cNvPr id="7" name="Espace réservé du contenu 6">
+          <p:cNvPr id="7" name="slot.source">
             <a:extLst>
               <a:ext uri="{FF2B5EF4-FFF2-40B4-BE49-F238E27FC236}">
                 <a16:creationId xmlns:a16="http://schemas.microsoft.com/office/drawing/2014/main" id="{DA655AE8-4AB0-E991-4F30-5F6219C4F5C4}"/>
@@ -23286,7 +23286,7 @@
       </p:grpSpPr>
       <p:sp>
         <p:nvSpPr>
-          <p:cNvPr id="2" name="Titre 1">
+          <p:cNvPr id="2" name="slot.title">
             <a:extLst>
               <a:ext uri="{FF2B5EF4-FFF2-40B4-BE49-F238E27FC236}">
                 <a16:creationId xmlns:a16="http://schemas.microsoft.com/office/drawing/2014/main" id="{A6D17A19-CAE4-FA2F-080D-DA17849C5916}"/>
@@ -23311,7 +23311,7 @@
       </p:sp>
       <p:sp>
         <p:nvSpPr>
-          <p:cNvPr id="3" name="Espace réservé du texte 2">
+          <p:cNvPr id="3" name="slot.subtitle-1">
             <a:extLst>
               <a:ext uri="{FF2B5EF4-FFF2-40B4-BE49-F238E27FC236}">
                 <a16:creationId xmlns:a16="http://schemas.microsoft.com/office/drawing/2014/main" id="{F6D07D73-8ACA-BC20-1ADF-744E20D84DFA}"/>
@@ -23386,7 +23386,7 @@
       </p:sp>
       <p:sp>
         <p:nvSpPr>
-          <p:cNvPr id="6" name="Espace réservé du numéro de diapositive 5">
+          <p:cNvPr id="6" name="slot.footer-page">
             <a:extLst>
               <a:ext uri="{FF2B5EF4-FFF2-40B4-BE49-F238E27FC236}">
                 <a16:creationId xmlns:a16="http://schemas.microsoft.com/office/drawing/2014/main" id="{BF5E0291-96D4-4AAD-9728-6D7882490A4F}"/>
@@ -23416,7 +23416,7 @@
       </p:sp>
       <p:sp>
         <p:nvSpPr>
-          <p:cNvPr id="7" name="Espace réservé du contenu 6">
+          <p:cNvPr id="7" name="slot.source">
             <a:extLst>
               <a:ext uri="{FF2B5EF4-FFF2-40B4-BE49-F238E27FC236}">
                 <a16:creationId xmlns:a16="http://schemas.microsoft.com/office/drawing/2014/main" id="{9414BBDE-DFC1-B1B1-CCB9-338AAFF2DAEB}"/>
@@ -23471,7 +23471,7 @@
       </p:grpSpPr>
       <p:sp>
         <p:nvSpPr>
-          <p:cNvPr id="2" name="Titre 1">
+          <p:cNvPr id="2" name="slot.title">
             <a:extLst>
               <a:ext uri="{FF2B5EF4-FFF2-40B4-BE49-F238E27FC236}">
                 <a16:creationId xmlns:a16="http://schemas.microsoft.com/office/drawing/2014/main" id="{C9860B66-4F97-16A2-5884-362D844D5186}"/>
@@ -23496,7 +23496,7 @@
       </p:sp>
       <p:sp>
         <p:nvSpPr>
-          <p:cNvPr id="3" name="Espace réservé du contenu 2">
+          <p:cNvPr id="3" name="slot.body-left">
             <a:extLst>
               <a:ext uri="{FF2B5EF4-FFF2-40B4-BE49-F238E27FC236}">
                 <a16:creationId xmlns:a16="http://schemas.microsoft.com/office/drawing/2014/main" id="{67D0980E-EC25-1F76-A0E7-024667E7F4A2}"/>
@@ -23521,7 +23521,7 @@
       </p:sp>
       <p:sp>
         <p:nvSpPr>
-          <p:cNvPr id="4" name="Espace réservé du numéro de diapositive 3">
+          <p:cNvPr id="4" name="slot.footer-page">
             <a:extLst>
               <a:ext uri="{FF2B5EF4-FFF2-40B4-BE49-F238E27FC236}">
                 <a16:creationId xmlns:a16="http://schemas.microsoft.com/office/drawing/2014/main" id="{EE0DA2D1-8508-AF08-321B-9DD6AB3193E9}"/>
@@ -23581,7 +23581,7 @@
       </p:grpSpPr>
       <p:sp>
         <p:nvSpPr>
-          <p:cNvPr id="2" name="Titre 1">
+          <p:cNvPr id="2" name="slot.title">
             <a:extLst>
               <a:ext uri="{FF2B5EF4-FFF2-40B4-BE49-F238E27FC236}">
                 <a16:creationId xmlns:a16="http://schemas.microsoft.com/office/drawing/2014/main" id="{8380E5D0-5026-EB71-0F67-47CE171B2266}"/>
@@ -23606,7 +23606,7 @@
       </p:sp>
       <p:sp>
         <p:nvSpPr>
-          <p:cNvPr id="3" name="Espace réservé du contenu 2">
+          <p:cNvPr id="3" name="slot.body-left">
             <a:extLst>
               <a:ext uri="{FF2B5EF4-FFF2-40B4-BE49-F238E27FC236}">
                 <a16:creationId xmlns:a16="http://schemas.microsoft.com/office/drawing/2014/main" id="{61F73BCE-7414-9647-031B-5E1E96589689}"/>
@@ -23631,7 +23631,7 @@
       </p:sp>
       <p:sp>
         <p:nvSpPr>
-          <p:cNvPr id="4" name="Espace réservé du numéro de diapositive 3">
+          <p:cNvPr id="4" name="slot.footer-page">
             <a:extLst>
               <a:ext uri="{FF2B5EF4-FFF2-40B4-BE49-F238E27FC236}">
                 <a16:creationId xmlns:a16="http://schemas.microsoft.com/office/drawing/2014/main" id="{CCB1391B-9E18-29A1-5039-16BED643ACED}"/>
@@ -23660,7 +23660,7 @@
       </p:sp>
       <p:sp>
         <p:nvSpPr>
-          <p:cNvPr id="5" name="Espace réservé du contenu 4">
+          <p:cNvPr id="5" name="slot.source">
             <a:extLst>
               <a:ext uri="{FF2B5EF4-FFF2-40B4-BE49-F238E27FC236}">
                 <a16:creationId xmlns:a16="http://schemas.microsoft.com/office/drawing/2014/main" id="{1FA08A71-20BC-F105-521A-0896E8DDCFEC}"/>
@@ -23715,7 +23715,7 @@
       </p:grpSpPr>
       <p:sp>
         <p:nvSpPr>
-          <p:cNvPr id="5" name="Titre 4">
+          <p:cNvPr id="5" name="slot.title">
             <a:extLst>
               <a:ext uri="{FF2B5EF4-FFF2-40B4-BE49-F238E27FC236}">
                 <a16:creationId xmlns:a16="http://schemas.microsoft.com/office/drawing/2014/main" id="{56AFBC28-EC91-4C6B-21FC-51452A2E0D5E}"/>
@@ -23740,7 +23740,7 @@
       </p:sp>
       <p:sp>
         <p:nvSpPr>
-          <p:cNvPr id="6" name="Espace réservé du contenu 5">
+          <p:cNvPr id="6" name="slot.source">
             <a:extLst>
               <a:ext uri="{FF2B5EF4-FFF2-40B4-BE49-F238E27FC236}">
                 <a16:creationId xmlns:a16="http://schemas.microsoft.com/office/drawing/2014/main" id="{7E4542B0-4EEC-FBEE-97E0-DC5D5E41CC6B}"/>
@@ -23765,7 +23765,7 @@
       </p:sp>
       <p:sp>
         <p:nvSpPr>
-          <p:cNvPr id="4" name="Espace réservé du numéro de diapositive 3">
+          <p:cNvPr id="4" name="slot.footer-page">
             <a:extLst>
               <a:ext uri="{FF2B5EF4-FFF2-40B4-BE49-F238E27FC236}">
                 <a16:creationId xmlns:a16="http://schemas.microsoft.com/office/drawing/2014/main" id="{6F138008-195A-9DF9-CDBA-4C150FA42D20}"/>
@@ -23824,7 +23824,7 @@
       </p:grpSpPr>
       <p:sp>
         <p:nvSpPr>
-          <p:cNvPr id="5" name="Titre 4">
+          <p:cNvPr id="5" name="slot.title">
             <a:extLst>
               <a:ext uri="{FF2B5EF4-FFF2-40B4-BE49-F238E27FC236}">
                 <a16:creationId xmlns:a16="http://schemas.microsoft.com/office/drawing/2014/main" id="{A78B4462-098A-BEFB-12A5-0B2130617E9E}"/>
@@ -23849,7 +23849,7 @@
       </p:sp>
       <p:sp>
         <p:nvSpPr>
-          <p:cNvPr id="6" name="Espace réservé du contenu 5">
+          <p:cNvPr id="6" name="slot.body-left">
             <a:extLst>
               <a:ext uri="{FF2B5EF4-FFF2-40B4-BE49-F238E27FC236}">
                 <a16:creationId xmlns:a16="http://schemas.microsoft.com/office/drawing/2014/main" id="{B2DBBAC5-9A7A-F9B1-7594-7A706C39E559}"/>
@@ -23874,7 +23874,7 @@
       </p:sp>
       <p:sp>
         <p:nvSpPr>
-          <p:cNvPr id="8" name="Sous-titre 7">
+          <p:cNvPr id="8" name="slot.subtitle">
             <a:extLst>
               <a:ext uri="{FF2B5EF4-FFF2-40B4-BE49-F238E27FC236}">
                 <a16:creationId xmlns:a16="http://schemas.microsoft.com/office/drawing/2014/main" id="{3C84BBC7-166F-A5FB-3EB4-D0E396C32405}"/>
@@ -23899,7 +23899,7 @@
       </p:sp>
       <p:sp>
         <p:nvSpPr>
-          <p:cNvPr id="4" name="Espace réservé du numéro de diapositive 3">
+          <p:cNvPr id="4" name="slot.footer-page">
             <a:extLst>
               <a:ext uri="{FF2B5EF4-FFF2-40B4-BE49-F238E27FC236}">
                 <a16:creationId xmlns:a16="http://schemas.microsoft.com/office/drawing/2014/main" id="{5C8601E0-E097-6F4C-1CB6-93C63DFC9604}"/>
@@ -23928,7 +23928,7 @@
       </p:sp>
       <p:sp>
         <p:nvSpPr>
-          <p:cNvPr id="7" name="Espace réservé du contenu 6">
+          <p:cNvPr id="7" name="slot.source">
             <a:extLst>
               <a:ext uri="{FF2B5EF4-FFF2-40B4-BE49-F238E27FC236}">
                 <a16:creationId xmlns:a16="http://schemas.microsoft.com/office/drawing/2014/main" id="{140ECFB3-DB91-97BB-BC3F-A41D4BC064F2}"/>
@@ -24229,7 +24229,7 @@
       </p:grpSpPr>
       <p:sp>
         <p:nvSpPr>
-          <p:cNvPr id="11" name="Titre 10">
+          <p:cNvPr id="11" name="slot.title">
             <a:extLst>
               <a:ext uri="{FF2B5EF4-FFF2-40B4-BE49-F238E27FC236}">
                 <a16:creationId xmlns:a16="http://schemas.microsoft.com/office/drawing/2014/main" id="{D1C5C7F7-F1BB-F645-9BFD-AC43D790CDB8}"/>
@@ -24254,7 +24254,7 @@
       </p:sp>
       <p:graphicFrame>
         <p:nvGraphicFramePr>
-          <p:cNvPr id="2" name="Espace réservé du contenu 1">
+          <p:cNvPr id="2" name="slot.chart">
             <a:extLst>
               <a:ext uri="{FF2B5EF4-FFF2-40B4-BE49-F238E27FC236}">
                 <a16:creationId xmlns:a16="http://schemas.microsoft.com/office/drawing/2014/main" id="{8B9A51C8-0821-CC8D-FE41-EC04560121EE}"/>
@@ -24285,7 +24285,7 @@
       </p:graphicFrame>
       <p:sp>
         <p:nvSpPr>
-          <p:cNvPr id="4" name="Espace réservé du numéro de diapositive 3">
+          <p:cNvPr id="4" name="slot.footer-page">
             <a:extLst>
               <a:ext uri="{FF2B5EF4-FFF2-40B4-BE49-F238E27FC236}">
                 <a16:creationId xmlns:a16="http://schemas.microsoft.com/office/drawing/2014/main" id="{ACA357C0-33AA-F8BB-B7C0-8DFBCE7B96BC}"/>
@@ -24314,7 +24314,7 @@
       </p:sp>
       <p:sp>
         <p:nvSpPr>
-          <p:cNvPr id="12" name="Espace réservé du contenu 11">
+          <p:cNvPr id="12" name="slot.source">
             <a:extLst>
               <a:ext uri="{FF2B5EF4-FFF2-40B4-BE49-F238E27FC236}">
                 <a16:creationId xmlns:a16="http://schemas.microsoft.com/office/drawing/2014/main" id="{3C2A6227-568F-E980-735B-9E2C7525D872}"/>
@@ -24339,7 +24339,7 @@
       </p:sp>
       <p:sp>
         <p:nvSpPr>
-          <p:cNvPr id="3" name="Espace réservé du contenu 5">
+          <p:cNvPr id="3" name="slot.body-right">
             <a:extLst>
               <a:ext uri="{FF2B5EF4-FFF2-40B4-BE49-F238E27FC236}">
                 <a16:creationId xmlns:a16="http://schemas.microsoft.com/office/drawing/2014/main" id="{8D0B1F2F-2950-2FED-2CF1-55AA8817ED3F}"/>
@@ -24578,7 +24578,7 @@
       </p:sp>
       <p:sp>
         <p:nvSpPr>
-          <p:cNvPr id="13" name="Espace réservé du contenu 5">
+          <p:cNvPr id="13" name="slot.chart-title">
             <a:extLst>
               <a:ext uri="{FF2B5EF4-FFF2-40B4-BE49-F238E27FC236}">
                 <a16:creationId xmlns:a16="http://schemas.microsoft.com/office/drawing/2014/main" id="{945984DF-2BDC-B335-76E3-4D1A5C06727A}"/>
@@ -24872,7 +24872,7 @@
       </p:grpSpPr>
       <p:sp>
         <p:nvSpPr>
-          <p:cNvPr id="11" name="Titre 10">
+          <p:cNvPr id="11" name="slot.title">
             <a:extLst>
               <a:ext uri="{FF2B5EF4-FFF2-40B4-BE49-F238E27FC236}">
                 <a16:creationId xmlns:a16="http://schemas.microsoft.com/office/drawing/2014/main" id="{9BD6B52A-FF19-78CF-A935-E133AB89A4BB}"/>
@@ -24897,7 +24897,7 @@
       </p:sp>
       <p:graphicFrame>
         <p:nvGraphicFramePr>
-          <p:cNvPr id="2" name="Espace réservé du contenu 1">
+          <p:cNvPr id="2" name="slot.chart">
             <a:extLst>
               <a:ext uri="{FF2B5EF4-FFF2-40B4-BE49-F238E27FC236}">
                 <a16:creationId xmlns:a16="http://schemas.microsoft.com/office/drawing/2014/main" id="{43A9A298-18DF-1A43-C8A6-AF4C2F808ABB}"/>
@@ -24928,7 +24928,7 @@
       </p:graphicFrame>
       <p:sp>
         <p:nvSpPr>
-          <p:cNvPr id="4" name="Espace réservé du numéro de diapositive 3">
+          <p:cNvPr id="4" name="slot.footer-page">
             <a:extLst>
               <a:ext uri="{FF2B5EF4-FFF2-40B4-BE49-F238E27FC236}">
                 <a16:creationId xmlns:a16="http://schemas.microsoft.com/office/drawing/2014/main" id="{F4B4F2E0-11FD-0E6A-3E72-DE65E7BF7B3C}"/>
@@ -24957,7 +24957,7 @@
       </p:sp>
       <p:sp>
         <p:nvSpPr>
-          <p:cNvPr id="12" name="Espace réservé du contenu 11">
+          <p:cNvPr id="12" name="slot.source">
             <a:extLst>
               <a:ext uri="{FF2B5EF4-FFF2-40B4-BE49-F238E27FC236}">
                 <a16:creationId xmlns:a16="http://schemas.microsoft.com/office/drawing/2014/main" id="{4FFBAF71-AAF1-3782-E97A-9AE70D79E6AF}"/>
@@ -24982,7 +24982,7 @@
       </p:sp>
       <p:sp>
         <p:nvSpPr>
-          <p:cNvPr id="10" name="Espace réservé du contenu 5">
+          <p:cNvPr id="10" name="slot.body-right">
             <a:extLst>
               <a:ext uri="{FF2B5EF4-FFF2-40B4-BE49-F238E27FC236}">
                 <a16:creationId xmlns:a16="http://schemas.microsoft.com/office/drawing/2014/main" id="{E47B0D7A-5F90-F7D3-A811-E1A7AEE96FB1}"/>
@@ -25221,7 +25221,7 @@
       </p:sp>
       <p:sp>
         <p:nvSpPr>
-          <p:cNvPr id="13" name="Espace réservé du contenu 5">
+          <p:cNvPr id="13" name="slot.chart-title">
             <a:extLst>
               <a:ext uri="{FF2B5EF4-FFF2-40B4-BE49-F238E27FC236}">
                 <a16:creationId xmlns:a16="http://schemas.microsoft.com/office/drawing/2014/main" id="{997B11C3-8955-D64A-329E-B0AA8D59C74C}"/>
@@ -25515,7 +25515,7 @@
       </p:grpSpPr>
       <p:sp>
         <p:nvSpPr>
-          <p:cNvPr id="11" name="Titre 10">
+          <p:cNvPr id="11" name="slot.title">
             <a:extLst>
               <a:ext uri="{FF2B5EF4-FFF2-40B4-BE49-F238E27FC236}">
                 <a16:creationId xmlns:a16="http://schemas.microsoft.com/office/drawing/2014/main" id="{E6BA610B-9EE9-45A1-B28B-47B1ECDE0349}"/>
@@ -25540,7 +25540,7 @@
       </p:sp>
       <p:graphicFrame>
         <p:nvGraphicFramePr>
-          <p:cNvPr id="2" name="Espace réservé du contenu 1">
+          <p:cNvPr id="2" name="slot.chart">
             <a:extLst>
               <a:ext uri="{FF2B5EF4-FFF2-40B4-BE49-F238E27FC236}">
                 <a16:creationId xmlns:a16="http://schemas.microsoft.com/office/drawing/2014/main" id="{9C81EFE1-097D-C671-2766-C25389738490}"/>
@@ -25571,7 +25571,7 @@
       </p:graphicFrame>
       <p:sp>
         <p:nvSpPr>
-          <p:cNvPr id="4" name="Espace réservé du numéro de diapositive 3">
+          <p:cNvPr id="4" name="slot.footer-page">
             <a:extLst>
               <a:ext uri="{FF2B5EF4-FFF2-40B4-BE49-F238E27FC236}">
                 <a16:creationId xmlns:a16="http://schemas.microsoft.com/office/drawing/2014/main" id="{EC42C37B-CB35-17E7-8EE5-6ED39227D43E}"/>
@@ -25600,7 +25600,7 @@
       </p:sp>
       <p:sp>
         <p:nvSpPr>
-          <p:cNvPr id="12" name="Espace réservé du contenu 11">
+          <p:cNvPr id="12" name="slot.source">
             <a:extLst>
               <a:ext uri="{FF2B5EF4-FFF2-40B4-BE49-F238E27FC236}">
                 <a16:creationId xmlns:a16="http://schemas.microsoft.com/office/drawing/2014/main" id="{190093B9-4BCE-CCC2-2DCD-4F71A64766E9}"/>
@@ -25625,7 +25625,7 @@
       </p:sp>
       <p:sp>
         <p:nvSpPr>
-          <p:cNvPr id="10" name="Espace réservé du contenu 5">
+          <p:cNvPr id="10" name="slot.body-right">
             <a:extLst>
               <a:ext uri="{FF2B5EF4-FFF2-40B4-BE49-F238E27FC236}">
                 <a16:creationId xmlns:a16="http://schemas.microsoft.com/office/drawing/2014/main" id="{9B4B49E6-ACBD-1A9F-8953-1EB368346C96}"/>
@@ -25864,7 +25864,7 @@
       </p:sp>
       <p:sp>
         <p:nvSpPr>
-          <p:cNvPr id="13" name="Espace réservé du contenu 5">
+          <p:cNvPr id="13" name="slot.chart-title">
             <a:extLst>
               <a:ext uri="{FF2B5EF4-FFF2-40B4-BE49-F238E27FC236}">
                 <a16:creationId xmlns:a16="http://schemas.microsoft.com/office/drawing/2014/main" id="{33F8A7A2-5825-1682-27AF-955BF8FEC5B1}"/>

--- a/templates/report.master.pptx
+++ b/templates/report.master.pptx
@@ -4903,7 +4903,7 @@
       </p:graphicFrame>
       <p:sp>
         <p:nvSpPr>
-          <p:cNvPr id="2" name="Titre 1">
+          <p:cNvPr id="2" name="slot.title">
             <a:extLst>
               <a:ext uri="{FF2B5EF4-FFF2-40B4-BE49-F238E27FC236}">
                 <a16:creationId xmlns:a16="http://schemas.microsoft.com/office/drawing/2014/main" id="{FCE45F8B-6B35-4416-DE1A-36DAC87E84D7}"/>
@@ -4947,7 +4947,7 @@
       </p:sp>
       <p:sp>
         <p:nvSpPr>
-          <p:cNvPr id="3" name="Espace réservé du contenu 2">
+          <p:cNvPr id="3" name="slot.body-left">
             <a:extLst>
               <a:ext uri="{FF2B5EF4-FFF2-40B4-BE49-F238E27FC236}">
                 <a16:creationId xmlns:a16="http://schemas.microsoft.com/office/drawing/2014/main" id="{DD259420-A1F5-B3E7-FA1E-AF141FA30A75}"/>
@@ -5033,7 +5033,7 @@
       </p:sp>
       <p:sp>
         <p:nvSpPr>
-          <p:cNvPr id="6" name="Espace réservé du numéro de diapositive 5">
+          <p:cNvPr id="6" name="slot.footer-page">
             <a:extLst>
               <a:ext uri="{FF2B5EF4-FFF2-40B4-BE49-F238E27FC236}">
                 <a16:creationId xmlns:a16="http://schemas.microsoft.com/office/drawing/2014/main" id="{C0B19DAE-9253-B1E3-C9A1-BAD7328324FA}"/>
@@ -5067,7 +5067,7 @@
       </p:sp>
       <p:sp>
         <p:nvSpPr>
-          <p:cNvPr id="20" name="Espace réservé du contenu 6">
+          <p:cNvPr id="20" name="slot.source">
             <a:extLst>
               <a:ext uri="{FF2B5EF4-FFF2-40B4-BE49-F238E27FC236}">
                 <a16:creationId xmlns:a16="http://schemas.microsoft.com/office/drawing/2014/main" id="{A0EE391D-69CD-DBA5-462B-AEF51D098FA6}"/>
@@ -5443,7 +5443,7 @@
       </p:pic>
       <p:sp>
         <p:nvSpPr>
-          <p:cNvPr id="4" name="Titre 1">
+          <p:cNvPr id="4" name="slot.title">
             <a:extLst>
               <a:ext uri="{FF2B5EF4-FFF2-40B4-BE49-F238E27FC236}">
                 <a16:creationId xmlns:a16="http://schemas.microsoft.com/office/drawing/2014/main" id="{5021812E-4666-EE7A-00F0-B822BDC95294}"/>
@@ -5489,7 +5489,7 @@
       </p:sp>
       <p:sp>
         <p:nvSpPr>
-          <p:cNvPr id="5" name="Espace réservé du contenu 3">
+          <p:cNvPr id="5" name="slot.body-left">
             <a:extLst>
               <a:ext uri="{FF2B5EF4-FFF2-40B4-BE49-F238E27FC236}">
                 <a16:creationId xmlns:a16="http://schemas.microsoft.com/office/drawing/2014/main" id="{664EE6FE-7213-D8B4-C52F-792F747C9C0B}"/>
@@ -5715,7 +5715,7 @@
       </p:cxnSp>
       <p:sp>
         <p:nvSpPr>
-          <p:cNvPr id="10" name="Espace réservé du numéro de diapositive 5">
+          <p:cNvPr id="10" name="slot.footer-page">
             <a:extLst>
               <a:ext uri="{FF2B5EF4-FFF2-40B4-BE49-F238E27FC236}">
                 <a16:creationId xmlns:a16="http://schemas.microsoft.com/office/drawing/2014/main" id="{D522E3A2-42AA-2228-2F55-67BD9734EC15}"/>
@@ -6117,7 +6117,7 @@
       </p:graphicFrame>
       <p:sp>
         <p:nvSpPr>
-          <p:cNvPr id="5" name="Titre 1">
+          <p:cNvPr id="5" name="slot.title">
             <a:extLst>
               <a:ext uri="{FF2B5EF4-FFF2-40B4-BE49-F238E27FC236}">
                 <a16:creationId xmlns:a16="http://schemas.microsoft.com/office/drawing/2014/main" id="{00E8F29D-6980-4830-A056-57FFB127FFBD}"/>
@@ -6161,7 +6161,7 @@
       </p:sp>
       <p:sp>
         <p:nvSpPr>
-          <p:cNvPr id="9" name="Sous-titre 2">
+          <p:cNvPr id="9" name="slot.subtitle">
             <a:extLst>
               <a:ext uri="{FF2B5EF4-FFF2-40B4-BE49-F238E27FC236}">
                 <a16:creationId xmlns:a16="http://schemas.microsoft.com/office/drawing/2014/main" id="{D92A2739-22B5-D8C9-22C3-AB9ACCB8111C}"/>
@@ -6778,7 +6778,7 @@
       </p:graphicFrame>
       <p:sp>
         <p:nvSpPr>
-          <p:cNvPr id="2" name="Titre 1">
+          <p:cNvPr id="2" name="slot.section-title">
             <a:extLst>
               <a:ext uri="{FF2B5EF4-FFF2-40B4-BE49-F238E27FC236}">
                 <a16:creationId xmlns:a16="http://schemas.microsoft.com/office/drawing/2014/main" id="{1FAAFAE6-D60C-93B1-4819-060D20F8BFF4}"/>
@@ -6822,7 +6822,7 @@
       </p:sp>
       <p:sp>
         <p:nvSpPr>
-          <p:cNvPr id="3" name="Sous-titre 2">
+          <p:cNvPr id="3" name="slot.subtitle">
             <a:extLst>
               <a:ext uri="{FF2B5EF4-FFF2-40B4-BE49-F238E27FC236}">
                 <a16:creationId xmlns:a16="http://schemas.microsoft.com/office/drawing/2014/main" id="{B989298A-8D13-336B-A448-1CB247CE6E4F}"/>
@@ -7014,7 +7014,7 @@
       </p:graphicFrame>
       <p:sp>
         <p:nvSpPr>
-          <p:cNvPr id="2" name="Titre 1">
+          <p:cNvPr id="2" name="slot.title">
             <a:extLst>
               <a:ext uri="{FF2B5EF4-FFF2-40B4-BE49-F238E27FC236}">
                 <a16:creationId xmlns:a16="http://schemas.microsoft.com/office/drawing/2014/main" id="{02A78A85-561E-020D-C7F8-40BBB3F191CA}"/>
@@ -7098,7 +7098,7 @@
       </p:cxnSp>
       <p:sp>
         <p:nvSpPr>
-          <p:cNvPr id="3" name="Espace réservé du numéro de diapositive 5">
+          <p:cNvPr id="3" name="slot.footer-page">
             <a:extLst>
               <a:ext uri="{FF2B5EF4-FFF2-40B4-BE49-F238E27FC236}">
                 <a16:creationId xmlns:a16="http://schemas.microsoft.com/office/drawing/2014/main" id="{D39FA986-AFFA-D470-697F-282E932DA97D}"/>
@@ -7132,7 +7132,7 @@
       </p:sp>
       <p:sp>
         <p:nvSpPr>
-          <p:cNvPr id="5" name="Espace réservé du contenu 3">
+          <p:cNvPr id="5" name="slot.body-left">
             <a:extLst>
               <a:ext uri="{FF2B5EF4-FFF2-40B4-BE49-F238E27FC236}">
                 <a16:creationId xmlns:a16="http://schemas.microsoft.com/office/drawing/2014/main" id="{FCB803A9-272C-4119-092B-F5D7EE4021F0}"/>
@@ -7523,7 +7523,7 @@
       </p:pic>
       <p:sp>
         <p:nvSpPr>
-          <p:cNvPr id="2" name="Titre 1">
+          <p:cNvPr id="2" name="slot.title">
             <a:extLst>
               <a:ext uri="{FF2B5EF4-FFF2-40B4-BE49-F238E27FC236}">
                 <a16:creationId xmlns:a16="http://schemas.microsoft.com/office/drawing/2014/main" id="{02A78A85-561E-020D-C7F8-40BBB3F191CA}"/>
@@ -7565,7 +7565,7 @@
       </p:sp>
       <p:sp>
         <p:nvSpPr>
-          <p:cNvPr id="3" name="Espace réservé du texte 2">
+          <p:cNvPr id="3" name="slot.subtitle-left">
             <a:extLst>
               <a:ext uri="{FF2B5EF4-FFF2-40B4-BE49-F238E27FC236}">
                 <a16:creationId xmlns:a16="http://schemas.microsoft.com/office/drawing/2014/main" id="{E43735A6-6302-B3D2-6BB7-6309454C5C3A}"/>
@@ -7659,7 +7659,7 @@
       </p:sp>
       <p:sp>
         <p:nvSpPr>
-          <p:cNvPr id="4" name="Espace réservé du contenu 3">
+          <p:cNvPr id="4" name="slot.body-left">
             <a:extLst>
               <a:ext uri="{FF2B5EF4-FFF2-40B4-BE49-F238E27FC236}">
                 <a16:creationId xmlns:a16="http://schemas.microsoft.com/office/drawing/2014/main" id="{2D3E2C40-4C7F-6E36-C2FB-962C73150210}"/>
@@ -7772,7 +7772,7 @@
       </p:sp>
       <p:sp>
         <p:nvSpPr>
-          <p:cNvPr id="5" name="Espace réservé du texte 4">
+          <p:cNvPr id="5" name="slot.subtitle-left">
             <a:extLst>
               <a:ext uri="{FF2B5EF4-FFF2-40B4-BE49-F238E27FC236}">
                 <a16:creationId xmlns:a16="http://schemas.microsoft.com/office/drawing/2014/main" id="{2D35804D-7044-B129-7E2C-ED3868BD4F80}"/>
@@ -7863,7 +7863,7 @@
       </p:sp>
       <p:sp>
         <p:nvSpPr>
-          <p:cNvPr id="6" name="Espace réservé du contenu 5">
+          <p:cNvPr id="6" name="slot.body-right">
             <a:extLst>
               <a:ext uri="{FF2B5EF4-FFF2-40B4-BE49-F238E27FC236}">
                 <a16:creationId xmlns:a16="http://schemas.microsoft.com/office/drawing/2014/main" id="{C56BF488-D9DF-64BA-30D9-77D4A3CB1561}"/>
@@ -8421,7 +8421,7 @@
       </p:pic>
       <p:sp>
         <p:nvSpPr>
-          <p:cNvPr id="2" name="Titre 1">
+          <p:cNvPr id="2" name="slot.title">
             <a:extLst>
               <a:ext uri="{FF2B5EF4-FFF2-40B4-BE49-F238E27FC236}">
                 <a16:creationId xmlns:a16="http://schemas.microsoft.com/office/drawing/2014/main" id="{02A78A85-561E-020D-C7F8-40BBB3F191CA}"/>
@@ -8463,7 +8463,7 @@
       </p:sp>
       <p:sp>
         <p:nvSpPr>
-          <p:cNvPr id="3" name="Espace réservé du texte 2">
+          <p:cNvPr id="3" name="slot.subtitle-left">
             <a:extLst>
               <a:ext uri="{FF2B5EF4-FFF2-40B4-BE49-F238E27FC236}">
                 <a16:creationId xmlns:a16="http://schemas.microsoft.com/office/drawing/2014/main" id="{E43735A6-6302-B3D2-6BB7-6309454C5C3A}"/>
@@ -8557,7 +8557,7 @@
       </p:sp>
       <p:sp>
         <p:nvSpPr>
-          <p:cNvPr id="4" name="Espace réservé du contenu 3">
+          <p:cNvPr id="4" name="slot.body-left">
             <a:extLst>
               <a:ext uri="{FF2B5EF4-FFF2-40B4-BE49-F238E27FC236}">
                 <a16:creationId xmlns:a16="http://schemas.microsoft.com/office/drawing/2014/main" id="{2D3E2C40-4C7F-6E36-C2FB-962C73150210}"/>
@@ -8670,7 +8670,7 @@
       </p:sp>
       <p:sp>
         <p:nvSpPr>
-          <p:cNvPr id="5" name="Espace réservé du texte 4">
+          <p:cNvPr id="5" name="slot.subtitle-left">
             <a:extLst>
               <a:ext uri="{FF2B5EF4-FFF2-40B4-BE49-F238E27FC236}">
                 <a16:creationId xmlns:a16="http://schemas.microsoft.com/office/drawing/2014/main" id="{2D35804D-7044-B129-7E2C-ED3868BD4F80}"/>
@@ -8761,7 +8761,7 @@
       </p:sp>
       <p:sp>
         <p:nvSpPr>
-          <p:cNvPr id="6" name="Espace réservé du contenu 5">
+          <p:cNvPr id="6" name="slot.body-right">
             <a:extLst>
               <a:ext uri="{FF2B5EF4-FFF2-40B4-BE49-F238E27FC236}">
                 <a16:creationId xmlns:a16="http://schemas.microsoft.com/office/drawing/2014/main" id="{C56BF488-D9DF-64BA-30D9-77D4A3CB1561}"/>
@@ -9314,7 +9314,7 @@
       </p:pic>
       <p:sp>
         <p:nvSpPr>
-          <p:cNvPr id="2" name="Titre 1">
+          <p:cNvPr id="2" name="slot.title">
             <a:extLst>
               <a:ext uri="{FF2B5EF4-FFF2-40B4-BE49-F238E27FC236}">
                 <a16:creationId xmlns:a16="http://schemas.microsoft.com/office/drawing/2014/main" id="{02A78A85-561E-020D-C7F8-40BBB3F191CA}"/>
@@ -9356,7 +9356,7 @@
       </p:sp>
       <p:sp>
         <p:nvSpPr>
-          <p:cNvPr id="3" name="Espace réservé du texte 2">
+          <p:cNvPr id="3" name="slot.subtitle-1">
             <a:extLst>
               <a:ext uri="{FF2B5EF4-FFF2-40B4-BE49-F238E27FC236}">
                 <a16:creationId xmlns:a16="http://schemas.microsoft.com/office/drawing/2014/main" id="{E43735A6-6302-B3D2-6BB7-6309454C5C3A}"/>
@@ -9770,7 +9770,7 @@
       </p:cxnSp>
       <p:sp>
         <p:nvSpPr>
-          <p:cNvPr id="15" name="Espace réservé du numéro de diapositive 5">
+          <p:cNvPr id="15" name="slot.footer-page">
             <a:extLst>
               <a:ext uri="{FF2B5EF4-FFF2-40B4-BE49-F238E27FC236}">
                 <a16:creationId xmlns:a16="http://schemas.microsoft.com/office/drawing/2014/main" id="{24F11CE2-041F-6445-F54A-56AAFFD76115}"/>
@@ -9804,7 +9804,7 @@
       </p:sp>
       <p:sp>
         <p:nvSpPr>
-          <p:cNvPr id="20" name="Espace réservé du contenu 6">
+          <p:cNvPr id="20" name="slot.source">
             <a:extLst>
               <a:ext uri="{FF2B5EF4-FFF2-40B4-BE49-F238E27FC236}">
                 <a16:creationId xmlns:a16="http://schemas.microsoft.com/office/drawing/2014/main" id="{95AC962B-733D-ABAE-17E4-E513BAC8B9E1}"/>
@@ -10144,7 +10144,7 @@
       </p:pic>
       <p:sp>
         <p:nvSpPr>
-          <p:cNvPr id="2" name="Titre 1">
+          <p:cNvPr id="2" name="slot.title">
             <a:extLst>
               <a:ext uri="{FF2B5EF4-FFF2-40B4-BE49-F238E27FC236}">
                 <a16:creationId xmlns:a16="http://schemas.microsoft.com/office/drawing/2014/main" id="{02A78A85-561E-020D-C7F8-40BBB3F191CA}"/>
@@ -10186,7 +10186,7 @@
       </p:sp>
       <p:sp>
         <p:nvSpPr>
-          <p:cNvPr id="3" name="Espace réservé du texte 2">
+          <p:cNvPr id="3" name="slot.subtitle-1">
             <a:extLst>
               <a:ext uri="{FF2B5EF4-FFF2-40B4-BE49-F238E27FC236}">
                 <a16:creationId xmlns:a16="http://schemas.microsoft.com/office/drawing/2014/main" id="{E43735A6-6302-B3D2-6BB7-6309454C5C3A}"/>
@@ -10514,7 +10514,7 @@
       </p:cxnSp>
       <p:sp>
         <p:nvSpPr>
-          <p:cNvPr id="15" name="Espace réservé du numéro de diapositive 5">
+          <p:cNvPr id="15" name="slot.footer-page">
             <a:extLst>
               <a:ext uri="{FF2B5EF4-FFF2-40B4-BE49-F238E27FC236}">
                 <a16:creationId xmlns:a16="http://schemas.microsoft.com/office/drawing/2014/main" id="{24F11CE2-041F-6445-F54A-56AAFFD76115}"/>
@@ -10548,7 +10548,7 @@
       </p:sp>
       <p:sp>
         <p:nvSpPr>
-          <p:cNvPr id="20" name="Espace réservé du contenu 6">
+          <p:cNvPr id="20" name="slot.source">
             <a:extLst>
               <a:ext uri="{FF2B5EF4-FFF2-40B4-BE49-F238E27FC236}">
                 <a16:creationId xmlns:a16="http://schemas.microsoft.com/office/drawing/2014/main" id="{95AC962B-733D-ABAE-17E4-E513BAC8B9E1}"/>
@@ -11021,7 +11021,7 @@
       </p:sp>
       <p:sp>
         <p:nvSpPr>
-          <p:cNvPr id="2" name="Titre 1">
+          <p:cNvPr id="2" name="slot.title">
             <a:extLst>
               <a:ext uri="{FF2B5EF4-FFF2-40B4-BE49-F238E27FC236}">
                 <a16:creationId xmlns:a16="http://schemas.microsoft.com/office/drawing/2014/main" id="{02A78A85-561E-020D-C7F8-40BBB3F191CA}"/>
@@ -11063,7 +11063,7 @@
       </p:sp>
       <p:sp>
         <p:nvSpPr>
-          <p:cNvPr id="3" name="Espace réservé du texte 2">
+          <p:cNvPr id="3" name="slot.subtitle-left">
             <a:extLst>
               <a:ext uri="{FF2B5EF4-FFF2-40B4-BE49-F238E27FC236}">
                 <a16:creationId xmlns:a16="http://schemas.microsoft.com/office/drawing/2014/main" id="{E43735A6-6302-B3D2-6BB7-6309454C5C3A}"/>
@@ -11157,7 +11157,7 @@
       </p:sp>
       <p:sp>
         <p:nvSpPr>
-          <p:cNvPr id="4" name="Espace réservé du contenu 3">
+          <p:cNvPr id="4" name="slot.body-left">
             <a:extLst>
               <a:ext uri="{FF2B5EF4-FFF2-40B4-BE49-F238E27FC236}">
                 <a16:creationId xmlns:a16="http://schemas.microsoft.com/office/drawing/2014/main" id="{2D3E2C40-4C7F-6E36-C2FB-962C73150210}"/>
@@ -11270,7 +11270,7 @@
       </p:sp>
       <p:sp>
         <p:nvSpPr>
-          <p:cNvPr id="5" name="Espace réservé du texte 4">
+          <p:cNvPr id="5" name="slot.subtitle-left">
             <a:extLst>
               <a:ext uri="{FF2B5EF4-FFF2-40B4-BE49-F238E27FC236}">
                 <a16:creationId xmlns:a16="http://schemas.microsoft.com/office/drawing/2014/main" id="{2D35804D-7044-B129-7E2C-ED3868BD4F80}"/>
@@ -11361,7 +11361,7 @@
       </p:sp>
       <p:sp>
         <p:nvSpPr>
-          <p:cNvPr id="6" name="Espace réservé du contenu 5">
+          <p:cNvPr id="6" name="slot.body-right">
             <a:extLst>
               <a:ext uri="{FF2B5EF4-FFF2-40B4-BE49-F238E27FC236}">
                 <a16:creationId xmlns:a16="http://schemas.microsoft.com/office/drawing/2014/main" id="{C56BF488-D9DF-64BA-30D9-77D4A3CB1561}"/>
@@ -11995,7 +11995,7 @@
       </p:sp>
       <p:sp>
         <p:nvSpPr>
-          <p:cNvPr id="2" name="Titre 1">
+          <p:cNvPr id="2" name="slot.title">
             <a:extLst>
               <a:ext uri="{FF2B5EF4-FFF2-40B4-BE49-F238E27FC236}">
                 <a16:creationId xmlns:a16="http://schemas.microsoft.com/office/drawing/2014/main" id="{02A78A85-561E-020D-C7F8-40BBB3F191CA}"/>
@@ -12037,7 +12037,7 @@
       </p:sp>
       <p:sp>
         <p:nvSpPr>
-          <p:cNvPr id="3" name="Espace réservé du texte 2">
+          <p:cNvPr id="3" name="slot.subtitle-left">
             <a:extLst>
               <a:ext uri="{FF2B5EF4-FFF2-40B4-BE49-F238E27FC236}">
                 <a16:creationId xmlns:a16="http://schemas.microsoft.com/office/drawing/2014/main" id="{E43735A6-6302-B3D2-6BB7-6309454C5C3A}"/>
@@ -12131,7 +12131,7 @@
       </p:sp>
       <p:sp>
         <p:nvSpPr>
-          <p:cNvPr id="4" name="Espace réservé du contenu 3">
+          <p:cNvPr id="4" name="slot.body-left">
             <a:extLst>
               <a:ext uri="{FF2B5EF4-FFF2-40B4-BE49-F238E27FC236}">
                 <a16:creationId xmlns:a16="http://schemas.microsoft.com/office/drawing/2014/main" id="{2D3E2C40-4C7F-6E36-C2FB-962C73150210}"/>
@@ -12244,7 +12244,7 @@
       </p:sp>
       <p:sp>
         <p:nvSpPr>
-          <p:cNvPr id="5" name="Espace réservé du texte 4">
+          <p:cNvPr id="5" name="slot.subtitle-left">
             <a:extLst>
               <a:ext uri="{FF2B5EF4-FFF2-40B4-BE49-F238E27FC236}">
                 <a16:creationId xmlns:a16="http://schemas.microsoft.com/office/drawing/2014/main" id="{2D35804D-7044-B129-7E2C-ED3868BD4F80}"/>
@@ -12335,7 +12335,7 @@
       </p:sp>
       <p:sp>
         <p:nvSpPr>
-          <p:cNvPr id="6" name="Espace réservé du contenu 5">
+          <p:cNvPr id="6" name="slot.body-right">
             <a:extLst>
               <a:ext uri="{FF2B5EF4-FFF2-40B4-BE49-F238E27FC236}">
                 <a16:creationId xmlns:a16="http://schemas.microsoft.com/office/drawing/2014/main" id="{C56BF488-D9DF-64BA-30D9-77D4A3CB1561}"/>
@@ -12923,7 +12923,7 @@
       </p:graphicFrame>
       <p:sp>
         <p:nvSpPr>
-          <p:cNvPr id="2" name="Titre 1">
+          <p:cNvPr id="2" name="slot.title">
             <a:extLst>
               <a:ext uri="{FF2B5EF4-FFF2-40B4-BE49-F238E27FC236}">
                 <a16:creationId xmlns:a16="http://schemas.microsoft.com/office/drawing/2014/main" id="{8E7A6757-C645-3EC5-79F9-70135F48F1F5}"/>
@@ -12993,7 +12993,7 @@
       </p:cxnSp>
       <p:sp>
         <p:nvSpPr>
-          <p:cNvPr id="16" name="Espace réservé du contenu 6">
+          <p:cNvPr id="16" name="slot.source">
             <a:extLst>
               <a:ext uri="{FF2B5EF4-FFF2-40B4-BE49-F238E27FC236}">
                 <a16:creationId xmlns:a16="http://schemas.microsoft.com/office/drawing/2014/main" id="{1EAE700C-AA3D-B07B-6407-A28618C99CA3}"/>
@@ -13060,7 +13060,7 @@
       </p:sp>
       <p:sp>
         <p:nvSpPr>
-          <p:cNvPr id="17" name="Espace réservé du numéro de diapositive 5">
+          <p:cNvPr id="17" name="slot.footer-page">
             <a:extLst>
               <a:ext uri="{FF2B5EF4-FFF2-40B4-BE49-F238E27FC236}">
                 <a16:creationId xmlns:a16="http://schemas.microsoft.com/office/drawing/2014/main" id="{30471A69-7D18-731A-528E-0F5C73D3278C}"/>
@@ -13379,7 +13379,7 @@
       </p:sp>
       <p:sp>
         <p:nvSpPr>
-          <p:cNvPr id="2" name="Titre 1">
+          <p:cNvPr id="2" name="slot.title">
             <a:extLst>
               <a:ext uri="{FF2B5EF4-FFF2-40B4-BE49-F238E27FC236}">
                 <a16:creationId xmlns:a16="http://schemas.microsoft.com/office/drawing/2014/main" id="{02A78A85-561E-020D-C7F8-40BBB3F191CA}"/>
@@ -13421,7 +13421,7 @@
       </p:sp>
       <p:sp>
         <p:nvSpPr>
-          <p:cNvPr id="3" name="Espace réservé du texte 2">
+          <p:cNvPr id="3" name="slot.subtitle-1">
             <a:extLst>
               <a:ext uri="{FF2B5EF4-FFF2-40B4-BE49-F238E27FC236}">
                 <a16:creationId xmlns:a16="http://schemas.microsoft.com/office/drawing/2014/main" id="{E43735A6-6302-B3D2-6BB7-6309454C5C3A}"/>
@@ -13762,7 +13762,7 @@
       </p:cxnSp>
       <p:sp>
         <p:nvSpPr>
-          <p:cNvPr id="7" name="Espace réservé du numéro de diapositive 5">
+          <p:cNvPr id="7" name="slot.footer-page">
             <a:extLst>
               <a:ext uri="{FF2B5EF4-FFF2-40B4-BE49-F238E27FC236}">
                 <a16:creationId xmlns:a16="http://schemas.microsoft.com/office/drawing/2014/main" id="{1A58D0F3-933B-44A0-AA4E-059DFC9A693F}"/>
@@ -13805,7 +13805,7 @@
       </p:sp>
       <p:sp>
         <p:nvSpPr>
-          <p:cNvPr id="16" name="Espace réservé du contenu 6">
+          <p:cNvPr id="16" name="slot.source">
             <a:extLst>
               <a:ext uri="{FF2B5EF4-FFF2-40B4-BE49-F238E27FC236}">
                 <a16:creationId xmlns:a16="http://schemas.microsoft.com/office/drawing/2014/main" id="{90BAEBC7-9C13-C823-651C-6CF5BCB1CA2C}"/>
@@ -14155,7 +14155,7 @@
       </p:sp>
       <p:sp>
         <p:nvSpPr>
-          <p:cNvPr id="15" name="Titre 1">
+          <p:cNvPr id="15" name="slot.title">
             <a:extLst>
               <a:ext uri="{FF2B5EF4-FFF2-40B4-BE49-F238E27FC236}">
                 <a16:creationId xmlns:a16="http://schemas.microsoft.com/office/drawing/2014/main" id="{011ADB7C-2BFE-5201-7E80-4A7CB5B2A9D7}"/>
@@ -14197,7 +14197,7 @@
       </p:sp>
       <p:sp>
         <p:nvSpPr>
-          <p:cNvPr id="16" name="Espace réservé du texte 2">
+          <p:cNvPr id="16" name="slot.subtitle-1">
             <a:extLst>
               <a:ext uri="{FF2B5EF4-FFF2-40B4-BE49-F238E27FC236}">
                 <a16:creationId xmlns:a16="http://schemas.microsoft.com/office/drawing/2014/main" id="{A6C2B456-2FBB-0CCF-35AD-10F95452A42E}"/>
@@ -14538,7 +14538,7 @@
       </p:cxnSp>
       <p:sp>
         <p:nvSpPr>
-          <p:cNvPr id="25" name="Espace réservé du numéro de diapositive 5">
+          <p:cNvPr id="25" name="slot.footer-page">
             <a:extLst>
               <a:ext uri="{FF2B5EF4-FFF2-40B4-BE49-F238E27FC236}">
                 <a16:creationId xmlns:a16="http://schemas.microsoft.com/office/drawing/2014/main" id="{E7E2C119-EF2B-38F6-0525-06C871F99DB2}"/>
@@ -14581,7 +14581,7 @@
       </p:sp>
       <p:sp>
         <p:nvSpPr>
-          <p:cNvPr id="27" name="Espace réservé du contenu 6">
+          <p:cNvPr id="27" name="slot.source">
             <a:extLst>
               <a:ext uri="{FF2B5EF4-FFF2-40B4-BE49-F238E27FC236}">
                 <a16:creationId xmlns:a16="http://schemas.microsoft.com/office/drawing/2014/main" id="{86608BDE-897C-79A9-D915-0BB179DBABCE}"/>
@@ -15150,7 +15150,7 @@
       </p:graphicFrame>
       <p:sp>
         <p:nvSpPr>
-          <p:cNvPr id="2" name="Titre 1">
+          <p:cNvPr id="2" name="slot.title">
             <a:extLst>
               <a:ext uri="{FF2B5EF4-FFF2-40B4-BE49-F238E27FC236}">
                 <a16:creationId xmlns:a16="http://schemas.microsoft.com/office/drawing/2014/main" id="{FCE45F8B-6B35-4416-DE1A-36DAC87E84D7}"/>
@@ -15184,7 +15184,7 @@
       </p:sp>
       <p:sp>
         <p:nvSpPr>
-          <p:cNvPr id="3" name="Espace réservé du contenu 2">
+          <p:cNvPr id="3" name="slot.body-left">
             <a:extLst>
               <a:ext uri="{FF2B5EF4-FFF2-40B4-BE49-F238E27FC236}">
                 <a16:creationId xmlns:a16="http://schemas.microsoft.com/office/drawing/2014/main" id="{DD259420-A1F5-B3E7-FA1E-AF141FA30A75}"/>
@@ -15247,7 +15247,7 @@
       </p:sp>
       <p:sp>
         <p:nvSpPr>
-          <p:cNvPr id="4" name="Sous-titre 2">
+          <p:cNvPr id="4" name="slot.subtitle">
             <a:extLst>
               <a:ext uri="{FF2B5EF4-FFF2-40B4-BE49-F238E27FC236}">
                 <a16:creationId xmlns:a16="http://schemas.microsoft.com/office/drawing/2014/main" id="{0BD151FF-774C-0F45-1C17-D35CEB240F37}"/>
@@ -15366,7 +15366,7 @@
       </p:cxnSp>
       <p:sp>
         <p:nvSpPr>
-          <p:cNvPr id="7" name="Espace réservé du numéro de diapositive 5">
+          <p:cNvPr id="7" name="slot.footer-page">
             <a:extLst>
               <a:ext uri="{FF2B5EF4-FFF2-40B4-BE49-F238E27FC236}">
                 <a16:creationId xmlns:a16="http://schemas.microsoft.com/office/drawing/2014/main" id="{E93BE603-3A6B-82E8-B096-333EF0F29FF1}"/>
@@ -15400,7 +15400,7 @@
       </p:sp>
       <p:sp>
         <p:nvSpPr>
-          <p:cNvPr id="16" name="Espace réservé du contenu 6">
+          <p:cNvPr id="16" name="slot.source">
             <a:extLst>
               <a:ext uri="{FF2B5EF4-FFF2-40B4-BE49-F238E27FC236}">
                 <a16:creationId xmlns:a16="http://schemas.microsoft.com/office/drawing/2014/main" id="{30FB613D-2E4E-C892-5E41-010F534973BA}"/>
@@ -15703,7 +15703,7 @@
       </p:graphicFrame>
       <p:sp>
         <p:nvSpPr>
-          <p:cNvPr id="2" name="Titre 1">
+          <p:cNvPr id="2" name="slot.title">
             <a:extLst>
               <a:ext uri="{FF2B5EF4-FFF2-40B4-BE49-F238E27FC236}">
                 <a16:creationId xmlns:a16="http://schemas.microsoft.com/office/drawing/2014/main" id="{2177F37C-BE34-28C6-E3CA-11B0B3A1A2C2}"/>
@@ -15732,7 +15732,7 @@
       </p:sp>
       <p:sp>
         <p:nvSpPr>
-          <p:cNvPr id="3" name="Espace réservé du contenu 2">
+          <p:cNvPr id="3" name="slot.body-left">
             <a:extLst>
               <a:ext uri="{FF2B5EF4-FFF2-40B4-BE49-F238E27FC236}">
                 <a16:creationId xmlns:a16="http://schemas.microsoft.com/office/drawing/2014/main" id="{1F024AAB-E748-56F5-69CF-8D668412B46A}"/>
@@ -15831,7 +15831,7 @@
       </p:sp>
       <p:sp>
         <p:nvSpPr>
-          <p:cNvPr id="4" name="Espace réservé du contenu 3">
+          <p:cNvPr id="4" name="slot.body-left">
             <a:extLst>
               <a:ext uri="{FF2B5EF4-FFF2-40B4-BE49-F238E27FC236}">
                 <a16:creationId xmlns:a16="http://schemas.microsoft.com/office/drawing/2014/main" id="{8EB565A4-3D20-0C08-E4EA-AB81725F7D5D}"/>
@@ -15978,7 +15978,7 @@
       </p:cxnSp>
       <p:sp>
         <p:nvSpPr>
-          <p:cNvPr id="11" name="Espace réservé du numéro de diapositive 5">
+          <p:cNvPr id="11" name="slot.footer-page">
             <a:extLst>
               <a:ext uri="{FF2B5EF4-FFF2-40B4-BE49-F238E27FC236}">
                 <a16:creationId xmlns:a16="http://schemas.microsoft.com/office/drawing/2014/main" id="{1382F4B7-187B-8A42-30AA-40FBAC1ED43E}"/>
@@ -16012,7 +16012,7 @@
       </p:sp>
       <p:sp>
         <p:nvSpPr>
-          <p:cNvPr id="18" name="Espace réservé du contenu 6">
+          <p:cNvPr id="18" name="slot.body-left">
             <a:extLst>
               <a:ext uri="{FF2B5EF4-FFF2-40B4-BE49-F238E27FC236}">
                 <a16:creationId xmlns:a16="http://schemas.microsoft.com/office/drawing/2014/main" id="{134DD0FE-B05A-6304-7865-C88149104BD6}"/>
@@ -16315,7 +16315,7 @@
       </p:graphicFrame>
       <p:sp>
         <p:nvSpPr>
-          <p:cNvPr id="2" name="Titre 1">
+          <p:cNvPr id="2" name="slot.title">
             <a:extLst>
               <a:ext uri="{FF2B5EF4-FFF2-40B4-BE49-F238E27FC236}">
                 <a16:creationId xmlns:a16="http://schemas.microsoft.com/office/drawing/2014/main" id="{02A78A85-561E-020D-C7F8-40BBB3F191CA}"/>
@@ -16349,7 +16349,7 @@
       </p:sp>
       <p:sp>
         <p:nvSpPr>
-          <p:cNvPr id="3" name="Espace réservé du texte 2">
+          <p:cNvPr id="3" name="slot.subtitle-left">
             <a:extLst>
               <a:ext uri="{FF2B5EF4-FFF2-40B4-BE49-F238E27FC236}">
                 <a16:creationId xmlns:a16="http://schemas.microsoft.com/office/drawing/2014/main" id="{E43735A6-6302-B3D2-6BB7-6309454C5C3A}"/>
@@ -16427,7 +16427,7 @@
       </p:sp>
       <p:sp>
         <p:nvSpPr>
-          <p:cNvPr id="4" name="Espace réservé du contenu 3">
+          <p:cNvPr id="4" name="slot.body-left">
             <a:extLst>
               <a:ext uri="{FF2B5EF4-FFF2-40B4-BE49-F238E27FC236}">
                 <a16:creationId xmlns:a16="http://schemas.microsoft.com/office/drawing/2014/main" id="{2D3E2C40-4C7F-6E36-C2FB-962C73150210}"/>
@@ -16490,7 +16490,7 @@
       </p:sp>
       <p:sp>
         <p:nvSpPr>
-          <p:cNvPr id="5" name="Espace réservé du texte 4">
+          <p:cNvPr id="5" name="slot.subtitle-left">
             <a:extLst>
               <a:ext uri="{FF2B5EF4-FFF2-40B4-BE49-F238E27FC236}">
                 <a16:creationId xmlns:a16="http://schemas.microsoft.com/office/drawing/2014/main" id="{2D35804D-7044-B129-7E2C-ED3868BD4F80}"/>
@@ -16568,7 +16568,7 @@
       </p:sp>
       <p:sp>
         <p:nvSpPr>
-          <p:cNvPr id="6" name="Espace réservé du contenu 5">
+          <p:cNvPr id="6" name="slot.body-right">
             <a:extLst>
               <a:ext uri="{FF2B5EF4-FFF2-40B4-BE49-F238E27FC236}">
                 <a16:creationId xmlns:a16="http://schemas.microsoft.com/office/drawing/2014/main" id="{C56BF488-D9DF-64BA-30D9-77D4A3CB1561}"/>
@@ -17052,7 +17052,7 @@
       </p:graphicFrame>
       <p:sp>
         <p:nvSpPr>
-          <p:cNvPr id="2" name="Titre 1">
+          <p:cNvPr id="2" name="slot.title">
             <a:extLst>
               <a:ext uri="{FF2B5EF4-FFF2-40B4-BE49-F238E27FC236}">
                 <a16:creationId xmlns:a16="http://schemas.microsoft.com/office/drawing/2014/main" id="{02A78A85-561E-020D-C7F8-40BBB3F191CA}"/>
@@ -17086,7 +17086,7 @@
       </p:sp>
       <p:sp>
         <p:nvSpPr>
-          <p:cNvPr id="3" name="Espace réservé du texte 2">
+          <p:cNvPr id="3" name="slot.subtitle-left">
             <a:extLst>
               <a:ext uri="{FF2B5EF4-FFF2-40B4-BE49-F238E27FC236}">
                 <a16:creationId xmlns:a16="http://schemas.microsoft.com/office/drawing/2014/main" id="{E43735A6-6302-B3D2-6BB7-6309454C5C3A}"/>
@@ -17164,7 +17164,7 @@
       </p:sp>
       <p:sp>
         <p:nvSpPr>
-          <p:cNvPr id="4" name="Espace réservé du contenu 3">
+          <p:cNvPr id="4" name="slot.body-left">
             <a:extLst>
               <a:ext uri="{FF2B5EF4-FFF2-40B4-BE49-F238E27FC236}">
                 <a16:creationId xmlns:a16="http://schemas.microsoft.com/office/drawing/2014/main" id="{2D3E2C40-4C7F-6E36-C2FB-962C73150210}"/>
@@ -17227,7 +17227,7 @@
       </p:sp>
       <p:sp>
         <p:nvSpPr>
-          <p:cNvPr id="5" name="Espace réservé du texte 4">
+          <p:cNvPr id="5" name="slot.subtitle-left">
             <a:extLst>
               <a:ext uri="{FF2B5EF4-FFF2-40B4-BE49-F238E27FC236}">
                 <a16:creationId xmlns:a16="http://schemas.microsoft.com/office/drawing/2014/main" id="{2D35804D-7044-B129-7E2C-ED3868BD4F80}"/>
@@ -17305,7 +17305,7 @@
       </p:sp>
       <p:sp>
         <p:nvSpPr>
-          <p:cNvPr id="6" name="Espace réservé du contenu 5">
+          <p:cNvPr id="6" name="slot.body-right">
             <a:extLst>
               <a:ext uri="{FF2B5EF4-FFF2-40B4-BE49-F238E27FC236}">
                 <a16:creationId xmlns:a16="http://schemas.microsoft.com/office/drawing/2014/main" id="{C56BF488-D9DF-64BA-30D9-77D4A3CB1561}"/>
@@ -17368,7 +17368,7 @@
       </p:sp>
       <p:sp>
         <p:nvSpPr>
-          <p:cNvPr id="7" name="Espace réservé du texte 2">
+          <p:cNvPr id="7" name="slot.subtitle-left">
             <a:extLst>
               <a:ext uri="{FF2B5EF4-FFF2-40B4-BE49-F238E27FC236}">
                 <a16:creationId xmlns:a16="http://schemas.microsoft.com/office/drawing/2014/main" id="{5E8252F0-DE57-E2EB-BE2E-BAD06505AF77}"/>
@@ -17446,7 +17446,7 @@
       </p:sp>
       <p:sp>
         <p:nvSpPr>
-          <p:cNvPr id="11" name="Espace réservé du contenu 3">
+          <p:cNvPr id="11" name="slot.body-left">
             <a:extLst>
               <a:ext uri="{FF2B5EF4-FFF2-40B4-BE49-F238E27FC236}">
                 <a16:creationId xmlns:a16="http://schemas.microsoft.com/office/drawing/2014/main" id="{AF4E5750-BDEC-4328-0B8F-9525E2496CFD}"/>
@@ -17990,7 +17990,7 @@
       </p:graphicFrame>
       <p:sp>
         <p:nvSpPr>
-          <p:cNvPr id="3" name="Espace réservé du numéro de diapositive 5">
+          <p:cNvPr id="3" name="slot.footer-page">
             <a:extLst>
               <a:ext uri="{FF2B5EF4-FFF2-40B4-BE49-F238E27FC236}">
                 <a16:creationId xmlns:a16="http://schemas.microsoft.com/office/drawing/2014/main" id="{AC98BCD7-B4BD-45F0-A1DC-E597AD321024}"/>
@@ -18024,7 +18024,7 @@
       </p:sp>
       <p:sp>
         <p:nvSpPr>
-          <p:cNvPr id="10" name="Espace réservé du contenu 6">
+          <p:cNvPr id="10" name="slot.source">
             <a:extLst>
               <a:ext uri="{FF2B5EF4-FFF2-40B4-BE49-F238E27FC236}">
                 <a16:creationId xmlns:a16="http://schemas.microsoft.com/office/drawing/2014/main" id="{DE645C6A-CC14-E4D3-22C9-E154707F3FF7}"/>
@@ -18384,7 +18384,7 @@
       </p:sp>
       <p:sp>
         <p:nvSpPr>
-          <p:cNvPr id="5" name="Titre 1">
+          <p:cNvPr id="5" name="slot.title">
             <a:extLst>
               <a:ext uri="{FF2B5EF4-FFF2-40B4-BE49-F238E27FC236}">
                 <a16:creationId xmlns:a16="http://schemas.microsoft.com/office/drawing/2014/main" id="{3A8C9D35-E503-FE8C-69EA-8B619E0CB8DB}"/>
@@ -18428,7 +18428,7 @@
       </p:sp>
       <p:sp>
         <p:nvSpPr>
-          <p:cNvPr id="7" name="Sous-titre 2">
+          <p:cNvPr id="7" name="slot.subtitle">
             <a:extLst>
               <a:ext uri="{FF2B5EF4-FFF2-40B4-BE49-F238E27FC236}">
                 <a16:creationId xmlns:a16="http://schemas.microsoft.com/office/drawing/2014/main" id="{C9E991B4-3678-BE6E-9D33-B6480825BFEA}"/>
@@ -18952,7 +18952,7 @@
       </p:pic>
       <p:sp>
         <p:nvSpPr>
-          <p:cNvPr id="2" name="Titre 1">
+          <p:cNvPr id="2" name="slot.section-title">
             <a:extLst>
               <a:ext uri="{FF2B5EF4-FFF2-40B4-BE49-F238E27FC236}">
                 <a16:creationId xmlns:a16="http://schemas.microsoft.com/office/drawing/2014/main" id="{1FAAFAE6-D60C-93B1-4819-060D20F8BFF4}"/>
@@ -18996,7 +18996,7 @@
       </p:sp>
       <p:sp>
         <p:nvSpPr>
-          <p:cNvPr id="3" name="Sous-titre 2">
+          <p:cNvPr id="3" name="slot.subtitle">
             <a:extLst>
               <a:ext uri="{FF2B5EF4-FFF2-40B4-BE49-F238E27FC236}">
                 <a16:creationId xmlns:a16="http://schemas.microsoft.com/office/drawing/2014/main" id="{B989298A-8D13-336B-A448-1CB247CE6E4F}"/>
@@ -20959,7 +20959,7 @@
       </p:sp>
       <p:sp>
         <p:nvSpPr>
-          <p:cNvPr id="7" name="Espace réservé du numéro de diapositive 6">
+          <p:cNvPr id="7" name="slot.footer-page">
             <a:extLst>
               <a:ext uri="{FF2B5EF4-FFF2-40B4-BE49-F238E27FC236}">
                 <a16:creationId xmlns:a16="http://schemas.microsoft.com/office/drawing/2014/main" id="{AD7EC4A8-8CF5-8C79-BAB5-0AA6E55EAE76}"/>
@@ -20988,7 +20988,7 @@
       </p:sp>
       <p:sp>
         <p:nvSpPr>
-          <p:cNvPr id="8" name="Espace réservé du contenu 7">
+          <p:cNvPr id="8" name="slot.source">
             <a:extLst>
               <a:ext uri="{FF2B5EF4-FFF2-40B4-BE49-F238E27FC236}">
                 <a16:creationId xmlns:a16="http://schemas.microsoft.com/office/drawing/2014/main" id="{78FA1B2A-92F7-40FB-F965-CA4A4804D578}"/>
@@ -21168,7 +21168,7 @@
       </p:sp>
       <p:sp>
         <p:nvSpPr>
-          <p:cNvPr id="7" name="Espace réservé du numéro de diapositive 6">
+          <p:cNvPr id="7" name="slot.footer-page">
             <a:extLst>
               <a:ext uri="{FF2B5EF4-FFF2-40B4-BE49-F238E27FC236}">
                 <a16:creationId xmlns:a16="http://schemas.microsoft.com/office/drawing/2014/main" id="{244EFA7C-21AE-6C7D-FAC2-7D19DE421203}"/>
@@ -21197,7 +21197,7 @@
       </p:sp>
       <p:sp>
         <p:nvSpPr>
-          <p:cNvPr id="8" name="Espace réservé du contenu 7">
+          <p:cNvPr id="8" name="slot.source">
             <a:extLst>
               <a:ext uri="{FF2B5EF4-FFF2-40B4-BE49-F238E27FC236}">
                 <a16:creationId xmlns:a16="http://schemas.microsoft.com/office/drawing/2014/main" id="{B421CB7E-7CF9-8773-A8E0-CBC5497D8F78}"/>
@@ -21302,7 +21302,7 @@
       </p:sp>
       <p:sp>
         <p:nvSpPr>
-          <p:cNvPr id="4" name="Espace réservé du texte 3">
+          <p:cNvPr id="4" name="slot.subtitle-2">
             <a:extLst>
               <a:ext uri="{FF2B5EF4-FFF2-40B4-BE49-F238E27FC236}">
                 <a16:creationId xmlns:a16="http://schemas.microsoft.com/office/drawing/2014/main" id="{4358881E-4F55-3D28-CF02-3F4E9115E333}"/>
@@ -21327,7 +21327,7 @@
       </p:sp>
       <p:sp>
         <p:nvSpPr>
-          <p:cNvPr id="5" name="Espace réservé du contenu 4">
+          <p:cNvPr id="5" name="slot.body">
             <a:extLst>
               <a:ext uri="{FF2B5EF4-FFF2-40B4-BE49-F238E27FC236}">
                 <a16:creationId xmlns:a16="http://schemas.microsoft.com/office/drawing/2014/main" id="{8705FAFD-60FB-F8C7-491E-8FB862F9C8A6}"/>
@@ -21611,7 +21611,7 @@
       </p:sp>
       <p:sp>
         <p:nvSpPr>
-          <p:cNvPr id="9" name="Espace réservé du numéro de diapositive 8">
+          <p:cNvPr id="9" name="slot.footer-page">
             <a:extLst>
               <a:ext uri="{FF2B5EF4-FFF2-40B4-BE49-F238E27FC236}">
                 <a16:creationId xmlns:a16="http://schemas.microsoft.com/office/drawing/2014/main" id="{56BA1548-2B85-A72F-BEF1-2AF72880F211}"/>
@@ -21640,7 +21640,7 @@
       </p:sp>
       <p:sp>
         <p:nvSpPr>
-          <p:cNvPr id="10" name="Espace réservé du contenu 9">
+          <p:cNvPr id="10" name="slot.source">
             <a:extLst>
               <a:ext uri="{FF2B5EF4-FFF2-40B4-BE49-F238E27FC236}">
                 <a16:creationId xmlns:a16="http://schemas.microsoft.com/office/drawing/2014/main" id="{94A0CC14-B06D-8574-9642-42CAE0EDB56C}"/>
@@ -21930,7 +21930,7 @@
       </p:sp>
       <p:sp>
         <p:nvSpPr>
-          <p:cNvPr id="7" name="Espace réservé du numéro de diapositive 6">
+          <p:cNvPr id="7" name="slot.footer-page">
             <a:extLst>
               <a:ext uri="{FF2B5EF4-FFF2-40B4-BE49-F238E27FC236}">
                 <a16:creationId xmlns:a16="http://schemas.microsoft.com/office/drawing/2014/main" id="{85C13A4A-3651-3F41-649E-1290DB09A996}"/>
@@ -21959,7 +21959,7 @@
       </p:sp>
       <p:sp>
         <p:nvSpPr>
-          <p:cNvPr id="8" name="Espace réservé du contenu 7">
+          <p:cNvPr id="8" name="slot.source">
             <a:extLst>
               <a:ext uri="{FF2B5EF4-FFF2-40B4-BE49-F238E27FC236}">
                 <a16:creationId xmlns:a16="http://schemas.microsoft.com/office/drawing/2014/main" id="{DBFFDC8F-D14C-28D8-B388-6724C21B4BA1}"/>
@@ -22547,7 +22547,7 @@
       </p:sp>
       <p:sp>
         <p:nvSpPr>
-          <p:cNvPr id="4" name="Espace réservé du texte 3">
+          <p:cNvPr id="4" name="slot.subtitle-2">
             <a:extLst>
               <a:ext uri="{FF2B5EF4-FFF2-40B4-BE49-F238E27FC236}">
                 <a16:creationId xmlns:a16="http://schemas.microsoft.com/office/drawing/2014/main" id="{FE9D7C8C-FA55-7BC1-9885-70240B5F619E}"/>
@@ -22572,7 +22572,7 @@
       </p:sp>
       <p:sp>
         <p:nvSpPr>
-          <p:cNvPr id="5" name="Espace réservé du contenu 4">
+          <p:cNvPr id="5" name="slot.body">
             <a:extLst>
               <a:ext uri="{FF2B5EF4-FFF2-40B4-BE49-F238E27FC236}">
                 <a16:creationId xmlns:a16="http://schemas.microsoft.com/office/drawing/2014/main" id="{F04F6FA0-64EA-A96F-77DB-DC9007910239}"/>
@@ -22806,7 +22806,7 @@
       </p:sp>
       <p:sp>
         <p:nvSpPr>
-          <p:cNvPr id="7" name="Espace réservé du numéro de diapositive 6">
+          <p:cNvPr id="7" name="slot.footer-page">
             <a:extLst>
               <a:ext uri="{FF2B5EF4-FFF2-40B4-BE49-F238E27FC236}">
                 <a16:creationId xmlns:a16="http://schemas.microsoft.com/office/drawing/2014/main" id="{3F8D98DD-0E84-F6F8-641C-DE30A625FDBA}"/>
@@ -22836,7 +22836,7 @@
       </p:sp>
       <p:sp>
         <p:nvSpPr>
-          <p:cNvPr id="8" name="Espace réservé du contenu 7">
+          <p:cNvPr id="8" name="slot.source">
             <a:extLst>
               <a:ext uri="{FF2B5EF4-FFF2-40B4-BE49-F238E27FC236}">
                 <a16:creationId xmlns:a16="http://schemas.microsoft.com/office/drawing/2014/main" id="{B74E6D85-D63B-5397-6C95-9A1C410A807A}"/>
@@ -23016,7 +23016,7 @@
       </p:sp>
       <p:sp>
         <p:nvSpPr>
-          <p:cNvPr id="7" name="Espace réservé du numéro de diapositive 6">
+          <p:cNvPr id="7" name="slot.footer-page">
             <a:extLst>
               <a:ext uri="{FF2B5EF4-FFF2-40B4-BE49-F238E27FC236}">
                 <a16:creationId xmlns:a16="http://schemas.microsoft.com/office/drawing/2014/main" id="{C737C2DD-0597-C781-B47B-9ED87A6858D2}"/>
@@ -23046,7 +23046,7 @@
       </p:sp>
       <p:sp>
         <p:nvSpPr>
-          <p:cNvPr id="8" name="Espace réservé du contenu 7">
+          <p:cNvPr id="8" name="slot.source">
             <a:extLst>
               <a:ext uri="{FF2B5EF4-FFF2-40B4-BE49-F238E27FC236}">
                 <a16:creationId xmlns:a16="http://schemas.microsoft.com/office/drawing/2014/main" id="{E45008B4-06ED-42AB-99A0-FF2AA10C8FC1}"/>
@@ -23151,7 +23151,7 @@
       </p:sp>
       <p:sp>
         <p:nvSpPr>
-          <p:cNvPr id="4" name="Espace réservé du texte 3">
+          <p:cNvPr id="4" name="slot.subtitle-2">
             <a:extLst>
               <a:ext uri="{FF2B5EF4-FFF2-40B4-BE49-F238E27FC236}">
                 <a16:creationId xmlns:a16="http://schemas.microsoft.com/office/drawing/2014/main" id="{103ADEE2-BB69-96C8-ECF0-FBB50E9BFEA1}"/>
@@ -23176,7 +23176,7 @@
       </p:sp>
       <p:sp>
         <p:nvSpPr>
-          <p:cNvPr id="5" name="Espace réservé du contenu 4">
+          <p:cNvPr id="5" name="slot.body">
             <a:extLst>
               <a:ext uri="{FF2B5EF4-FFF2-40B4-BE49-F238E27FC236}">
                 <a16:creationId xmlns:a16="http://schemas.microsoft.com/office/drawing/2014/main" id="{491EAC36-2BCB-A68E-5176-6D64BE2064F7}"/>
@@ -23336,7 +23336,7 @@
       </p:sp>
       <p:sp>
         <p:nvSpPr>
-          <p:cNvPr id="4" name="Espace réservé du texte 3">
+          <p:cNvPr id="4" name="slot.subtitle-2">
             <a:extLst>
               <a:ext uri="{FF2B5EF4-FFF2-40B4-BE49-F238E27FC236}">
                 <a16:creationId xmlns:a16="http://schemas.microsoft.com/office/drawing/2014/main" id="{F6D383B4-B0C9-D409-F9B1-C9DF0C4ED39B}"/>
@@ -23361,7 +23361,7 @@
       </p:sp>
       <p:sp>
         <p:nvSpPr>
-          <p:cNvPr id="5" name="Espace réservé du contenu 4">
+          <p:cNvPr id="5" name="slot.body">
             <a:extLst>
               <a:ext uri="{FF2B5EF4-FFF2-40B4-BE49-F238E27FC236}">
                 <a16:creationId xmlns:a16="http://schemas.microsoft.com/office/drawing/2014/main" id="{8682BE46-4ADD-712E-693C-56A5CC4DE5D0}"/>
@@ -23948,246 +23948,6 @@
           <a:lstStyle/>
           <a:p>
             <a:endParaRPr lang="fr-FR"/>
-          </a:p>
-        </p:txBody>
-      </p:sp>
-      <p:sp>
-        <p:nvSpPr>
-          <p:cNvPr id="2" name="Espace réservé du contenu 5">
-            <a:extLst>
-              <a:ext uri="{FF2B5EF4-FFF2-40B4-BE49-F238E27FC236}">
-                <a16:creationId xmlns:a16="http://schemas.microsoft.com/office/drawing/2014/main" id="{1CDF13B5-C492-7E19-E47D-AF5DEC25A9CD}"/>
-              </a:ext>
-            </a:extLst>
-          </p:cNvPr>
-          <p:cNvSpPr txBox="1">
-            <a:spLocks/>
-          </p:cNvSpPr>
-          <p:nvPr/>
-        </p:nvSpPr>
-        <p:spPr>
-          <a:xfrm>
-            <a:off x="1947271" y="2356821"/>
-            <a:ext cx="11090275" cy="4723984"/>
-          </a:xfrm>
-          <a:prstGeom prst="rect">
-            <a:avLst/>
-          </a:prstGeom>
-        </p:spPr>
-        <p:txBody>
-          <a:bodyPr vert="horz" lIns="0" tIns="0" rIns="0" bIns="0" rtlCol="0">
-            <a:noAutofit/>
-          </a:bodyPr>
-          <a:lstStyle>
-            <a:lvl1pPr marL="136525" indent="-133350" algn="l" defTabSz="914400" rtl="0" eaLnBrk="1" latinLnBrk="0" hangingPunct="1">
-              <a:lnSpc>
-                <a:spcPct val="100000"/>
-              </a:lnSpc>
-              <a:spcBef>
-                <a:spcPts val="0"/>
-              </a:spcBef>
-              <a:spcAft>
-                <a:spcPts val="200"/>
-              </a:spcAft>
-              <a:buClr>
-                <a:schemeClr val="tx2"/>
-              </a:buClr>
-              <a:buSzPct val="100000"/>
-              <a:buFont typeface="System Font Regular"/>
-              <a:buChar char="•"/>
-              <a:tabLst/>
-              <a:defRPr sz="1200" kern="1200">
-                <a:solidFill>
-                  <a:schemeClr val="tx1"/>
-                </a:solidFill>
-                <a:latin typeface="Arial" panose="020B0604020202020204" pitchFamily="34" charset="0"/>
-                <a:ea typeface="+mn-ea"/>
-                <a:cs typeface="Arial" panose="020B0604020202020204" pitchFamily="34" charset="0"/>
-              </a:defRPr>
-            </a:lvl1pPr>
-            <a:lvl2pPr marL="273050" indent="-136525" algn="l" defTabSz="914400" rtl="0" eaLnBrk="1" latinLnBrk="0" hangingPunct="1">
-              <a:lnSpc>
-                <a:spcPct val="100000"/>
-              </a:lnSpc>
-              <a:spcBef>
-                <a:spcPts val="0"/>
-              </a:spcBef>
-              <a:spcAft>
-                <a:spcPts val="200"/>
-              </a:spcAft>
-              <a:buClr>
-                <a:schemeClr val="tx2"/>
-              </a:buClr>
-              <a:buSzPct val="100000"/>
-              <a:buFont typeface="System Font Regular"/>
-              <a:buChar char="−"/>
-              <a:tabLst/>
-              <a:defRPr sz="1200" kern="1200">
-                <a:solidFill>
-                  <a:schemeClr val="tx1"/>
-                </a:solidFill>
-                <a:latin typeface="Arial" panose="020B0604020202020204" pitchFamily="34" charset="0"/>
-                <a:ea typeface="+mn-ea"/>
-                <a:cs typeface="Arial" panose="020B0604020202020204" pitchFamily="34" charset="0"/>
-              </a:defRPr>
-            </a:lvl2pPr>
-            <a:lvl3pPr marL="401638" indent="-128588" algn="l" defTabSz="914400" rtl="0" eaLnBrk="1" latinLnBrk="0" hangingPunct="1">
-              <a:lnSpc>
-                <a:spcPct val="100000"/>
-              </a:lnSpc>
-              <a:spcBef>
-                <a:spcPts val="0"/>
-              </a:spcBef>
-              <a:spcAft>
-                <a:spcPts val="200"/>
-              </a:spcAft>
-              <a:buClr>
-                <a:schemeClr val="tx2"/>
-              </a:buClr>
-              <a:buSzPct val="100000"/>
-              <a:buFont typeface="System Font Regular"/>
-              <a:buChar char="◦"/>
-              <a:tabLst/>
-              <a:defRPr sz="1200" kern="1200">
-                <a:solidFill>
-                  <a:schemeClr val="tx1"/>
-                </a:solidFill>
-                <a:latin typeface="Arial" panose="020B0604020202020204" pitchFamily="34" charset="0"/>
-                <a:ea typeface="+mn-ea"/>
-                <a:cs typeface="Arial" panose="020B0604020202020204" pitchFamily="34" charset="0"/>
-              </a:defRPr>
-            </a:lvl3pPr>
-            <a:lvl4pPr marL="534988" indent="-133350" algn="l" defTabSz="914400" rtl="0" eaLnBrk="1" latinLnBrk="0" hangingPunct="1">
-              <a:lnSpc>
-                <a:spcPct val="100000"/>
-              </a:lnSpc>
-              <a:spcBef>
-                <a:spcPts val="0"/>
-              </a:spcBef>
-              <a:spcAft>
-                <a:spcPts val="200"/>
-              </a:spcAft>
-              <a:buClr>
-                <a:schemeClr val="tx2"/>
-              </a:buClr>
-              <a:buSzPct val="100000"/>
-              <a:buFont typeface="Wingdings" pitchFamily="2" charset="2"/>
-              <a:buChar char="§"/>
-              <a:tabLst/>
-              <a:defRPr sz="1200" kern="1200">
-                <a:solidFill>
-                  <a:schemeClr val="tx1"/>
-                </a:solidFill>
-                <a:latin typeface="Arial" panose="020B0604020202020204" pitchFamily="34" charset="0"/>
-                <a:ea typeface="+mn-ea"/>
-                <a:cs typeface="Arial" panose="020B0604020202020204" pitchFamily="34" charset="0"/>
-              </a:defRPr>
-            </a:lvl4pPr>
-            <a:lvl5pPr marL="668338" indent="-133350" algn="l" defTabSz="914400" rtl="0" eaLnBrk="1" latinLnBrk="0" hangingPunct="1">
-              <a:lnSpc>
-                <a:spcPct val="100000"/>
-              </a:lnSpc>
-              <a:spcBef>
-                <a:spcPts val="0"/>
-              </a:spcBef>
-              <a:spcAft>
-                <a:spcPts val="200"/>
-              </a:spcAft>
-              <a:buClr>
-                <a:schemeClr val="tx2"/>
-              </a:buClr>
-              <a:buSzPct val="100000"/>
-              <a:buFont typeface="System Font Regular"/>
-              <a:buChar char="▫"/>
-              <a:tabLst/>
-              <a:defRPr sz="1200" kern="1200">
-                <a:solidFill>
-                  <a:schemeClr val="tx1"/>
-                </a:solidFill>
-                <a:latin typeface="Arial" panose="020B0604020202020204" pitchFamily="34" charset="0"/>
-                <a:ea typeface="+mn-ea"/>
-                <a:cs typeface="Arial" panose="020B0604020202020204" pitchFamily="34" charset="0"/>
-              </a:defRPr>
-            </a:lvl5pPr>
-            <a:lvl6pPr marL="2514600" indent="-228600" algn="l" defTabSz="914400" rtl="0" eaLnBrk="1" latinLnBrk="0" hangingPunct="1">
-              <a:lnSpc>
-                <a:spcPct val="90000"/>
-              </a:lnSpc>
-              <a:spcBef>
-                <a:spcPts val="500"/>
-              </a:spcBef>
-              <a:buFont typeface="Arial" panose="020B0604020202020204" pitchFamily="34" charset="0"/>
-              <a:buChar char="•"/>
-              <a:defRPr sz="1800" kern="1200">
-                <a:solidFill>
-                  <a:schemeClr val="tx1"/>
-                </a:solidFill>
-                <a:latin typeface="+mn-lt"/>
-                <a:ea typeface="+mn-ea"/>
-                <a:cs typeface="+mn-cs"/>
-              </a:defRPr>
-            </a:lvl6pPr>
-            <a:lvl7pPr marL="2971800" indent="-228600" algn="l" defTabSz="914400" rtl="0" eaLnBrk="1" latinLnBrk="0" hangingPunct="1">
-              <a:lnSpc>
-                <a:spcPct val="90000"/>
-              </a:lnSpc>
-              <a:spcBef>
-                <a:spcPts val="500"/>
-              </a:spcBef>
-              <a:buFont typeface="Arial" panose="020B0604020202020204" pitchFamily="34" charset="0"/>
-              <a:buChar char="•"/>
-              <a:defRPr sz="1800" kern="1200">
-                <a:solidFill>
-                  <a:schemeClr val="tx1"/>
-                </a:solidFill>
-                <a:latin typeface="+mn-lt"/>
-                <a:ea typeface="+mn-ea"/>
-                <a:cs typeface="+mn-cs"/>
-              </a:defRPr>
-            </a:lvl7pPr>
-            <a:lvl8pPr marL="3429000" indent="-228600" algn="l" defTabSz="914400" rtl="0" eaLnBrk="1" latinLnBrk="0" hangingPunct="1">
-              <a:lnSpc>
-                <a:spcPct val="90000"/>
-              </a:lnSpc>
-              <a:spcBef>
-                <a:spcPts val="500"/>
-              </a:spcBef>
-              <a:buFont typeface="Arial" panose="020B0604020202020204" pitchFamily="34" charset="0"/>
-              <a:buChar char="•"/>
-              <a:defRPr sz="1800" kern="1200">
-                <a:solidFill>
-                  <a:schemeClr val="tx1"/>
-                </a:solidFill>
-                <a:latin typeface="+mn-lt"/>
-                <a:ea typeface="+mn-ea"/>
-                <a:cs typeface="+mn-cs"/>
-              </a:defRPr>
-            </a:lvl8pPr>
-            <a:lvl9pPr marL="3886200" indent="-228600" algn="l" defTabSz="914400" rtl="0" eaLnBrk="1" latinLnBrk="0" hangingPunct="1">
-              <a:lnSpc>
-                <a:spcPct val="90000"/>
-              </a:lnSpc>
-              <a:spcBef>
-                <a:spcPts val="500"/>
-              </a:spcBef>
-              <a:buFont typeface="Arial" panose="020B0604020202020204" pitchFamily="34" charset="0"/>
-              <a:buChar char="•"/>
-              <a:defRPr sz="1800" kern="1200">
-                <a:solidFill>
-                  <a:schemeClr val="tx1"/>
-                </a:solidFill>
-                <a:latin typeface="+mn-lt"/>
-                <a:ea typeface="+mn-ea"/>
-                <a:cs typeface="+mn-cs"/>
-              </a:defRPr>
-            </a:lvl9pPr>
-          </a:lstStyle>
-          <a:p>
-            <a:r>
-              <a:rPr lang="fr-FR" dirty="0" err="1"/>
-              <a:t>qsdf</a:t>
-            </a:r>
-            <a:endParaRPr lang="fr-FR" dirty="0"/>
           </a:p>
         </p:txBody>
       </p:sp>

--- a/templates/report.master.pptx
+++ b/templates/report.master.pptx
@@ -4903,7 +4903,7 @@
       </p:graphicFrame>
       <p:sp>
         <p:nvSpPr>
-          <p:cNvPr id="2" name="Titre 1">
+          <p:cNvPr id="2" name="slot.title">
             <a:extLst>
               <a:ext uri="{FF2B5EF4-FFF2-40B4-BE49-F238E27FC236}">
                 <a16:creationId xmlns:a16="http://schemas.microsoft.com/office/drawing/2014/main" id="{FCE45F8B-6B35-4416-DE1A-36DAC87E84D7}"/>
@@ -4947,7 +4947,7 @@
       </p:sp>
       <p:sp>
         <p:nvSpPr>
-          <p:cNvPr id="3" name="Espace réservé du contenu 2">
+          <p:cNvPr id="3" name="slot.body-left">
             <a:extLst>
               <a:ext uri="{FF2B5EF4-FFF2-40B4-BE49-F238E27FC236}">
                 <a16:creationId xmlns:a16="http://schemas.microsoft.com/office/drawing/2014/main" id="{DD259420-A1F5-B3E7-FA1E-AF141FA30A75}"/>
@@ -5033,7 +5033,7 @@
       </p:sp>
       <p:sp>
         <p:nvSpPr>
-          <p:cNvPr id="6" name="Espace réservé du numéro de diapositive 5">
+          <p:cNvPr id="6" name="slot.footer-page">
             <a:extLst>
               <a:ext uri="{FF2B5EF4-FFF2-40B4-BE49-F238E27FC236}">
                 <a16:creationId xmlns:a16="http://schemas.microsoft.com/office/drawing/2014/main" id="{C0B19DAE-9253-B1E3-C9A1-BAD7328324FA}"/>
@@ -5067,7 +5067,7 @@
       </p:sp>
       <p:sp>
         <p:nvSpPr>
-          <p:cNvPr id="20" name="Espace réservé du contenu 6">
+          <p:cNvPr id="20" name="slot.source">
             <a:extLst>
               <a:ext uri="{FF2B5EF4-FFF2-40B4-BE49-F238E27FC236}">
                 <a16:creationId xmlns:a16="http://schemas.microsoft.com/office/drawing/2014/main" id="{A0EE391D-69CD-DBA5-462B-AEF51D098FA6}"/>
@@ -5175,7 +5175,7 @@
       </p:cxnSp>
       <p:sp>
         <p:nvSpPr>
-          <p:cNvPr id="5" name="ZoneTexte 30">
+          <p:cNvPr id="5" name="slot.footer-copyright">
             <a:extLst>
               <a:ext uri="{FF2B5EF4-FFF2-40B4-BE49-F238E27FC236}">
                 <a16:creationId xmlns:a16="http://schemas.microsoft.com/office/drawing/2014/main" id="{A2FEA1FF-9F37-6219-3F4E-99D834B28FEB}"/>
@@ -5229,7 +5229,7 @@
       </p:sp>
       <p:sp>
         <p:nvSpPr>
-          <p:cNvPr id="8" name="ZoneTexte 7">
+          <p:cNvPr id="8" name="slot.footer-logo">
             <a:extLst>
               <a:ext uri="{FF2B5EF4-FFF2-40B4-BE49-F238E27FC236}">
                 <a16:creationId xmlns:a16="http://schemas.microsoft.com/office/drawing/2014/main" id="{E8981164-199B-BE71-F7D8-B1188DFC07F2}"/>
@@ -5443,7 +5443,7 @@
       </p:pic>
       <p:sp>
         <p:nvSpPr>
-          <p:cNvPr id="4" name="Titre 1">
+          <p:cNvPr id="4" name="slot.title">
             <a:extLst>
               <a:ext uri="{FF2B5EF4-FFF2-40B4-BE49-F238E27FC236}">
                 <a16:creationId xmlns:a16="http://schemas.microsoft.com/office/drawing/2014/main" id="{5021812E-4666-EE7A-00F0-B822BDC95294}"/>
@@ -5489,7 +5489,7 @@
       </p:sp>
       <p:sp>
         <p:nvSpPr>
-          <p:cNvPr id="5" name="Espace réservé du contenu 3">
+          <p:cNvPr id="5" name="slot.body-left">
             <a:extLst>
               <a:ext uri="{FF2B5EF4-FFF2-40B4-BE49-F238E27FC236}">
                 <a16:creationId xmlns:a16="http://schemas.microsoft.com/office/drawing/2014/main" id="{664EE6FE-7213-D8B4-C52F-792F747C9C0B}"/>
@@ -5715,7 +5715,7 @@
       </p:cxnSp>
       <p:sp>
         <p:nvSpPr>
-          <p:cNvPr id="10" name="Espace réservé du numéro de diapositive 5">
+          <p:cNvPr id="10" name="slot.footer-page">
             <a:extLst>
               <a:ext uri="{FF2B5EF4-FFF2-40B4-BE49-F238E27FC236}">
                 <a16:creationId xmlns:a16="http://schemas.microsoft.com/office/drawing/2014/main" id="{D522E3A2-42AA-2228-2F55-67BD9734EC15}"/>
@@ -5881,7 +5881,7 @@
       </p:sp>
       <p:sp>
         <p:nvSpPr>
-          <p:cNvPr id="8" name="ZoneTexte 30">
+          <p:cNvPr id="8" name="slot.footer-copyright">
             <a:extLst>
               <a:ext uri="{FF2B5EF4-FFF2-40B4-BE49-F238E27FC236}">
                 <a16:creationId xmlns:a16="http://schemas.microsoft.com/office/drawing/2014/main" id="{E150FD5F-C13D-5321-DE4B-E1FDA4387569}"/>
@@ -5935,7 +5935,7 @@
       </p:sp>
       <p:sp>
         <p:nvSpPr>
-          <p:cNvPr id="12" name="ZoneTexte 11">
+          <p:cNvPr id="12" name="slot.footer-logo">
             <a:extLst>
               <a:ext uri="{FF2B5EF4-FFF2-40B4-BE49-F238E27FC236}">
                 <a16:creationId xmlns:a16="http://schemas.microsoft.com/office/drawing/2014/main" id="{8AF61725-8811-F4AA-3B06-802B815FDF5F}"/>
@@ -6117,7 +6117,7 @@
       </p:graphicFrame>
       <p:sp>
         <p:nvSpPr>
-          <p:cNvPr id="5" name="Titre 1">
+          <p:cNvPr id="5" name="slot.title">
             <a:extLst>
               <a:ext uri="{FF2B5EF4-FFF2-40B4-BE49-F238E27FC236}">
                 <a16:creationId xmlns:a16="http://schemas.microsoft.com/office/drawing/2014/main" id="{00E8F29D-6980-4830-A056-57FFB127FFBD}"/>
@@ -6161,7 +6161,7 @@
       </p:sp>
       <p:sp>
         <p:nvSpPr>
-          <p:cNvPr id="9" name="Sous-titre 2">
+          <p:cNvPr id="9" name="slot.subtitle">
             <a:extLst>
               <a:ext uri="{FF2B5EF4-FFF2-40B4-BE49-F238E27FC236}">
                 <a16:creationId xmlns:a16="http://schemas.microsoft.com/office/drawing/2014/main" id="{D92A2739-22B5-D8C9-22C3-AB9ACCB8111C}"/>
@@ -6778,7 +6778,7 @@
       </p:graphicFrame>
       <p:sp>
         <p:nvSpPr>
-          <p:cNvPr id="2" name="Titre 1">
+          <p:cNvPr id="2" name="slot.section-title">
             <a:extLst>
               <a:ext uri="{FF2B5EF4-FFF2-40B4-BE49-F238E27FC236}">
                 <a16:creationId xmlns:a16="http://schemas.microsoft.com/office/drawing/2014/main" id="{1FAAFAE6-D60C-93B1-4819-060D20F8BFF4}"/>
@@ -6822,7 +6822,7 @@
       </p:sp>
       <p:sp>
         <p:nvSpPr>
-          <p:cNvPr id="3" name="Sous-titre 2">
+          <p:cNvPr id="3" name="slot.subtitle">
             <a:extLst>
               <a:ext uri="{FF2B5EF4-FFF2-40B4-BE49-F238E27FC236}">
                 <a16:creationId xmlns:a16="http://schemas.microsoft.com/office/drawing/2014/main" id="{B989298A-8D13-336B-A448-1CB247CE6E4F}"/>
@@ -7014,7 +7014,7 @@
       </p:graphicFrame>
       <p:sp>
         <p:nvSpPr>
-          <p:cNvPr id="2" name="Titre 1">
+          <p:cNvPr id="2" name="slot.title">
             <a:extLst>
               <a:ext uri="{FF2B5EF4-FFF2-40B4-BE49-F238E27FC236}">
                 <a16:creationId xmlns:a16="http://schemas.microsoft.com/office/drawing/2014/main" id="{02A78A85-561E-020D-C7F8-40BBB3F191CA}"/>
@@ -7098,7 +7098,7 @@
       </p:cxnSp>
       <p:sp>
         <p:nvSpPr>
-          <p:cNvPr id="3" name="Espace réservé du numéro de diapositive 5">
+          <p:cNvPr id="3" name="slot.footer-page">
             <a:extLst>
               <a:ext uri="{FF2B5EF4-FFF2-40B4-BE49-F238E27FC236}">
                 <a16:creationId xmlns:a16="http://schemas.microsoft.com/office/drawing/2014/main" id="{D39FA986-AFFA-D470-697F-282E932DA97D}"/>
@@ -7132,7 +7132,7 @@
       </p:sp>
       <p:sp>
         <p:nvSpPr>
-          <p:cNvPr id="5" name="Espace réservé du contenu 3">
+          <p:cNvPr id="5" name="slot.body-left">
             <a:extLst>
               <a:ext uri="{FF2B5EF4-FFF2-40B4-BE49-F238E27FC236}">
                 <a16:creationId xmlns:a16="http://schemas.microsoft.com/office/drawing/2014/main" id="{FCB803A9-272C-4119-092B-F5D7EE4021F0}"/>
@@ -7250,7 +7250,7 @@
       </p:sp>
       <p:sp>
         <p:nvSpPr>
-          <p:cNvPr id="4" name="ZoneTexte 30">
+          <p:cNvPr id="4" name="slot.footer-copyright">
             <a:extLst>
               <a:ext uri="{FF2B5EF4-FFF2-40B4-BE49-F238E27FC236}">
                 <a16:creationId xmlns:a16="http://schemas.microsoft.com/office/drawing/2014/main" id="{C6A98321-E2FB-BA54-2C7C-C6FAE635B1A9}"/>
@@ -7304,7 +7304,7 @@
       </p:sp>
       <p:sp>
         <p:nvSpPr>
-          <p:cNvPr id="8" name="ZoneTexte 7">
+          <p:cNvPr id="8" name="slot.footer-logo">
             <a:extLst>
               <a:ext uri="{FF2B5EF4-FFF2-40B4-BE49-F238E27FC236}">
                 <a16:creationId xmlns:a16="http://schemas.microsoft.com/office/drawing/2014/main" id="{EF472C68-8BBB-B295-F133-C34823F6F4A8}"/>
@@ -7523,7 +7523,7 @@
       </p:pic>
       <p:sp>
         <p:nvSpPr>
-          <p:cNvPr id="2" name="Titre 1">
+          <p:cNvPr id="2" name="slot.title">
             <a:extLst>
               <a:ext uri="{FF2B5EF4-FFF2-40B4-BE49-F238E27FC236}">
                 <a16:creationId xmlns:a16="http://schemas.microsoft.com/office/drawing/2014/main" id="{02A78A85-561E-020D-C7F8-40BBB3F191CA}"/>
@@ -7565,7 +7565,7 @@
       </p:sp>
       <p:sp>
         <p:nvSpPr>
-          <p:cNvPr id="3" name="Espace réservé du texte 2">
+          <p:cNvPr id="3" name="slot.subtitle-left">
             <a:extLst>
               <a:ext uri="{FF2B5EF4-FFF2-40B4-BE49-F238E27FC236}">
                 <a16:creationId xmlns:a16="http://schemas.microsoft.com/office/drawing/2014/main" id="{E43735A6-6302-B3D2-6BB7-6309454C5C3A}"/>
@@ -7659,7 +7659,7 @@
       </p:sp>
       <p:sp>
         <p:nvSpPr>
-          <p:cNvPr id="4" name="Espace réservé du contenu 3">
+          <p:cNvPr id="4" name="slot.body-left">
             <a:extLst>
               <a:ext uri="{FF2B5EF4-FFF2-40B4-BE49-F238E27FC236}">
                 <a16:creationId xmlns:a16="http://schemas.microsoft.com/office/drawing/2014/main" id="{2D3E2C40-4C7F-6E36-C2FB-962C73150210}"/>
@@ -7772,7 +7772,7 @@
       </p:sp>
       <p:sp>
         <p:nvSpPr>
-          <p:cNvPr id="5" name="Espace réservé du texte 4">
+          <p:cNvPr id="5" name="slot.subtitle-left">
             <a:extLst>
               <a:ext uri="{FF2B5EF4-FFF2-40B4-BE49-F238E27FC236}">
                 <a16:creationId xmlns:a16="http://schemas.microsoft.com/office/drawing/2014/main" id="{2D35804D-7044-B129-7E2C-ED3868BD4F80}"/>
@@ -7863,7 +7863,7 @@
       </p:sp>
       <p:sp>
         <p:nvSpPr>
-          <p:cNvPr id="6" name="Espace réservé du contenu 5">
+          <p:cNvPr id="6" name="slot.body-right">
             <a:extLst>
               <a:ext uri="{FF2B5EF4-FFF2-40B4-BE49-F238E27FC236}">
                 <a16:creationId xmlns:a16="http://schemas.microsoft.com/office/drawing/2014/main" id="{C56BF488-D9DF-64BA-30D9-77D4A3CB1561}"/>
@@ -8047,7 +8047,7 @@
       </p:cxnSp>
       <p:sp>
         <p:nvSpPr>
-          <p:cNvPr id="8" name="Espace réservé du numéro de diapositive 5">
+          <p:cNvPr id="8" name="slot.footer-page">
             <a:extLst>
               <a:ext uri="{FF2B5EF4-FFF2-40B4-BE49-F238E27FC236}">
                 <a16:creationId xmlns:a16="http://schemas.microsoft.com/office/drawing/2014/main" id="{510C2F0B-2799-67BD-FD30-3323FE6E8D3F}"/>
@@ -8081,7 +8081,7 @@
       </p:sp>
       <p:sp>
         <p:nvSpPr>
-          <p:cNvPr id="15" name="Espace réservé du contenu 6">
+          <p:cNvPr id="15" name="slot.source">
             <a:extLst>
               <a:ext uri="{FF2B5EF4-FFF2-40B4-BE49-F238E27FC236}">
                 <a16:creationId xmlns:a16="http://schemas.microsoft.com/office/drawing/2014/main" id="{BB6B3779-78D5-9210-1459-E20DFD83BF8E}"/>
@@ -8148,7 +8148,7 @@
       </p:sp>
       <p:sp>
         <p:nvSpPr>
-          <p:cNvPr id="7" name="ZoneTexte 30">
+          <p:cNvPr id="7" name="slot.footer-copyright">
             <a:extLst>
               <a:ext uri="{FF2B5EF4-FFF2-40B4-BE49-F238E27FC236}">
                 <a16:creationId xmlns:a16="http://schemas.microsoft.com/office/drawing/2014/main" id="{9A6DF3F5-8564-E129-6554-B6EDA6853068}"/>
@@ -8202,7 +8202,7 @@
       </p:sp>
       <p:sp>
         <p:nvSpPr>
-          <p:cNvPr id="9" name="ZoneTexte 8">
+          <p:cNvPr id="9" name="slot.footer-logo">
             <a:extLst>
               <a:ext uri="{FF2B5EF4-FFF2-40B4-BE49-F238E27FC236}">
                 <a16:creationId xmlns:a16="http://schemas.microsoft.com/office/drawing/2014/main" id="{06395C06-3B11-8812-966B-5A6B6AA95084}"/>
@@ -8421,7 +8421,7 @@
       </p:pic>
       <p:sp>
         <p:nvSpPr>
-          <p:cNvPr id="2" name="Titre 1">
+          <p:cNvPr id="2" name="slot.title">
             <a:extLst>
               <a:ext uri="{FF2B5EF4-FFF2-40B4-BE49-F238E27FC236}">
                 <a16:creationId xmlns:a16="http://schemas.microsoft.com/office/drawing/2014/main" id="{02A78A85-561E-020D-C7F8-40BBB3F191CA}"/>
@@ -8463,7 +8463,7 @@
       </p:sp>
       <p:sp>
         <p:nvSpPr>
-          <p:cNvPr id="3" name="Espace réservé du texte 2">
+          <p:cNvPr id="3" name="slot.subtitle-left">
             <a:extLst>
               <a:ext uri="{FF2B5EF4-FFF2-40B4-BE49-F238E27FC236}">
                 <a16:creationId xmlns:a16="http://schemas.microsoft.com/office/drawing/2014/main" id="{E43735A6-6302-B3D2-6BB7-6309454C5C3A}"/>
@@ -8557,7 +8557,7 @@
       </p:sp>
       <p:sp>
         <p:nvSpPr>
-          <p:cNvPr id="4" name="Espace réservé du contenu 3">
+          <p:cNvPr id="4" name="slot.body-left">
             <a:extLst>
               <a:ext uri="{FF2B5EF4-FFF2-40B4-BE49-F238E27FC236}">
                 <a16:creationId xmlns:a16="http://schemas.microsoft.com/office/drawing/2014/main" id="{2D3E2C40-4C7F-6E36-C2FB-962C73150210}"/>
@@ -8670,7 +8670,7 @@
       </p:sp>
       <p:sp>
         <p:nvSpPr>
-          <p:cNvPr id="5" name="Espace réservé du texte 4">
+          <p:cNvPr id="5" name="slot.subtitle-left">
             <a:extLst>
               <a:ext uri="{FF2B5EF4-FFF2-40B4-BE49-F238E27FC236}">
                 <a16:creationId xmlns:a16="http://schemas.microsoft.com/office/drawing/2014/main" id="{2D35804D-7044-B129-7E2C-ED3868BD4F80}"/>
@@ -8761,7 +8761,7 @@
       </p:sp>
       <p:sp>
         <p:nvSpPr>
-          <p:cNvPr id="6" name="Espace réservé du contenu 5">
+          <p:cNvPr id="6" name="slot.body-right">
             <a:extLst>
               <a:ext uri="{FF2B5EF4-FFF2-40B4-BE49-F238E27FC236}">
                 <a16:creationId xmlns:a16="http://schemas.microsoft.com/office/drawing/2014/main" id="{C56BF488-D9DF-64BA-30D9-77D4A3CB1561}"/>
@@ -8945,7 +8945,7 @@
       </p:cxnSp>
       <p:sp>
         <p:nvSpPr>
-          <p:cNvPr id="11" name="Espace réservé du numéro de diapositive 5">
+          <p:cNvPr id="11" name="slot.footer-page">
             <a:extLst>
               <a:ext uri="{FF2B5EF4-FFF2-40B4-BE49-F238E27FC236}">
                 <a16:creationId xmlns:a16="http://schemas.microsoft.com/office/drawing/2014/main" id="{B083480F-4AEB-CC56-9E28-75B8E7A55047}"/>
@@ -8979,7 +8979,7 @@
       </p:sp>
       <p:sp>
         <p:nvSpPr>
-          <p:cNvPr id="19" name="Espace réservé du contenu 6">
+          <p:cNvPr id="19" name="slot.source">
             <a:extLst>
               <a:ext uri="{FF2B5EF4-FFF2-40B4-BE49-F238E27FC236}">
                 <a16:creationId xmlns:a16="http://schemas.microsoft.com/office/drawing/2014/main" id="{47DD7148-9127-86A3-6944-6DF6931A959F}"/>
@@ -9046,7 +9046,7 @@
       </p:sp>
       <p:sp>
         <p:nvSpPr>
-          <p:cNvPr id="7" name="ZoneTexte 30">
+          <p:cNvPr id="7" name="slot.footer-copyright">
             <a:extLst>
               <a:ext uri="{FF2B5EF4-FFF2-40B4-BE49-F238E27FC236}">
                 <a16:creationId xmlns:a16="http://schemas.microsoft.com/office/drawing/2014/main" id="{69C38BEF-2317-F24E-C3B1-1AA0A6810398}"/>
@@ -9100,7 +9100,7 @@
       </p:sp>
       <p:sp>
         <p:nvSpPr>
-          <p:cNvPr id="8" name="ZoneTexte 7">
+          <p:cNvPr id="8" name="slot.footer-logo">
             <a:extLst>
               <a:ext uri="{FF2B5EF4-FFF2-40B4-BE49-F238E27FC236}">
                 <a16:creationId xmlns:a16="http://schemas.microsoft.com/office/drawing/2014/main" id="{A2FB2DD0-93CC-F92C-4E8C-5BA3458E25C3}"/>
@@ -9314,7 +9314,7 @@
       </p:pic>
       <p:sp>
         <p:nvSpPr>
-          <p:cNvPr id="2" name="Titre 1">
+          <p:cNvPr id="2" name="slot.title">
             <a:extLst>
               <a:ext uri="{FF2B5EF4-FFF2-40B4-BE49-F238E27FC236}">
                 <a16:creationId xmlns:a16="http://schemas.microsoft.com/office/drawing/2014/main" id="{02A78A85-561E-020D-C7F8-40BBB3F191CA}"/>
@@ -9356,7 +9356,7 @@
       </p:sp>
       <p:sp>
         <p:nvSpPr>
-          <p:cNvPr id="3" name="Espace réservé du texte 2">
+          <p:cNvPr id="3" name="slot.subtitle-1">
             <a:extLst>
               <a:ext uri="{FF2B5EF4-FFF2-40B4-BE49-F238E27FC236}">
                 <a16:creationId xmlns:a16="http://schemas.microsoft.com/office/drawing/2014/main" id="{E43735A6-6302-B3D2-6BB7-6309454C5C3A}"/>
@@ -9450,7 +9450,7 @@
       </p:sp>
       <p:sp>
         <p:nvSpPr>
-          <p:cNvPr id="5" name="Espace réservé du texte 4">
+          <p:cNvPr id="5" name="slot.subtitle-2">
             <a:extLst>
               <a:ext uri="{FF2B5EF4-FFF2-40B4-BE49-F238E27FC236}">
                 <a16:creationId xmlns:a16="http://schemas.microsoft.com/office/drawing/2014/main" id="{2D35804D-7044-B129-7E2C-ED3868BD4F80}"/>
@@ -9541,7 +9541,7 @@
       </p:sp>
       <p:sp>
         <p:nvSpPr>
-          <p:cNvPr id="6" name="Espace réservé du contenu 5">
+          <p:cNvPr id="6" name="slot.body">
             <a:extLst>
               <a:ext uri="{FF2B5EF4-FFF2-40B4-BE49-F238E27FC236}">
                 <a16:creationId xmlns:a16="http://schemas.microsoft.com/office/drawing/2014/main" id="{C56BF488-D9DF-64BA-30D9-77D4A3CB1561}"/>
@@ -9770,7 +9770,7 @@
       </p:cxnSp>
       <p:sp>
         <p:nvSpPr>
-          <p:cNvPr id="15" name="Espace réservé du numéro de diapositive 5">
+          <p:cNvPr id="15" name="slot.footer-page">
             <a:extLst>
               <a:ext uri="{FF2B5EF4-FFF2-40B4-BE49-F238E27FC236}">
                 <a16:creationId xmlns:a16="http://schemas.microsoft.com/office/drawing/2014/main" id="{24F11CE2-041F-6445-F54A-56AAFFD76115}"/>
@@ -9804,7 +9804,7 @@
       </p:sp>
       <p:sp>
         <p:nvSpPr>
-          <p:cNvPr id="20" name="Espace réservé du contenu 6">
+          <p:cNvPr id="20" name="slot.source">
             <a:extLst>
               <a:ext uri="{FF2B5EF4-FFF2-40B4-BE49-F238E27FC236}">
                 <a16:creationId xmlns:a16="http://schemas.microsoft.com/office/drawing/2014/main" id="{95AC962B-733D-ABAE-17E4-E513BAC8B9E1}"/>
@@ -9871,7 +9871,7 @@
       </p:sp>
       <p:sp>
         <p:nvSpPr>
-          <p:cNvPr id="4" name="ZoneTexte 30">
+          <p:cNvPr id="4" name="slot.footer-copyright">
             <a:extLst>
               <a:ext uri="{FF2B5EF4-FFF2-40B4-BE49-F238E27FC236}">
                 <a16:creationId xmlns:a16="http://schemas.microsoft.com/office/drawing/2014/main" id="{B9EA91B6-6CF2-5B80-F0AE-B0ED5165D982}"/>
@@ -9925,7 +9925,7 @@
       </p:sp>
       <p:sp>
         <p:nvSpPr>
-          <p:cNvPr id="7" name="ZoneTexte 6">
+          <p:cNvPr id="7" name="slot.footer-logo">
             <a:extLst>
               <a:ext uri="{FF2B5EF4-FFF2-40B4-BE49-F238E27FC236}">
                 <a16:creationId xmlns:a16="http://schemas.microsoft.com/office/drawing/2014/main" id="{4C9F5E73-E5D7-0B11-9227-681DA930D820}"/>
@@ -10144,7 +10144,7 @@
       </p:pic>
       <p:sp>
         <p:nvSpPr>
-          <p:cNvPr id="2" name="Titre 1">
+          <p:cNvPr id="2" name="slot.title">
             <a:extLst>
               <a:ext uri="{FF2B5EF4-FFF2-40B4-BE49-F238E27FC236}">
                 <a16:creationId xmlns:a16="http://schemas.microsoft.com/office/drawing/2014/main" id="{02A78A85-561E-020D-C7F8-40BBB3F191CA}"/>
@@ -10186,7 +10186,7 @@
       </p:sp>
       <p:sp>
         <p:nvSpPr>
-          <p:cNvPr id="3" name="Espace réservé du texte 2">
+          <p:cNvPr id="3" name="slot.subtitle-1">
             <a:extLst>
               <a:ext uri="{FF2B5EF4-FFF2-40B4-BE49-F238E27FC236}">
                 <a16:creationId xmlns:a16="http://schemas.microsoft.com/office/drawing/2014/main" id="{E43735A6-6302-B3D2-6BB7-6309454C5C3A}"/>
@@ -10280,7 +10280,7 @@
       </p:sp>
       <p:sp>
         <p:nvSpPr>
-          <p:cNvPr id="5" name="Espace réservé du texte 4">
+          <p:cNvPr id="5" name="slot.subtitle-2">
             <a:extLst>
               <a:ext uri="{FF2B5EF4-FFF2-40B4-BE49-F238E27FC236}">
                 <a16:creationId xmlns:a16="http://schemas.microsoft.com/office/drawing/2014/main" id="{2D35804D-7044-B129-7E2C-ED3868BD4F80}"/>
@@ -10371,7 +10371,7 @@
       </p:sp>
       <p:sp>
         <p:nvSpPr>
-          <p:cNvPr id="6" name="Espace réservé du contenu 5">
+          <p:cNvPr id="6" name="slot.body">
             <a:extLst>
               <a:ext uri="{FF2B5EF4-FFF2-40B4-BE49-F238E27FC236}">
                 <a16:creationId xmlns:a16="http://schemas.microsoft.com/office/drawing/2014/main" id="{C56BF488-D9DF-64BA-30D9-77D4A3CB1561}"/>
@@ -10514,7 +10514,7 @@
       </p:cxnSp>
       <p:sp>
         <p:nvSpPr>
-          <p:cNvPr id="15" name="Espace réservé du numéro de diapositive 5">
+          <p:cNvPr id="15" name="slot.footer-page">
             <a:extLst>
               <a:ext uri="{FF2B5EF4-FFF2-40B4-BE49-F238E27FC236}">
                 <a16:creationId xmlns:a16="http://schemas.microsoft.com/office/drawing/2014/main" id="{24F11CE2-041F-6445-F54A-56AAFFD76115}"/>
@@ -10548,7 +10548,7 @@
       </p:sp>
       <p:sp>
         <p:nvSpPr>
-          <p:cNvPr id="20" name="Espace réservé du contenu 6">
+          <p:cNvPr id="20" name="slot.source">
             <a:extLst>
               <a:ext uri="{FF2B5EF4-FFF2-40B4-BE49-F238E27FC236}">
                 <a16:creationId xmlns:a16="http://schemas.microsoft.com/office/drawing/2014/main" id="{95AC962B-733D-ABAE-17E4-E513BAC8B9E1}"/>
@@ -10738,7 +10738,7 @@
       </p:sp>
       <p:sp>
         <p:nvSpPr>
-          <p:cNvPr id="7" name="ZoneTexte 30">
+          <p:cNvPr id="7" name="slot.footer-copyright">
             <a:extLst>
               <a:ext uri="{FF2B5EF4-FFF2-40B4-BE49-F238E27FC236}">
                 <a16:creationId xmlns:a16="http://schemas.microsoft.com/office/drawing/2014/main" id="{1BF41F40-595B-48CD-E781-95878742749D}"/>
@@ -10792,7 +10792,7 @@
       </p:sp>
       <p:sp>
         <p:nvSpPr>
-          <p:cNvPr id="9" name="ZoneTexte 8">
+          <p:cNvPr id="9" name="slot.footer-logo">
             <a:extLst>
               <a:ext uri="{FF2B5EF4-FFF2-40B4-BE49-F238E27FC236}">
                 <a16:creationId xmlns:a16="http://schemas.microsoft.com/office/drawing/2014/main" id="{EEBE6346-AC0F-95D1-CFD8-CB8054A615A5}"/>
@@ -11021,7 +11021,7 @@
       </p:sp>
       <p:sp>
         <p:nvSpPr>
-          <p:cNvPr id="2" name="Titre 1">
+          <p:cNvPr id="2" name="slot.title">
             <a:extLst>
               <a:ext uri="{FF2B5EF4-FFF2-40B4-BE49-F238E27FC236}">
                 <a16:creationId xmlns:a16="http://schemas.microsoft.com/office/drawing/2014/main" id="{02A78A85-561E-020D-C7F8-40BBB3F191CA}"/>
@@ -11063,7 +11063,7 @@
       </p:sp>
       <p:sp>
         <p:nvSpPr>
-          <p:cNvPr id="3" name="Espace réservé du texte 2">
+          <p:cNvPr id="3" name="slot.subtitle-left">
             <a:extLst>
               <a:ext uri="{FF2B5EF4-FFF2-40B4-BE49-F238E27FC236}">
                 <a16:creationId xmlns:a16="http://schemas.microsoft.com/office/drawing/2014/main" id="{E43735A6-6302-B3D2-6BB7-6309454C5C3A}"/>
@@ -11157,7 +11157,7 @@
       </p:sp>
       <p:sp>
         <p:nvSpPr>
-          <p:cNvPr id="4" name="Espace réservé du contenu 3">
+          <p:cNvPr id="4" name="slot.body-left">
             <a:extLst>
               <a:ext uri="{FF2B5EF4-FFF2-40B4-BE49-F238E27FC236}">
                 <a16:creationId xmlns:a16="http://schemas.microsoft.com/office/drawing/2014/main" id="{2D3E2C40-4C7F-6E36-C2FB-962C73150210}"/>
@@ -11270,7 +11270,7 @@
       </p:sp>
       <p:sp>
         <p:nvSpPr>
-          <p:cNvPr id="5" name="Espace réservé du texte 4">
+          <p:cNvPr id="5" name="slot.subtitle-left">
             <a:extLst>
               <a:ext uri="{FF2B5EF4-FFF2-40B4-BE49-F238E27FC236}">
                 <a16:creationId xmlns:a16="http://schemas.microsoft.com/office/drawing/2014/main" id="{2D35804D-7044-B129-7E2C-ED3868BD4F80}"/>
@@ -11361,7 +11361,7 @@
       </p:sp>
       <p:sp>
         <p:nvSpPr>
-          <p:cNvPr id="6" name="Espace réservé du contenu 5">
+          <p:cNvPr id="6" name="slot.body-right">
             <a:extLst>
               <a:ext uri="{FF2B5EF4-FFF2-40B4-BE49-F238E27FC236}">
                 <a16:creationId xmlns:a16="http://schemas.microsoft.com/office/drawing/2014/main" id="{C56BF488-D9DF-64BA-30D9-77D4A3CB1561}"/>
@@ -11602,7 +11602,7 @@
       </p:cxnSp>
       <p:sp>
         <p:nvSpPr>
-          <p:cNvPr id="11" name="Espace réservé du numéro de diapositive 5">
+          <p:cNvPr id="11" name="slot.footer-page">
             <a:extLst>
               <a:ext uri="{FF2B5EF4-FFF2-40B4-BE49-F238E27FC236}">
                 <a16:creationId xmlns:a16="http://schemas.microsoft.com/office/drawing/2014/main" id="{EF3FC79F-B88C-8E01-0898-E0B4EFE85FEE}"/>
@@ -11645,7 +11645,7 @@
       </p:sp>
       <p:sp>
         <p:nvSpPr>
-          <p:cNvPr id="22" name="Espace réservé du contenu 6">
+          <p:cNvPr id="22" name="slot.source">
             <a:extLst>
               <a:ext uri="{FF2B5EF4-FFF2-40B4-BE49-F238E27FC236}">
                 <a16:creationId xmlns:a16="http://schemas.microsoft.com/office/drawing/2014/main" id="{BD45DD6B-1B35-99CF-127B-561BE4952E16}"/>
@@ -11712,7 +11712,7 @@
       </p:sp>
       <p:sp>
         <p:nvSpPr>
-          <p:cNvPr id="9" name="ZoneTexte 30">
+          <p:cNvPr id="9" name="slot.footer-copyright">
             <a:extLst>
               <a:ext uri="{FF2B5EF4-FFF2-40B4-BE49-F238E27FC236}">
                 <a16:creationId xmlns:a16="http://schemas.microsoft.com/office/drawing/2014/main" id="{E76FB809-1B2B-CCF6-24BB-429FDD2D7B24}"/>
@@ -11766,7 +11766,7 @@
       </p:sp>
       <p:sp>
         <p:nvSpPr>
-          <p:cNvPr id="14" name="ZoneTexte 13">
+          <p:cNvPr id="14" name="slot.footer-logo">
             <a:extLst>
               <a:ext uri="{FF2B5EF4-FFF2-40B4-BE49-F238E27FC236}">
                 <a16:creationId xmlns:a16="http://schemas.microsoft.com/office/drawing/2014/main" id="{003096E9-3812-E7EE-F73E-A45B1A3882EE}"/>
@@ -11995,7 +11995,7 @@
       </p:sp>
       <p:sp>
         <p:nvSpPr>
-          <p:cNvPr id="2" name="Titre 1">
+          <p:cNvPr id="2" name="slot.title">
             <a:extLst>
               <a:ext uri="{FF2B5EF4-FFF2-40B4-BE49-F238E27FC236}">
                 <a16:creationId xmlns:a16="http://schemas.microsoft.com/office/drawing/2014/main" id="{02A78A85-561E-020D-C7F8-40BBB3F191CA}"/>
@@ -12037,7 +12037,7 @@
       </p:sp>
       <p:sp>
         <p:nvSpPr>
-          <p:cNvPr id="3" name="Espace réservé du texte 2">
+          <p:cNvPr id="3" name="slot.subtitle-left">
             <a:extLst>
               <a:ext uri="{FF2B5EF4-FFF2-40B4-BE49-F238E27FC236}">
                 <a16:creationId xmlns:a16="http://schemas.microsoft.com/office/drawing/2014/main" id="{E43735A6-6302-B3D2-6BB7-6309454C5C3A}"/>
@@ -12131,7 +12131,7 @@
       </p:sp>
       <p:sp>
         <p:nvSpPr>
-          <p:cNvPr id="4" name="Espace réservé du contenu 3">
+          <p:cNvPr id="4" name="slot.body-left">
             <a:extLst>
               <a:ext uri="{FF2B5EF4-FFF2-40B4-BE49-F238E27FC236}">
                 <a16:creationId xmlns:a16="http://schemas.microsoft.com/office/drawing/2014/main" id="{2D3E2C40-4C7F-6E36-C2FB-962C73150210}"/>
@@ -12244,7 +12244,7 @@
       </p:sp>
       <p:sp>
         <p:nvSpPr>
-          <p:cNvPr id="5" name="Espace réservé du texte 4">
+          <p:cNvPr id="5" name="slot.subtitle-left">
             <a:extLst>
               <a:ext uri="{FF2B5EF4-FFF2-40B4-BE49-F238E27FC236}">
                 <a16:creationId xmlns:a16="http://schemas.microsoft.com/office/drawing/2014/main" id="{2D35804D-7044-B129-7E2C-ED3868BD4F80}"/>
@@ -12335,7 +12335,7 @@
       </p:sp>
       <p:sp>
         <p:nvSpPr>
-          <p:cNvPr id="6" name="Espace réservé du contenu 5">
+          <p:cNvPr id="6" name="slot.body-right">
             <a:extLst>
               <a:ext uri="{FF2B5EF4-FFF2-40B4-BE49-F238E27FC236}">
                 <a16:creationId xmlns:a16="http://schemas.microsoft.com/office/drawing/2014/main" id="{C56BF488-D9DF-64BA-30D9-77D4A3CB1561}"/>
@@ -12577,7 +12577,7 @@
       </p:cxnSp>
       <p:sp>
         <p:nvSpPr>
-          <p:cNvPr id="8" name="Espace réservé du numéro de diapositive 5">
+          <p:cNvPr id="8" name="slot.footer-page">
             <a:extLst>
               <a:ext uri="{FF2B5EF4-FFF2-40B4-BE49-F238E27FC236}">
                 <a16:creationId xmlns:a16="http://schemas.microsoft.com/office/drawing/2014/main" id="{CF0FD329-A27E-51A3-480F-9C04DED50C30}"/>
@@ -12620,7 +12620,7 @@
       </p:sp>
       <p:sp>
         <p:nvSpPr>
-          <p:cNvPr id="20" name="Espace réservé du contenu 6">
+          <p:cNvPr id="20" name="slot.source">
             <a:extLst>
               <a:ext uri="{FF2B5EF4-FFF2-40B4-BE49-F238E27FC236}">
                 <a16:creationId xmlns:a16="http://schemas.microsoft.com/office/drawing/2014/main" id="{19D01319-1A5E-43BA-3540-3F52885879BC}"/>
@@ -12687,7 +12687,7 @@
       </p:sp>
       <p:sp>
         <p:nvSpPr>
-          <p:cNvPr id="9" name="ZoneTexte 30">
+          <p:cNvPr id="9" name="slot.footer-copyright">
             <a:extLst>
               <a:ext uri="{FF2B5EF4-FFF2-40B4-BE49-F238E27FC236}">
                 <a16:creationId xmlns:a16="http://schemas.microsoft.com/office/drawing/2014/main" id="{39D24033-DF4D-0ED7-1A57-92CACF576185}"/>
@@ -12741,7 +12741,7 @@
       </p:sp>
       <p:sp>
         <p:nvSpPr>
-          <p:cNvPr id="12" name="ZoneTexte 11">
+          <p:cNvPr id="12" name="slot.footer-logo">
             <a:extLst>
               <a:ext uri="{FF2B5EF4-FFF2-40B4-BE49-F238E27FC236}">
                 <a16:creationId xmlns:a16="http://schemas.microsoft.com/office/drawing/2014/main" id="{378E3F20-EC2E-870A-570B-4022DDD01109}"/>
@@ -12923,7 +12923,7 @@
       </p:graphicFrame>
       <p:sp>
         <p:nvSpPr>
-          <p:cNvPr id="2" name="Titre 1">
+          <p:cNvPr id="2" name="slot.title">
             <a:extLst>
               <a:ext uri="{FF2B5EF4-FFF2-40B4-BE49-F238E27FC236}">
                 <a16:creationId xmlns:a16="http://schemas.microsoft.com/office/drawing/2014/main" id="{8E7A6757-C645-3EC5-79F9-70135F48F1F5}"/>
@@ -12993,7 +12993,7 @@
       </p:cxnSp>
       <p:sp>
         <p:nvSpPr>
-          <p:cNvPr id="16" name="Espace réservé du contenu 6">
+          <p:cNvPr id="16" name="slot.source">
             <a:extLst>
               <a:ext uri="{FF2B5EF4-FFF2-40B4-BE49-F238E27FC236}">
                 <a16:creationId xmlns:a16="http://schemas.microsoft.com/office/drawing/2014/main" id="{1EAE700C-AA3D-B07B-6407-A28618C99CA3}"/>
@@ -13060,7 +13060,7 @@
       </p:sp>
       <p:sp>
         <p:nvSpPr>
-          <p:cNvPr id="17" name="Espace réservé du numéro de diapositive 5">
+          <p:cNvPr id="17" name="slot.footer-page">
             <a:extLst>
               <a:ext uri="{FF2B5EF4-FFF2-40B4-BE49-F238E27FC236}">
                 <a16:creationId xmlns:a16="http://schemas.microsoft.com/office/drawing/2014/main" id="{30471A69-7D18-731A-528E-0F5C73D3278C}"/>
@@ -13094,7 +13094,7 @@
       </p:sp>
       <p:sp>
         <p:nvSpPr>
-          <p:cNvPr id="4" name="ZoneTexte 30">
+          <p:cNvPr id="4" name="slot.footer-copyright">
             <a:extLst>
               <a:ext uri="{FF2B5EF4-FFF2-40B4-BE49-F238E27FC236}">
                 <a16:creationId xmlns:a16="http://schemas.microsoft.com/office/drawing/2014/main" id="{6F36171D-B542-2086-9241-E71F1886F35F}"/>
@@ -13148,7 +13148,7 @@
       </p:sp>
       <p:sp>
         <p:nvSpPr>
-          <p:cNvPr id="5" name="ZoneTexte 4">
+          <p:cNvPr id="5" name="slot.footer-logo">
             <a:extLst>
               <a:ext uri="{FF2B5EF4-FFF2-40B4-BE49-F238E27FC236}">
                 <a16:creationId xmlns:a16="http://schemas.microsoft.com/office/drawing/2014/main" id="{D41DD35C-CF64-510B-4D2D-9A5073A838A6}"/>
@@ -13379,7 +13379,7 @@
       </p:sp>
       <p:sp>
         <p:nvSpPr>
-          <p:cNvPr id="2" name="Titre 1">
+          <p:cNvPr id="2" name="slot.title">
             <a:extLst>
               <a:ext uri="{FF2B5EF4-FFF2-40B4-BE49-F238E27FC236}">
                 <a16:creationId xmlns:a16="http://schemas.microsoft.com/office/drawing/2014/main" id="{02A78A85-561E-020D-C7F8-40BBB3F191CA}"/>
@@ -13421,7 +13421,7 @@
       </p:sp>
       <p:sp>
         <p:nvSpPr>
-          <p:cNvPr id="3" name="Espace réservé du texte 2">
+          <p:cNvPr id="3" name="slot.subtitle-1">
             <a:extLst>
               <a:ext uri="{FF2B5EF4-FFF2-40B4-BE49-F238E27FC236}">
                 <a16:creationId xmlns:a16="http://schemas.microsoft.com/office/drawing/2014/main" id="{E43735A6-6302-B3D2-6BB7-6309454C5C3A}"/>
@@ -13515,7 +13515,7 @@
       </p:sp>
       <p:sp>
         <p:nvSpPr>
-          <p:cNvPr id="5" name="Espace réservé du texte 4">
+          <p:cNvPr id="5" name="slot.subtitle-2">
             <a:extLst>
               <a:ext uri="{FF2B5EF4-FFF2-40B4-BE49-F238E27FC236}">
                 <a16:creationId xmlns:a16="http://schemas.microsoft.com/office/drawing/2014/main" id="{2D35804D-7044-B129-7E2C-ED3868BD4F80}"/>
@@ -13606,7 +13606,7 @@
       </p:sp>
       <p:sp>
         <p:nvSpPr>
-          <p:cNvPr id="6" name="Espace réservé du contenu 5">
+          <p:cNvPr id="6" name="slot.body">
             <a:extLst>
               <a:ext uri="{FF2B5EF4-FFF2-40B4-BE49-F238E27FC236}">
                 <a16:creationId xmlns:a16="http://schemas.microsoft.com/office/drawing/2014/main" id="{C56BF488-D9DF-64BA-30D9-77D4A3CB1561}"/>
@@ -13762,7 +13762,7 @@
       </p:cxnSp>
       <p:sp>
         <p:nvSpPr>
-          <p:cNvPr id="7" name="Espace réservé du numéro de diapositive 5">
+          <p:cNvPr id="7" name="slot.footer-page">
             <a:extLst>
               <a:ext uri="{FF2B5EF4-FFF2-40B4-BE49-F238E27FC236}">
                 <a16:creationId xmlns:a16="http://schemas.microsoft.com/office/drawing/2014/main" id="{1A58D0F3-933B-44A0-AA4E-059DFC9A693F}"/>
@@ -13805,7 +13805,7 @@
       </p:sp>
       <p:sp>
         <p:nvSpPr>
-          <p:cNvPr id="16" name="Espace réservé du contenu 6">
+          <p:cNvPr id="16" name="slot.source">
             <a:extLst>
               <a:ext uri="{FF2B5EF4-FFF2-40B4-BE49-F238E27FC236}">
                 <a16:creationId xmlns:a16="http://schemas.microsoft.com/office/drawing/2014/main" id="{90BAEBC7-9C13-C823-651C-6CF5BCB1CA2C}"/>
@@ -13872,7 +13872,7 @@
       </p:sp>
       <p:sp>
         <p:nvSpPr>
-          <p:cNvPr id="4" name="ZoneTexte 30">
+          <p:cNvPr id="4" name="slot.footer-copyright">
             <a:extLst>
               <a:ext uri="{FF2B5EF4-FFF2-40B4-BE49-F238E27FC236}">
                 <a16:creationId xmlns:a16="http://schemas.microsoft.com/office/drawing/2014/main" id="{15305BAF-50BD-584B-DC74-C009508EB3DC}"/>
@@ -13926,7 +13926,7 @@
       </p:sp>
       <p:sp>
         <p:nvSpPr>
-          <p:cNvPr id="9" name="ZoneTexte 8">
+          <p:cNvPr id="9" name="slot.footer-logo">
             <a:extLst>
               <a:ext uri="{FF2B5EF4-FFF2-40B4-BE49-F238E27FC236}">
                 <a16:creationId xmlns:a16="http://schemas.microsoft.com/office/drawing/2014/main" id="{746F6E4E-77DF-D5C8-6FC4-15CBB7325373}"/>
@@ -14155,7 +14155,7 @@
       </p:sp>
       <p:sp>
         <p:nvSpPr>
-          <p:cNvPr id="15" name="Titre 1">
+          <p:cNvPr id="15" name="slot.title">
             <a:extLst>
               <a:ext uri="{FF2B5EF4-FFF2-40B4-BE49-F238E27FC236}">
                 <a16:creationId xmlns:a16="http://schemas.microsoft.com/office/drawing/2014/main" id="{011ADB7C-2BFE-5201-7E80-4A7CB5B2A9D7}"/>
@@ -14197,7 +14197,7 @@
       </p:sp>
       <p:sp>
         <p:nvSpPr>
-          <p:cNvPr id="16" name="Espace réservé du texte 2">
+          <p:cNvPr id="16" name="slot.subtitle-1">
             <a:extLst>
               <a:ext uri="{FF2B5EF4-FFF2-40B4-BE49-F238E27FC236}">
                 <a16:creationId xmlns:a16="http://schemas.microsoft.com/office/drawing/2014/main" id="{A6C2B456-2FBB-0CCF-35AD-10F95452A42E}"/>
@@ -14291,7 +14291,7 @@
       </p:sp>
       <p:sp>
         <p:nvSpPr>
-          <p:cNvPr id="20" name="Espace réservé du texte 4">
+          <p:cNvPr id="20" name="slot.subtitle-2">
             <a:extLst>
               <a:ext uri="{FF2B5EF4-FFF2-40B4-BE49-F238E27FC236}">
                 <a16:creationId xmlns:a16="http://schemas.microsoft.com/office/drawing/2014/main" id="{310C5BB4-05F5-13FD-06D5-F7F90D3D7573}"/>
@@ -14382,7 +14382,7 @@
       </p:sp>
       <p:sp>
         <p:nvSpPr>
-          <p:cNvPr id="23" name="Espace réservé du contenu 5">
+          <p:cNvPr id="23" name="slot.body">
             <a:extLst>
               <a:ext uri="{FF2B5EF4-FFF2-40B4-BE49-F238E27FC236}">
                 <a16:creationId xmlns:a16="http://schemas.microsoft.com/office/drawing/2014/main" id="{75B3DDDB-0FFF-0BA0-DC0E-79048AFFC69C}"/>
@@ -14538,7 +14538,7 @@
       </p:cxnSp>
       <p:sp>
         <p:nvSpPr>
-          <p:cNvPr id="25" name="Espace réservé du numéro de diapositive 5">
+          <p:cNvPr id="25" name="slot.footer-page">
             <a:extLst>
               <a:ext uri="{FF2B5EF4-FFF2-40B4-BE49-F238E27FC236}">
                 <a16:creationId xmlns:a16="http://schemas.microsoft.com/office/drawing/2014/main" id="{E7E2C119-EF2B-38F6-0525-06C871F99DB2}"/>
@@ -14581,7 +14581,7 @@
       </p:sp>
       <p:sp>
         <p:nvSpPr>
-          <p:cNvPr id="27" name="Espace réservé du contenu 6">
+          <p:cNvPr id="27" name="slot.source">
             <a:extLst>
               <a:ext uri="{FF2B5EF4-FFF2-40B4-BE49-F238E27FC236}">
                 <a16:creationId xmlns:a16="http://schemas.microsoft.com/office/drawing/2014/main" id="{86608BDE-897C-79A9-D915-0BB179DBABCE}"/>
@@ -14767,7 +14767,7 @@
       </p:sp>
       <p:sp>
         <p:nvSpPr>
-          <p:cNvPr id="4" name="ZoneTexte 30">
+          <p:cNvPr id="4" name="slot.footer-copyright">
             <a:extLst>
               <a:ext uri="{FF2B5EF4-FFF2-40B4-BE49-F238E27FC236}">
                 <a16:creationId xmlns:a16="http://schemas.microsoft.com/office/drawing/2014/main" id="{2DDB37EA-A3C9-8886-2554-B4F3286733E9}"/>
@@ -14821,7 +14821,7 @@
       </p:sp>
       <p:sp>
         <p:nvSpPr>
-          <p:cNvPr id="5" name="ZoneTexte 4">
+          <p:cNvPr id="5" name="slot.footer-logo">
             <a:extLst>
               <a:ext uri="{FF2B5EF4-FFF2-40B4-BE49-F238E27FC236}">
                 <a16:creationId xmlns:a16="http://schemas.microsoft.com/office/drawing/2014/main" id="{4171C2A4-A825-1321-2CCC-00A293AF826E}"/>
@@ -15150,7 +15150,7 @@
       </p:graphicFrame>
       <p:sp>
         <p:nvSpPr>
-          <p:cNvPr id="2" name="Titre 1">
+          <p:cNvPr id="2" name="slot.title">
             <a:extLst>
               <a:ext uri="{FF2B5EF4-FFF2-40B4-BE49-F238E27FC236}">
                 <a16:creationId xmlns:a16="http://schemas.microsoft.com/office/drawing/2014/main" id="{FCE45F8B-6B35-4416-DE1A-36DAC87E84D7}"/>
@@ -15184,7 +15184,7 @@
       </p:sp>
       <p:sp>
         <p:nvSpPr>
-          <p:cNvPr id="3" name="Espace réservé du contenu 2">
+          <p:cNvPr id="3" name="slot.body-left">
             <a:extLst>
               <a:ext uri="{FF2B5EF4-FFF2-40B4-BE49-F238E27FC236}">
                 <a16:creationId xmlns:a16="http://schemas.microsoft.com/office/drawing/2014/main" id="{DD259420-A1F5-B3E7-FA1E-AF141FA30A75}"/>
@@ -15247,7 +15247,7 @@
       </p:sp>
       <p:sp>
         <p:nvSpPr>
-          <p:cNvPr id="4" name="Sous-titre 2">
+          <p:cNvPr id="4" name="slot.subtitle">
             <a:extLst>
               <a:ext uri="{FF2B5EF4-FFF2-40B4-BE49-F238E27FC236}">
                 <a16:creationId xmlns:a16="http://schemas.microsoft.com/office/drawing/2014/main" id="{0BD151FF-774C-0F45-1C17-D35CEB240F37}"/>
@@ -15366,7 +15366,7 @@
       </p:cxnSp>
       <p:sp>
         <p:nvSpPr>
-          <p:cNvPr id="7" name="Espace réservé du numéro de diapositive 5">
+          <p:cNvPr id="7" name="slot.footer-page">
             <a:extLst>
               <a:ext uri="{FF2B5EF4-FFF2-40B4-BE49-F238E27FC236}">
                 <a16:creationId xmlns:a16="http://schemas.microsoft.com/office/drawing/2014/main" id="{E93BE603-3A6B-82E8-B096-333EF0F29FF1}"/>
@@ -15400,7 +15400,7 @@
       </p:sp>
       <p:sp>
         <p:nvSpPr>
-          <p:cNvPr id="16" name="Espace réservé du contenu 6">
+          <p:cNvPr id="16" name="slot.source">
             <a:extLst>
               <a:ext uri="{FF2B5EF4-FFF2-40B4-BE49-F238E27FC236}">
                 <a16:creationId xmlns:a16="http://schemas.microsoft.com/office/drawing/2014/main" id="{30FB613D-2E4E-C892-5E41-010F534973BA}"/>
@@ -15467,7 +15467,7 @@
       </p:sp>
       <p:sp>
         <p:nvSpPr>
-          <p:cNvPr id="5" name="ZoneTexte 30">
+          <p:cNvPr id="5" name="slot.footer-copyright">
             <a:extLst>
               <a:ext uri="{FF2B5EF4-FFF2-40B4-BE49-F238E27FC236}">
                 <a16:creationId xmlns:a16="http://schemas.microsoft.com/office/drawing/2014/main" id="{E99671A2-29BC-C486-4FDD-535AB808C56F}"/>
@@ -15521,7 +15521,7 @@
       </p:sp>
       <p:sp>
         <p:nvSpPr>
-          <p:cNvPr id="6" name="ZoneTexte 5">
+          <p:cNvPr id="6" name="slot.footer-logo">
             <a:extLst>
               <a:ext uri="{FF2B5EF4-FFF2-40B4-BE49-F238E27FC236}">
                 <a16:creationId xmlns:a16="http://schemas.microsoft.com/office/drawing/2014/main" id="{1F03ADAA-DE4B-1668-3DA4-78AC64CFC6AC}"/>
@@ -15703,7 +15703,7 @@
       </p:graphicFrame>
       <p:sp>
         <p:nvSpPr>
-          <p:cNvPr id="2" name="Titre 1">
+          <p:cNvPr id="2" name="slot.title">
             <a:extLst>
               <a:ext uri="{FF2B5EF4-FFF2-40B4-BE49-F238E27FC236}">
                 <a16:creationId xmlns:a16="http://schemas.microsoft.com/office/drawing/2014/main" id="{2177F37C-BE34-28C6-E3CA-11B0B3A1A2C2}"/>
@@ -15732,7 +15732,7 @@
       </p:sp>
       <p:sp>
         <p:nvSpPr>
-          <p:cNvPr id="3" name="Espace réservé du contenu 2">
+          <p:cNvPr id="3" name="slot.body-left">
             <a:extLst>
               <a:ext uri="{FF2B5EF4-FFF2-40B4-BE49-F238E27FC236}">
                 <a16:creationId xmlns:a16="http://schemas.microsoft.com/office/drawing/2014/main" id="{1F024AAB-E748-56F5-69CF-8D668412B46A}"/>
@@ -15831,7 +15831,7 @@
       </p:sp>
       <p:sp>
         <p:nvSpPr>
-          <p:cNvPr id="4" name="Espace réservé du contenu 3">
+          <p:cNvPr id="4" name="slot.body-left">
             <a:extLst>
               <a:ext uri="{FF2B5EF4-FFF2-40B4-BE49-F238E27FC236}">
                 <a16:creationId xmlns:a16="http://schemas.microsoft.com/office/drawing/2014/main" id="{8EB565A4-3D20-0C08-E4EA-AB81725F7D5D}"/>
@@ -15978,7 +15978,7 @@
       </p:cxnSp>
       <p:sp>
         <p:nvSpPr>
-          <p:cNvPr id="11" name="Espace réservé du numéro de diapositive 5">
+          <p:cNvPr id="11" name="slot.footer-page">
             <a:extLst>
               <a:ext uri="{FF2B5EF4-FFF2-40B4-BE49-F238E27FC236}">
                 <a16:creationId xmlns:a16="http://schemas.microsoft.com/office/drawing/2014/main" id="{1382F4B7-187B-8A42-30AA-40FBAC1ED43E}"/>
@@ -16012,7 +16012,7 @@
       </p:sp>
       <p:sp>
         <p:nvSpPr>
-          <p:cNvPr id="18" name="Espace réservé du contenu 6">
+          <p:cNvPr id="18" name="slot.body-left">
             <a:extLst>
               <a:ext uri="{FF2B5EF4-FFF2-40B4-BE49-F238E27FC236}">
                 <a16:creationId xmlns:a16="http://schemas.microsoft.com/office/drawing/2014/main" id="{134DD0FE-B05A-6304-7865-C88149104BD6}"/>
@@ -16079,7 +16079,7 @@
       </p:sp>
       <p:sp>
         <p:nvSpPr>
-          <p:cNvPr id="6" name="ZoneTexte 30">
+          <p:cNvPr id="6" name="slot.footer-copyright">
             <a:extLst>
               <a:ext uri="{FF2B5EF4-FFF2-40B4-BE49-F238E27FC236}">
                 <a16:creationId xmlns:a16="http://schemas.microsoft.com/office/drawing/2014/main" id="{4DF8E504-CA60-F860-96A9-F4BC5E46CA41}"/>
@@ -16133,7 +16133,7 @@
       </p:sp>
       <p:sp>
         <p:nvSpPr>
-          <p:cNvPr id="7" name="ZoneTexte 6">
+          <p:cNvPr id="7" name="slot.footer-logo">
             <a:extLst>
               <a:ext uri="{FF2B5EF4-FFF2-40B4-BE49-F238E27FC236}">
                 <a16:creationId xmlns:a16="http://schemas.microsoft.com/office/drawing/2014/main" id="{BB9E44C8-0E14-E627-B39C-3CC292226220}"/>
@@ -16315,7 +16315,7 @@
       </p:graphicFrame>
       <p:sp>
         <p:nvSpPr>
-          <p:cNvPr id="2" name="Titre 1">
+          <p:cNvPr id="2" name="slot.title">
             <a:extLst>
               <a:ext uri="{FF2B5EF4-FFF2-40B4-BE49-F238E27FC236}">
                 <a16:creationId xmlns:a16="http://schemas.microsoft.com/office/drawing/2014/main" id="{02A78A85-561E-020D-C7F8-40BBB3F191CA}"/>
@@ -16349,7 +16349,7 @@
       </p:sp>
       <p:sp>
         <p:nvSpPr>
-          <p:cNvPr id="3" name="Espace réservé du texte 2">
+          <p:cNvPr id="3" name="slot.subtitle-left">
             <a:extLst>
               <a:ext uri="{FF2B5EF4-FFF2-40B4-BE49-F238E27FC236}">
                 <a16:creationId xmlns:a16="http://schemas.microsoft.com/office/drawing/2014/main" id="{E43735A6-6302-B3D2-6BB7-6309454C5C3A}"/>
@@ -16427,7 +16427,7 @@
       </p:sp>
       <p:sp>
         <p:nvSpPr>
-          <p:cNvPr id="4" name="Espace réservé du contenu 3">
+          <p:cNvPr id="4" name="slot.body-left">
             <a:extLst>
               <a:ext uri="{FF2B5EF4-FFF2-40B4-BE49-F238E27FC236}">
                 <a16:creationId xmlns:a16="http://schemas.microsoft.com/office/drawing/2014/main" id="{2D3E2C40-4C7F-6E36-C2FB-962C73150210}"/>
@@ -16490,7 +16490,7 @@
       </p:sp>
       <p:sp>
         <p:nvSpPr>
-          <p:cNvPr id="5" name="Espace réservé du texte 4">
+          <p:cNvPr id="5" name="slot.subtitle-left">
             <a:extLst>
               <a:ext uri="{FF2B5EF4-FFF2-40B4-BE49-F238E27FC236}">
                 <a16:creationId xmlns:a16="http://schemas.microsoft.com/office/drawing/2014/main" id="{2D35804D-7044-B129-7E2C-ED3868BD4F80}"/>
@@ -16568,7 +16568,7 @@
       </p:sp>
       <p:sp>
         <p:nvSpPr>
-          <p:cNvPr id="6" name="Espace réservé du contenu 5">
+          <p:cNvPr id="6" name="slot.body-right">
             <a:extLst>
               <a:ext uri="{FF2B5EF4-FFF2-40B4-BE49-F238E27FC236}">
                 <a16:creationId xmlns:a16="http://schemas.microsoft.com/office/drawing/2014/main" id="{C56BF488-D9DF-64BA-30D9-77D4A3CB1561}"/>
@@ -16715,7 +16715,7 @@
       </p:cxnSp>
       <p:sp>
         <p:nvSpPr>
-          <p:cNvPr id="12" name="Espace réservé du numéro de diapositive 5">
+          <p:cNvPr id="12" name="slot.footer-page">
             <a:extLst>
               <a:ext uri="{FF2B5EF4-FFF2-40B4-BE49-F238E27FC236}">
                 <a16:creationId xmlns:a16="http://schemas.microsoft.com/office/drawing/2014/main" id="{B1FB7D05-838F-532B-0B3B-5466C302AAE2}"/>
@@ -16749,7 +16749,7 @@
       </p:sp>
       <p:sp>
         <p:nvSpPr>
-          <p:cNvPr id="18" name="Espace réservé du contenu 6">
+          <p:cNvPr id="18" name="slot.source">
             <a:extLst>
               <a:ext uri="{FF2B5EF4-FFF2-40B4-BE49-F238E27FC236}">
                 <a16:creationId xmlns:a16="http://schemas.microsoft.com/office/drawing/2014/main" id="{DD6D06F4-9510-38A2-079C-836FA0E25990}"/>
@@ -16816,7 +16816,7 @@
       </p:sp>
       <p:sp>
         <p:nvSpPr>
-          <p:cNvPr id="8" name="ZoneTexte 30">
+          <p:cNvPr id="8" name="slot.footer-copyright">
             <a:extLst>
               <a:ext uri="{FF2B5EF4-FFF2-40B4-BE49-F238E27FC236}">
                 <a16:creationId xmlns:a16="http://schemas.microsoft.com/office/drawing/2014/main" id="{3047539A-0BFC-5BB9-0072-5DE19483ABBF}"/>
@@ -16870,7 +16870,7 @@
       </p:sp>
       <p:sp>
         <p:nvSpPr>
-          <p:cNvPr id="9" name="ZoneTexte 8">
+          <p:cNvPr id="9" name="slot.footer-logo">
             <a:extLst>
               <a:ext uri="{FF2B5EF4-FFF2-40B4-BE49-F238E27FC236}">
                 <a16:creationId xmlns:a16="http://schemas.microsoft.com/office/drawing/2014/main" id="{247E3550-5CD6-33B5-5444-8A45D9F8FAC0}"/>
@@ -17052,7 +17052,7 @@
       </p:graphicFrame>
       <p:sp>
         <p:nvSpPr>
-          <p:cNvPr id="2" name="Titre 1">
+          <p:cNvPr id="2" name="slot.title">
             <a:extLst>
               <a:ext uri="{FF2B5EF4-FFF2-40B4-BE49-F238E27FC236}">
                 <a16:creationId xmlns:a16="http://schemas.microsoft.com/office/drawing/2014/main" id="{02A78A85-561E-020D-C7F8-40BBB3F191CA}"/>
@@ -17086,7 +17086,7 @@
       </p:sp>
       <p:sp>
         <p:nvSpPr>
-          <p:cNvPr id="3" name="Espace réservé du texte 2">
+          <p:cNvPr id="3" name="slot.subtitle-left">
             <a:extLst>
               <a:ext uri="{FF2B5EF4-FFF2-40B4-BE49-F238E27FC236}">
                 <a16:creationId xmlns:a16="http://schemas.microsoft.com/office/drawing/2014/main" id="{E43735A6-6302-B3D2-6BB7-6309454C5C3A}"/>
@@ -17164,7 +17164,7 @@
       </p:sp>
       <p:sp>
         <p:nvSpPr>
-          <p:cNvPr id="4" name="Espace réservé du contenu 3">
+          <p:cNvPr id="4" name="slot.body-left">
             <a:extLst>
               <a:ext uri="{FF2B5EF4-FFF2-40B4-BE49-F238E27FC236}">
                 <a16:creationId xmlns:a16="http://schemas.microsoft.com/office/drawing/2014/main" id="{2D3E2C40-4C7F-6E36-C2FB-962C73150210}"/>
@@ -17227,7 +17227,7 @@
       </p:sp>
       <p:sp>
         <p:nvSpPr>
-          <p:cNvPr id="5" name="Espace réservé du texte 4">
+          <p:cNvPr id="5" name="slot.subtitle-left">
             <a:extLst>
               <a:ext uri="{FF2B5EF4-FFF2-40B4-BE49-F238E27FC236}">
                 <a16:creationId xmlns:a16="http://schemas.microsoft.com/office/drawing/2014/main" id="{2D35804D-7044-B129-7E2C-ED3868BD4F80}"/>
@@ -17305,7 +17305,7 @@
       </p:sp>
       <p:sp>
         <p:nvSpPr>
-          <p:cNvPr id="6" name="Espace réservé du contenu 5">
+          <p:cNvPr id="6" name="slot.body-right">
             <a:extLst>
               <a:ext uri="{FF2B5EF4-FFF2-40B4-BE49-F238E27FC236}">
                 <a16:creationId xmlns:a16="http://schemas.microsoft.com/office/drawing/2014/main" id="{C56BF488-D9DF-64BA-30D9-77D4A3CB1561}"/>
@@ -17368,7 +17368,7 @@
       </p:sp>
       <p:sp>
         <p:nvSpPr>
-          <p:cNvPr id="7" name="Espace réservé du texte 2">
+          <p:cNvPr id="7" name="slot.subtitle-left">
             <a:extLst>
               <a:ext uri="{FF2B5EF4-FFF2-40B4-BE49-F238E27FC236}">
                 <a16:creationId xmlns:a16="http://schemas.microsoft.com/office/drawing/2014/main" id="{5E8252F0-DE57-E2EB-BE2E-BAD06505AF77}"/>
@@ -17446,7 +17446,7 @@
       </p:sp>
       <p:sp>
         <p:nvSpPr>
-          <p:cNvPr id="11" name="Espace réservé du contenu 3">
+          <p:cNvPr id="11" name="slot.body-left">
             <a:extLst>
               <a:ext uri="{FF2B5EF4-FFF2-40B4-BE49-F238E27FC236}">
                 <a16:creationId xmlns:a16="http://schemas.microsoft.com/office/drawing/2014/main" id="{AF4E5750-BDEC-4328-0B8F-9525E2496CFD}"/>
@@ -17653,7 +17653,7 @@
       </p:cxnSp>
       <p:sp>
         <p:nvSpPr>
-          <p:cNvPr id="16" name="Espace réservé du numéro de diapositive 5">
+          <p:cNvPr id="16" name="slot.footer-page">
             <a:extLst>
               <a:ext uri="{FF2B5EF4-FFF2-40B4-BE49-F238E27FC236}">
                 <a16:creationId xmlns:a16="http://schemas.microsoft.com/office/drawing/2014/main" id="{9591EC4D-D015-BB3F-B075-780ADAD4923D}"/>
@@ -17687,7 +17687,7 @@
       </p:sp>
       <p:sp>
         <p:nvSpPr>
-          <p:cNvPr id="23" name="Espace réservé du contenu 6">
+          <p:cNvPr id="23" name="slot.source">
             <a:extLst>
               <a:ext uri="{FF2B5EF4-FFF2-40B4-BE49-F238E27FC236}">
                 <a16:creationId xmlns:a16="http://schemas.microsoft.com/office/drawing/2014/main" id="{57B7AFE9-1481-AAAB-096A-34F44FCF4189}"/>
@@ -17754,7 +17754,7 @@
       </p:sp>
       <p:sp>
         <p:nvSpPr>
-          <p:cNvPr id="8" name="ZoneTexte 30">
+          <p:cNvPr id="8" name="slot.footer-copyright">
             <a:extLst>
               <a:ext uri="{FF2B5EF4-FFF2-40B4-BE49-F238E27FC236}">
                 <a16:creationId xmlns:a16="http://schemas.microsoft.com/office/drawing/2014/main" id="{AE48B899-D254-33FF-13F7-FB3591FAB6B1}"/>
@@ -17808,7 +17808,7 @@
       </p:sp>
       <p:sp>
         <p:nvSpPr>
-          <p:cNvPr id="9" name="ZoneTexte 8">
+          <p:cNvPr id="9" name="slot.footer-logo">
             <a:extLst>
               <a:ext uri="{FF2B5EF4-FFF2-40B4-BE49-F238E27FC236}">
                 <a16:creationId xmlns:a16="http://schemas.microsoft.com/office/drawing/2014/main" id="{5079D28D-C0D1-A414-D61D-CDD866EB1576}"/>
@@ -17990,7 +17990,7 @@
       </p:graphicFrame>
       <p:sp>
         <p:nvSpPr>
-          <p:cNvPr id="3" name="Espace réservé du numéro de diapositive 5">
+          <p:cNvPr id="3" name="slot.footer-page">
             <a:extLst>
               <a:ext uri="{FF2B5EF4-FFF2-40B4-BE49-F238E27FC236}">
                 <a16:creationId xmlns:a16="http://schemas.microsoft.com/office/drawing/2014/main" id="{AC98BCD7-B4BD-45F0-A1DC-E597AD321024}"/>
@@ -18024,7 +18024,7 @@
       </p:sp>
       <p:sp>
         <p:nvSpPr>
-          <p:cNvPr id="10" name="Espace réservé du contenu 6">
+          <p:cNvPr id="10" name="slot.source">
             <a:extLst>
               <a:ext uri="{FF2B5EF4-FFF2-40B4-BE49-F238E27FC236}">
                 <a16:creationId xmlns:a16="http://schemas.microsoft.com/office/drawing/2014/main" id="{DE645C6A-CC14-E4D3-22C9-E154707F3FF7}"/>
@@ -18384,7 +18384,7 @@
       </p:sp>
       <p:sp>
         <p:nvSpPr>
-          <p:cNvPr id="5" name="Titre 1">
+          <p:cNvPr id="5" name="slot.title">
             <a:extLst>
               <a:ext uri="{FF2B5EF4-FFF2-40B4-BE49-F238E27FC236}">
                 <a16:creationId xmlns:a16="http://schemas.microsoft.com/office/drawing/2014/main" id="{3A8C9D35-E503-FE8C-69EA-8B619E0CB8DB}"/>
@@ -18428,7 +18428,7 @@
       </p:sp>
       <p:sp>
         <p:nvSpPr>
-          <p:cNvPr id="7" name="Sous-titre 2">
+          <p:cNvPr id="7" name="slot.subtitle">
             <a:extLst>
               <a:ext uri="{FF2B5EF4-FFF2-40B4-BE49-F238E27FC236}">
                 <a16:creationId xmlns:a16="http://schemas.microsoft.com/office/drawing/2014/main" id="{C9E991B4-3678-BE6E-9D33-B6480825BFEA}"/>
@@ -18952,7 +18952,7 @@
       </p:pic>
       <p:sp>
         <p:nvSpPr>
-          <p:cNvPr id="2" name="Titre 1">
+          <p:cNvPr id="2" name="slot.section-title">
             <a:extLst>
               <a:ext uri="{FF2B5EF4-FFF2-40B4-BE49-F238E27FC236}">
                 <a16:creationId xmlns:a16="http://schemas.microsoft.com/office/drawing/2014/main" id="{1FAAFAE6-D60C-93B1-4819-060D20F8BFF4}"/>
@@ -18996,7 +18996,7 @@
       </p:sp>
       <p:sp>
         <p:nvSpPr>
-          <p:cNvPr id="3" name="Sous-titre 2">
+          <p:cNvPr id="3" name="slot.subtitle">
             <a:extLst>
               <a:ext uri="{FF2B5EF4-FFF2-40B4-BE49-F238E27FC236}">
                 <a16:creationId xmlns:a16="http://schemas.microsoft.com/office/drawing/2014/main" id="{B989298A-8D13-336B-A448-1CB247CE6E4F}"/>
@@ -19902,7 +19902,7 @@
       </p:grpSpPr>
       <p:sp>
         <p:nvSpPr>
-          <p:cNvPr id="2" name="Espace réservé pour une image  1">
+          <p:cNvPr id="2" name="slot.image">
             <a:extLst>
               <a:ext uri="{FF2B5EF4-FFF2-40B4-BE49-F238E27FC236}">
                 <a16:creationId xmlns:a16="http://schemas.microsoft.com/office/drawing/2014/main" id="{E0BCE59B-D444-7A18-DCCB-70AFE1EA42FF}"/>
@@ -19927,7 +19927,7 @@
       </p:sp>
       <p:sp>
         <p:nvSpPr>
-          <p:cNvPr id="3" name="Titre 2">
+          <p:cNvPr id="3" name="slot.title">
             <a:extLst>
               <a:ext uri="{FF2B5EF4-FFF2-40B4-BE49-F238E27FC236}">
                 <a16:creationId xmlns:a16="http://schemas.microsoft.com/office/drawing/2014/main" id="{7ACAD432-3BA2-C857-1F08-57EFA4F2680E}"/>
@@ -19952,7 +19952,7 @@
       </p:sp>
       <p:sp>
         <p:nvSpPr>
-          <p:cNvPr id="4" name="Sous-titre 3">
+          <p:cNvPr id="4" name="slot.subtitle">
             <a:extLst>
               <a:ext uri="{FF2B5EF4-FFF2-40B4-BE49-F238E27FC236}">
                 <a16:creationId xmlns:a16="http://schemas.microsoft.com/office/drawing/2014/main" id="{A7B49F1B-6722-9095-525C-4E4E2657BDB4}"/>
@@ -19977,7 +19977,7 @@
       </p:sp>
       <p:sp>
         <p:nvSpPr>
-          <p:cNvPr id="5" name="Espace réservé du texte 4">
+          <p:cNvPr id="5" name="slot.body">
             <a:extLst>
               <a:ext uri="{FF2B5EF4-FFF2-40B4-BE49-F238E27FC236}">
                 <a16:creationId xmlns:a16="http://schemas.microsoft.com/office/drawing/2014/main" id="{4CBFC38C-423B-3DD8-A88D-A1A1A9C3A913}"/>
@@ -20038,7 +20038,7 @@
       </p:grpSpPr>
       <p:sp>
         <p:nvSpPr>
-          <p:cNvPr id="11" name="Titre 10">
+          <p:cNvPr id="11" name="slot.title">
             <a:extLst>
               <a:ext uri="{FF2B5EF4-FFF2-40B4-BE49-F238E27FC236}">
                 <a16:creationId xmlns:a16="http://schemas.microsoft.com/office/drawing/2014/main" id="{5B9B5EFF-D6C0-5F6D-B181-93D9A1EEA543}"/>
@@ -20063,7 +20063,7 @@
       </p:sp>
       <p:graphicFrame>
         <p:nvGraphicFramePr>
-          <p:cNvPr id="2" name="Espace réservé du contenu 1">
+          <p:cNvPr id="2" name="slot.chart">
             <a:extLst>
               <a:ext uri="{FF2B5EF4-FFF2-40B4-BE49-F238E27FC236}">
                 <a16:creationId xmlns:a16="http://schemas.microsoft.com/office/drawing/2014/main" id="{6856BEA8-6434-0F26-881F-058CB793B77E}"/>
@@ -20094,7 +20094,7 @@
       </p:graphicFrame>
       <p:sp>
         <p:nvSpPr>
-          <p:cNvPr id="4" name="Espace réservé du numéro de diapositive 3">
+          <p:cNvPr id="4" name="slot.footer-page">
             <a:extLst>
               <a:ext uri="{FF2B5EF4-FFF2-40B4-BE49-F238E27FC236}">
                 <a16:creationId xmlns:a16="http://schemas.microsoft.com/office/drawing/2014/main" id="{A97A835A-87A2-B939-1DD1-F196BE144C01}"/>
@@ -20123,7 +20123,7 @@
       </p:sp>
       <p:sp>
         <p:nvSpPr>
-          <p:cNvPr id="12" name="Espace réservé du contenu 11">
+          <p:cNvPr id="12" name="slot.source">
             <a:extLst>
               <a:ext uri="{FF2B5EF4-FFF2-40B4-BE49-F238E27FC236}">
                 <a16:creationId xmlns:a16="http://schemas.microsoft.com/office/drawing/2014/main" id="{BBB8D210-4F84-AB0E-C916-9C28A9514921}"/>
@@ -20148,7 +20148,7 @@
       </p:sp>
       <p:sp>
         <p:nvSpPr>
-          <p:cNvPr id="10" name="Espace réservé du contenu 5">
+          <p:cNvPr id="10" name="slot.body-right">
             <a:extLst>
               <a:ext uri="{FF2B5EF4-FFF2-40B4-BE49-F238E27FC236}">
                 <a16:creationId xmlns:a16="http://schemas.microsoft.com/office/drawing/2014/main" id="{12965206-88B4-0F47-8E28-3FA959B2EF16}"/>
@@ -20387,7 +20387,7 @@
       </p:sp>
       <p:sp>
         <p:nvSpPr>
-          <p:cNvPr id="13" name="Espace réservé du contenu 5">
+          <p:cNvPr id="13" name="slot.chart-title">
             <a:extLst>
               <a:ext uri="{FF2B5EF4-FFF2-40B4-BE49-F238E27FC236}">
                 <a16:creationId xmlns:a16="http://schemas.microsoft.com/office/drawing/2014/main" id="{4B04BF95-50FB-9DF2-7E0A-AC1BBEDAB16D}"/>
@@ -20675,7 +20675,7 @@
       </p:grpSpPr>
       <p:sp>
         <p:nvSpPr>
-          <p:cNvPr id="6" name="Titre 5">
+          <p:cNvPr id="6" name="slot.title">
             <a:extLst>
               <a:ext uri="{FF2B5EF4-FFF2-40B4-BE49-F238E27FC236}">
                 <a16:creationId xmlns:a16="http://schemas.microsoft.com/office/drawing/2014/main" id="{BBC5BA43-0109-A451-0B17-1344EBBD7B3B}"/>
@@ -20700,7 +20700,7 @@
       </p:sp>
       <p:sp>
         <p:nvSpPr>
-          <p:cNvPr id="7" name="Espace réservé du contenu 6">
+          <p:cNvPr id="7" name="slot.body-left">
             <a:extLst>
               <a:ext uri="{FF2B5EF4-FFF2-40B4-BE49-F238E27FC236}">
                 <a16:creationId xmlns:a16="http://schemas.microsoft.com/office/drawing/2014/main" id="{F9A39B9F-8FE3-C5E4-66EB-23D6B854B01A}"/>
@@ -20725,7 +20725,7 @@
       </p:sp>
       <p:sp>
         <p:nvSpPr>
-          <p:cNvPr id="8" name="Espace réservé du contenu 7">
+          <p:cNvPr id="8" name="slot.body-left">
             <a:extLst>
               <a:ext uri="{FF2B5EF4-FFF2-40B4-BE49-F238E27FC236}">
                 <a16:creationId xmlns:a16="http://schemas.microsoft.com/office/drawing/2014/main" id="{37886110-4BF1-3B19-47FC-1B3A623E68F4}"/>
@@ -20750,7 +20750,7 @@
       </p:sp>
       <p:sp>
         <p:nvSpPr>
-          <p:cNvPr id="4" name="Espace réservé du numéro de diapositive 3">
+          <p:cNvPr id="4" name="slot.footer-page">
             <a:extLst>
               <a:ext uri="{FF2B5EF4-FFF2-40B4-BE49-F238E27FC236}">
                 <a16:creationId xmlns:a16="http://schemas.microsoft.com/office/drawing/2014/main" id="{955021DA-9147-47DF-2270-FA79520AA834}"/>
@@ -20779,7 +20779,7 @@
       </p:sp>
       <p:sp>
         <p:nvSpPr>
-          <p:cNvPr id="9" name="Espace réservé du contenu 8">
+          <p:cNvPr id="9" name="slot.source">
             <a:extLst>
               <a:ext uri="{FF2B5EF4-FFF2-40B4-BE49-F238E27FC236}">
                 <a16:creationId xmlns:a16="http://schemas.microsoft.com/office/drawing/2014/main" id="{08669132-B2E9-C7FD-0E5A-195E1E90B39F}"/>
@@ -20834,7 +20834,7 @@
       </p:grpSpPr>
       <p:sp>
         <p:nvSpPr>
-          <p:cNvPr id="2" name="Titre 1">
+          <p:cNvPr id="2" name="slot.title">
             <a:extLst>
               <a:ext uri="{FF2B5EF4-FFF2-40B4-BE49-F238E27FC236}">
                 <a16:creationId xmlns:a16="http://schemas.microsoft.com/office/drawing/2014/main" id="{A1B13B95-550F-B65B-3507-ADE3B9DA9E32}"/>
@@ -20859,7 +20859,7 @@
       </p:sp>
       <p:sp>
         <p:nvSpPr>
-          <p:cNvPr id="3" name="Espace réservé du texte 2">
+          <p:cNvPr id="3" name="slot.subtitle-left">
             <a:extLst>
               <a:ext uri="{FF2B5EF4-FFF2-40B4-BE49-F238E27FC236}">
                 <a16:creationId xmlns:a16="http://schemas.microsoft.com/office/drawing/2014/main" id="{472AF4BA-3A94-A6AA-75ED-51F19EF10D87}"/>
@@ -20884,7 +20884,7 @@
       </p:sp>
       <p:sp>
         <p:nvSpPr>
-          <p:cNvPr id="4" name="Espace réservé du contenu 3">
+          <p:cNvPr id="4" name="slot.body-left">
             <a:extLst>
               <a:ext uri="{FF2B5EF4-FFF2-40B4-BE49-F238E27FC236}">
                 <a16:creationId xmlns:a16="http://schemas.microsoft.com/office/drawing/2014/main" id="{B0ABFD61-CD4F-EC1A-5115-45CDDC420BF3}"/>
@@ -20909,7 +20909,7 @@
       </p:sp>
       <p:sp>
         <p:nvSpPr>
-          <p:cNvPr id="5" name="Espace réservé du texte 4">
+          <p:cNvPr id="5" name="slot.subtitle-right">
             <a:extLst>
               <a:ext uri="{FF2B5EF4-FFF2-40B4-BE49-F238E27FC236}">
                 <a16:creationId xmlns:a16="http://schemas.microsoft.com/office/drawing/2014/main" id="{DE696CA1-6E07-520A-1327-ED245650AA9E}"/>
@@ -20934,7 +20934,7 @@
       </p:sp>
       <p:sp>
         <p:nvSpPr>
-          <p:cNvPr id="6" name="Espace réservé du contenu 5">
+          <p:cNvPr id="6" name="slot.body-right">
             <a:extLst>
               <a:ext uri="{FF2B5EF4-FFF2-40B4-BE49-F238E27FC236}">
                 <a16:creationId xmlns:a16="http://schemas.microsoft.com/office/drawing/2014/main" id="{8C3FD960-175C-64AD-76A4-03C56B091E11}"/>
@@ -20959,7 +20959,7 @@
       </p:sp>
       <p:sp>
         <p:nvSpPr>
-          <p:cNvPr id="7" name="Espace réservé du numéro de diapositive 6">
+          <p:cNvPr id="7" name="slot.footer-page">
             <a:extLst>
               <a:ext uri="{FF2B5EF4-FFF2-40B4-BE49-F238E27FC236}">
                 <a16:creationId xmlns:a16="http://schemas.microsoft.com/office/drawing/2014/main" id="{AD7EC4A8-8CF5-8C79-BAB5-0AA6E55EAE76}"/>
@@ -20988,7 +20988,7 @@
       </p:sp>
       <p:sp>
         <p:nvSpPr>
-          <p:cNvPr id="8" name="Espace réservé du contenu 7">
+          <p:cNvPr id="8" name="slot.source">
             <a:extLst>
               <a:ext uri="{FF2B5EF4-FFF2-40B4-BE49-F238E27FC236}">
                 <a16:creationId xmlns:a16="http://schemas.microsoft.com/office/drawing/2014/main" id="{78FA1B2A-92F7-40FB-F965-CA4A4804D578}"/>
@@ -21043,7 +21043,7 @@
       </p:grpSpPr>
       <p:sp>
         <p:nvSpPr>
-          <p:cNvPr id="2" name="Titre 1">
+          <p:cNvPr id="2" name="slot.title">
             <a:extLst>
               <a:ext uri="{FF2B5EF4-FFF2-40B4-BE49-F238E27FC236}">
                 <a16:creationId xmlns:a16="http://schemas.microsoft.com/office/drawing/2014/main" id="{96382BF3-A58D-9FCC-73D2-D23B8E3097D6}"/>
@@ -21068,7 +21068,7 @@
       </p:sp>
       <p:sp>
         <p:nvSpPr>
-          <p:cNvPr id="3" name="Espace réservé du texte 2">
+          <p:cNvPr id="3" name="slot.subtitle-left">
             <a:extLst>
               <a:ext uri="{FF2B5EF4-FFF2-40B4-BE49-F238E27FC236}">
                 <a16:creationId xmlns:a16="http://schemas.microsoft.com/office/drawing/2014/main" id="{507C86A9-5AA4-5FEE-279D-DB62E9AF5A84}"/>
@@ -21093,7 +21093,7 @@
       </p:sp>
       <p:sp>
         <p:nvSpPr>
-          <p:cNvPr id="4" name="Espace réservé du contenu 3">
+          <p:cNvPr id="4" name="slot.body-left">
             <a:extLst>
               <a:ext uri="{FF2B5EF4-FFF2-40B4-BE49-F238E27FC236}">
                 <a16:creationId xmlns:a16="http://schemas.microsoft.com/office/drawing/2014/main" id="{1615B9A0-C888-2906-494C-2BE85967A792}"/>
@@ -21118,7 +21118,7 @@
       </p:sp>
       <p:sp>
         <p:nvSpPr>
-          <p:cNvPr id="5" name="Espace réservé du texte 4">
+          <p:cNvPr id="5" name="slot.subtitle-center">
             <a:extLst>
               <a:ext uri="{FF2B5EF4-FFF2-40B4-BE49-F238E27FC236}">
                 <a16:creationId xmlns:a16="http://schemas.microsoft.com/office/drawing/2014/main" id="{899EBAB0-D7CA-FCF6-5AE7-F3182BDD73D7}"/>
@@ -21143,7 +21143,7 @@
       </p:sp>
       <p:sp>
         <p:nvSpPr>
-          <p:cNvPr id="6" name="Espace réservé du contenu 5">
+          <p:cNvPr id="6" name="slot.body-right">
             <a:extLst>
               <a:ext uri="{FF2B5EF4-FFF2-40B4-BE49-F238E27FC236}">
                 <a16:creationId xmlns:a16="http://schemas.microsoft.com/office/drawing/2014/main" id="{15A49452-0460-60CD-1237-4332D2B7D644}"/>
@@ -21168,7 +21168,7 @@
       </p:sp>
       <p:sp>
         <p:nvSpPr>
-          <p:cNvPr id="7" name="Espace réservé du numéro de diapositive 6">
+          <p:cNvPr id="7" name="slot.footer-page">
             <a:extLst>
               <a:ext uri="{FF2B5EF4-FFF2-40B4-BE49-F238E27FC236}">
                 <a16:creationId xmlns:a16="http://schemas.microsoft.com/office/drawing/2014/main" id="{244EFA7C-21AE-6C7D-FAC2-7D19DE421203}"/>
@@ -21197,7 +21197,7 @@
       </p:sp>
       <p:sp>
         <p:nvSpPr>
-          <p:cNvPr id="8" name="Espace réservé du contenu 7">
+          <p:cNvPr id="8" name="slot.source">
             <a:extLst>
               <a:ext uri="{FF2B5EF4-FFF2-40B4-BE49-F238E27FC236}">
                 <a16:creationId xmlns:a16="http://schemas.microsoft.com/office/drawing/2014/main" id="{B421CB7E-7CF9-8773-A8E0-CBC5497D8F78}"/>
@@ -21252,7 +21252,7 @@
       </p:grpSpPr>
       <p:sp>
         <p:nvSpPr>
-          <p:cNvPr id="2" name="Titre 1">
+          <p:cNvPr id="2" name="slot.title">
             <a:extLst>
               <a:ext uri="{FF2B5EF4-FFF2-40B4-BE49-F238E27FC236}">
                 <a16:creationId xmlns:a16="http://schemas.microsoft.com/office/drawing/2014/main" id="{642C1C7A-2951-8460-E931-5812BA57EE8A}"/>
@@ -21277,7 +21277,7 @@
       </p:sp>
       <p:sp>
         <p:nvSpPr>
-          <p:cNvPr id="3" name="Espace réservé du texte 2">
+          <p:cNvPr id="3" name="slot.subtitle-1">
             <a:extLst>
               <a:ext uri="{FF2B5EF4-FFF2-40B4-BE49-F238E27FC236}">
                 <a16:creationId xmlns:a16="http://schemas.microsoft.com/office/drawing/2014/main" id="{4BE58D27-D33D-9A6A-261A-FC37592CCB76}"/>
@@ -21302,7 +21302,7 @@
       </p:sp>
       <p:sp>
         <p:nvSpPr>
-          <p:cNvPr id="4" name="Espace réservé du texte 3">
+          <p:cNvPr id="4" name="slot.subtitle-2">
             <a:extLst>
               <a:ext uri="{FF2B5EF4-FFF2-40B4-BE49-F238E27FC236}">
                 <a16:creationId xmlns:a16="http://schemas.microsoft.com/office/drawing/2014/main" id="{4358881E-4F55-3D28-CF02-3F4E9115E333}"/>
@@ -21327,7 +21327,7 @@
       </p:sp>
       <p:sp>
         <p:nvSpPr>
-          <p:cNvPr id="5" name="Espace réservé du contenu 4">
+          <p:cNvPr id="5" name="slot.body">
             <a:extLst>
               <a:ext uri="{FF2B5EF4-FFF2-40B4-BE49-F238E27FC236}">
                 <a16:creationId xmlns:a16="http://schemas.microsoft.com/office/drawing/2014/main" id="{8705FAFD-60FB-F8C7-491E-8FB862F9C8A6}"/>
@@ -21352,7 +21352,7 @@
       </p:sp>
       <p:sp>
         <p:nvSpPr>
-          <p:cNvPr id="6" name="Espace réservé du numéro de diapositive 5">
+          <p:cNvPr id="6" name="slot.footer-page">
             <a:extLst>
               <a:ext uri="{FF2B5EF4-FFF2-40B4-BE49-F238E27FC236}">
                 <a16:creationId xmlns:a16="http://schemas.microsoft.com/office/drawing/2014/main" id="{5A64BB6A-ABB8-43B5-C4FE-21B96FB0BB2E}"/>
@@ -21381,7 +21381,7 @@
       </p:sp>
       <p:sp>
         <p:nvSpPr>
-          <p:cNvPr id="7" name="Espace réservé du contenu 6">
+          <p:cNvPr id="7" name="slot.source">
             <a:extLst>
               <a:ext uri="{FF2B5EF4-FFF2-40B4-BE49-F238E27FC236}">
                 <a16:creationId xmlns:a16="http://schemas.microsoft.com/office/drawing/2014/main" id="{86E2B333-DEEF-7099-9A0E-5BCFE4306828}"/>
@@ -21436,7 +21436,7 @@
       </p:grpSpPr>
       <p:sp>
         <p:nvSpPr>
-          <p:cNvPr id="2" name="Titre 1">
+          <p:cNvPr id="2" name="slot.title">
             <a:extLst>
               <a:ext uri="{FF2B5EF4-FFF2-40B4-BE49-F238E27FC236}">
                 <a16:creationId xmlns:a16="http://schemas.microsoft.com/office/drawing/2014/main" id="{F04B6622-6B31-137C-3057-BEC114E1EA0A}"/>
@@ -21461,7 +21461,7 @@
       </p:sp>
       <p:sp>
         <p:nvSpPr>
-          <p:cNvPr id="3" name="Espace réservé du texte 2">
+          <p:cNvPr id="3" name="slot.subtitle-left">
             <a:extLst>
               <a:ext uri="{FF2B5EF4-FFF2-40B4-BE49-F238E27FC236}">
                 <a16:creationId xmlns:a16="http://schemas.microsoft.com/office/drawing/2014/main" id="{9BECFB8F-18AF-4F46-A86C-FEBFF34FBD84}"/>
@@ -21486,7 +21486,7 @@
       </p:sp>
       <p:sp>
         <p:nvSpPr>
-          <p:cNvPr id="4" name="Espace réservé du contenu 3">
+          <p:cNvPr id="4" name="slot.body-left">
             <a:extLst>
               <a:ext uri="{FF2B5EF4-FFF2-40B4-BE49-F238E27FC236}">
                 <a16:creationId xmlns:a16="http://schemas.microsoft.com/office/drawing/2014/main" id="{92B2C9B2-1C38-1A3B-A3B6-94D76323AA00}"/>
@@ -21511,7 +21511,7 @@
       </p:sp>
       <p:sp>
         <p:nvSpPr>
-          <p:cNvPr id="5" name="Espace réservé du texte 4">
+          <p:cNvPr id="5" name="slot.subtitle-right">
             <a:extLst>
               <a:ext uri="{FF2B5EF4-FFF2-40B4-BE49-F238E27FC236}">
                 <a16:creationId xmlns:a16="http://schemas.microsoft.com/office/drawing/2014/main" id="{F2F573AA-32F1-9474-AA0B-5F748B545775}"/>
@@ -21536,7 +21536,7 @@
       </p:sp>
       <p:sp>
         <p:nvSpPr>
-          <p:cNvPr id="6" name="Espace réservé du contenu 5">
+          <p:cNvPr id="6" name="slot.body-right">
             <a:extLst>
               <a:ext uri="{FF2B5EF4-FFF2-40B4-BE49-F238E27FC236}">
                 <a16:creationId xmlns:a16="http://schemas.microsoft.com/office/drawing/2014/main" id="{209746BB-053D-5EAC-CCE0-A0561FCC3E14}"/>
@@ -21561,7 +21561,7 @@
       </p:sp>
       <p:sp>
         <p:nvSpPr>
-          <p:cNvPr id="7" name="Espace réservé du texte 6">
+          <p:cNvPr id="7" name="slot.subtitle-middle">
             <a:extLst>
               <a:ext uri="{FF2B5EF4-FFF2-40B4-BE49-F238E27FC236}">
                 <a16:creationId xmlns:a16="http://schemas.microsoft.com/office/drawing/2014/main" id="{82EE0964-0DD7-A113-68C6-51DE83E049B7}"/>
@@ -21586,7 +21586,7 @@
       </p:sp>
       <p:sp>
         <p:nvSpPr>
-          <p:cNvPr id="8" name="Espace réservé du contenu 7">
+          <p:cNvPr id="8" name="slot.body-center">
             <a:extLst>
               <a:ext uri="{FF2B5EF4-FFF2-40B4-BE49-F238E27FC236}">
                 <a16:creationId xmlns:a16="http://schemas.microsoft.com/office/drawing/2014/main" id="{4E8625F8-C8B3-70DA-59F3-2E8F89562010}"/>
@@ -21611,7 +21611,7 @@
       </p:sp>
       <p:sp>
         <p:nvSpPr>
-          <p:cNvPr id="9" name="Espace réservé du numéro de diapositive 8">
+          <p:cNvPr id="9" name="slot.footer-page">
             <a:extLst>
               <a:ext uri="{FF2B5EF4-FFF2-40B4-BE49-F238E27FC236}">
                 <a16:creationId xmlns:a16="http://schemas.microsoft.com/office/drawing/2014/main" id="{56BA1548-2B85-A72F-BEF1-2AF72880F211}"/>
@@ -21640,7 +21640,7 @@
       </p:sp>
       <p:sp>
         <p:nvSpPr>
-          <p:cNvPr id="10" name="Espace réservé du contenu 9">
+          <p:cNvPr id="10" name="slot.source">
             <a:extLst>
               <a:ext uri="{FF2B5EF4-FFF2-40B4-BE49-F238E27FC236}">
                 <a16:creationId xmlns:a16="http://schemas.microsoft.com/office/drawing/2014/main" id="{94A0CC14-B06D-8574-9642-42CAE0EDB56C}"/>
@@ -21695,7 +21695,7 @@
       </p:grpSpPr>
       <p:sp>
         <p:nvSpPr>
-          <p:cNvPr id="2" name="Titre 1">
+          <p:cNvPr id="2" name="slot.title">
             <a:extLst>
               <a:ext uri="{FF2B5EF4-FFF2-40B4-BE49-F238E27FC236}">
                 <a16:creationId xmlns:a16="http://schemas.microsoft.com/office/drawing/2014/main" id="{3F90EC06-30A6-F2AF-B561-806978C6E639}"/>
@@ -21720,7 +21720,7 @@
       </p:sp>
       <p:sp>
         <p:nvSpPr>
-          <p:cNvPr id="3" name="Espace réservé du contenu 2">
+          <p:cNvPr id="3" name="slot.body-left">
             <a:extLst>
               <a:ext uri="{FF2B5EF4-FFF2-40B4-BE49-F238E27FC236}">
                 <a16:creationId xmlns:a16="http://schemas.microsoft.com/office/drawing/2014/main" id="{BF51E751-4D1F-8AFF-4DDB-151A4B82F877}"/>
@@ -21745,7 +21745,7 @@
       </p:sp>
       <p:sp>
         <p:nvSpPr>
-          <p:cNvPr id="4" name="Espace réservé du numéro de diapositive 3">
+          <p:cNvPr id="4" name="slot.footer-page">
             <a:extLst>
               <a:ext uri="{FF2B5EF4-FFF2-40B4-BE49-F238E27FC236}">
                 <a16:creationId xmlns:a16="http://schemas.microsoft.com/office/drawing/2014/main" id="{0E735BF3-7AFE-76C1-631C-652548B2CDC7}"/>
@@ -21805,7 +21805,7 @@
       </p:grpSpPr>
       <p:sp>
         <p:nvSpPr>
-          <p:cNvPr id="2" name="Titre 1">
+          <p:cNvPr id="2" name="slot.title">
             <a:extLst>
               <a:ext uri="{FF2B5EF4-FFF2-40B4-BE49-F238E27FC236}">
                 <a16:creationId xmlns:a16="http://schemas.microsoft.com/office/drawing/2014/main" id="{09AD6002-5264-FF81-5C58-8257C5BE35E0}"/>
@@ -21830,7 +21830,7 @@
       </p:sp>
       <p:sp>
         <p:nvSpPr>
-          <p:cNvPr id="3" name="Espace réservé du texte 2">
+          <p:cNvPr id="3" name="slot.subtitle-left">
             <a:extLst>
               <a:ext uri="{FF2B5EF4-FFF2-40B4-BE49-F238E27FC236}">
                 <a16:creationId xmlns:a16="http://schemas.microsoft.com/office/drawing/2014/main" id="{3DA0BAAF-9233-FECD-C9A4-9D6BB9CB133F}"/>
@@ -21855,7 +21855,7 @@
       </p:sp>
       <p:sp>
         <p:nvSpPr>
-          <p:cNvPr id="4" name="Espace réservé du contenu 3">
+          <p:cNvPr id="4" name="slot.body-left">
             <a:extLst>
               <a:ext uri="{FF2B5EF4-FFF2-40B4-BE49-F238E27FC236}">
                 <a16:creationId xmlns:a16="http://schemas.microsoft.com/office/drawing/2014/main" id="{9F86A069-0F52-B4CB-EABB-F7F2BE1DDC39}"/>
@@ -21880,7 +21880,7 @@
       </p:sp>
       <p:sp>
         <p:nvSpPr>
-          <p:cNvPr id="5" name="Espace réservé du texte 4">
+          <p:cNvPr id="5" name="slot.subtitle-center">
             <a:extLst>
               <a:ext uri="{FF2B5EF4-FFF2-40B4-BE49-F238E27FC236}">
                 <a16:creationId xmlns:a16="http://schemas.microsoft.com/office/drawing/2014/main" id="{3F8F4092-5C55-47A8-80BF-15DB6F705E87}"/>
@@ -21905,7 +21905,7 @@
       </p:sp>
       <p:sp>
         <p:nvSpPr>
-          <p:cNvPr id="6" name="Espace réservé du contenu 5">
+          <p:cNvPr id="6" name="slot.body-right">
             <a:extLst>
               <a:ext uri="{FF2B5EF4-FFF2-40B4-BE49-F238E27FC236}">
                 <a16:creationId xmlns:a16="http://schemas.microsoft.com/office/drawing/2014/main" id="{4FD0BBC1-AF6B-7FB2-8131-9CFFE5B4F720}"/>
@@ -21930,7 +21930,7 @@
       </p:sp>
       <p:sp>
         <p:nvSpPr>
-          <p:cNvPr id="7" name="Espace réservé du numéro de diapositive 6">
+          <p:cNvPr id="7" name="slot.footer-page">
             <a:extLst>
               <a:ext uri="{FF2B5EF4-FFF2-40B4-BE49-F238E27FC236}">
                 <a16:creationId xmlns:a16="http://schemas.microsoft.com/office/drawing/2014/main" id="{85C13A4A-3651-3F41-649E-1290DB09A996}"/>
@@ -21959,7 +21959,7 @@
       </p:sp>
       <p:sp>
         <p:nvSpPr>
-          <p:cNvPr id="8" name="Espace réservé du contenu 7">
+          <p:cNvPr id="8" name="slot.source">
             <a:extLst>
               <a:ext uri="{FF2B5EF4-FFF2-40B4-BE49-F238E27FC236}">
                 <a16:creationId xmlns:a16="http://schemas.microsoft.com/office/drawing/2014/main" id="{DBFFDC8F-D14C-28D8-B388-6724C21B4BA1}"/>
@@ -22014,7 +22014,7 @@
       </p:grpSpPr>
       <p:sp>
         <p:nvSpPr>
-          <p:cNvPr id="2" name="Espace réservé du numéro de diapositive 1">
+          <p:cNvPr id="2" name="slot.footer-page">
             <a:extLst>
               <a:ext uri="{FF2B5EF4-FFF2-40B4-BE49-F238E27FC236}">
                 <a16:creationId xmlns:a16="http://schemas.microsoft.com/office/drawing/2014/main" id="{F8C126C1-B24A-39D2-94A0-FFACD11454AA}"/>
@@ -22043,7 +22043,7 @@
       </p:sp>
       <p:sp>
         <p:nvSpPr>
-          <p:cNvPr id="3" name="Espace réservé du contenu 2">
+          <p:cNvPr id="3" name="slot.source">
             <a:extLst>
               <a:ext uri="{FF2B5EF4-FFF2-40B4-BE49-F238E27FC236}">
                 <a16:creationId xmlns:a16="http://schemas.microsoft.com/office/drawing/2014/main" id="{EDAB797B-BD47-F8EB-9C7B-5DD0CFEBADB8}"/>
@@ -22098,7 +22098,7 @@
       </p:grpSpPr>
       <p:sp>
         <p:nvSpPr>
-          <p:cNvPr id="2" name="Titre 1">
+          <p:cNvPr id="2" name="slot.title">
             <a:extLst>
               <a:ext uri="{FF2B5EF4-FFF2-40B4-BE49-F238E27FC236}">
                 <a16:creationId xmlns:a16="http://schemas.microsoft.com/office/drawing/2014/main" id="{374C00EF-B038-0C65-A241-7BA2006BD93D}"/>
@@ -22123,7 +22123,7 @@
       </p:sp>
       <p:sp>
         <p:nvSpPr>
-          <p:cNvPr id="3" name="Sous-titre 2">
+          <p:cNvPr id="3" name="slot.subtitle">
             <a:extLst>
               <a:ext uri="{FF2B5EF4-FFF2-40B4-BE49-F238E27FC236}">
                 <a16:creationId xmlns:a16="http://schemas.microsoft.com/office/drawing/2014/main" id="{B200C2F0-0A4E-E4B1-6889-CCD71BAA093E}"/>
@@ -22148,7 +22148,7 @@
       </p:sp>
       <p:sp>
         <p:nvSpPr>
-          <p:cNvPr id="4" name="Espace réservé du texte 3">
+          <p:cNvPr id="4" name="slot.body">
             <a:extLst>
               <a:ext uri="{FF2B5EF4-FFF2-40B4-BE49-F238E27FC236}">
                 <a16:creationId xmlns:a16="http://schemas.microsoft.com/office/drawing/2014/main" id="{64EDA83A-70CF-2093-E08B-6577F07B93B0}"/>
@@ -22173,7 +22173,7 @@
       </p:sp>
       <p:sp>
         <p:nvSpPr>
-          <p:cNvPr id="5" name="Espace réservé pour une image  4">
+          <p:cNvPr id="5" name="slot.image">
             <a:extLst>
               <a:ext uri="{FF2B5EF4-FFF2-40B4-BE49-F238E27FC236}">
                 <a16:creationId xmlns:a16="http://schemas.microsoft.com/office/drawing/2014/main" id="{03704343-FDF9-0B04-E26C-C52FDAC38AE3}"/>
@@ -22228,7 +22228,7 @@
       </p:grpSpPr>
       <p:sp>
         <p:nvSpPr>
-          <p:cNvPr id="2" name="Titre 1">
+          <p:cNvPr id="2" name="slot.section-title">
             <a:extLst>
               <a:ext uri="{FF2B5EF4-FFF2-40B4-BE49-F238E27FC236}">
                 <a16:creationId xmlns:a16="http://schemas.microsoft.com/office/drawing/2014/main" id="{F1BC0C3D-26C5-B176-7BFF-6520034413BA}"/>
@@ -22253,7 +22253,7 @@
       </p:sp>
       <p:sp>
         <p:nvSpPr>
-          <p:cNvPr id="3" name="Sous-titre 2">
+          <p:cNvPr id="3" name="slot.subtitle">
             <a:extLst>
               <a:ext uri="{FF2B5EF4-FFF2-40B4-BE49-F238E27FC236}">
                 <a16:creationId xmlns:a16="http://schemas.microsoft.com/office/drawing/2014/main" id="{72D99522-BBC2-339A-157B-E266188B49E5}"/>
@@ -22308,7 +22308,7 @@
       </p:grpSpPr>
       <p:sp>
         <p:nvSpPr>
-          <p:cNvPr id="2" name="Titre 1">
+          <p:cNvPr id="2" name="slot.section-title">
             <a:extLst>
               <a:ext uri="{FF2B5EF4-FFF2-40B4-BE49-F238E27FC236}">
                 <a16:creationId xmlns:a16="http://schemas.microsoft.com/office/drawing/2014/main" id="{7ABCA97C-1EB3-759D-152E-F5D49FB8B12D}"/>
@@ -22333,7 +22333,7 @@
       </p:sp>
       <p:sp>
         <p:nvSpPr>
-          <p:cNvPr id="3" name="Sous-titre 2">
+          <p:cNvPr id="3" name="slot.subtitle">
             <a:extLst>
               <a:ext uri="{FF2B5EF4-FFF2-40B4-BE49-F238E27FC236}">
                 <a16:creationId xmlns:a16="http://schemas.microsoft.com/office/drawing/2014/main" id="{10574AA7-F19E-53D0-15C6-BAED9DD9AE99}"/>
@@ -22388,7 +22388,7 @@
       </p:grpSpPr>
       <p:sp>
         <p:nvSpPr>
-          <p:cNvPr id="2" name="Titre 1">
+          <p:cNvPr id="2" name="slot.title">
             <a:extLst>
               <a:ext uri="{FF2B5EF4-FFF2-40B4-BE49-F238E27FC236}">
                 <a16:creationId xmlns:a16="http://schemas.microsoft.com/office/drawing/2014/main" id="{3557F5E2-DE24-B1BE-806A-41DFD0EA573B}"/>
@@ -22413,7 +22413,7 @@
       </p:sp>
       <p:sp>
         <p:nvSpPr>
-          <p:cNvPr id="3" name="Espace réservé du numéro de diapositive 2">
+          <p:cNvPr id="3" name="slot.footer-page">
             <a:extLst>
               <a:ext uri="{FF2B5EF4-FFF2-40B4-BE49-F238E27FC236}">
                 <a16:creationId xmlns:a16="http://schemas.microsoft.com/office/drawing/2014/main" id="{E389FC4E-69D2-CB98-99E0-8235C5DF4832}"/>
@@ -22442,7 +22442,7 @@
       </p:sp>
       <p:sp>
         <p:nvSpPr>
-          <p:cNvPr id="4" name="Espace réservé du contenu 3">
+          <p:cNvPr id="4" name="slot.body-left">
             <a:extLst>
               <a:ext uri="{FF2B5EF4-FFF2-40B4-BE49-F238E27FC236}">
                 <a16:creationId xmlns:a16="http://schemas.microsoft.com/office/drawing/2014/main" id="{57014636-1242-DAAA-256A-ED368B606BEC}"/>
@@ -22497,7 +22497,7 @@
       </p:grpSpPr>
       <p:sp>
         <p:nvSpPr>
-          <p:cNvPr id="2" name="Titre 1">
+          <p:cNvPr id="2" name="slot.title">
             <a:extLst>
               <a:ext uri="{FF2B5EF4-FFF2-40B4-BE49-F238E27FC236}">
                 <a16:creationId xmlns:a16="http://schemas.microsoft.com/office/drawing/2014/main" id="{AD338188-5DE4-C5CB-FE17-B4AE4BD42079}"/>
@@ -22522,7 +22522,7 @@
       </p:sp>
       <p:sp>
         <p:nvSpPr>
-          <p:cNvPr id="3" name="Espace réservé du texte 2">
+          <p:cNvPr id="3" name="slot.subtitle-1">
             <a:extLst>
               <a:ext uri="{FF2B5EF4-FFF2-40B4-BE49-F238E27FC236}">
                 <a16:creationId xmlns:a16="http://schemas.microsoft.com/office/drawing/2014/main" id="{57F5E41D-FE93-0A76-9D73-D1E1F79C27F3}"/>
@@ -22547,7 +22547,7 @@
       </p:sp>
       <p:sp>
         <p:nvSpPr>
-          <p:cNvPr id="4" name="Espace réservé du texte 3">
+          <p:cNvPr id="4" name="slot.subtitle-2">
             <a:extLst>
               <a:ext uri="{FF2B5EF4-FFF2-40B4-BE49-F238E27FC236}">
                 <a16:creationId xmlns:a16="http://schemas.microsoft.com/office/drawing/2014/main" id="{FE9D7C8C-FA55-7BC1-9885-70240B5F619E}"/>
@@ -22572,7 +22572,7 @@
       </p:sp>
       <p:sp>
         <p:nvSpPr>
-          <p:cNvPr id="5" name="Espace réservé du contenu 4">
+          <p:cNvPr id="5" name="slot.body">
             <a:extLst>
               <a:ext uri="{FF2B5EF4-FFF2-40B4-BE49-F238E27FC236}">
                 <a16:creationId xmlns:a16="http://schemas.microsoft.com/office/drawing/2014/main" id="{F04F6FA0-64EA-A96F-77DB-DC9007910239}"/>
@@ -22597,7 +22597,7 @@
       </p:sp>
       <p:sp>
         <p:nvSpPr>
-          <p:cNvPr id="6" name="Espace réservé du numéro de diapositive 5">
+          <p:cNvPr id="6" name="slot.footer-page">
             <a:extLst>
               <a:ext uri="{FF2B5EF4-FFF2-40B4-BE49-F238E27FC236}">
                 <a16:creationId xmlns:a16="http://schemas.microsoft.com/office/drawing/2014/main" id="{93029647-4684-D393-CF0A-BF12BF20539B}"/>
@@ -22626,7 +22626,7 @@
       </p:sp>
       <p:sp>
         <p:nvSpPr>
-          <p:cNvPr id="7" name="Espace réservé du contenu 6">
+          <p:cNvPr id="7" name="slot.source">
             <a:extLst>
               <a:ext uri="{FF2B5EF4-FFF2-40B4-BE49-F238E27FC236}">
                 <a16:creationId xmlns:a16="http://schemas.microsoft.com/office/drawing/2014/main" id="{7D007424-99FE-9625-45E0-4F3C4A8FB982}"/>
@@ -22681,7 +22681,7 @@
       </p:grpSpPr>
       <p:sp>
         <p:nvSpPr>
-          <p:cNvPr id="2" name="Titre 1">
+          <p:cNvPr id="2" name="slot.title">
             <a:extLst>
               <a:ext uri="{FF2B5EF4-FFF2-40B4-BE49-F238E27FC236}">
                 <a16:creationId xmlns:a16="http://schemas.microsoft.com/office/drawing/2014/main" id="{60196F93-28B3-0AC4-E12E-B919C02EDE9E}"/>
@@ -22706,7 +22706,7 @@
       </p:sp>
       <p:sp>
         <p:nvSpPr>
-          <p:cNvPr id="3" name="Espace réservé du texte 2">
+          <p:cNvPr id="3" name="slot.subtitle-left">
             <a:extLst>
               <a:ext uri="{FF2B5EF4-FFF2-40B4-BE49-F238E27FC236}">
                 <a16:creationId xmlns:a16="http://schemas.microsoft.com/office/drawing/2014/main" id="{F5334444-FCDF-1684-3FB8-353DDE1A56F3}"/>
@@ -22731,7 +22731,7 @@
       </p:sp>
       <p:sp>
         <p:nvSpPr>
-          <p:cNvPr id="4" name="Espace réservé du contenu 3">
+          <p:cNvPr id="4" name="slot.body-left">
             <a:extLst>
               <a:ext uri="{FF2B5EF4-FFF2-40B4-BE49-F238E27FC236}">
                 <a16:creationId xmlns:a16="http://schemas.microsoft.com/office/drawing/2014/main" id="{FD352B93-713D-7B29-0C96-707BE1CD5EB1}"/>
@@ -22756,7 +22756,7 @@
       </p:sp>
       <p:sp>
         <p:nvSpPr>
-          <p:cNvPr id="5" name="Espace réservé du texte 4">
+          <p:cNvPr id="5" name="slot.subtitle-right">
             <a:extLst>
               <a:ext uri="{FF2B5EF4-FFF2-40B4-BE49-F238E27FC236}">
                 <a16:creationId xmlns:a16="http://schemas.microsoft.com/office/drawing/2014/main" id="{2155886C-20D1-8079-4E2C-A73C6BE8B440}"/>
@@ -22781,7 +22781,7 @@
       </p:sp>
       <p:sp>
         <p:nvSpPr>
-          <p:cNvPr id="6" name="Espace réservé du contenu 5">
+          <p:cNvPr id="6" name="slot.body-right">
             <a:extLst>
               <a:ext uri="{FF2B5EF4-FFF2-40B4-BE49-F238E27FC236}">
                 <a16:creationId xmlns:a16="http://schemas.microsoft.com/office/drawing/2014/main" id="{F79C5220-BA0D-98C6-8A4B-CC116CD16EFD}"/>
@@ -22806,7 +22806,7 @@
       </p:sp>
       <p:sp>
         <p:nvSpPr>
-          <p:cNvPr id="7" name="Espace réservé du numéro de diapositive 6">
+          <p:cNvPr id="7" name="slot.footer-page">
             <a:extLst>
               <a:ext uri="{FF2B5EF4-FFF2-40B4-BE49-F238E27FC236}">
                 <a16:creationId xmlns:a16="http://schemas.microsoft.com/office/drawing/2014/main" id="{3F8D98DD-0E84-F6F8-641C-DE30A625FDBA}"/>
@@ -22836,7 +22836,7 @@
       </p:sp>
       <p:sp>
         <p:nvSpPr>
-          <p:cNvPr id="8" name="Espace réservé du contenu 7">
+          <p:cNvPr id="8" name="slot.source">
             <a:extLst>
               <a:ext uri="{FF2B5EF4-FFF2-40B4-BE49-F238E27FC236}">
                 <a16:creationId xmlns:a16="http://schemas.microsoft.com/office/drawing/2014/main" id="{B74E6D85-D63B-5397-6C95-9A1C410A807A}"/>
@@ -22891,7 +22891,7 @@
       </p:grpSpPr>
       <p:sp>
         <p:nvSpPr>
-          <p:cNvPr id="2" name="Titre 1">
+          <p:cNvPr id="2" name="slot.title">
             <a:extLst>
               <a:ext uri="{FF2B5EF4-FFF2-40B4-BE49-F238E27FC236}">
                 <a16:creationId xmlns:a16="http://schemas.microsoft.com/office/drawing/2014/main" id="{A1CFCE2F-EEED-699F-16B7-14583F29EE31}"/>
@@ -22916,7 +22916,7 @@
       </p:sp>
       <p:sp>
         <p:nvSpPr>
-          <p:cNvPr id="3" name="Espace réservé du texte 2">
+          <p:cNvPr id="3" name="slot.subtitle-left">
             <a:extLst>
               <a:ext uri="{FF2B5EF4-FFF2-40B4-BE49-F238E27FC236}">
                 <a16:creationId xmlns:a16="http://schemas.microsoft.com/office/drawing/2014/main" id="{52EE0DEE-BE02-0E60-46F1-9B17BE9DCC2C}"/>
@@ -22941,7 +22941,7 @@
       </p:sp>
       <p:sp>
         <p:nvSpPr>
-          <p:cNvPr id="4" name="Espace réservé du contenu 3">
+          <p:cNvPr id="4" name="slot.body-left">
             <a:extLst>
               <a:ext uri="{FF2B5EF4-FFF2-40B4-BE49-F238E27FC236}">
                 <a16:creationId xmlns:a16="http://schemas.microsoft.com/office/drawing/2014/main" id="{6DEB6691-49FC-D5CD-00E2-956161A686E3}"/>
@@ -22966,7 +22966,7 @@
       </p:sp>
       <p:sp>
         <p:nvSpPr>
-          <p:cNvPr id="5" name="Espace réservé du texte 4">
+          <p:cNvPr id="5" name="slot.subtitle-center">
             <a:extLst>
               <a:ext uri="{FF2B5EF4-FFF2-40B4-BE49-F238E27FC236}">
                 <a16:creationId xmlns:a16="http://schemas.microsoft.com/office/drawing/2014/main" id="{A6481CB5-EAF6-34D0-38D2-004DF250D138}"/>
@@ -22991,7 +22991,7 @@
       </p:sp>
       <p:sp>
         <p:nvSpPr>
-          <p:cNvPr id="6" name="Espace réservé du contenu 5">
+          <p:cNvPr id="6" name="slot.body-right">
             <a:extLst>
               <a:ext uri="{FF2B5EF4-FFF2-40B4-BE49-F238E27FC236}">
                 <a16:creationId xmlns:a16="http://schemas.microsoft.com/office/drawing/2014/main" id="{CCBAEE9E-9656-7330-1450-08204C79A982}"/>
@@ -23016,7 +23016,7 @@
       </p:sp>
       <p:sp>
         <p:nvSpPr>
-          <p:cNvPr id="7" name="Espace réservé du numéro de diapositive 6">
+          <p:cNvPr id="7" name="slot.footer-page">
             <a:extLst>
               <a:ext uri="{FF2B5EF4-FFF2-40B4-BE49-F238E27FC236}">
                 <a16:creationId xmlns:a16="http://schemas.microsoft.com/office/drawing/2014/main" id="{C737C2DD-0597-C781-B47B-9ED87A6858D2}"/>
@@ -23046,7 +23046,7 @@
       </p:sp>
       <p:sp>
         <p:nvSpPr>
-          <p:cNvPr id="8" name="Espace réservé du contenu 7">
+          <p:cNvPr id="8" name="slot.source">
             <a:extLst>
               <a:ext uri="{FF2B5EF4-FFF2-40B4-BE49-F238E27FC236}">
                 <a16:creationId xmlns:a16="http://schemas.microsoft.com/office/drawing/2014/main" id="{E45008B4-06ED-42AB-99A0-FF2AA10C8FC1}"/>
@@ -23101,7 +23101,7 @@
       </p:grpSpPr>
       <p:sp>
         <p:nvSpPr>
-          <p:cNvPr id="2" name="Titre 1">
+          <p:cNvPr id="2" name="slot.title">
             <a:extLst>
               <a:ext uri="{FF2B5EF4-FFF2-40B4-BE49-F238E27FC236}">
                 <a16:creationId xmlns:a16="http://schemas.microsoft.com/office/drawing/2014/main" id="{4E843E8F-F946-1ADE-FB37-0EBF4D9CBEF8}"/>
@@ -23126,7 +23126,7 @@
       </p:sp>
       <p:sp>
         <p:nvSpPr>
-          <p:cNvPr id="3" name="Espace réservé du texte 2">
+          <p:cNvPr id="3" name="slot.subtitle-1">
             <a:extLst>
               <a:ext uri="{FF2B5EF4-FFF2-40B4-BE49-F238E27FC236}">
                 <a16:creationId xmlns:a16="http://schemas.microsoft.com/office/drawing/2014/main" id="{1675CAD6-9E20-BF63-6D76-BAE57FC8D65D}"/>
@@ -23151,7 +23151,7 @@
       </p:sp>
       <p:sp>
         <p:nvSpPr>
-          <p:cNvPr id="4" name="Espace réservé du texte 3">
+          <p:cNvPr id="4" name="slot.subtitle-2">
             <a:extLst>
               <a:ext uri="{FF2B5EF4-FFF2-40B4-BE49-F238E27FC236}">
                 <a16:creationId xmlns:a16="http://schemas.microsoft.com/office/drawing/2014/main" id="{103ADEE2-BB69-96C8-ECF0-FBB50E9BFEA1}"/>
@@ -23176,7 +23176,7 @@
       </p:sp>
       <p:sp>
         <p:nvSpPr>
-          <p:cNvPr id="5" name="Espace réservé du contenu 4">
+          <p:cNvPr id="5" name="slot.body">
             <a:extLst>
               <a:ext uri="{FF2B5EF4-FFF2-40B4-BE49-F238E27FC236}">
                 <a16:creationId xmlns:a16="http://schemas.microsoft.com/office/drawing/2014/main" id="{491EAC36-2BCB-A68E-5176-6D64BE2064F7}"/>
@@ -23201,7 +23201,7 @@
       </p:sp>
       <p:sp>
         <p:nvSpPr>
-          <p:cNvPr id="6" name="Espace réservé du numéro de diapositive 5">
+          <p:cNvPr id="6" name="slot.footer-page">
             <a:extLst>
               <a:ext uri="{FF2B5EF4-FFF2-40B4-BE49-F238E27FC236}">
                 <a16:creationId xmlns:a16="http://schemas.microsoft.com/office/drawing/2014/main" id="{0CF94BA1-CADC-3BB5-F63F-E912932EAE7F}"/>
@@ -23231,7 +23231,7 @@
       </p:sp>
       <p:sp>
         <p:nvSpPr>
-          <p:cNvPr id="7" name="Espace réservé du contenu 6">
+          <p:cNvPr id="7" name="slot.source">
             <a:extLst>
               <a:ext uri="{FF2B5EF4-FFF2-40B4-BE49-F238E27FC236}">
                 <a16:creationId xmlns:a16="http://schemas.microsoft.com/office/drawing/2014/main" id="{DA655AE8-4AB0-E991-4F30-5F6219C4F5C4}"/>
@@ -23286,7 +23286,7 @@
       </p:grpSpPr>
       <p:sp>
         <p:nvSpPr>
-          <p:cNvPr id="2" name="Titre 1">
+          <p:cNvPr id="2" name="slot.title">
             <a:extLst>
               <a:ext uri="{FF2B5EF4-FFF2-40B4-BE49-F238E27FC236}">
                 <a16:creationId xmlns:a16="http://schemas.microsoft.com/office/drawing/2014/main" id="{A6D17A19-CAE4-FA2F-080D-DA17849C5916}"/>
@@ -23311,7 +23311,7 @@
       </p:sp>
       <p:sp>
         <p:nvSpPr>
-          <p:cNvPr id="3" name="Espace réservé du texte 2">
+          <p:cNvPr id="3" name="slot.subtitle-1">
             <a:extLst>
               <a:ext uri="{FF2B5EF4-FFF2-40B4-BE49-F238E27FC236}">
                 <a16:creationId xmlns:a16="http://schemas.microsoft.com/office/drawing/2014/main" id="{F6D07D73-8ACA-BC20-1ADF-744E20D84DFA}"/>
@@ -23336,7 +23336,7 @@
       </p:sp>
       <p:sp>
         <p:nvSpPr>
-          <p:cNvPr id="4" name="Espace réservé du texte 3">
+          <p:cNvPr id="4" name="slot.subtitle-2">
             <a:extLst>
               <a:ext uri="{FF2B5EF4-FFF2-40B4-BE49-F238E27FC236}">
                 <a16:creationId xmlns:a16="http://schemas.microsoft.com/office/drawing/2014/main" id="{F6D383B4-B0C9-D409-F9B1-C9DF0C4ED39B}"/>
@@ -23361,7 +23361,7 @@
       </p:sp>
       <p:sp>
         <p:nvSpPr>
-          <p:cNvPr id="5" name="Espace réservé du contenu 4">
+          <p:cNvPr id="5" name="slot.body">
             <a:extLst>
               <a:ext uri="{FF2B5EF4-FFF2-40B4-BE49-F238E27FC236}">
                 <a16:creationId xmlns:a16="http://schemas.microsoft.com/office/drawing/2014/main" id="{8682BE46-4ADD-712E-693C-56A5CC4DE5D0}"/>
@@ -23386,7 +23386,7 @@
       </p:sp>
       <p:sp>
         <p:nvSpPr>
-          <p:cNvPr id="6" name="Espace réservé du numéro de diapositive 5">
+          <p:cNvPr id="6" name="slot.footer-page">
             <a:extLst>
               <a:ext uri="{FF2B5EF4-FFF2-40B4-BE49-F238E27FC236}">
                 <a16:creationId xmlns:a16="http://schemas.microsoft.com/office/drawing/2014/main" id="{BF5E0291-96D4-4AAD-9728-6D7882490A4F}"/>
@@ -23416,7 +23416,7 @@
       </p:sp>
       <p:sp>
         <p:nvSpPr>
-          <p:cNvPr id="7" name="Espace réservé du contenu 6">
+          <p:cNvPr id="7" name="slot.source">
             <a:extLst>
               <a:ext uri="{FF2B5EF4-FFF2-40B4-BE49-F238E27FC236}">
                 <a16:creationId xmlns:a16="http://schemas.microsoft.com/office/drawing/2014/main" id="{9414BBDE-DFC1-B1B1-CCB9-338AAFF2DAEB}"/>
@@ -23471,7 +23471,7 @@
       </p:grpSpPr>
       <p:sp>
         <p:nvSpPr>
-          <p:cNvPr id="2" name="Titre 1">
+          <p:cNvPr id="2" name="slot.title">
             <a:extLst>
               <a:ext uri="{FF2B5EF4-FFF2-40B4-BE49-F238E27FC236}">
                 <a16:creationId xmlns:a16="http://schemas.microsoft.com/office/drawing/2014/main" id="{C9860B66-4F97-16A2-5884-362D844D5186}"/>
@@ -23496,7 +23496,7 @@
       </p:sp>
       <p:sp>
         <p:nvSpPr>
-          <p:cNvPr id="3" name="Espace réservé du contenu 2">
+          <p:cNvPr id="3" name="slot.body-left">
             <a:extLst>
               <a:ext uri="{FF2B5EF4-FFF2-40B4-BE49-F238E27FC236}">
                 <a16:creationId xmlns:a16="http://schemas.microsoft.com/office/drawing/2014/main" id="{67D0980E-EC25-1F76-A0E7-024667E7F4A2}"/>
@@ -23521,7 +23521,7 @@
       </p:sp>
       <p:sp>
         <p:nvSpPr>
-          <p:cNvPr id="4" name="Espace réservé du numéro de diapositive 3">
+          <p:cNvPr id="4" name="slot.footer-page">
             <a:extLst>
               <a:ext uri="{FF2B5EF4-FFF2-40B4-BE49-F238E27FC236}">
                 <a16:creationId xmlns:a16="http://schemas.microsoft.com/office/drawing/2014/main" id="{EE0DA2D1-8508-AF08-321B-9DD6AB3193E9}"/>
@@ -23581,7 +23581,7 @@
       </p:grpSpPr>
       <p:sp>
         <p:nvSpPr>
-          <p:cNvPr id="2" name="Titre 1">
+          <p:cNvPr id="2" name="slot.title">
             <a:extLst>
               <a:ext uri="{FF2B5EF4-FFF2-40B4-BE49-F238E27FC236}">
                 <a16:creationId xmlns:a16="http://schemas.microsoft.com/office/drawing/2014/main" id="{8380E5D0-5026-EB71-0F67-47CE171B2266}"/>
@@ -23606,7 +23606,7 @@
       </p:sp>
       <p:sp>
         <p:nvSpPr>
-          <p:cNvPr id="3" name="Espace réservé du contenu 2">
+          <p:cNvPr id="3" name="slot.body-left">
             <a:extLst>
               <a:ext uri="{FF2B5EF4-FFF2-40B4-BE49-F238E27FC236}">
                 <a16:creationId xmlns:a16="http://schemas.microsoft.com/office/drawing/2014/main" id="{61F73BCE-7414-9647-031B-5E1E96589689}"/>
@@ -23631,7 +23631,7 @@
       </p:sp>
       <p:sp>
         <p:nvSpPr>
-          <p:cNvPr id="4" name="Espace réservé du numéro de diapositive 3">
+          <p:cNvPr id="4" name="slot.footer-page">
             <a:extLst>
               <a:ext uri="{FF2B5EF4-FFF2-40B4-BE49-F238E27FC236}">
                 <a16:creationId xmlns:a16="http://schemas.microsoft.com/office/drawing/2014/main" id="{CCB1391B-9E18-29A1-5039-16BED643ACED}"/>
@@ -23660,7 +23660,7 @@
       </p:sp>
       <p:sp>
         <p:nvSpPr>
-          <p:cNvPr id="5" name="Espace réservé du contenu 4">
+          <p:cNvPr id="5" name="slot.source">
             <a:extLst>
               <a:ext uri="{FF2B5EF4-FFF2-40B4-BE49-F238E27FC236}">
                 <a16:creationId xmlns:a16="http://schemas.microsoft.com/office/drawing/2014/main" id="{1FA08A71-20BC-F105-521A-0896E8DDCFEC}"/>
@@ -23715,7 +23715,7 @@
       </p:grpSpPr>
       <p:sp>
         <p:nvSpPr>
-          <p:cNvPr id="5" name="Titre 4">
+          <p:cNvPr id="5" name="slot.title">
             <a:extLst>
               <a:ext uri="{FF2B5EF4-FFF2-40B4-BE49-F238E27FC236}">
                 <a16:creationId xmlns:a16="http://schemas.microsoft.com/office/drawing/2014/main" id="{56AFBC28-EC91-4C6B-21FC-51452A2E0D5E}"/>
@@ -23740,7 +23740,7 @@
       </p:sp>
       <p:sp>
         <p:nvSpPr>
-          <p:cNvPr id="6" name="Espace réservé du contenu 5">
+          <p:cNvPr id="6" name="slot.source">
             <a:extLst>
               <a:ext uri="{FF2B5EF4-FFF2-40B4-BE49-F238E27FC236}">
                 <a16:creationId xmlns:a16="http://schemas.microsoft.com/office/drawing/2014/main" id="{7E4542B0-4EEC-FBEE-97E0-DC5D5E41CC6B}"/>
@@ -23765,7 +23765,7 @@
       </p:sp>
       <p:sp>
         <p:nvSpPr>
-          <p:cNvPr id="4" name="Espace réservé du numéro de diapositive 3">
+          <p:cNvPr id="4" name="slot.footer-page">
             <a:extLst>
               <a:ext uri="{FF2B5EF4-FFF2-40B4-BE49-F238E27FC236}">
                 <a16:creationId xmlns:a16="http://schemas.microsoft.com/office/drawing/2014/main" id="{6F138008-195A-9DF9-CDBA-4C150FA42D20}"/>
@@ -23824,7 +23824,7 @@
       </p:grpSpPr>
       <p:sp>
         <p:nvSpPr>
-          <p:cNvPr id="5" name="Titre 4">
+          <p:cNvPr id="5" name="slot.title">
             <a:extLst>
               <a:ext uri="{FF2B5EF4-FFF2-40B4-BE49-F238E27FC236}">
                 <a16:creationId xmlns:a16="http://schemas.microsoft.com/office/drawing/2014/main" id="{A78B4462-098A-BEFB-12A5-0B2130617E9E}"/>
@@ -23849,7 +23849,7 @@
       </p:sp>
       <p:sp>
         <p:nvSpPr>
-          <p:cNvPr id="6" name="Espace réservé du contenu 5">
+          <p:cNvPr id="6" name="slot.body-left">
             <a:extLst>
               <a:ext uri="{FF2B5EF4-FFF2-40B4-BE49-F238E27FC236}">
                 <a16:creationId xmlns:a16="http://schemas.microsoft.com/office/drawing/2014/main" id="{B2DBBAC5-9A7A-F9B1-7594-7A706C39E559}"/>
@@ -23874,7 +23874,7 @@
       </p:sp>
       <p:sp>
         <p:nvSpPr>
-          <p:cNvPr id="8" name="Sous-titre 7">
+          <p:cNvPr id="8" name="slot.subtitle">
             <a:extLst>
               <a:ext uri="{FF2B5EF4-FFF2-40B4-BE49-F238E27FC236}">
                 <a16:creationId xmlns:a16="http://schemas.microsoft.com/office/drawing/2014/main" id="{3C84BBC7-166F-A5FB-3EB4-D0E396C32405}"/>
@@ -23899,7 +23899,7 @@
       </p:sp>
       <p:sp>
         <p:nvSpPr>
-          <p:cNvPr id="4" name="Espace réservé du numéro de diapositive 3">
+          <p:cNvPr id="4" name="slot.footer-page">
             <a:extLst>
               <a:ext uri="{FF2B5EF4-FFF2-40B4-BE49-F238E27FC236}">
                 <a16:creationId xmlns:a16="http://schemas.microsoft.com/office/drawing/2014/main" id="{5C8601E0-E097-6F4C-1CB6-93C63DFC9604}"/>
@@ -23928,7 +23928,7 @@
       </p:sp>
       <p:sp>
         <p:nvSpPr>
-          <p:cNvPr id="7" name="Espace réservé du contenu 6">
+          <p:cNvPr id="7" name="slot.source">
             <a:extLst>
               <a:ext uri="{FF2B5EF4-FFF2-40B4-BE49-F238E27FC236}">
                 <a16:creationId xmlns:a16="http://schemas.microsoft.com/office/drawing/2014/main" id="{140ECFB3-DB91-97BB-BC3F-A41D4BC064F2}"/>
@@ -23951,12 +23951,158 @@
           </a:p>
         </p:txBody>
       </p:sp>
-      <p:sp>
-        <p:nvSpPr>
-          <p:cNvPr id="2" name="Espace réservé du contenu 5">
-            <a:extLst>
-              <a:ext uri="{FF2B5EF4-FFF2-40B4-BE49-F238E27FC236}">
-                <a16:creationId xmlns:a16="http://schemas.microsoft.com/office/drawing/2014/main" id="{1CDF13B5-C492-7E19-E47D-AF5DEC25A9CD}"/>
+    </p:spTree>
+    <p:extLst>
+      <p:ext uri="{BB962C8B-B14F-4D97-AF65-F5344CB8AC3E}">
+        <p14:creationId xmlns:p14="http://schemas.microsoft.com/office/powerpoint/2010/main" val="1849693561"/>
+      </p:ext>
+    </p:extLst>
+  </p:cSld>
+  <p:clrMapOvr>
+    <a:masterClrMapping/>
+  </p:clrMapOvr>
+</p:sld>
+</file>
+
+<file path=ppt/slides/slide7.xml><?xml version="1.0" encoding="utf-8"?>
+<p:sld xmlns:a="http://schemas.openxmlformats.org/drawingml/2006/main" xmlns:r="http://schemas.openxmlformats.org/officeDocument/2006/relationships" xmlns:p="http://schemas.openxmlformats.org/presentationml/2006/main">
+  <p:cSld>
+    <p:spTree>
+      <p:nvGrpSpPr>
+        <p:cNvPr id="1" name="">
+          <a:extLst>
+            <a:ext uri="{FF2B5EF4-FFF2-40B4-BE49-F238E27FC236}">
+              <a16:creationId xmlns:a16="http://schemas.microsoft.com/office/drawing/2014/main" id="{D61B41E7-9281-699C-9E57-E2B30557148A}"/>
+            </a:ext>
+          </a:extLst>
+        </p:cNvPr>
+        <p:cNvGrpSpPr/>
+        <p:nvPr/>
+      </p:nvGrpSpPr>
+      <p:grpSpPr>
+        <a:xfrm>
+          <a:off x="0" y="0"/>
+          <a:ext cx="0" cy="0"/>
+          <a:chOff x="0" y="0"/>
+          <a:chExt cx="0" cy="0"/>
+        </a:xfrm>
+      </p:grpSpPr>
+      <p:sp>
+        <p:nvSpPr>
+          <p:cNvPr id="11" name="slot.title">
+            <a:extLst>
+              <a:ext uri="{FF2B5EF4-FFF2-40B4-BE49-F238E27FC236}">
+                <a16:creationId xmlns:a16="http://schemas.microsoft.com/office/drawing/2014/main" id="{D1C5C7F7-F1BB-F645-9BFD-AC43D790CDB8}"/>
+              </a:ext>
+            </a:extLst>
+          </p:cNvPr>
+          <p:cNvSpPr>
+            <a:spLocks noGrp="1"/>
+          </p:cNvSpPr>
+          <p:nvPr>
+            <p:ph type="title"/>
+          </p:nvPr>
+        </p:nvSpPr>
+        <p:spPr/>
+        <p:txBody>
+          <a:bodyPr/>
+          <a:lstStyle/>
+          <a:p>
+            <a:endParaRPr lang="fr-FR"/>
+          </a:p>
+        </p:txBody>
+      </p:sp>
+      <p:graphicFrame>
+        <p:nvGraphicFramePr>
+          <p:cNvPr id="2" name="slot.chart">
+            <a:extLst>
+              <a:ext uri="{FF2B5EF4-FFF2-40B4-BE49-F238E27FC236}">
+                <a16:creationId xmlns:a16="http://schemas.microsoft.com/office/drawing/2014/main" id="{8B9A51C8-0821-CC8D-FE41-EC04560121EE}"/>
+              </a:ext>
+            </a:extLst>
+          </p:cNvPr>
+          <p:cNvGraphicFramePr>
+            <a:graphicFrameLocks noGrp="1"/>
+          </p:cNvGraphicFramePr>
+          <p:nvPr>
+            <p:ph idx="1"/>
+            <p:extLst>
+              <p:ext uri="{D42A27DB-BD31-4B8C-83A1-F6EECF244321}">
+                <p14:modId xmlns:p14="http://schemas.microsoft.com/office/powerpoint/2010/main" val="845708311"/>
+              </p:ext>
+            </p:extLst>
+          </p:nvPr>
+        </p:nvGraphicFramePr>
+        <p:xfrm>
+          <a:off x="550863" y="1622758"/>
+          <a:ext cx="5918303" cy="4614530"/>
+        </p:xfrm>
+        <a:graphic>
+          <a:graphicData uri="http://schemas.openxmlformats.org/drawingml/2006/chart">
+            <c:chart xmlns:c="http://schemas.openxmlformats.org/drawingml/2006/chart" xmlns:r="http://schemas.openxmlformats.org/officeDocument/2006/relationships" r:id="rId2"/>
+          </a:graphicData>
+        </a:graphic>
+      </p:graphicFrame>
+      <p:sp>
+        <p:nvSpPr>
+          <p:cNvPr id="4" name="slot.footer-page">
+            <a:extLst>
+              <a:ext uri="{FF2B5EF4-FFF2-40B4-BE49-F238E27FC236}">
+                <a16:creationId xmlns:a16="http://schemas.microsoft.com/office/drawing/2014/main" id="{ACA357C0-33AA-F8BB-B7C0-8DFBCE7B96BC}"/>
+              </a:ext>
+            </a:extLst>
+          </p:cNvPr>
+          <p:cNvSpPr>
+            <a:spLocks noGrp="1"/>
+          </p:cNvSpPr>
+          <p:nvPr>
+            <p:ph type="sldNum" sz="quarter" idx="12"/>
+          </p:nvPr>
+        </p:nvSpPr>
+        <p:spPr/>
+        <p:txBody>
+          <a:bodyPr/>
+          <a:lstStyle/>
+          <a:p>
+            <a:fld id="{27D40A0C-669C-7745-8A4B-A0A60E70B612}" type="slidenum">
+              <a:rPr lang="fr-FR" smtClean="0"/>
+              <a:t>7</a:t>
+            </a:fld>
+            <a:endParaRPr lang="fr-FR"/>
+          </a:p>
+        </p:txBody>
+      </p:sp>
+      <p:sp>
+        <p:nvSpPr>
+          <p:cNvPr id="12" name="slot.source">
+            <a:extLst>
+              <a:ext uri="{FF2B5EF4-FFF2-40B4-BE49-F238E27FC236}">
+                <a16:creationId xmlns:a16="http://schemas.microsoft.com/office/drawing/2014/main" id="{3C2A6227-568F-E980-735B-9E2C7525D872}"/>
+              </a:ext>
+            </a:extLst>
+          </p:cNvPr>
+          <p:cNvSpPr>
+            <a:spLocks noGrp="1"/>
+          </p:cNvSpPr>
+          <p:nvPr>
+            <p:ph sz="quarter" idx="18"/>
+          </p:nvPr>
+        </p:nvSpPr>
+        <p:spPr/>
+        <p:txBody>
+          <a:bodyPr/>
+          <a:lstStyle/>
+          <a:p>
+            <a:endParaRPr lang="fr-FR"/>
+          </a:p>
+        </p:txBody>
+      </p:sp>
+      <p:sp>
+        <p:nvSpPr>
+          <p:cNvPr id="3" name="slot.body-right">
+            <a:extLst>
+              <a:ext uri="{FF2B5EF4-FFF2-40B4-BE49-F238E27FC236}">
+                <a16:creationId xmlns:a16="http://schemas.microsoft.com/office/drawing/2014/main" id="{8D0B1F2F-2950-2FED-2CF1-55AA8817ED3F}"/>
               </a:ext>
             </a:extLst>
           </p:cNvPr>
@@ -23967,8 +24113,8 @@
         </p:nvSpPr>
         <p:spPr>
           <a:xfrm>
-            <a:off x="1947271" y="2356821"/>
-            <a:ext cx="11090275" cy="4723984"/>
+            <a:off x="6882254" y="1622758"/>
+            <a:ext cx="4804303" cy="4448433"/>
           </a:xfrm>
           <a:prstGeom prst="rect">
             <a:avLst/>
@@ -24184,165 +24330,18 @@
           </a:lstStyle>
           <a:p>
             <a:r>
-              <a:rPr lang="fr-FR" dirty="0" err="1"/>
-              <a:t>qsdf</a:t>
-            </a:r>
-            <a:endParaRPr lang="fr-FR" dirty="0"/>
-          </a:p>
-        </p:txBody>
-      </p:sp>
-    </p:spTree>
-    <p:extLst>
-      <p:ext uri="{BB962C8B-B14F-4D97-AF65-F5344CB8AC3E}">
-        <p14:creationId xmlns:p14="http://schemas.microsoft.com/office/powerpoint/2010/main" val="1849693561"/>
-      </p:ext>
-    </p:extLst>
-  </p:cSld>
-  <p:clrMapOvr>
-    <a:masterClrMapping/>
-  </p:clrMapOvr>
-</p:sld>
-</file>
-
-<file path=ppt/slides/slide7.xml><?xml version="1.0" encoding="utf-8"?>
-<p:sld xmlns:a="http://schemas.openxmlformats.org/drawingml/2006/main" xmlns:r="http://schemas.openxmlformats.org/officeDocument/2006/relationships" xmlns:p="http://schemas.openxmlformats.org/presentationml/2006/main">
-  <p:cSld>
-    <p:spTree>
-      <p:nvGrpSpPr>
-        <p:cNvPr id="1" name="">
-          <a:extLst>
-            <a:ext uri="{FF2B5EF4-FFF2-40B4-BE49-F238E27FC236}">
-              <a16:creationId xmlns:a16="http://schemas.microsoft.com/office/drawing/2014/main" id="{D61B41E7-9281-699C-9E57-E2B30557148A}"/>
-            </a:ext>
-          </a:extLst>
-        </p:cNvPr>
-        <p:cNvGrpSpPr/>
-        <p:nvPr/>
-      </p:nvGrpSpPr>
-      <p:grpSpPr>
-        <a:xfrm>
-          <a:off x="0" y="0"/>
-          <a:ext cx="0" cy="0"/>
-          <a:chOff x="0" y="0"/>
-          <a:chExt cx="0" cy="0"/>
-        </a:xfrm>
-      </p:grpSpPr>
-      <p:sp>
-        <p:nvSpPr>
-          <p:cNvPr id="11" name="Titre 10">
-            <a:extLst>
-              <a:ext uri="{FF2B5EF4-FFF2-40B4-BE49-F238E27FC236}">
-                <a16:creationId xmlns:a16="http://schemas.microsoft.com/office/drawing/2014/main" id="{D1C5C7F7-F1BB-F645-9BFD-AC43D790CDB8}"/>
-              </a:ext>
-            </a:extLst>
-          </p:cNvPr>
-          <p:cNvSpPr>
-            <a:spLocks noGrp="1"/>
-          </p:cNvSpPr>
-          <p:nvPr>
-            <p:ph type="title"/>
-          </p:nvPr>
-        </p:nvSpPr>
-        <p:spPr/>
-        <p:txBody>
-          <a:bodyPr/>
-          <a:lstStyle/>
-          <a:p>
-            <a:endParaRPr lang="fr-FR"/>
-          </a:p>
-        </p:txBody>
-      </p:sp>
-      <p:graphicFrame>
-        <p:nvGraphicFramePr>
-          <p:cNvPr id="2" name="Espace réservé du contenu 1">
-            <a:extLst>
-              <a:ext uri="{FF2B5EF4-FFF2-40B4-BE49-F238E27FC236}">
-                <a16:creationId xmlns:a16="http://schemas.microsoft.com/office/drawing/2014/main" id="{8B9A51C8-0821-CC8D-FE41-EC04560121EE}"/>
-              </a:ext>
-            </a:extLst>
-          </p:cNvPr>
-          <p:cNvGraphicFramePr>
-            <a:graphicFrameLocks noGrp="1"/>
-          </p:cNvGraphicFramePr>
-          <p:nvPr>
-            <p:ph idx="1"/>
-            <p:extLst>
-              <p:ext uri="{D42A27DB-BD31-4B8C-83A1-F6EECF244321}">
-                <p14:modId xmlns:p14="http://schemas.microsoft.com/office/powerpoint/2010/main" val="845708311"/>
-              </p:ext>
-            </p:extLst>
-          </p:nvPr>
-        </p:nvGraphicFramePr>
-        <p:xfrm>
-          <a:off x="550863" y="1622758"/>
-          <a:ext cx="5918303" cy="4614530"/>
-        </p:xfrm>
-        <a:graphic>
-          <a:graphicData uri="http://schemas.openxmlformats.org/drawingml/2006/chart">
-            <c:chart xmlns:c="http://schemas.openxmlformats.org/drawingml/2006/chart" xmlns:r="http://schemas.openxmlformats.org/officeDocument/2006/relationships" r:id="rId2"/>
-          </a:graphicData>
-        </a:graphic>
-      </p:graphicFrame>
-      <p:sp>
-        <p:nvSpPr>
-          <p:cNvPr id="4" name="Espace réservé du numéro de diapositive 3">
-            <a:extLst>
-              <a:ext uri="{FF2B5EF4-FFF2-40B4-BE49-F238E27FC236}">
-                <a16:creationId xmlns:a16="http://schemas.microsoft.com/office/drawing/2014/main" id="{ACA357C0-33AA-F8BB-B7C0-8DFBCE7B96BC}"/>
-              </a:ext>
-            </a:extLst>
-          </p:cNvPr>
-          <p:cNvSpPr>
-            <a:spLocks noGrp="1"/>
-          </p:cNvSpPr>
-          <p:nvPr>
-            <p:ph type="sldNum" sz="quarter" idx="12"/>
-          </p:nvPr>
-        </p:nvSpPr>
-        <p:spPr/>
-        <p:txBody>
-          <a:bodyPr/>
-          <a:lstStyle/>
-          <a:p>
-            <a:fld id="{27D40A0C-669C-7745-8A4B-A0A60E70B612}" type="slidenum">
-              <a:rPr lang="fr-FR" smtClean="0"/>
-              <a:t>7</a:t>
-            </a:fld>
-            <a:endParaRPr lang="fr-FR"/>
-          </a:p>
-        </p:txBody>
-      </p:sp>
-      <p:sp>
-        <p:nvSpPr>
-          <p:cNvPr id="12" name="Espace réservé du contenu 11">
-            <a:extLst>
-              <a:ext uri="{FF2B5EF4-FFF2-40B4-BE49-F238E27FC236}">
-                <a16:creationId xmlns:a16="http://schemas.microsoft.com/office/drawing/2014/main" id="{3C2A6227-568F-E980-735B-9E2C7525D872}"/>
-              </a:ext>
-            </a:extLst>
-          </p:cNvPr>
-          <p:cNvSpPr>
-            <a:spLocks noGrp="1"/>
-          </p:cNvSpPr>
-          <p:nvPr>
-            <p:ph sz="quarter" idx="18"/>
-          </p:nvPr>
-        </p:nvSpPr>
-        <p:spPr/>
-        <p:txBody>
-          <a:bodyPr/>
-          <a:lstStyle/>
-          <a:p>
-            <a:endParaRPr lang="fr-FR"/>
-          </a:p>
-        </p:txBody>
-      </p:sp>
-      <p:sp>
-        <p:nvSpPr>
-          <p:cNvPr id="3" name="Espace réservé du contenu 5">
-            <a:extLst>
-              <a:ext uri="{FF2B5EF4-FFF2-40B4-BE49-F238E27FC236}">
-                <a16:creationId xmlns:a16="http://schemas.microsoft.com/office/drawing/2014/main" id="{8D0B1F2F-2950-2FED-2CF1-55AA8817ED3F}"/>
+              <a:rPr lang="fr-FR" dirty="0"/>
+              <a:t>Comment</a:t>
+            </a:r>
+          </a:p>
+        </p:txBody>
+      </p:sp>
+      <p:sp>
+        <p:nvSpPr>
+          <p:cNvPr id="13" name="slot.chart-title">
+            <a:extLst>
+              <a:ext uri="{FF2B5EF4-FFF2-40B4-BE49-F238E27FC236}">
+                <a16:creationId xmlns:a16="http://schemas.microsoft.com/office/drawing/2014/main" id="{945984DF-2BDC-B335-76E3-4D1A5C06727A}"/>
               </a:ext>
             </a:extLst>
           </p:cNvPr>
@@ -24353,8 +24352,8 @@
         </p:nvSpPr>
         <p:spPr>
           <a:xfrm>
-            <a:off x="6882254" y="1622758"/>
-            <a:ext cx="4804303" cy="4448433"/>
+            <a:off x="550863" y="1204783"/>
+            <a:ext cx="5636292" cy="275101"/>
           </a:xfrm>
           <a:prstGeom prst="rect">
             <a:avLst/>
@@ -24569,19 +24568,184 @@
             </a:lvl9pPr>
           </a:lstStyle>
           <a:p>
+            <a:pPr marL="3175" indent="0">
+              <a:buNone/>
+            </a:pPr>
+            <a:r>
+              <a:rPr lang="fr-FR" b="1" dirty="0"/>
+              <a:t>Chart </a:t>
+            </a:r>
+            <a:r>
+              <a:rPr lang="fr-FR" b="1" dirty="0" err="1"/>
+              <a:t>name</a:t>
+            </a:r>
             <a:r>
               <a:rPr lang="fr-FR" dirty="0"/>
-              <a:t>Comment</a:t>
-            </a:r>
-          </a:p>
-        </p:txBody>
-      </p:sp>
-      <p:sp>
-        <p:nvSpPr>
-          <p:cNvPr id="13" name="Espace réservé du contenu 5">
-            <a:extLst>
-              <a:ext uri="{FF2B5EF4-FFF2-40B4-BE49-F238E27FC236}">
-                <a16:creationId xmlns:a16="http://schemas.microsoft.com/office/drawing/2014/main" id="{945984DF-2BDC-B335-76E3-4D1A5C06727A}"/>
+              <a:t>, </a:t>
+            </a:r>
+            <a:r>
+              <a:rPr lang="fr-FR" i="1" dirty="0">
+                <a:solidFill>
+                  <a:schemeClr val="accent6"/>
+                </a:solidFill>
+              </a:rPr>
+              <a:t>unit</a:t>
+            </a:r>
+          </a:p>
+        </p:txBody>
+      </p:sp>
+    </p:spTree>
+    <p:extLst>
+      <p:ext uri="{BB962C8B-B14F-4D97-AF65-F5344CB8AC3E}">
+        <p14:creationId xmlns:p14="http://schemas.microsoft.com/office/powerpoint/2010/main" val="3710206233"/>
+      </p:ext>
+    </p:extLst>
+  </p:cSld>
+  <p:clrMapOvr>
+    <a:masterClrMapping/>
+  </p:clrMapOvr>
+</p:sld>
+</file>
+
+<file path=ppt/slides/slide8.xml><?xml version="1.0" encoding="utf-8"?>
+<p:sld xmlns:a="http://schemas.openxmlformats.org/drawingml/2006/main" xmlns:r="http://schemas.openxmlformats.org/officeDocument/2006/relationships" xmlns:p="http://schemas.openxmlformats.org/presentationml/2006/main">
+  <p:cSld>
+    <p:spTree>
+      <p:nvGrpSpPr>
+        <p:cNvPr id="1" name="">
+          <a:extLst>
+            <a:ext uri="{FF2B5EF4-FFF2-40B4-BE49-F238E27FC236}">
+              <a16:creationId xmlns:a16="http://schemas.microsoft.com/office/drawing/2014/main" id="{B0AB688E-47CF-1959-E687-9402B2CA2A73}"/>
+            </a:ext>
+          </a:extLst>
+        </p:cNvPr>
+        <p:cNvGrpSpPr/>
+        <p:nvPr/>
+      </p:nvGrpSpPr>
+      <p:grpSpPr>
+        <a:xfrm>
+          <a:off x="0" y="0"/>
+          <a:ext cx="0" cy="0"/>
+          <a:chOff x="0" y="0"/>
+          <a:chExt cx="0" cy="0"/>
+        </a:xfrm>
+      </p:grpSpPr>
+      <p:sp>
+        <p:nvSpPr>
+          <p:cNvPr id="11" name="slot.title">
+            <a:extLst>
+              <a:ext uri="{FF2B5EF4-FFF2-40B4-BE49-F238E27FC236}">
+                <a16:creationId xmlns:a16="http://schemas.microsoft.com/office/drawing/2014/main" id="{9BD6B52A-FF19-78CF-A935-E133AB89A4BB}"/>
+              </a:ext>
+            </a:extLst>
+          </p:cNvPr>
+          <p:cNvSpPr>
+            <a:spLocks noGrp="1"/>
+          </p:cNvSpPr>
+          <p:nvPr>
+            <p:ph type="title"/>
+          </p:nvPr>
+        </p:nvSpPr>
+        <p:spPr/>
+        <p:txBody>
+          <a:bodyPr/>
+          <a:lstStyle/>
+          <a:p>
+            <a:endParaRPr lang="fr-FR"/>
+          </a:p>
+        </p:txBody>
+      </p:sp>
+      <p:graphicFrame>
+        <p:nvGraphicFramePr>
+          <p:cNvPr id="2" name="slot.chart">
+            <a:extLst>
+              <a:ext uri="{FF2B5EF4-FFF2-40B4-BE49-F238E27FC236}">
+                <a16:creationId xmlns:a16="http://schemas.microsoft.com/office/drawing/2014/main" id="{43A9A298-18DF-1A43-C8A6-AF4C2F808ABB}"/>
+              </a:ext>
+            </a:extLst>
+          </p:cNvPr>
+          <p:cNvGraphicFramePr>
+            <a:graphicFrameLocks noGrp="1"/>
+          </p:cNvGraphicFramePr>
+          <p:nvPr>
+            <p:ph idx="1"/>
+            <p:extLst>
+              <p:ext uri="{D42A27DB-BD31-4B8C-83A1-F6EECF244321}">
+                <p14:modId xmlns:p14="http://schemas.microsoft.com/office/powerpoint/2010/main" val="356047063"/>
+              </p:ext>
+            </p:extLst>
+          </p:nvPr>
+        </p:nvGraphicFramePr>
+        <p:xfrm>
+          <a:off x="550863" y="1622758"/>
+          <a:ext cx="5935395" cy="4614530"/>
+        </p:xfrm>
+        <a:graphic>
+          <a:graphicData uri="http://schemas.openxmlformats.org/drawingml/2006/chart">
+            <c:chart xmlns:c="http://schemas.openxmlformats.org/drawingml/2006/chart" xmlns:r="http://schemas.openxmlformats.org/officeDocument/2006/relationships" r:id="rId2"/>
+          </a:graphicData>
+        </a:graphic>
+      </p:graphicFrame>
+      <p:sp>
+        <p:nvSpPr>
+          <p:cNvPr id="4" name="slot.footer-page">
+            <a:extLst>
+              <a:ext uri="{FF2B5EF4-FFF2-40B4-BE49-F238E27FC236}">
+                <a16:creationId xmlns:a16="http://schemas.microsoft.com/office/drawing/2014/main" id="{F4B4F2E0-11FD-0E6A-3E72-DE65E7BF7B3C}"/>
+              </a:ext>
+            </a:extLst>
+          </p:cNvPr>
+          <p:cNvSpPr>
+            <a:spLocks noGrp="1"/>
+          </p:cNvSpPr>
+          <p:nvPr>
+            <p:ph type="sldNum" sz="quarter" idx="12"/>
+          </p:nvPr>
+        </p:nvSpPr>
+        <p:spPr/>
+        <p:txBody>
+          <a:bodyPr/>
+          <a:lstStyle/>
+          <a:p>
+            <a:fld id="{27D40A0C-669C-7745-8A4B-A0A60E70B612}" type="slidenum">
+              <a:rPr lang="fr-FR" smtClean="0"/>
+              <a:t>8</a:t>
+            </a:fld>
+            <a:endParaRPr lang="fr-FR"/>
+          </a:p>
+        </p:txBody>
+      </p:sp>
+      <p:sp>
+        <p:nvSpPr>
+          <p:cNvPr id="12" name="slot.source">
+            <a:extLst>
+              <a:ext uri="{FF2B5EF4-FFF2-40B4-BE49-F238E27FC236}">
+                <a16:creationId xmlns:a16="http://schemas.microsoft.com/office/drawing/2014/main" id="{4FFBAF71-AAF1-3782-E97A-9AE70D79E6AF}"/>
+              </a:ext>
+            </a:extLst>
+          </p:cNvPr>
+          <p:cNvSpPr>
+            <a:spLocks noGrp="1"/>
+          </p:cNvSpPr>
+          <p:nvPr>
+            <p:ph sz="quarter" idx="18"/>
+          </p:nvPr>
+        </p:nvSpPr>
+        <p:spPr/>
+        <p:txBody>
+          <a:bodyPr/>
+          <a:lstStyle/>
+          <a:p>
+            <a:endParaRPr lang="fr-FR"/>
+          </a:p>
+        </p:txBody>
+      </p:sp>
+      <p:sp>
+        <p:nvSpPr>
+          <p:cNvPr id="10" name="slot.body-right">
+            <a:extLst>
+              <a:ext uri="{FF2B5EF4-FFF2-40B4-BE49-F238E27FC236}">
+                <a16:creationId xmlns:a16="http://schemas.microsoft.com/office/drawing/2014/main" id="{E47B0D7A-5F90-F7D3-A811-E1A7AEE96FB1}"/>
               </a:ext>
             </a:extLst>
           </p:cNvPr>
@@ -24592,8 +24756,8 @@
         </p:nvSpPr>
         <p:spPr>
           <a:xfrm>
-            <a:off x="550863" y="1204783"/>
-            <a:ext cx="5636292" cy="275101"/>
+            <a:off x="6882254" y="1622758"/>
+            <a:ext cx="4804303" cy="4448433"/>
           </a:xfrm>
           <a:prstGeom prst="rect">
             <a:avLst/>
@@ -24808,184 +24972,19 @@
             </a:lvl9pPr>
           </a:lstStyle>
           <a:p>
-            <a:pPr marL="3175" indent="0">
-              <a:buNone/>
-            </a:pPr>
-            <a:r>
-              <a:rPr lang="fr-FR" b="1" dirty="0"/>
-              <a:t>Chart </a:t>
-            </a:r>
-            <a:r>
-              <a:rPr lang="fr-FR" b="1" dirty="0" err="1"/>
-              <a:t>name</a:t>
-            </a:r>
             <a:r>
               <a:rPr lang="fr-FR" dirty="0"/>
-              <a:t>, </a:t>
-            </a:r>
-            <a:r>
-              <a:rPr lang="fr-FR" i="1" dirty="0">
-                <a:solidFill>
-                  <a:schemeClr val="accent6"/>
-                </a:solidFill>
-              </a:rPr>
-              <a:t>unit</a:t>
-            </a:r>
-          </a:p>
-        </p:txBody>
-      </p:sp>
-    </p:spTree>
-    <p:extLst>
-      <p:ext uri="{BB962C8B-B14F-4D97-AF65-F5344CB8AC3E}">
-        <p14:creationId xmlns:p14="http://schemas.microsoft.com/office/powerpoint/2010/main" val="3710206233"/>
-      </p:ext>
-    </p:extLst>
-  </p:cSld>
-  <p:clrMapOvr>
-    <a:masterClrMapping/>
-  </p:clrMapOvr>
-</p:sld>
-</file>
-
-<file path=ppt/slides/slide8.xml><?xml version="1.0" encoding="utf-8"?>
-<p:sld xmlns:a="http://schemas.openxmlformats.org/drawingml/2006/main" xmlns:r="http://schemas.openxmlformats.org/officeDocument/2006/relationships" xmlns:p="http://schemas.openxmlformats.org/presentationml/2006/main">
-  <p:cSld>
-    <p:spTree>
-      <p:nvGrpSpPr>
-        <p:cNvPr id="1" name="">
-          <a:extLst>
-            <a:ext uri="{FF2B5EF4-FFF2-40B4-BE49-F238E27FC236}">
-              <a16:creationId xmlns:a16="http://schemas.microsoft.com/office/drawing/2014/main" id="{B0AB688E-47CF-1959-E687-9402B2CA2A73}"/>
-            </a:ext>
-          </a:extLst>
-        </p:cNvPr>
-        <p:cNvGrpSpPr/>
-        <p:nvPr/>
-      </p:nvGrpSpPr>
-      <p:grpSpPr>
-        <a:xfrm>
-          <a:off x="0" y="0"/>
-          <a:ext cx="0" cy="0"/>
-          <a:chOff x="0" y="0"/>
-          <a:chExt cx="0" cy="0"/>
-        </a:xfrm>
-      </p:grpSpPr>
-      <p:sp>
-        <p:nvSpPr>
-          <p:cNvPr id="11" name="Titre 10">
-            <a:extLst>
-              <a:ext uri="{FF2B5EF4-FFF2-40B4-BE49-F238E27FC236}">
-                <a16:creationId xmlns:a16="http://schemas.microsoft.com/office/drawing/2014/main" id="{9BD6B52A-FF19-78CF-A935-E133AB89A4BB}"/>
-              </a:ext>
-            </a:extLst>
-          </p:cNvPr>
-          <p:cNvSpPr>
-            <a:spLocks noGrp="1"/>
-          </p:cNvSpPr>
-          <p:nvPr>
-            <p:ph type="title"/>
-          </p:nvPr>
-        </p:nvSpPr>
-        <p:spPr/>
-        <p:txBody>
-          <a:bodyPr/>
-          <a:lstStyle/>
-          <a:p>
-            <a:endParaRPr lang="fr-FR"/>
-          </a:p>
-        </p:txBody>
-      </p:sp>
-      <p:graphicFrame>
-        <p:nvGraphicFramePr>
-          <p:cNvPr id="2" name="Espace réservé du contenu 1">
-            <a:extLst>
-              <a:ext uri="{FF2B5EF4-FFF2-40B4-BE49-F238E27FC236}">
-                <a16:creationId xmlns:a16="http://schemas.microsoft.com/office/drawing/2014/main" id="{43A9A298-18DF-1A43-C8A6-AF4C2F808ABB}"/>
-              </a:ext>
-            </a:extLst>
-          </p:cNvPr>
-          <p:cNvGraphicFramePr>
-            <a:graphicFrameLocks noGrp="1"/>
-          </p:cNvGraphicFramePr>
-          <p:nvPr>
-            <p:ph idx="1"/>
-            <p:extLst>
-              <p:ext uri="{D42A27DB-BD31-4B8C-83A1-F6EECF244321}">
-                <p14:modId xmlns:p14="http://schemas.microsoft.com/office/powerpoint/2010/main" val="356047063"/>
-              </p:ext>
-            </p:extLst>
-          </p:nvPr>
-        </p:nvGraphicFramePr>
-        <p:xfrm>
-          <a:off x="550863" y="1622758"/>
-          <a:ext cx="5935395" cy="4614530"/>
-        </p:xfrm>
-        <a:graphic>
-          <a:graphicData uri="http://schemas.openxmlformats.org/drawingml/2006/chart">
-            <c:chart xmlns:c="http://schemas.openxmlformats.org/drawingml/2006/chart" xmlns:r="http://schemas.openxmlformats.org/officeDocument/2006/relationships" r:id="rId2"/>
-          </a:graphicData>
-        </a:graphic>
-      </p:graphicFrame>
-      <p:sp>
-        <p:nvSpPr>
-          <p:cNvPr id="4" name="Espace réservé du numéro de diapositive 3">
-            <a:extLst>
-              <a:ext uri="{FF2B5EF4-FFF2-40B4-BE49-F238E27FC236}">
-                <a16:creationId xmlns:a16="http://schemas.microsoft.com/office/drawing/2014/main" id="{F4B4F2E0-11FD-0E6A-3E72-DE65E7BF7B3C}"/>
-              </a:ext>
-            </a:extLst>
-          </p:cNvPr>
-          <p:cNvSpPr>
-            <a:spLocks noGrp="1"/>
-          </p:cNvSpPr>
-          <p:nvPr>
-            <p:ph type="sldNum" sz="quarter" idx="12"/>
-          </p:nvPr>
-        </p:nvSpPr>
-        <p:spPr/>
-        <p:txBody>
-          <a:bodyPr/>
-          <a:lstStyle/>
-          <a:p>
-            <a:fld id="{27D40A0C-669C-7745-8A4B-A0A60E70B612}" type="slidenum">
-              <a:rPr lang="fr-FR" smtClean="0"/>
-              <a:t>8</a:t>
-            </a:fld>
-            <a:endParaRPr lang="fr-FR"/>
-          </a:p>
-        </p:txBody>
-      </p:sp>
-      <p:sp>
-        <p:nvSpPr>
-          <p:cNvPr id="12" name="Espace réservé du contenu 11">
-            <a:extLst>
-              <a:ext uri="{FF2B5EF4-FFF2-40B4-BE49-F238E27FC236}">
-                <a16:creationId xmlns:a16="http://schemas.microsoft.com/office/drawing/2014/main" id="{4FFBAF71-AAF1-3782-E97A-9AE70D79E6AF}"/>
-              </a:ext>
-            </a:extLst>
-          </p:cNvPr>
-          <p:cNvSpPr>
-            <a:spLocks noGrp="1"/>
-          </p:cNvSpPr>
-          <p:nvPr>
-            <p:ph sz="quarter" idx="18"/>
-          </p:nvPr>
-        </p:nvSpPr>
-        <p:spPr/>
-        <p:txBody>
-          <a:bodyPr/>
-          <a:lstStyle/>
-          <a:p>
-            <a:endParaRPr lang="fr-FR"/>
-          </a:p>
-        </p:txBody>
-      </p:sp>
-      <p:sp>
-        <p:nvSpPr>
-          <p:cNvPr id="10" name="Espace réservé du contenu 5">
-            <a:extLst>
-              <a:ext uri="{FF2B5EF4-FFF2-40B4-BE49-F238E27FC236}">
-                <a16:creationId xmlns:a16="http://schemas.microsoft.com/office/drawing/2014/main" id="{E47B0D7A-5F90-F7D3-A811-E1A7AEE96FB1}"/>
+              <a:t>Comment</a:t>
+            </a:r>
+          </a:p>
+        </p:txBody>
+      </p:sp>
+      <p:sp>
+        <p:nvSpPr>
+          <p:cNvPr id="13" name="slot.chart-title">
+            <a:extLst>
+              <a:ext uri="{FF2B5EF4-FFF2-40B4-BE49-F238E27FC236}">
+                <a16:creationId xmlns:a16="http://schemas.microsoft.com/office/drawing/2014/main" id="{997B11C3-8955-D64A-329E-B0AA8D59C74C}"/>
               </a:ext>
             </a:extLst>
           </p:cNvPr>
@@ -24996,8 +24995,8 @@
         </p:nvSpPr>
         <p:spPr>
           <a:xfrm>
-            <a:off x="6882254" y="1622758"/>
-            <a:ext cx="4804303" cy="4448433"/>
+            <a:off x="550863" y="1204783"/>
+            <a:ext cx="5636292" cy="275101"/>
           </a:xfrm>
           <a:prstGeom prst="rect">
             <a:avLst/>
@@ -25212,19 +25211,184 @@
             </a:lvl9pPr>
           </a:lstStyle>
           <a:p>
+            <a:pPr marL="3175" indent="0">
+              <a:buNone/>
+            </a:pPr>
+            <a:r>
+              <a:rPr lang="fr-FR" b="1" dirty="0"/>
+              <a:t>Chart </a:t>
+            </a:r>
+            <a:r>
+              <a:rPr lang="fr-FR" b="1" dirty="0" err="1"/>
+              <a:t>name</a:t>
+            </a:r>
             <a:r>
               <a:rPr lang="fr-FR" dirty="0"/>
-              <a:t>Comment</a:t>
-            </a:r>
-          </a:p>
-        </p:txBody>
-      </p:sp>
-      <p:sp>
-        <p:nvSpPr>
-          <p:cNvPr id="13" name="Espace réservé du contenu 5">
-            <a:extLst>
-              <a:ext uri="{FF2B5EF4-FFF2-40B4-BE49-F238E27FC236}">
-                <a16:creationId xmlns:a16="http://schemas.microsoft.com/office/drawing/2014/main" id="{997B11C3-8955-D64A-329E-B0AA8D59C74C}"/>
+              <a:t>, </a:t>
+            </a:r>
+            <a:r>
+              <a:rPr lang="fr-FR" i="1" dirty="0">
+                <a:solidFill>
+                  <a:schemeClr val="accent6"/>
+                </a:solidFill>
+              </a:rPr>
+              <a:t>unit</a:t>
+            </a:r>
+          </a:p>
+        </p:txBody>
+      </p:sp>
+    </p:spTree>
+    <p:extLst>
+      <p:ext uri="{BB962C8B-B14F-4D97-AF65-F5344CB8AC3E}">
+        <p14:creationId xmlns:p14="http://schemas.microsoft.com/office/powerpoint/2010/main" val="3525562660"/>
+      </p:ext>
+    </p:extLst>
+  </p:cSld>
+  <p:clrMapOvr>
+    <a:masterClrMapping/>
+  </p:clrMapOvr>
+</p:sld>
+</file>
+
+<file path=ppt/slides/slide9.xml><?xml version="1.0" encoding="utf-8"?>
+<p:sld xmlns:a="http://schemas.openxmlformats.org/drawingml/2006/main" xmlns:r="http://schemas.openxmlformats.org/officeDocument/2006/relationships" xmlns:p="http://schemas.openxmlformats.org/presentationml/2006/main">
+  <p:cSld>
+    <p:spTree>
+      <p:nvGrpSpPr>
+        <p:cNvPr id="1" name="">
+          <a:extLst>
+            <a:ext uri="{FF2B5EF4-FFF2-40B4-BE49-F238E27FC236}">
+              <a16:creationId xmlns:a16="http://schemas.microsoft.com/office/drawing/2014/main" id="{977B962F-0DD9-4D69-1322-91DEA5F6127C}"/>
+            </a:ext>
+          </a:extLst>
+        </p:cNvPr>
+        <p:cNvGrpSpPr/>
+        <p:nvPr/>
+      </p:nvGrpSpPr>
+      <p:grpSpPr>
+        <a:xfrm>
+          <a:off x="0" y="0"/>
+          <a:ext cx="0" cy="0"/>
+          <a:chOff x="0" y="0"/>
+          <a:chExt cx="0" cy="0"/>
+        </a:xfrm>
+      </p:grpSpPr>
+      <p:sp>
+        <p:nvSpPr>
+          <p:cNvPr id="11" name="slot.title">
+            <a:extLst>
+              <a:ext uri="{FF2B5EF4-FFF2-40B4-BE49-F238E27FC236}">
+                <a16:creationId xmlns:a16="http://schemas.microsoft.com/office/drawing/2014/main" id="{E6BA610B-9EE9-45A1-B28B-47B1ECDE0349}"/>
+              </a:ext>
+            </a:extLst>
+          </p:cNvPr>
+          <p:cNvSpPr>
+            <a:spLocks noGrp="1"/>
+          </p:cNvSpPr>
+          <p:nvPr>
+            <p:ph type="title"/>
+          </p:nvPr>
+        </p:nvSpPr>
+        <p:spPr/>
+        <p:txBody>
+          <a:bodyPr/>
+          <a:lstStyle/>
+          <a:p>
+            <a:endParaRPr lang="fr-FR"/>
+          </a:p>
+        </p:txBody>
+      </p:sp>
+      <p:graphicFrame>
+        <p:nvGraphicFramePr>
+          <p:cNvPr id="2" name="slot.chart">
+            <a:extLst>
+              <a:ext uri="{FF2B5EF4-FFF2-40B4-BE49-F238E27FC236}">
+                <a16:creationId xmlns:a16="http://schemas.microsoft.com/office/drawing/2014/main" id="{9C81EFE1-097D-C671-2766-C25389738490}"/>
+              </a:ext>
+            </a:extLst>
+          </p:cNvPr>
+          <p:cNvGraphicFramePr>
+            <a:graphicFrameLocks noGrp="1"/>
+          </p:cNvGraphicFramePr>
+          <p:nvPr>
+            <p:ph idx="1"/>
+            <p:extLst>
+              <p:ext uri="{D42A27DB-BD31-4B8C-83A1-F6EECF244321}">
+                <p14:modId xmlns:p14="http://schemas.microsoft.com/office/powerpoint/2010/main" val="1077567379"/>
+              </p:ext>
+            </p:extLst>
+          </p:nvPr>
+        </p:nvGraphicFramePr>
+        <p:xfrm>
+          <a:off x="550864" y="1622758"/>
+          <a:ext cx="5713204" cy="4614530"/>
+        </p:xfrm>
+        <a:graphic>
+          <a:graphicData uri="http://schemas.openxmlformats.org/drawingml/2006/chart">
+            <c:chart xmlns:c="http://schemas.openxmlformats.org/drawingml/2006/chart" xmlns:r="http://schemas.openxmlformats.org/officeDocument/2006/relationships" r:id="rId2"/>
+          </a:graphicData>
+        </a:graphic>
+      </p:graphicFrame>
+      <p:sp>
+        <p:nvSpPr>
+          <p:cNvPr id="4" name="slot.footer-page">
+            <a:extLst>
+              <a:ext uri="{FF2B5EF4-FFF2-40B4-BE49-F238E27FC236}">
+                <a16:creationId xmlns:a16="http://schemas.microsoft.com/office/drawing/2014/main" id="{EC42C37B-CB35-17E7-8EE5-6ED39227D43E}"/>
+              </a:ext>
+            </a:extLst>
+          </p:cNvPr>
+          <p:cNvSpPr>
+            <a:spLocks noGrp="1"/>
+          </p:cNvSpPr>
+          <p:nvPr>
+            <p:ph type="sldNum" sz="quarter" idx="12"/>
+          </p:nvPr>
+        </p:nvSpPr>
+        <p:spPr/>
+        <p:txBody>
+          <a:bodyPr/>
+          <a:lstStyle/>
+          <a:p>
+            <a:fld id="{27D40A0C-669C-7745-8A4B-A0A60E70B612}" type="slidenum">
+              <a:rPr lang="fr-FR" smtClean="0"/>
+              <a:t>9</a:t>
+            </a:fld>
+            <a:endParaRPr lang="fr-FR"/>
+          </a:p>
+        </p:txBody>
+      </p:sp>
+      <p:sp>
+        <p:nvSpPr>
+          <p:cNvPr id="12" name="slot.source">
+            <a:extLst>
+              <a:ext uri="{FF2B5EF4-FFF2-40B4-BE49-F238E27FC236}">
+                <a16:creationId xmlns:a16="http://schemas.microsoft.com/office/drawing/2014/main" id="{190093B9-4BCE-CCC2-2DCD-4F71A64766E9}"/>
+              </a:ext>
+            </a:extLst>
+          </p:cNvPr>
+          <p:cNvSpPr>
+            <a:spLocks noGrp="1"/>
+          </p:cNvSpPr>
+          <p:nvPr>
+            <p:ph sz="quarter" idx="18"/>
+          </p:nvPr>
+        </p:nvSpPr>
+        <p:spPr/>
+        <p:txBody>
+          <a:bodyPr/>
+          <a:lstStyle/>
+          <a:p>
+            <a:endParaRPr lang="fr-FR"/>
+          </a:p>
+        </p:txBody>
+      </p:sp>
+      <p:sp>
+        <p:nvSpPr>
+          <p:cNvPr id="10" name="slot.body-right">
+            <a:extLst>
+              <a:ext uri="{FF2B5EF4-FFF2-40B4-BE49-F238E27FC236}">
+                <a16:creationId xmlns:a16="http://schemas.microsoft.com/office/drawing/2014/main" id="{9B4B49E6-ACBD-1A9F-8953-1EB368346C96}"/>
               </a:ext>
             </a:extLst>
           </p:cNvPr>
@@ -25235,8 +25399,8 @@
         </p:nvSpPr>
         <p:spPr>
           <a:xfrm>
-            <a:off x="550863" y="1204783"/>
-            <a:ext cx="5636292" cy="275101"/>
+            <a:off x="6882254" y="1622758"/>
+            <a:ext cx="4804303" cy="4448433"/>
           </a:xfrm>
           <a:prstGeom prst="rect">
             <a:avLst/>
@@ -25451,410 +25615,6 @@
             </a:lvl9pPr>
           </a:lstStyle>
           <a:p>
-            <a:pPr marL="3175" indent="0">
-              <a:buNone/>
-            </a:pPr>
-            <a:r>
-              <a:rPr lang="fr-FR" b="1" dirty="0"/>
-              <a:t>Chart </a:t>
-            </a:r>
-            <a:r>
-              <a:rPr lang="fr-FR" b="1" dirty="0" err="1"/>
-              <a:t>name</a:t>
-            </a:r>
-            <a:r>
-              <a:rPr lang="fr-FR" dirty="0"/>
-              <a:t>, </a:t>
-            </a:r>
-            <a:r>
-              <a:rPr lang="fr-FR" i="1" dirty="0">
-                <a:solidFill>
-                  <a:schemeClr val="accent6"/>
-                </a:solidFill>
-              </a:rPr>
-              <a:t>unit</a:t>
-            </a:r>
-          </a:p>
-        </p:txBody>
-      </p:sp>
-    </p:spTree>
-    <p:extLst>
-      <p:ext uri="{BB962C8B-B14F-4D97-AF65-F5344CB8AC3E}">
-        <p14:creationId xmlns:p14="http://schemas.microsoft.com/office/powerpoint/2010/main" val="3525562660"/>
-      </p:ext>
-    </p:extLst>
-  </p:cSld>
-  <p:clrMapOvr>
-    <a:masterClrMapping/>
-  </p:clrMapOvr>
-</p:sld>
-</file>
-
-<file path=ppt/slides/slide9.xml><?xml version="1.0" encoding="utf-8"?>
-<p:sld xmlns:a="http://schemas.openxmlformats.org/drawingml/2006/main" xmlns:r="http://schemas.openxmlformats.org/officeDocument/2006/relationships" xmlns:p="http://schemas.openxmlformats.org/presentationml/2006/main">
-  <p:cSld>
-    <p:spTree>
-      <p:nvGrpSpPr>
-        <p:cNvPr id="1" name="">
-          <a:extLst>
-            <a:ext uri="{FF2B5EF4-FFF2-40B4-BE49-F238E27FC236}">
-              <a16:creationId xmlns:a16="http://schemas.microsoft.com/office/drawing/2014/main" id="{977B962F-0DD9-4D69-1322-91DEA5F6127C}"/>
-            </a:ext>
-          </a:extLst>
-        </p:cNvPr>
-        <p:cNvGrpSpPr/>
-        <p:nvPr/>
-      </p:nvGrpSpPr>
-      <p:grpSpPr>
-        <a:xfrm>
-          <a:off x="0" y="0"/>
-          <a:ext cx="0" cy="0"/>
-          <a:chOff x="0" y="0"/>
-          <a:chExt cx="0" cy="0"/>
-        </a:xfrm>
-      </p:grpSpPr>
-      <p:sp>
-        <p:nvSpPr>
-          <p:cNvPr id="11" name="Titre 10">
-            <a:extLst>
-              <a:ext uri="{FF2B5EF4-FFF2-40B4-BE49-F238E27FC236}">
-                <a16:creationId xmlns:a16="http://schemas.microsoft.com/office/drawing/2014/main" id="{E6BA610B-9EE9-45A1-B28B-47B1ECDE0349}"/>
-              </a:ext>
-            </a:extLst>
-          </p:cNvPr>
-          <p:cNvSpPr>
-            <a:spLocks noGrp="1"/>
-          </p:cNvSpPr>
-          <p:nvPr>
-            <p:ph type="title"/>
-          </p:nvPr>
-        </p:nvSpPr>
-        <p:spPr/>
-        <p:txBody>
-          <a:bodyPr/>
-          <a:lstStyle/>
-          <a:p>
-            <a:endParaRPr lang="fr-FR"/>
-          </a:p>
-        </p:txBody>
-      </p:sp>
-      <p:graphicFrame>
-        <p:nvGraphicFramePr>
-          <p:cNvPr id="2" name="Espace réservé du contenu 1">
-            <a:extLst>
-              <a:ext uri="{FF2B5EF4-FFF2-40B4-BE49-F238E27FC236}">
-                <a16:creationId xmlns:a16="http://schemas.microsoft.com/office/drawing/2014/main" id="{9C81EFE1-097D-C671-2766-C25389738490}"/>
-              </a:ext>
-            </a:extLst>
-          </p:cNvPr>
-          <p:cNvGraphicFramePr>
-            <a:graphicFrameLocks noGrp="1"/>
-          </p:cNvGraphicFramePr>
-          <p:nvPr>
-            <p:ph idx="1"/>
-            <p:extLst>
-              <p:ext uri="{D42A27DB-BD31-4B8C-83A1-F6EECF244321}">
-                <p14:modId xmlns:p14="http://schemas.microsoft.com/office/powerpoint/2010/main" val="1077567379"/>
-              </p:ext>
-            </p:extLst>
-          </p:nvPr>
-        </p:nvGraphicFramePr>
-        <p:xfrm>
-          <a:off x="550864" y="1622758"/>
-          <a:ext cx="5713204" cy="4614530"/>
-        </p:xfrm>
-        <a:graphic>
-          <a:graphicData uri="http://schemas.openxmlformats.org/drawingml/2006/chart">
-            <c:chart xmlns:c="http://schemas.openxmlformats.org/drawingml/2006/chart" xmlns:r="http://schemas.openxmlformats.org/officeDocument/2006/relationships" r:id="rId2"/>
-          </a:graphicData>
-        </a:graphic>
-      </p:graphicFrame>
-      <p:sp>
-        <p:nvSpPr>
-          <p:cNvPr id="4" name="Espace réservé du numéro de diapositive 3">
-            <a:extLst>
-              <a:ext uri="{FF2B5EF4-FFF2-40B4-BE49-F238E27FC236}">
-                <a16:creationId xmlns:a16="http://schemas.microsoft.com/office/drawing/2014/main" id="{EC42C37B-CB35-17E7-8EE5-6ED39227D43E}"/>
-              </a:ext>
-            </a:extLst>
-          </p:cNvPr>
-          <p:cNvSpPr>
-            <a:spLocks noGrp="1"/>
-          </p:cNvSpPr>
-          <p:nvPr>
-            <p:ph type="sldNum" sz="quarter" idx="12"/>
-          </p:nvPr>
-        </p:nvSpPr>
-        <p:spPr/>
-        <p:txBody>
-          <a:bodyPr/>
-          <a:lstStyle/>
-          <a:p>
-            <a:fld id="{27D40A0C-669C-7745-8A4B-A0A60E70B612}" type="slidenum">
-              <a:rPr lang="fr-FR" smtClean="0"/>
-              <a:t>9</a:t>
-            </a:fld>
-            <a:endParaRPr lang="fr-FR"/>
-          </a:p>
-        </p:txBody>
-      </p:sp>
-      <p:sp>
-        <p:nvSpPr>
-          <p:cNvPr id="12" name="Espace réservé du contenu 11">
-            <a:extLst>
-              <a:ext uri="{FF2B5EF4-FFF2-40B4-BE49-F238E27FC236}">
-                <a16:creationId xmlns:a16="http://schemas.microsoft.com/office/drawing/2014/main" id="{190093B9-4BCE-CCC2-2DCD-4F71A64766E9}"/>
-              </a:ext>
-            </a:extLst>
-          </p:cNvPr>
-          <p:cNvSpPr>
-            <a:spLocks noGrp="1"/>
-          </p:cNvSpPr>
-          <p:nvPr>
-            <p:ph sz="quarter" idx="18"/>
-          </p:nvPr>
-        </p:nvSpPr>
-        <p:spPr/>
-        <p:txBody>
-          <a:bodyPr/>
-          <a:lstStyle/>
-          <a:p>
-            <a:endParaRPr lang="fr-FR"/>
-          </a:p>
-        </p:txBody>
-      </p:sp>
-      <p:sp>
-        <p:nvSpPr>
-          <p:cNvPr id="10" name="Espace réservé du contenu 5">
-            <a:extLst>
-              <a:ext uri="{FF2B5EF4-FFF2-40B4-BE49-F238E27FC236}">
-                <a16:creationId xmlns:a16="http://schemas.microsoft.com/office/drawing/2014/main" id="{9B4B49E6-ACBD-1A9F-8953-1EB368346C96}"/>
-              </a:ext>
-            </a:extLst>
-          </p:cNvPr>
-          <p:cNvSpPr txBox="1">
-            <a:spLocks/>
-          </p:cNvSpPr>
-          <p:nvPr/>
-        </p:nvSpPr>
-        <p:spPr>
-          <a:xfrm>
-            <a:off x="6882254" y="1622758"/>
-            <a:ext cx="4804303" cy="4448433"/>
-          </a:xfrm>
-          <a:prstGeom prst="rect">
-            <a:avLst/>
-          </a:prstGeom>
-        </p:spPr>
-        <p:txBody>
-          <a:bodyPr vert="horz" lIns="0" tIns="0" rIns="0" bIns="0" rtlCol="0">
-            <a:noAutofit/>
-          </a:bodyPr>
-          <a:lstStyle>
-            <a:lvl1pPr marL="136525" indent="-133350" algn="l" defTabSz="914400" rtl="0" eaLnBrk="1" latinLnBrk="0" hangingPunct="1">
-              <a:lnSpc>
-                <a:spcPct val="100000"/>
-              </a:lnSpc>
-              <a:spcBef>
-                <a:spcPts val="0"/>
-              </a:spcBef>
-              <a:spcAft>
-                <a:spcPts val="200"/>
-              </a:spcAft>
-              <a:buClr>
-                <a:schemeClr val="tx2"/>
-              </a:buClr>
-              <a:buSzPct val="100000"/>
-              <a:buFont typeface="System Font Regular"/>
-              <a:buChar char="•"/>
-              <a:tabLst/>
-              <a:defRPr sz="1200" kern="1200">
-                <a:solidFill>
-                  <a:schemeClr val="tx1"/>
-                </a:solidFill>
-                <a:latin typeface="Arial" panose="020B0604020202020204" pitchFamily="34" charset="0"/>
-                <a:ea typeface="+mn-ea"/>
-                <a:cs typeface="Arial" panose="020B0604020202020204" pitchFamily="34" charset="0"/>
-              </a:defRPr>
-            </a:lvl1pPr>
-            <a:lvl2pPr marL="273050" indent="-136525" algn="l" defTabSz="914400" rtl="0" eaLnBrk="1" latinLnBrk="0" hangingPunct="1">
-              <a:lnSpc>
-                <a:spcPct val="100000"/>
-              </a:lnSpc>
-              <a:spcBef>
-                <a:spcPts val="0"/>
-              </a:spcBef>
-              <a:spcAft>
-                <a:spcPts val="200"/>
-              </a:spcAft>
-              <a:buClr>
-                <a:schemeClr val="tx2"/>
-              </a:buClr>
-              <a:buSzPct val="100000"/>
-              <a:buFont typeface="System Font Regular"/>
-              <a:buChar char="−"/>
-              <a:tabLst/>
-              <a:defRPr sz="1200" kern="1200">
-                <a:solidFill>
-                  <a:schemeClr val="tx1"/>
-                </a:solidFill>
-                <a:latin typeface="Arial" panose="020B0604020202020204" pitchFamily="34" charset="0"/>
-                <a:ea typeface="+mn-ea"/>
-                <a:cs typeface="Arial" panose="020B0604020202020204" pitchFamily="34" charset="0"/>
-              </a:defRPr>
-            </a:lvl2pPr>
-            <a:lvl3pPr marL="401638" indent="-128588" algn="l" defTabSz="914400" rtl="0" eaLnBrk="1" latinLnBrk="0" hangingPunct="1">
-              <a:lnSpc>
-                <a:spcPct val="100000"/>
-              </a:lnSpc>
-              <a:spcBef>
-                <a:spcPts val="0"/>
-              </a:spcBef>
-              <a:spcAft>
-                <a:spcPts val="200"/>
-              </a:spcAft>
-              <a:buClr>
-                <a:schemeClr val="tx2"/>
-              </a:buClr>
-              <a:buSzPct val="100000"/>
-              <a:buFont typeface="System Font Regular"/>
-              <a:buChar char="◦"/>
-              <a:tabLst/>
-              <a:defRPr sz="1200" kern="1200">
-                <a:solidFill>
-                  <a:schemeClr val="tx1"/>
-                </a:solidFill>
-                <a:latin typeface="Arial" panose="020B0604020202020204" pitchFamily="34" charset="0"/>
-                <a:ea typeface="+mn-ea"/>
-                <a:cs typeface="Arial" panose="020B0604020202020204" pitchFamily="34" charset="0"/>
-              </a:defRPr>
-            </a:lvl3pPr>
-            <a:lvl4pPr marL="534988" indent="-133350" algn="l" defTabSz="914400" rtl="0" eaLnBrk="1" latinLnBrk="0" hangingPunct="1">
-              <a:lnSpc>
-                <a:spcPct val="100000"/>
-              </a:lnSpc>
-              <a:spcBef>
-                <a:spcPts val="0"/>
-              </a:spcBef>
-              <a:spcAft>
-                <a:spcPts val="200"/>
-              </a:spcAft>
-              <a:buClr>
-                <a:schemeClr val="tx2"/>
-              </a:buClr>
-              <a:buSzPct val="100000"/>
-              <a:buFont typeface="Wingdings" pitchFamily="2" charset="2"/>
-              <a:buChar char="§"/>
-              <a:tabLst/>
-              <a:defRPr sz="1200" kern="1200">
-                <a:solidFill>
-                  <a:schemeClr val="tx1"/>
-                </a:solidFill>
-                <a:latin typeface="Arial" panose="020B0604020202020204" pitchFamily="34" charset="0"/>
-                <a:ea typeface="+mn-ea"/>
-                <a:cs typeface="Arial" panose="020B0604020202020204" pitchFamily="34" charset="0"/>
-              </a:defRPr>
-            </a:lvl4pPr>
-            <a:lvl5pPr marL="668338" indent="-133350" algn="l" defTabSz="914400" rtl="0" eaLnBrk="1" latinLnBrk="0" hangingPunct="1">
-              <a:lnSpc>
-                <a:spcPct val="100000"/>
-              </a:lnSpc>
-              <a:spcBef>
-                <a:spcPts val="0"/>
-              </a:spcBef>
-              <a:spcAft>
-                <a:spcPts val="200"/>
-              </a:spcAft>
-              <a:buClr>
-                <a:schemeClr val="tx2"/>
-              </a:buClr>
-              <a:buSzPct val="100000"/>
-              <a:buFont typeface="System Font Regular"/>
-              <a:buChar char="▫"/>
-              <a:tabLst/>
-              <a:defRPr sz="1200" kern="1200">
-                <a:solidFill>
-                  <a:schemeClr val="tx1"/>
-                </a:solidFill>
-                <a:latin typeface="Arial" panose="020B0604020202020204" pitchFamily="34" charset="0"/>
-                <a:ea typeface="+mn-ea"/>
-                <a:cs typeface="Arial" panose="020B0604020202020204" pitchFamily="34" charset="0"/>
-              </a:defRPr>
-            </a:lvl5pPr>
-            <a:lvl6pPr marL="2514600" indent="-228600" algn="l" defTabSz="914400" rtl="0" eaLnBrk="1" latinLnBrk="0" hangingPunct="1">
-              <a:lnSpc>
-                <a:spcPct val="90000"/>
-              </a:lnSpc>
-              <a:spcBef>
-                <a:spcPts val="500"/>
-              </a:spcBef>
-              <a:buFont typeface="Arial" panose="020B0604020202020204" pitchFamily="34" charset="0"/>
-              <a:buChar char="•"/>
-              <a:defRPr sz="1800" kern="1200">
-                <a:solidFill>
-                  <a:schemeClr val="tx1"/>
-                </a:solidFill>
-                <a:latin typeface="+mn-lt"/>
-                <a:ea typeface="+mn-ea"/>
-                <a:cs typeface="+mn-cs"/>
-              </a:defRPr>
-            </a:lvl6pPr>
-            <a:lvl7pPr marL="2971800" indent="-228600" algn="l" defTabSz="914400" rtl="0" eaLnBrk="1" latinLnBrk="0" hangingPunct="1">
-              <a:lnSpc>
-                <a:spcPct val="90000"/>
-              </a:lnSpc>
-              <a:spcBef>
-                <a:spcPts val="500"/>
-              </a:spcBef>
-              <a:buFont typeface="Arial" panose="020B0604020202020204" pitchFamily="34" charset="0"/>
-              <a:buChar char="•"/>
-              <a:defRPr sz="1800" kern="1200">
-                <a:solidFill>
-                  <a:schemeClr val="tx1"/>
-                </a:solidFill>
-                <a:latin typeface="+mn-lt"/>
-                <a:ea typeface="+mn-ea"/>
-                <a:cs typeface="+mn-cs"/>
-              </a:defRPr>
-            </a:lvl7pPr>
-            <a:lvl8pPr marL="3429000" indent="-228600" algn="l" defTabSz="914400" rtl="0" eaLnBrk="1" latinLnBrk="0" hangingPunct="1">
-              <a:lnSpc>
-                <a:spcPct val="90000"/>
-              </a:lnSpc>
-              <a:spcBef>
-                <a:spcPts val="500"/>
-              </a:spcBef>
-              <a:buFont typeface="Arial" panose="020B0604020202020204" pitchFamily="34" charset="0"/>
-              <a:buChar char="•"/>
-              <a:defRPr sz="1800" kern="1200">
-                <a:solidFill>
-                  <a:schemeClr val="tx1"/>
-                </a:solidFill>
-                <a:latin typeface="+mn-lt"/>
-                <a:ea typeface="+mn-ea"/>
-                <a:cs typeface="+mn-cs"/>
-              </a:defRPr>
-            </a:lvl8pPr>
-            <a:lvl9pPr marL="3886200" indent="-228600" algn="l" defTabSz="914400" rtl="0" eaLnBrk="1" latinLnBrk="0" hangingPunct="1">
-              <a:lnSpc>
-                <a:spcPct val="90000"/>
-              </a:lnSpc>
-              <a:spcBef>
-                <a:spcPts val="500"/>
-              </a:spcBef>
-              <a:buFont typeface="Arial" panose="020B0604020202020204" pitchFamily="34" charset="0"/>
-              <a:buChar char="•"/>
-              <a:defRPr sz="1800" kern="1200">
-                <a:solidFill>
-                  <a:schemeClr val="tx1"/>
-                </a:solidFill>
-                <a:latin typeface="+mn-lt"/>
-                <a:ea typeface="+mn-ea"/>
-                <a:cs typeface="+mn-cs"/>
-              </a:defRPr>
-            </a:lvl9pPr>
-          </a:lstStyle>
-          <a:p>
             <a:r>
               <a:rPr lang="fr-FR" dirty="0"/>
               <a:t>Comment</a:t>
@@ -25864,7 +25624,7 @@
       </p:sp>
       <p:sp>
         <p:nvSpPr>
-          <p:cNvPr id="13" name="Espace réservé du contenu 5">
+          <p:cNvPr id="13" name="slot.chart-title">
             <a:extLst>
               <a:ext uri="{FF2B5EF4-FFF2-40B4-BE49-F238E27FC236}">
                 <a16:creationId xmlns:a16="http://schemas.microsoft.com/office/drawing/2014/main" id="{33F8A7A2-5825-1682-27AF-955BF8FEC5B1}"/>

--- a/templates/report.master.pptx
+++ b/templates/report.master.pptx
@@ -7772,7 +7772,7 @@
       </p:sp>
       <p:sp>
         <p:nvSpPr>
-          <p:cNvPr id="5" name="slot.subtitle-left">
+          <p:cNvPr id="5" name="slot.subtitle-right">
             <a:extLst>
               <a:ext uri="{FF2B5EF4-FFF2-40B4-BE49-F238E27FC236}">
                 <a16:creationId xmlns:a16="http://schemas.microsoft.com/office/drawing/2014/main" id="{2D35804D-7044-B129-7E2C-ED3868BD4F80}"/>
@@ -8670,7 +8670,7 @@
       </p:sp>
       <p:sp>
         <p:nvSpPr>
-          <p:cNvPr id="5" name="slot.subtitle-left">
+          <p:cNvPr id="5" name="slot.subtitle-right">
             <a:extLst>
               <a:ext uri="{FF2B5EF4-FFF2-40B4-BE49-F238E27FC236}">
                 <a16:creationId xmlns:a16="http://schemas.microsoft.com/office/drawing/2014/main" id="{2D35804D-7044-B129-7E2C-ED3868BD4F80}"/>
@@ -11270,7 +11270,7 @@
       </p:sp>
       <p:sp>
         <p:nvSpPr>
-          <p:cNvPr id="5" name="slot.subtitle-left">
+          <p:cNvPr id="5" name="slot.subtitle-right">
             <a:extLst>
               <a:ext uri="{FF2B5EF4-FFF2-40B4-BE49-F238E27FC236}">
                 <a16:creationId xmlns:a16="http://schemas.microsoft.com/office/drawing/2014/main" id="{2D35804D-7044-B129-7E2C-ED3868BD4F80}"/>
@@ -12244,7 +12244,7 @@
       </p:sp>
       <p:sp>
         <p:nvSpPr>
-          <p:cNvPr id="5" name="slot.subtitle-left">
+          <p:cNvPr id="5" name="slot.subtitle-right">
             <a:extLst>
               <a:ext uri="{FF2B5EF4-FFF2-40B4-BE49-F238E27FC236}">
                 <a16:creationId xmlns:a16="http://schemas.microsoft.com/office/drawing/2014/main" id="{2D35804D-7044-B129-7E2C-ED3868BD4F80}"/>
@@ -15831,7 +15831,7 @@
       </p:sp>
       <p:sp>
         <p:nvSpPr>
-          <p:cNvPr id="4" name="slot.body-left">
+          <p:cNvPr id="4" name="slot.body-right">
             <a:extLst>
               <a:ext uri="{FF2B5EF4-FFF2-40B4-BE49-F238E27FC236}">
                 <a16:creationId xmlns:a16="http://schemas.microsoft.com/office/drawing/2014/main" id="{8EB565A4-3D20-0C08-E4EA-AB81725F7D5D}"/>
@@ -16012,7 +16012,7 @@
       </p:sp>
       <p:sp>
         <p:nvSpPr>
-          <p:cNvPr id="18" name="slot.body-left">
+          <p:cNvPr id="18" name="slot.source">
             <a:extLst>
               <a:ext uri="{FF2B5EF4-FFF2-40B4-BE49-F238E27FC236}">
                 <a16:creationId xmlns:a16="http://schemas.microsoft.com/office/drawing/2014/main" id="{134DD0FE-B05A-6304-7865-C88149104BD6}"/>
@@ -16490,7 +16490,7 @@
       </p:sp>
       <p:sp>
         <p:nvSpPr>
-          <p:cNvPr id="5" name="slot.subtitle-left">
+          <p:cNvPr id="5" name="slot.subtitle-right">
             <a:extLst>
               <a:ext uri="{FF2B5EF4-FFF2-40B4-BE49-F238E27FC236}">
                 <a16:creationId xmlns:a16="http://schemas.microsoft.com/office/drawing/2014/main" id="{2D35804D-7044-B129-7E2C-ED3868BD4F80}"/>
@@ -17227,7 +17227,7 @@
       </p:sp>
       <p:sp>
         <p:nvSpPr>
-          <p:cNvPr id="5" name="slot.subtitle-left">
+          <p:cNvPr id="5" name="slot.subtitle-right">
             <a:extLst>
               <a:ext uri="{FF2B5EF4-FFF2-40B4-BE49-F238E27FC236}">
                 <a16:creationId xmlns:a16="http://schemas.microsoft.com/office/drawing/2014/main" id="{2D35804D-7044-B129-7E2C-ED3868BD4F80}"/>
@@ -17368,7 +17368,7 @@
       </p:sp>
       <p:sp>
         <p:nvSpPr>
-          <p:cNvPr id="7" name="slot.subtitle-left">
+          <p:cNvPr id="7" name="slot.subtitle-middle">
             <a:extLst>
               <a:ext uri="{FF2B5EF4-FFF2-40B4-BE49-F238E27FC236}">
                 <a16:creationId xmlns:a16="http://schemas.microsoft.com/office/drawing/2014/main" id="{5E8252F0-DE57-E2EB-BE2E-BAD06505AF77}"/>
@@ -17446,7 +17446,7 @@
       </p:sp>
       <p:sp>
         <p:nvSpPr>
-          <p:cNvPr id="11" name="slot.body-left">
+          <p:cNvPr id="11" name="slot.body-center">
             <a:extLst>
               <a:ext uri="{FF2B5EF4-FFF2-40B4-BE49-F238E27FC236}">
                 <a16:creationId xmlns:a16="http://schemas.microsoft.com/office/drawing/2014/main" id="{AF4E5750-BDEC-4328-0B8F-9525E2496CFD}"/>
@@ -20725,7 +20725,7 @@
       </p:sp>
       <p:sp>
         <p:nvSpPr>
-          <p:cNvPr id="8" name="slot.body-left">
+          <p:cNvPr id="8" name="slot.body-right">
             <a:extLst>
               <a:ext uri="{FF2B5EF4-FFF2-40B4-BE49-F238E27FC236}">
                 <a16:creationId xmlns:a16="http://schemas.microsoft.com/office/drawing/2014/main" id="{37886110-4BF1-3B19-47FC-1B3A623E68F4}"/>
@@ -21118,7 +21118,7 @@
       </p:sp>
       <p:sp>
         <p:nvSpPr>
-          <p:cNvPr id="5" name="slot.subtitle-center">
+          <p:cNvPr id="5" name="slot.subtitle-right">
             <a:extLst>
               <a:ext uri="{FF2B5EF4-FFF2-40B4-BE49-F238E27FC236}">
                 <a16:creationId xmlns:a16="http://schemas.microsoft.com/office/drawing/2014/main" id="{899EBAB0-D7CA-FCF6-5AE7-F3182BDD73D7}"/>
@@ -21880,7 +21880,7 @@
       </p:sp>
       <p:sp>
         <p:nvSpPr>
-          <p:cNvPr id="5" name="slot.subtitle-center">
+          <p:cNvPr id="5" name="slot.subtitle-right">
             <a:extLst>
               <a:ext uri="{FF2B5EF4-FFF2-40B4-BE49-F238E27FC236}">
                 <a16:creationId xmlns:a16="http://schemas.microsoft.com/office/drawing/2014/main" id="{3F8F4092-5C55-47A8-80BF-15DB6F705E87}"/>
@@ -22966,7 +22966,7 @@
       </p:sp>
       <p:sp>
         <p:nvSpPr>
-          <p:cNvPr id="5" name="slot.subtitle-center">
+          <p:cNvPr id="5" name="slot.subtitle-right">
             <a:extLst>
               <a:ext uri="{FF2B5EF4-FFF2-40B4-BE49-F238E27FC236}">
                 <a16:creationId xmlns:a16="http://schemas.microsoft.com/office/drawing/2014/main" id="{A6481CB5-EAF6-34D0-38D2-004DF250D138}"/>

--- a/templates/report.master.pptx
+++ b/templates/report.master.pptx
@@ -23542,7 +23542,130 @@
       </p:sp>
       <p:sp>
         <p:nvSpPr>
-          <p:cNvPr id="4" name="slot.title"/>
+          <p:cNvPr id="4" name="decor">
+            <a:extLst>
+              <a:ext uri="{FF2B5EF4-FFF2-40B4-BE49-F238E27FC236}">
+                <a16:creationId xmlns:a16="http://schemas.microsoft.com/office/drawing/2014/main" id="{9BCA9FA9-DC4A-F7F9-6F98-04EFCF05B790}"/>
+              </a:ext>
+            </a:extLst>
+          </p:cNvPr>
+          <p:cNvSpPr/>
+          <p:nvPr userDrawn="1"/>
+        </p:nvSpPr>
+        <p:spPr>
+          <a:xfrm>
+            <a:off x="-64731" y="246322"/>
+            <a:ext cx="512150" cy="423265"/>
+          </a:xfrm>
+          <a:prstGeom prst="pie">
+            <a:avLst>
+              <a:gd name="adj1" fmla="val 16190032"/>
+              <a:gd name="adj2" fmla="val 5400005"/>
+            </a:avLst>
+          </a:prstGeom>
+          <a:solidFill>
+            <a:schemeClr val="tx2"/>
+          </a:solidFill>
+          <a:ln>
+            <a:solidFill>
+              <a:schemeClr val="tx2"/>
+            </a:solidFill>
+          </a:ln>
+        </p:spPr>
+        <p:style>
+          <a:lnRef idx="2">
+            <a:schemeClr val="accent1">
+              <a:shade val="50000"/>
+            </a:schemeClr>
+          </a:lnRef>
+          <a:fillRef idx="1">
+            <a:schemeClr val="accent1"/>
+          </a:fillRef>
+          <a:effectRef idx="0">
+            <a:schemeClr val="accent1"/>
+          </a:effectRef>
+          <a:fontRef idx="minor">
+            <a:schemeClr val="lt1"/>
+          </a:fontRef>
+        </p:style>
+        <p:txBody>
+          <a:bodyPr lIns="36000" tIns="36000" rIns="36000" bIns="36000" rtlCol="0" anchor="ctr"/>
+          <a:lstStyle/>
+          <a:p>
+            <a:pPr algn="l" rtl="0"/>
+            <a:endParaRPr lang="en-US" sz="1200" b="1">
+              <a:solidFill>
+                <a:schemeClr val="bg1"/>
+              </a:solidFill>
+              <a:latin typeface="Arial" panose="020B0604020202020204" pitchFamily="34" charset="0"/>
+              <a:cs typeface="Arial" panose="020B0604020202020204" pitchFamily="34" charset="0"/>
+            </a:endParaRPr>
+          </a:p>
+        </p:txBody>
+      </p:sp>
+      <p:sp>
+        <p:nvSpPr>
+          <p:cNvPr id="5" name="decor">
+            <a:extLst>
+              <a:ext uri="{FF2B5EF4-FFF2-40B4-BE49-F238E27FC236}">
+                <a16:creationId xmlns:a16="http://schemas.microsoft.com/office/drawing/2014/main" id="{5D3B6E37-9E51-E62C-A843-852BEEBE5F2B}"/>
+              </a:ext>
+            </a:extLst>
+          </p:cNvPr>
+          <p:cNvSpPr/>
+          <p:nvPr userDrawn="1"/>
+        </p:nvSpPr>
+        <p:spPr>
+          <a:xfrm>
+            <a:off x="0" y="247761"/>
+            <a:ext cx="191344" cy="423265"/>
+          </a:xfrm>
+          <a:prstGeom prst="rect">
+            <a:avLst/>
+          </a:prstGeom>
+          <a:solidFill>
+            <a:schemeClr val="tx2"/>
+          </a:solidFill>
+          <a:ln>
+            <a:solidFill>
+              <a:schemeClr val="tx2"/>
+            </a:solidFill>
+          </a:ln>
+        </p:spPr>
+        <p:style>
+          <a:lnRef idx="2">
+            <a:schemeClr val="accent1">
+              <a:shade val="50000"/>
+            </a:schemeClr>
+          </a:lnRef>
+          <a:fillRef idx="1">
+            <a:schemeClr val="accent1"/>
+          </a:fillRef>
+          <a:effectRef idx="0">
+            <a:schemeClr val="accent1"/>
+          </a:effectRef>
+          <a:fontRef idx="minor">
+            <a:schemeClr val="lt1"/>
+          </a:fontRef>
+        </p:style>
+        <p:txBody>
+          <a:bodyPr lIns="36000" tIns="36000" rIns="36000" bIns="36000" rtlCol="0" anchor="ctr"/>
+          <a:lstStyle/>
+          <a:p>
+            <a:pPr algn="l" rtl="0"/>
+            <a:endParaRPr lang="en-US" sz="1200" b="1">
+              <a:solidFill>
+                <a:schemeClr val="bg1"/>
+              </a:solidFill>
+              <a:latin typeface="Arial" panose="020B0604020202020204" pitchFamily="34" charset="0"/>
+              <a:cs typeface="Arial" panose="020B0604020202020204" pitchFamily="34" charset="0"/>
+            </a:endParaRPr>
+          </a:p>
+        </p:txBody>
+      </p:sp>
+      <p:sp>
+        <p:nvSpPr>
+          <p:cNvPr id="6" name="slot.title"/>
           <p:cNvSpPr txBox="1"/>
           <p:nvPr/>
         </p:nvSpPr>
@@ -23566,18 +23689,18 @@
             <a:r>
               <a:rPr sz="2200" b="1">
                 <a:solidFill>
-                  <a:schemeClr val="dk1"/>
+                  <a:schemeClr val="accent2"/>
                 </a:solidFill>
                 <a:latin typeface="Futura Medium"/>
               </a:rPr>
-              <a:t>A single headline figure that anchors the slide</a:t>
-            </a:r>
-          </a:p>
-        </p:txBody>
-      </p:sp>
-      <p:sp>
-        <p:nvSpPr>
-          <p:cNvPr id="5" name="slot.big-number"/>
+              <a:t>Action title summarising the takeaway of this slide</a:t>
+            </a:r>
+          </a:p>
+        </p:txBody>
+      </p:sp>
+      <p:sp>
+        <p:nvSpPr>
+          <p:cNvPr id="7" name="slot.big-number"/>
           <p:cNvSpPr txBox="1"/>
           <p:nvPr/>
         </p:nvSpPr>
@@ -23603,7 +23726,7 @@
                 <a:solidFill>
                   <a:schemeClr val="accent2"/>
                 </a:solidFill>
-                <a:latin typeface="Futura Medium"/>
+                <a:latin typeface="Arial"/>
               </a:rPr>
               <a:t>€43M</a:t>
             </a:r>
@@ -23612,7 +23735,7 @@
       </p:sp>
       <p:sp>
         <p:nvSpPr>
-          <p:cNvPr id="6" name="slot.caption"/>
+          <p:cNvPr id="8" name="slot.caption"/>
           <p:cNvSpPr txBox="1"/>
           <p:nvPr/>
         </p:nvSpPr>
@@ -23719,7 +23842,130 @@
       </p:sp>
       <p:sp>
         <p:nvSpPr>
-          <p:cNvPr id="4" name="slot.title"/>
+          <p:cNvPr id="4" name="decor">
+            <a:extLst>
+              <a:ext uri="{FF2B5EF4-FFF2-40B4-BE49-F238E27FC236}">
+                <a16:creationId xmlns:a16="http://schemas.microsoft.com/office/drawing/2014/main" id="{9BCA9FA9-DC4A-F7F9-6F98-04EFCF05B790}"/>
+              </a:ext>
+            </a:extLst>
+          </p:cNvPr>
+          <p:cNvSpPr/>
+          <p:nvPr userDrawn="1"/>
+        </p:nvSpPr>
+        <p:spPr>
+          <a:xfrm>
+            <a:off x="-64731" y="246322"/>
+            <a:ext cx="512150" cy="423265"/>
+          </a:xfrm>
+          <a:prstGeom prst="pie">
+            <a:avLst>
+              <a:gd name="adj1" fmla="val 16190032"/>
+              <a:gd name="adj2" fmla="val 5400005"/>
+            </a:avLst>
+          </a:prstGeom>
+          <a:solidFill>
+            <a:schemeClr val="tx2"/>
+          </a:solidFill>
+          <a:ln>
+            <a:solidFill>
+              <a:schemeClr val="tx2"/>
+            </a:solidFill>
+          </a:ln>
+        </p:spPr>
+        <p:style>
+          <a:lnRef idx="2">
+            <a:schemeClr val="accent1">
+              <a:shade val="50000"/>
+            </a:schemeClr>
+          </a:lnRef>
+          <a:fillRef idx="1">
+            <a:schemeClr val="accent1"/>
+          </a:fillRef>
+          <a:effectRef idx="0">
+            <a:schemeClr val="accent1"/>
+          </a:effectRef>
+          <a:fontRef idx="minor">
+            <a:schemeClr val="lt1"/>
+          </a:fontRef>
+        </p:style>
+        <p:txBody>
+          <a:bodyPr lIns="36000" tIns="36000" rIns="36000" bIns="36000" rtlCol="0" anchor="ctr"/>
+          <a:lstStyle/>
+          <a:p>
+            <a:pPr algn="l" rtl="0"/>
+            <a:endParaRPr lang="en-US" sz="1200" b="1">
+              <a:solidFill>
+                <a:schemeClr val="bg1"/>
+              </a:solidFill>
+              <a:latin typeface="Arial" panose="020B0604020202020204" pitchFamily="34" charset="0"/>
+              <a:cs typeface="Arial" panose="020B0604020202020204" pitchFamily="34" charset="0"/>
+            </a:endParaRPr>
+          </a:p>
+        </p:txBody>
+      </p:sp>
+      <p:sp>
+        <p:nvSpPr>
+          <p:cNvPr id="5" name="decor">
+            <a:extLst>
+              <a:ext uri="{FF2B5EF4-FFF2-40B4-BE49-F238E27FC236}">
+                <a16:creationId xmlns:a16="http://schemas.microsoft.com/office/drawing/2014/main" id="{5D3B6E37-9E51-E62C-A843-852BEEBE5F2B}"/>
+              </a:ext>
+            </a:extLst>
+          </p:cNvPr>
+          <p:cNvSpPr/>
+          <p:nvPr userDrawn="1"/>
+        </p:nvSpPr>
+        <p:spPr>
+          <a:xfrm>
+            <a:off x="0" y="247761"/>
+            <a:ext cx="191344" cy="423265"/>
+          </a:xfrm>
+          <a:prstGeom prst="rect">
+            <a:avLst/>
+          </a:prstGeom>
+          <a:solidFill>
+            <a:schemeClr val="tx2"/>
+          </a:solidFill>
+          <a:ln>
+            <a:solidFill>
+              <a:schemeClr val="tx2"/>
+            </a:solidFill>
+          </a:ln>
+        </p:spPr>
+        <p:style>
+          <a:lnRef idx="2">
+            <a:schemeClr val="accent1">
+              <a:shade val="50000"/>
+            </a:schemeClr>
+          </a:lnRef>
+          <a:fillRef idx="1">
+            <a:schemeClr val="accent1"/>
+          </a:fillRef>
+          <a:effectRef idx="0">
+            <a:schemeClr val="accent1"/>
+          </a:effectRef>
+          <a:fontRef idx="minor">
+            <a:schemeClr val="lt1"/>
+          </a:fontRef>
+        </p:style>
+        <p:txBody>
+          <a:bodyPr lIns="36000" tIns="36000" rIns="36000" bIns="36000" rtlCol="0" anchor="ctr"/>
+          <a:lstStyle/>
+          <a:p>
+            <a:pPr algn="l" rtl="0"/>
+            <a:endParaRPr lang="en-US" sz="1200" b="1">
+              <a:solidFill>
+                <a:schemeClr val="bg1"/>
+              </a:solidFill>
+              <a:latin typeface="Arial" panose="020B0604020202020204" pitchFamily="34" charset="0"/>
+              <a:cs typeface="Arial" panose="020B0604020202020204" pitchFamily="34" charset="0"/>
+            </a:endParaRPr>
+          </a:p>
+        </p:txBody>
+      </p:sp>
+      <p:sp>
+        <p:nvSpPr>
+          <p:cNvPr id="6" name="slot.title"/>
           <p:cNvSpPr txBox="1"/>
           <p:nvPr/>
         </p:nvSpPr>
@@ -23743,7 +23989,7 @@
             <a:r>
               <a:rPr sz="2200" b="1">
                 <a:solidFill>
-                  <a:schemeClr val="dk1"/>
+                  <a:schemeClr val="accent2"/>
                 </a:solidFill>
                 <a:latin typeface="Futura Medium"/>
               </a:rPr>
@@ -23754,7 +24000,7 @@
       </p:sp>
       <p:sp>
         <p:nvSpPr>
-          <p:cNvPr id="5" name="slot.process-step.1.title"/>
+          <p:cNvPr id="7" name="slot.process-step.1.title"/>
           <p:cNvSpPr/>
           <p:nvPr/>
         </p:nvSpPr>
@@ -23797,7 +24043,7 @@
                 <a:solidFill>
                   <a:schemeClr val="accent1"/>
                 </a:solidFill>
-                <a:latin typeface="Futura Medium"/>
+                <a:latin typeface="Arial"/>
               </a:rPr>
               <a:t>Step 1</a:t>
             </a:r>
@@ -23806,7 +24052,7 @@
       </p:sp>
       <p:sp>
         <p:nvSpPr>
-          <p:cNvPr id="6" name="slot.process-step.1.body"/>
+          <p:cNvPr id="8" name="slot.process-step.1.body"/>
           <p:cNvSpPr txBox="1"/>
           <p:nvPr/>
         </p:nvSpPr>
@@ -23841,7 +24087,7 @@
       </p:sp>
       <p:sp>
         <p:nvSpPr>
-          <p:cNvPr id="7" name="decor"/>
+          <p:cNvPr id="9" name="decor"/>
           <p:cNvSpPr/>
           <p:nvPr/>
         </p:nvSpPr>
@@ -23884,7 +24130,7 @@
                 <a:solidFill>
                   <a:schemeClr val="lt1"/>
                 </a:solidFill>
-                <a:latin typeface="Futura Medium"/>
+                <a:latin typeface="Arial"/>
               </a:rPr>
               <a:t>1</a:t>
             </a:r>
@@ -23893,7 +24139,7 @@
       </p:sp>
       <p:sp>
         <p:nvSpPr>
-          <p:cNvPr id="8" name="slot.process-step.2.title"/>
+          <p:cNvPr id="10" name="slot.process-step.2.title"/>
           <p:cNvSpPr/>
           <p:nvPr/>
         </p:nvSpPr>
@@ -23936,7 +24182,7 @@
                 <a:solidFill>
                   <a:schemeClr val="accent1"/>
                 </a:solidFill>
-                <a:latin typeface="Futura Medium"/>
+                <a:latin typeface="Arial"/>
               </a:rPr>
               <a:t>Step 2</a:t>
             </a:r>
@@ -23945,7 +24191,7 @@
       </p:sp>
       <p:sp>
         <p:nvSpPr>
-          <p:cNvPr id="9" name="slot.process-step.2.body"/>
+          <p:cNvPr id="11" name="slot.process-step.2.body"/>
           <p:cNvSpPr txBox="1"/>
           <p:nvPr/>
         </p:nvSpPr>
@@ -23980,7 +24226,7 @@
       </p:sp>
       <p:sp>
         <p:nvSpPr>
-          <p:cNvPr id="10" name="decor"/>
+          <p:cNvPr id="12" name="decor"/>
           <p:cNvSpPr/>
           <p:nvPr/>
         </p:nvSpPr>
@@ -24023,7 +24269,7 @@
                 <a:solidFill>
                   <a:schemeClr val="lt1"/>
                 </a:solidFill>
-                <a:latin typeface="Futura Medium"/>
+                <a:latin typeface="Arial"/>
               </a:rPr>
               <a:t>2</a:t>
             </a:r>
@@ -24032,7 +24278,7 @@
       </p:sp>
       <p:sp>
         <p:nvSpPr>
-          <p:cNvPr id="11" name="slot.process-step.3.title"/>
+          <p:cNvPr id="13" name="slot.process-step.3.title"/>
           <p:cNvSpPr/>
           <p:nvPr/>
         </p:nvSpPr>
@@ -24075,7 +24321,7 @@
                 <a:solidFill>
                   <a:schemeClr val="accent1"/>
                 </a:solidFill>
-                <a:latin typeface="Futura Medium"/>
+                <a:latin typeface="Arial"/>
               </a:rPr>
               <a:t>Step 3</a:t>
             </a:r>
@@ -24084,7 +24330,7 @@
       </p:sp>
       <p:sp>
         <p:nvSpPr>
-          <p:cNvPr id="12" name="slot.process-step.3.body"/>
+          <p:cNvPr id="14" name="slot.process-step.3.body"/>
           <p:cNvSpPr txBox="1"/>
           <p:nvPr/>
         </p:nvSpPr>
@@ -24119,7 +24365,7 @@
       </p:sp>
       <p:sp>
         <p:nvSpPr>
-          <p:cNvPr id="13" name="decor"/>
+          <p:cNvPr id="15" name="decor"/>
           <p:cNvSpPr/>
           <p:nvPr/>
         </p:nvSpPr>
@@ -24162,7 +24408,7 @@
                 <a:solidFill>
                   <a:schemeClr val="lt1"/>
                 </a:solidFill>
-                <a:latin typeface="Futura Medium"/>
+                <a:latin typeface="Arial"/>
               </a:rPr>
               <a:t>3</a:t>
             </a:r>
@@ -24243,7 +24489,130 @@
       </p:sp>
       <p:sp>
         <p:nvSpPr>
-          <p:cNvPr id="4" name="slot.title"/>
+          <p:cNvPr id="4" name="decor">
+            <a:extLst>
+              <a:ext uri="{FF2B5EF4-FFF2-40B4-BE49-F238E27FC236}">
+                <a16:creationId xmlns:a16="http://schemas.microsoft.com/office/drawing/2014/main" id="{9BCA9FA9-DC4A-F7F9-6F98-04EFCF05B790}"/>
+              </a:ext>
+            </a:extLst>
+          </p:cNvPr>
+          <p:cNvSpPr/>
+          <p:nvPr userDrawn="1"/>
+        </p:nvSpPr>
+        <p:spPr>
+          <a:xfrm>
+            <a:off x="-64731" y="246322"/>
+            <a:ext cx="512150" cy="423265"/>
+          </a:xfrm>
+          <a:prstGeom prst="pie">
+            <a:avLst>
+              <a:gd name="adj1" fmla="val 16190032"/>
+              <a:gd name="adj2" fmla="val 5400005"/>
+            </a:avLst>
+          </a:prstGeom>
+          <a:solidFill>
+            <a:schemeClr val="tx2"/>
+          </a:solidFill>
+          <a:ln>
+            <a:solidFill>
+              <a:schemeClr val="tx2"/>
+            </a:solidFill>
+          </a:ln>
+        </p:spPr>
+        <p:style>
+          <a:lnRef idx="2">
+            <a:schemeClr val="accent1">
+              <a:shade val="50000"/>
+            </a:schemeClr>
+          </a:lnRef>
+          <a:fillRef idx="1">
+            <a:schemeClr val="accent1"/>
+          </a:fillRef>
+          <a:effectRef idx="0">
+            <a:schemeClr val="accent1"/>
+          </a:effectRef>
+          <a:fontRef idx="minor">
+            <a:schemeClr val="lt1"/>
+          </a:fontRef>
+        </p:style>
+        <p:txBody>
+          <a:bodyPr lIns="36000" tIns="36000" rIns="36000" bIns="36000" rtlCol="0" anchor="ctr"/>
+          <a:lstStyle/>
+          <a:p>
+            <a:pPr algn="l" rtl="0"/>
+            <a:endParaRPr lang="en-US" sz="1200" b="1">
+              <a:solidFill>
+                <a:schemeClr val="bg1"/>
+              </a:solidFill>
+              <a:latin typeface="Arial" panose="020B0604020202020204" pitchFamily="34" charset="0"/>
+              <a:cs typeface="Arial" panose="020B0604020202020204" pitchFamily="34" charset="0"/>
+            </a:endParaRPr>
+          </a:p>
+        </p:txBody>
+      </p:sp>
+      <p:sp>
+        <p:nvSpPr>
+          <p:cNvPr id="5" name="decor">
+            <a:extLst>
+              <a:ext uri="{FF2B5EF4-FFF2-40B4-BE49-F238E27FC236}">
+                <a16:creationId xmlns:a16="http://schemas.microsoft.com/office/drawing/2014/main" id="{5D3B6E37-9E51-E62C-A843-852BEEBE5F2B}"/>
+              </a:ext>
+            </a:extLst>
+          </p:cNvPr>
+          <p:cNvSpPr/>
+          <p:nvPr userDrawn="1"/>
+        </p:nvSpPr>
+        <p:spPr>
+          <a:xfrm>
+            <a:off x="0" y="247761"/>
+            <a:ext cx="191344" cy="423265"/>
+          </a:xfrm>
+          <a:prstGeom prst="rect">
+            <a:avLst/>
+          </a:prstGeom>
+          <a:solidFill>
+            <a:schemeClr val="tx2"/>
+          </a:solidFill>
+          <a:ln>
+            <a:solidFill>
+              <a:schemeClr val="tx2"/>
+            </a:solidFill>
+          </a:ln>
+        </p:spPr>
+        <p:style>
+          <a:lnRef idx="2">
+            <a:schemeClr val="accent1">
+              <a:shade val="50000"/>
+            </a:schemeClr>
+          </a:lnRef>
+          <a:fillRef idx="1">
+            <a:schemeClr val="accent1"/>
+          </a:fillRef>
+          <a:effectRef idx="0">
+            <a:schemeClr val="accent1"/>
+          </a:effectRef>
+          <a:fontRef idx="minor">
+            <a:schemeClr val="lt1"/>
+          </a:fontRef>
+        </p:style>
+        <p:txBody>
+          <a:bodyPr lIns="36000" tIns="36000" rIns="36000" bIns="36000" rtlCol="0" anchor="ctr"/>
+          <a:lstStyle/>
+          <a:p>
+            <a:pPr algn="l" rtl="0"/>
+            <a:endParaRPr lang="en-US" sz="1200" b="1">
+              <a:solidFill>
+                <a:schemeClr val="bg1"/>
+              </a:solidFill>
+              <a:latin typeface="Arial" panose="020B0604020202020204" pitchFamily="34" charset="0"/>
+              <a:cs typeface="Arial" panose="020B0604020202020204" pitchFamily="34" charset="0"/>
+            </a:endParaRPr>
+          </a:p>
+        </p:txBody>
+      </p:sp>
+      <p:sp>
+        <p:nvSpPr>
+          <p:cNvPr id="6" name="slot.title"/>
           <p:cNvSpPr txBox="1"/>
           <p:nvPr/>
         </p:nvSpPr>
@@ -24267,7 +24636,7 @@
             <a:r>
               <a:rPr sz="2200" b="1">
                 <a:solidFill>
-                  <a:schemeClr val="dk1"/>
+                  <a:schemeClr val="accent2"/>
                 </a:solidFill>
                 <a:latin typeface="Futura Medium"/>
               </a:rPr>
@@ -24278,7 +24647,7 @@
       </p:sp>
       <p:sp>
         <p:nvSpPr>
-          <p:cNvPr id="5" name="slot.process-step.1.title"/>
+          <p:cNvPr id="7" name="slot.process-step.1.title"/>
           <p:cNvSpPr/>
           <p:nvPr/>
         </p:nvSpPr>
@@ -24321,7 +24690,7 @@
                 <a:solidFill>
                   <a:schemeClr val="accent1"/>
                 </a:solidFill>
-                <a:latin typeface="Futura Medium"/>
+                <a:latin typeface="Arial"/>
               </a:rPr>
               <a:t>Step 1</a:t>
             </a:r>
@@ -24330,7 +24699,7 @@
       </p:sp>
       <p:sp>
         <p:nvSpPr>
-          <p:cNvPr id="6" name="slot.process-step.1.body"/>
+          <p:cNvPr id="8" name="slot.process-step.1.body"/>
           <p:cNvSpPr txBox="1"/>
           <p:nvPr/>
         </p:nvSpPr>
@@ -24365,7 +24734,7 @@
       </p:sp>
       <p:sp>
         <p:nvSpPr>
-          <p:cNvPr id="7" name="decor"/>
+          <p:cNvPr id="9" name="decor"/>
           <p:cNvSpPr/>
           <p:nvPr/>
         </p:nvSpPr>
@@ -24408,7 +24777,7 @@
                 <a:solidFill>
                   <a:schemeClr val="lt1"/>
                 </a:solidFill>
-                <a:latin typeface="Futura Medium"/>
+                <a:latin typeface="Arial"/>
               </a:rPr>
               <a:t>1</a:t>
             </a:r>
@@ -24417,7 +24786,7 @@
       </p:sp>
       <p:sp>
         <p:nvSpPr>
-          <p:cNvPr id="8" name="slot.process-step.2.title"/>
+          <p:cNvPr id="10" name="slot.process-step.2.title"/>
           <p:cNvSpPr/>
           <p:nvPr/>
         </p:nvSpPr>
@@ -24460,7 +24829,7 @@
                 <a:solidFill>
                   <a:schemeClr val="accent1"/>
                 </a:solidFill>
-                <a:latin typeface="Futura Medium"/>
+                <a:latin typeface="Arial"/>
               </a:rPr>
               <a:t>Step 2</a:t>
             </a:r>
@@ -24469,7 +24838,7 @@
       </p:sp>
       <p:sp>
         <p:nvSpPr>
-          <p:cNvPr id="9" name="slot.process-step.2.body"/>
+          <p:cNvPr id="11" name="slot.process-step.2.body"/>
           <p:cNvSpPr txBox="1"/>
           <p:nvPr/>
         </p:nvSpPr>
@@ -24504,7 +24873,7 @@
       </p:sp>
       <p:sp>
         <p:nvSpPr>
-          <p:cNvPr id="10" name="decor"/>
+          <p:cNvPr id="12" name="decor"/>
           <p:cNvSpPr/>
           <p:nvPr/>
         </p:nvSpPr>
@@ -24547,7 +24916,7 @@
                 <a:solidFill>
                   <a:schemeClr val="lt1"/>
                 </a:solidFill>
-                <a:latin typeface="Futura Medium"/>
+                <a:latin typeface="Arial"/>
               </a:rPr>
               <a:t>2</a:t>
             </a:r>
@@ -24556,7 +24925,7 @@
       </p:sp>
       <p:sp>
         <p:nvSpPr>
-          <p:cNvPr id="11" name="slot.process-step.3.title"/>
+          <p:cNvPr id="13" name="slot.process-step.3.title"/>
           <p:cNvSpPr/>
           <p:nvPr/>
         </p:nvSpPr>
@@ -24599,7 +24968,7 @@
                 <a:solidFill>
                   <a:schemeClr val="accent1"/>
                 </a:solidFill>
-                <a:latin typeface="Futura Medium"/>
+                <a:latin typeface="Arial"/>
               </a:rPr>
               <a:t>Step 3</a:t>
             </a:r>
@@ -24608,7 +24977,7 @@
       </p:sp>
       <p:sp>
         <p:nvSpPr>
-          <p:cNvPr id="12" name="slot.process-step.3.body"/>
+          <p:cNvPr id="14" name="slot.process-step.3.body"/>
           <p:cNvSpPr txBox="1"/>
           <p:nvPr/>
         </p:nvSpPr>
@@ -24643,7 +25012,7 @@
       </p:sp>
       <p:sp>
         <p:nvSpPr>
-          <p:cNvPr id="13" name="decor"/>
+          <p:cNvPr id="15" name="decor"/>
           <p:cNvSpPr/>
           <p:nvPr/>
         </p:nvSpPr>
@@ -24686,7 +25055,7 @@
                 <a:solidFill>
                   <a:schemeClr val="lt1"/>
                 </a:solidFill>
-                <a:latin typeface="Futura Medium"/>
+                <a:latin typeface="Arial"/>
               </a:rPr>
               <a:t>3</a:t>
             </a:r>
@@ -24695,7 +25064,7 @@
       </p:sp>
       <p:sp>
         <p:nvSpPr>
-          <p:cNvPr id="14" name="slot.process-step.4.title"/>
+          <p:cNvPr id="16" name="slot.process-step.4.title"/>
           <p:cNvSpPr/>
           <p:nvPr/>
         </p:nvSpPr>
@@ -24738,7 +25107,7 @@
                 <a:solidFill>
                   <a:schemeClr val="accent1"/>
                 </a:solidFill>
-                <a:latin typeface="Futura Medium"/>
+                <a:latin typeface="Arial"/>
               </a:rPr>
               <a:t>Step 4</a:t>
             </a:r>
@@ -24747,7 +25116,7 @@
       </p:sp>
       <p:sp>
         <p:nvSpPr>
-          <p:cNvPr id="15" name="slot.process-step.4.body"/>
+          <p:cNvPr id="17" name="slot.process-step.4.body"/>
           <p:cNvSpPr txBox="1"/>
           <p:nvPr/>
         </p:nvSpPr>
@@ -24782,7 +25151,7 @@
       </p:sp>
       <p:sp>
         <p:nvSpPr>
-          <p:cNvPr id="16" name="decor"/>
+          <p:cNvPr id="18" name="decor"/>
           <p:cNvSpPr/>
           <p:nvPr/>
         </p:nvSpPr>
@@ -24825,7 +25194,7 @@
                 <a:solidFill>
                   <a:schemeClr val="lt1"/>
                 </a:solidFill>
-                <a:latin typeface="Futura Medium"/>
+                <a:latin typeface="Arial"/>
               </a:rPr>
               <a:t>4</a:t>
             </a:r>
@@ -25016,7 +25385,130 @@
       </p:sp>
       <p:sp>
         <p:nvSpPr>
-          <p:cNvPr id="4" name="slot.title"/>
+          <p:cNvPr id="4" name="decor">
+            <a:extLst>
+              <a:ext uri="{FF2B5EF4-FFF2-40B4-BE49-F238E27FC236}">
+                <a16:creationId xmlns:a16="http://schemas.microsoft.com/office/drawing/2014/main" id="{9BCA9FA9-DC4A-F7F9-6F98-04EFCF05B790}"/>
+              </a:ext>
+            </a:extLst>
+          </p:cNvPr>
+          <p:cNvSpPr/>
+          <p:nvPr userDrawn="1"/>
+        </p:nvSpPr>
+        <p:spPr>
+          <a:xfrm>
+            <a:off x="-64731" y="246322"/>
+            <a:ext cx="512150" cy="423265"/>
+          </a:xfrm>
+          <a:prstGeom prst="pie">
+            <a:avLst>
+              <a:gd name="adj1" fmla="val 16190032"/>
+              <a:gd name="adj2" fmla="val 5400005"/>
+            </a:avLst>
+          </a:prstGeom>
+          <a:solidFill>
+            <a:schemeClr val="tx2"/>
+          </a:solidFill>
+          <a:ln>
+            <a:solidFill>
+              <a:schemeClr val="tx2"/>
+            </a:solidFill>
+          </a:ln>
+        </p:spPr>
+        <p:style>
+          <a:lnRef idx="2">
+            <a:schemeClr val="accent1">
+              <a:shade val="50000"/>
+            </a:schemeClr>
+          </a:lnRef>
+          <a:fillRef idx="1">
+            <a:schemeClr val="accent1"/>
+          </a:fillRef>
+          <a:effectRef idx="0">
+            <a:schemeClr val="accent1"/>
+          </a:effectRef>
+          <a:fontRef idx="minor">
+            <a:schemeClr val="lt1"/>
+          </a:fontRef>
+        </p:style>
+        <p:txBody>
+          <a:bodyPr lIns="36000" tIns="36000" rIns="36000" bIns="36000" rtlCol="0" anchor="ctr"/>
+          <a:lstStyle/>
+          <a:p>
+            <a:pPr algn="l" rtl="0"/>
+            <a:endParaRPr lang="en-US" sz="1200" b="1">
+              <a:solidFill>
+                <a:schemeClr val="bg1"/>
+              </a:solidFill>
+              <a:latin typeface="Arial" panose="020B0604020202020204" pitchFamily="34" charset="0"/>
+              <a:cs typeface="Arial" panose="020B0604020202020204" pitchFamily="34" charset="0"/>
+            </a:endParaRPr>
+          </a:p>
+        </p:txBody>
+      </p:sp>
+      <p:sp>
+        <p:nvSpPr>
+          <p:cNvPr id="5" name="decor">
+            <a:extLst>
+              <a:ext uri="{FF2B5EF4-FFF2-40B4-BE49-F238E27FC236}">
+                <a16:creationId xmlns:a16="http://schemas.microsoft.com/office/drawing/2014/main" id="{5D3B6E37-9E51-E62C-A843-852BEEBE5F2B}"/>
+              </a:ext>
+            </a:extLst>
+          </p:cNvPr>
+          <p:cNvSpPr/>
+          <p:nvPr userDrawn="1"/>
+        </p:nvSpPr>
+        <p:spPr>
+          <a:xfrm>
+            <a:off x="0" y="247761"/>
+            <a:ext cx="191344" cy="423265"/>
+          </a:xfrm>
+          <a:prstGeom prst="rect">
+            <a:avLst/>
+          </a:prstGeom>
+          <a:solidFill>
+            <a:schemeClr val="tx2"/>
+          </a:solidFill>
+          <a:ln>
+            <a:solidFill>
+              <a:schemeClr val="tx2"/>
+            </a:solidFill>
+          </a:ln>
+        </p:spPr>
+        <p:style>
+          <a:lnRef idx="2">
+            <a:schemeClr val="accent1">
+              <a:shade val="50000"/>
+            </a:schemeClr>
+          </a:lnRef>
+          <a:fillRef idx="1">
+            <a:schemeClr val="accent1"/>
+          </a:fillRef>
+          <a:effectRef idx="0">
+            <a:schemeClr val="accent1"/>
+          </a:effectRef>
+          <a:fontRef idx="minor">
+            <a:schemeClr val="lt1"/>
+          </a:fontRef>
+        </p:style>
+        <p:txBody>
+          <a:bodyPr lIns="36000" tIns="36000" rIns="36000" bIns="36000" rtlCol="0" anchor="ctr"/>
+          <a:lstStyle/>
+          <a:p>
+            <a:pPr algn="l" rtl="0"/>
+            <a:endParaRPr lang="en-US" sz="1200" b="1">
+              <a:solidFill>
+                <a:schemeClr val="bg1"/>
+              </a:solidFill>
+              <a:latin typeface="Arial" panose="020B0604020202020204" pitchFamily="34" charset="0"/>
+              <a:cs typeface="Arial" panose="020B0604020202020204" pitchFamily="34" charset="0"/>
+            </a:endParaRPr>
+          </a:p>
+        </p:txBody>
+      </p:sp>
+      <p:sp>
+        <p:nvSpPr>
+          <p:cNvPr id="6" name="slot.title"/>
           <p:cNvSpPr txBox="1"/>
           <p:nvPr/>
         </p:nvSpPr>
@@ -25040,7 +25532,7 @@
             <a:r>
               <a:rPr sz="2200" b="1">
                 <a:solidFill>
-                  <a:schemeClr val="dk1"/>
+                  <a:schemeClr val="accent2"/>
                 </a:solidFill>
                 <a:latin typeface="Futura Medium"/>
               </a:rPr>
@@ -25051,7 +25543,7 @@
       </p:sp>
       <p:sp>
         <p:nvSpPr>
-          <p:cNvPr id="5" name="slot.process-step.1.title"/>
+          <p:cNvPr id="7" name="slot.process-step.1.title"/>
           <p:cNvSpPr/>
           <p:nvPr/>
         </p:nvSpPr>
@@ -25094,7 +25586,7 @@
                 <a:solidFill>
                   <a:schemeClr val="accent1"/>
                 </a:solidFill>
-                <a:latin typeface="Futura Medium"/>
+                <a:latin typeface="Arial"/>
               </a:rPr>
               <a:t>Step 1</a:t>
             </a:r>
@@ -25103,7 +25595,7 @@
       </p:sp>
       <p:sp>
         <p:nvSpPr>
-          <p:cNvPr id="6" name="slot.process-step.1.body"/>
+          <p:cNvPr id="8" name="slot.process-step.1.body"/>
           <p:cNvSpPr txBox="1"/>
           <p:nvPr/>
         </p:nvSpPr>
@@ -25138,7 +25630,7 @@
       </p:sp>
       <p:sp>
         <p:nvSpPr>
-          <p:cNvPr id="7" name="decor"/>
+          <p:cNvPr id="9" name="decor"/>
           <p:cNvSpPr/>
           <p:nvPr/>
         </p:nvSpPr>
@@ -25181,7 +25673,7 @@
                 <a:solidFill>
                   <a:schemeClr val="lt1"/>
                 </a:solidFill>
-                <a:latin typeface="Futura Medium"/>
+                <a:latin typeface="Arial"/>
               </a:rPr>
               <a:t>1</a:t>
             </a:r>
@@ -25190,7 +25682,7 @@
       </p:sp>
       <p:sp>
         <p:nvSpPr>
-          <p:cNvPr id="8" name="slot.process-step.2.title"/>
+          <p:cNvPr id="10" name="slot.process-step.2.title"/>
           <p:cNvSpPr/>
           <p:nvPr/>
         </p:nvSpPr>
@@ -25233,7 +25725,7 @@
                 <a:solidFill>
                   <a:schemeClr val="accent1"/>
                 </a:solidFill>
-                <a:latin typeface="Futura Medium"/>
+                <a:latin typeface="Arial"/>
               </a:rPr>
               <a:t>Step 2</a:t>
             </a:r>
@@ -25242,7 +25734,7 @@
       </p:sp>
       <p:sp>
         <p:nvSpPr>
-          <p:cNvPr id="9" name="slot.process-step.2.body"/>
+          <p:cNvPr id="11" name="slot.process-step.2.body"/>
           <p:cNvSpPr txBox="1"/>
           <p:nvPr/>
         </p:nvSpPr>
@@ -25277,7 +25769,7 @@
       </p:sp>
       <p:sp>
         <p:nvSpPr>
-          <p:cNvPr id="10" name="decor"/>
+          <p:cNvPr id="12" name="decor"/>
           <p:cNvSpPr/>
           <p:nvPr/>
         </p:nvSpPr>
@@ -25320,7 +25812,7 @@
                 <a:solidFill>
                   <a:schemeClr val="lt1"/>
                 </a:solidFill>
-                <a:latin typeface="Futura Medium"/>
+                <a:latin typeface="Arial"/>
               </a:rPr>
               <a:t>2</a:t>
             </a:r>
@@ -25329,7 +25821,7 @@
       </p:sp>
       <p:sp>
         <p:nvSpPr>
-          <p:cNvPr id="11" name="slot.process-step.3.title"/>
+          <p:cNvPr id="13" name="slot.process-step.3.title"/>
           <p:cNvSpPr/>
           <p:nvPr/>
         </p:nvSpPr>
@@ -25372,7 +25864,7 @@
                 <a:solidFill>
                   <a:schemeClr val="accent1"/>
                 </a:solidFill>
-                <a:latin typeface="Futura Medium"/>
+                <a:latin typeface="Arial"/>
               </a:rPr>
               <a:t>Step 3</a:t>
             </a:r>
@@ -25381,7 +25873,7 @@
       </p:sp>
       <p:sp>
         <p:nvSpPr>
-          <p:cNvPr id="12" name="slot.process-step.3.body"/>
+          <p:cNvPr id="14" name="slot.process-step.3.body"/>
           <p:cNvSpPr txBox="1"/>
           <p:nvPr/>
         </p:nvSpPr>
@@ -25416,7 +25908,7 @@
       </p:sp>
       <p:sp>
         <p:nvSpPr>
-          <p:cNvPr id="13" name="decor"/>
+          <p:cNvPr id="15" name="decor"/>
           <p:cNvSpPr/>
           <p:nvPr/>
         </p:nvSpPr>
@@ -25459,7 +25951,7 @@
                 <a:solidFill>
                   <a:schemeClr val="lt1"/>
                 </a:solidFill>
-                <a:latin typeface="Futura Medium"/>
+                <a:latin typeface="Arial"/>
               </a:rPr>
               <a:t>3</a:t>
             </a:r>
@@ -25468,7 +25960,7 @@
       </p:sp>
       <p:sp>
         <p:nvSpPr>
-          <p:cNvPr id="14" name="slot.process-step.4.title"/>
+          <p:cNvPr id="16" name="slot.process-step.4.title"/>
           <p:cNvSpPr/>
           <p:nvPr/>
         </p:nvSpPr>
@@ -25511,7 +26003,7 @@
                 <a:solidFill>
                   <a:schemeClr val="accent1"/>
                 </a:solidFill>
-                <a:latin typeface="Futura Medium"/>
+                <a:latin typeface="Arial"/>
               </a:rPr>
               <a:t>Step 4</a:t>
             </a:r>
@@ -25520,7 +26012,7 @@
       </p:sp>
       <p:sp>
         <p:nvSpPr>
-          <p:cNvPr id="15" name="slot.process-step.4.body"/>
+          <p:cNvPr id="17" name="slot.process-step.4.body"/>
           <p:cNvSpPr txBox="1"/>
           <p:nvPr/>
         </p:nvSpPr>
@@ -25555,7 +26047,7 @@
       </p:sp>
       <p:sp>
         <p:nvSpPr>
-          <p:cNvPr id="16" name="decor"/>
+          <p:cNvPr id="18" name="decor"/>
           <p:cNvSpPr/>
           <p:nvPr/>
         </p:nvSpPr>
@@ -25598,7 +26090,7 @@
                 <a:solidFill>
                   <a:schemeClr val="lt1"/>
                 </a:solidFill>
-                <a:latin typeface="Futura Medium"/>
+                <a:latin typeface="Arial"/>
               </a:rPr>
               <a:t>4</a:t>
             </a:r>
@@ -25607,7 +26099,7 @@
       </p:sp>
       <p:sp>
         <p:nvSpPr>
-          <p:cNvPr id="17" name="slot.process-step.5.title"/>
+          <p:cNvPr id="19" name="slot.process-step.5.title"/>
           <p:cNvSpPr/>
           <p:nvPr/>
         </p:nvSpPr>
@@ -25650,7 +26142,7 @@
                 <a:solidFill>
                   <a:schemeClr val="accent1"/>
                 </a:solidFill>
-                <a:latin typeface="Futura Medium"/>
+                <a:latin typeface="Arial"/>
               </a:rPr>
               <a:t>Step 5</a:t>
             </a:r>
@@ -25659,7 +26151,7 @@
       </p:sp>
       <p:sp>
         <p:nvSpPr>
-          <p:cNvPr id="18" name="slot.process-step.5.body"/>
+          <p:cNvPr id="20" name="slot.process-step.5.body"/>
           <p:cNvSpPr txBox="1"/>
           <p:nvPr/>
         </p:nvSpPr>
@@ -25694,7 +26186,7 @@
       </p:sp>
       <p:sp>
         <p:nvSpPr>
-          <p:cNvPr id="19" name="decor"/>
+          <p:cNvPr id="21" name="decor"/>
           <p:cNvSpPr/>
           <p:nvPr/>
         </p:nvSpPr>
@@ -25737,7 +26229,7 @@
                 <a:solidFill>
                   <a:schemeClr val="lt1"/>
                 </a:solidFill>
-                <a:latin typeface="Futura Medium"/>
+                <a:latin typeface="Arial"/>
               </a:rPr>
               <a:t>5</a:t>
             </a:r>
@@ -25818,7 +26310,130 @@
       </p:sp>
       <p:sp>
         <p:nvSpPr>
-          <p:cNvPr id="4" name="slot.title"/>
+          <p:cNvPr id="4" name="decor">
+            <a:extLst>
+              <a:ext uri="{FF2B5EF4-FFF2-40B4-BE49-F238E27FC236}">
+                <a16:creationId xmlns:a16="http://schemas.microsoft.com/office/drawing/2014/main" id="{9BCA9FA9-DC4A-F7F9-6F98-04EFCF05B790}"/>
+              </a:ext>
+            </a:extLst>
+          </p:cNvPr>
+          <p:cNvSpPr/>
+          <p:nvPr userDrawn="1"/>
+        </p:nvSpPr>
+        <p:spPr>
+          <a:xfrm>
+            <a:off x="-64731" y="246322"/>
+            <a:ext cx="512150" cy="423265"/>
+          </a:xfrm>
+          <a:prstGeom prst="pie">
+            <a:avLst>
+              <a:gd name="adj1" fmla="val 16190032"/>
+              <a:gd name="adj2" fmla="val 5400005"/>
+            </a:avLst>
+          </a:prstGeom>
+          <a:solidFill>
+            <a:schemeClr val="tx2"/>
+          </a:solidFill>
+          <a:ln>
+            <a:solidFill>
+              <a:schemeClr val="tx2"/>
+            </a:solidFill>
+          </a:ln>
+        </p:spPr>
+        <p:style>
+          <a:lnRef idx="2">
+            <a:schemeClr val="accent1">
+              <a:shade val="50000"/>
+            </a:schemeClr>
+          </a:lnRef>
+          <a:fillRef idx="1">
+            <a:schemeClr val="accent1"/>
+          </a:fillRef>
+          <a:effectRef idx="0">
+            <a:schemeClr val="accent1"/>
+          </a:effectRef>
+          <a:fontRef idx="minor">
+            <a:schemeClr val="lt1"/>
+          </a:fontRef>
+        </p:style>
+        <p:txBody>
+          <a:bodyPr lIns="36000" tIns="36000" rIns="36000" bIns="36000" rtlCol="0" anchor="ctr"/>
+          <a:lstStyle/>
+          <a:p>
+            <a:pPr algn="l" rtl="0"/>
+            <a:endParaRPr lang="en-US" sz="1200" b="1">
+              <a:solidFill>
+                <a:schemeClr val="bg1"/>
+              </a:solidFill>
+              <a:latin typeface="Arial" panose="020B0604020202020204" pitchFamily="34" charset="0"/>
+              <a:cs typeface="Arial" panose="020B0604020202020204" pitchFamily="34" charset="0"/>
+            </a:endParaRPr>
+          </a:p>
+        </p:txBody>
+      </p:sp>
+      <p:sp>
+        <p:nvSpPr>
+          <p:cNvPr id="5" name="decor">
+            <a:extLst>
+              <a:ext uri="{FF2B5EF4-FFF2-40B4-BE49-F238E27FC236}">
+                <a16:creationId xmlns:a16="http://schemas.microsoft.com/office/drawing/2014/main" id="{5D3B6E37-9E51-E62C-A843-852BEEBE5F2B}"/>
+              </a:ext>
+            </a:extLst>
+          </p:cNvPr>
+          <p:cNvSpPr/>
+          <p:nvPr userDrawn="1"/>
+        </p:nvSpPr>
+        <p:spPr>
+          <a:xfrm>
+            <a:off x="0" y="247761"/>
+            <a:ext cx="191344" cy="423265"/>
+          </a:xfrm>
+          <a:prstGeom prst="rect">
+            <a:avLst/>
+          </a:prstGeom>
+          <a:solidFill>
+            <a:schemeClr val="tx2"/>
+          </a:solidFill>
+          <a:ln>
+            <a:solidFill>
+              <a:schemeClr val="tx2"/>
+            </a:solidFill>
+          </a:ln>
+        </p:spPr>
+        <p:style>
+          <a:lnRef idx="2">
+            <a:schemeClr val="accent1">
+              <a:shade val="50000"/>
+            </a:schemeClr>
+          </a:lnRef>
+          <a:fillRef idx="1">
+            <a:schemeClr val="accent1"/>
+          </a:fillRef>
+          <a:effectRef idx="0">
+            <a:schemeClr val="accent1"/>
+          </a:effectRef>
+          <a:fontRef idx="minor">
+            <a:schemeClr val="lt1"/>
+          </a:fontRef>
+        </p:style>
+        <p:txBody>
+          <a:bodyPr lIns="36000" tIns="36000" rIns="36000" bIns="36000" rtlCol="0" anchor="ctr"/>
+          <a:lstStyle/>
+          <a:p>
+            <a:pPr algn="l" rtl="0"/>
+            <a:endParaRPr lang="en-US" sz="1200" b="1">
+              <a:solidFill>
+                <a:schemeClr val="bg1"/>
+              </a:solidFill>
+              <a:latin typeface="Arial" panose="020B0604020202020204" pitchFamily="34" charset="0"/>
+              <a:cs typeface="Arial" panose="020B0604020202020204" pitchFamily="34" charset="0"/>
+            </a:endParaRPr>
+          </a:p>
+        </p:txBody>
+      </p:sp>
+      <p:sp>
+        <p:nvSpPr>
+          <p:cNvPr id="6" name="slot.title"/>
           <p:cNvSpPr txBox="1"/>
           <p:nvPr/>
         </p:nvSpPr>
@@ -25842,7 +26457,7 @@
             <a:r>
               <a:rPr sz="2200" b="1">
                 <a:solidFill>
-                  <a:schemeClr val="dk1"/>
+                  <a:schemeClr val="accent2"/>
                 </a:solidFill>
                 <a:latin typeface="Futura Medium"/>
               </a:rPr>
@@ -25853,7 +26468,7 @@
       </p:sp>
       <p:sp>
         <p:nvSpPr>
-          <p:cNvPr id="5" name="slot.kpi.1.value"/>
+          <p:cNvPr id="7" name="slot.kpi.1.value"/>
           <p:cNvSpPr txBox="1"/>
           <p:nvPr/>
         </p:nvSpPr>
@@ -25879,7 +26494,7 @@
                 <a:solidFill>
                   <a:schemeClr val="accent2"/>
                 </a:solidFill>
-                <a:latin typeface="Futura Medium"/>
+                <a:latin typeface="Arial"/>
               </a:rPr>
               <a:t>42%</a:t>
             </a:r>
@@ -25888,7 +26503,7 @@
       </p:sp>
       <p:sp>
         <p:nvSpPr>
-          <p:cNvPr id="6" name="slot.kpi.1.label"/>
+          <p:cNvPr id="8" name="slot.kpi.1.label"/>
           <p:cNvSpPr txBox="1"/>
           <p:nvPr/>
         </p:nvSpPr>
@@ -25914,7 +26529,7 @@
                 <a:solidFill>
                   <a:schemeClr val="dk1"/>
                 </a:solidFill>
-                <a:latin typeface="Futura Medium"/>
+                <a:latin typeface="Arial"/>
               </a:rPr>
               <a:t>Metric label</a:t>
             </a:r>
@@ -25923,7 +26538,7 @@
       </p:sp>
       <p:sp>
         <p:nvSpPr>
-          <p:cNvPr id="7" name="slot.kpi.1.body"/>
+          <p:cNvPr id="9" name="slot.kpi.1.body"/>
           <p:cNvSpPr txBox="1"/>
           <p:nvPr/>
         </p:nvSpPr>
@@ -25958,7 +26573,7 @@
       </p:sp>
       <p:sp>
         <p:nvSpPr>
-          <p:cNvPr id="8" name="decor"/>
+          <p:cNvPr id="10" name="decor"/>
           <p:cNvSpPr/>
           <p:nvPr/>
         </p:nvSpPr>
@@ -26001,7 +26616,7 @@
                 <a:solidFill>
                   <a:schemeClr val="lt1"/>
                 </a:solidFill>
-                <a:latin typeface="Futura Medium"/>
+                <a:latin typeface="Arial"/>
               </a:rPr>
               <a:t/>
             </a:r>
@@ -26010,7 +26625,7 @@
       </p:sp>
       <p:sp>
         <p:nvSpPr>
-          <p:cNvPr id="9" name="slot.kpi.2.value"/>
+          <p:cNvPr id="11" name="slot.kpi.2.value"/>
           <p:cNvSpPr txBox="1"/>
           <p:nvPr/>
         </p:nvSpPr>
@@ -26036,7 +26651,7 @@
                 <a:solidFill>
                   <a:schemeClr val="accent2"/>
                 </a:solidFill>
-                <a:latin typeface="Futura Medium"/>
+                <a:latin typeface="Arial"/>
               </a:rPr>
               <a:t>42%</a:t>
             </a:r>
@@ -26045,7 +26660,7 @@
       </p:sp>
       <p:sp>
         <p:nvSpPr>
-          <p:cNvPr id="10" name="slot.kpi.2.label"/>
+          <p:cNvPr id="12" name="slot.kpi.2.label"/>
           <p:cNvSpPr txBox="1"/>
           <p:nvPr/>
         </p:nvSpPr>
@@ -26071,7 +26686,7 @@
                 <a:solidFill>
                   <a:schemeClr val="dk1"/>
                 </a:solidFill>
-                <a:latin typeface="Futura Medium"/>
+                <a:latin typeface="Arial"/>
               </a:rPr>
               <a:t>Metric label</a:t>
             </a:r>
@@ -26080,7 +26695,7 @@
       </p:sp>
       <p:sp>
         <p:nvSpPr>
-          <p:cNvPr id="11" name="slot.kpi.2.body"/>
+          <p:cNvPr id="13" name="slot.kpi.2.body"/>
           <p:cNvSpPr txBox="1"/>
           <p:nvPr/>
         </p:nvSpPr>
@@ -26115,7 +26730,7 @@
       </p:sp>
       <p:sp>
         <p:nvSpPr>
-          <p:cNvPr id="12" name="decor"/>
+          <p:cNvPr id="14" name="decor"/>
           <p:cNvSpPr/>
           <p:nvPr/>
         </p:nvSpPr>
@@ -26158,7 +26773,7 @@
                 <a:solidFill>
                   <a:schemeClr val="lt1"/>
                 </a:solidFill>
-                <a:latin typeface="Futura Medium"/>
+                <a:latin typeface="Arial"/>
               </a:rPr>
               <a:t/>
             </a:r>
@@ -26167,7 +26782,7 @@
       </p:sp>
       <p:sp>
         <p:nvSpPr>
-          <p:cNvPr id="13" name="slot.kpi.3.value"/>
+          <p:cNvPr id="15" name="slot.kpi.3.value"/>
           <p:cNvSpPr txBox="1"/>
           <p:nvPr/>
         </p:nvSpPr>
@@ -26193,7 +26808,7 @@
                 <a:solidFill>
                   <a:schemeClr val="accent2"/>
                 </a:solidFill>
-                <a:latin typeface="Futura Medium"/>
+                <a:latin typeface="Arial"/>
               </a:rPr>
               <a:t>42%</a:t>
             </a:r>
@@ -26202,7 +26817,7 @@
       </p:sp>
       <p:sp>
         <p:nvSpPr>
-          <p:cNvPr id="14" name="slot.kpi.3.label"/>
+          <p:cNvPr id="16" name="slot.kpi.3.label"/>
           <p:cNvSpPr txBox="1"/>
           <p:nvPr/>
         </p:nvSpPr>
@@ -26228,7 +26843,7 @@
                 <a:solidFill>
                   <a:schemeClr val="dk1"/>
                 </a:solidFill>
-                <a:latin typeface="Futura Medium"/>
+                <a:latin typeface="Arial"/>
               </a:rPr>
               <a:t>Metric label</a:t>
             </a:r>
@@ -26237,7 +26852,7 @@
       </p:sp>
       <p:sp>
         <p:nvSpPr>
-          <p:cNvPr id="15" name="slot.kpi.3.body"/>
+          <p:cNvPr id="17" name="slot.kpi.3.body"/>
           <p:cNvSpPr txBox="1"/>
           <p:nvPr/>
         </p:nvSpPr>
@@ -26344,7 +26959,130 @@
       </p:sp>
       <p:sp>
         <p:nvSpPr>
-          <p:cNvPr id="4" name="slot.title"/>
+          <p:cNvPr id="4" name="decor">
+            <a:extLst>
+              <a:ext uri="{FF2B5EF4-FFF2-40B4-BE49-F238E27FC236}">
+                <a16:creationId xmlns:a16="http://schemas.microsoft.com/office/drawing/2014/main" id="{9BCA9FA9-DC4A-F7F9-6F98-04EFCF05B790}"/>
+              </a:ext>
+            </a:extLst>
+          </p:cNvPr>
+          <p:cNvSpPr/>
+          <p:nvPr userDrawn="1"/>
+        </p:nvSpPr>
+        <p:spPr>
+          <a:xfrm>
+            <a:off x="-64731" y="246322"/>
+            <a:ext cx="512150" cy="423265"/>
+          </a:xfrm>
+          <a:prstGeom prst="pie">
+            <a:avLst>
+              <a:gd name="adj1" fmla="val 16190032"/>
+              <a:gd name="adj2" fmla="val 5400005"/>
+            </a:avLst>
+          </a:prstGeom>
+          <a:solidFill>
+            <a:schemeClr val="tx2"/>
+          </a:solidFill>
+          <a:ln>
+            <a:solidFill>
+              <a:schemeClr val="tx2"/>
+            </a:solidFill>
+          </a:ln>
+        </p:spPr>
+        <p:style>
+          <a:lnRef idx="2">
+            <a:schemeClr val="accent1">
+              <a:shade val="50000"/>
+            </a:schemeClr>
+          </a:lnRef>
+          <a:fillRef idx="1">
+            <a:schemeClr val="accent1"/>
+          </a:fillRef>
+          <a:effectRef idx="0">
+            <a:schemeClr val="accent1"/>
+          </a:effectRef>
+          <a:fontRef idx="minor">
+            <a:schemeClr val="lt1"/>
+          </a:fontRef>
+        </p:style>
+        <p:txBody>
+          <a:bodyPr lIns="36000" tIns="36000" rIns="36000" bIns="36000" rtlCol="0" anchor="ctr"/>
+          <a:lstStyle/>
+          <a:p>
+            <a:pPr algn="l" rtl="0"/>
+            <a:endParaRPr lang="en-US" sz="1200" b="1">
+              <a:solidFill>
+                <a:schemeClr val="bg1"/>
+              </a:solidFill>
+              <a:latin typeface="Arial" panose="020B0604020202020204" pitchFamily="34" charset="0"/>
+              <a:cs typeface="Arial" panose="020B0604020202020204" pitchFamily="34" charset="0"/>
+            </a:endParaRPr>
+          </a:p>
+        </p:txBody>
+      </p:sp>
+      <p:sp>
+        <p:nvSpPr>
+          <p:cNvPr id="5" name="decor">
+            <a:extLst>
+              <a:ext uri="{FF2B5EF4-FFF2-40B4-BE49-F238E27FC236}">
+                <a16:creationId xmlns:a16="http://schemas.microsoft.com/office/drawing/2014/main" id="{5D3B6E37-9E51-E62C-A843-852BEEBE5F2B}"/>
+              </a:ext>
+            </a:extLst>
+          </p:cNvPr>
+          <p:cNvSpPr/>
+          <p:nvPr userDrawn="1"/>
+        </p:nvSpPr>
+        <p:spPr>
+          <a:xfrm>
+            <a:off x="0" y="247761"/>
+            <a:ext cx="191344" cy="423265"/>
+          </a:xfrm>
+          <a:prstGeom prst="rect">
+            <a:avLst/>
+          </a:prstGeom>
+          <a:solidFill>
+            <a:schemeClr val="tx2"/>
+          </a:solidFill>
+          <a:ln>
+            <a:solidFill>
+              <a:schemeClr val="tx2"/>
+            </a:solidFill>
+          </a:ln>
+        </p:spPr>
+        <p:style>
+          <a:lnRef idx="2">
+            <a:schemeClr val="accent1">
+              <a:shade val="50000"/>
+            </a:schemeClr>
+          </a:lnRef>
+          <a:fillRef idx="1">
+            <a:schemeClr val="accent1"/>
+          </a:fillRef>
+          <a:effectRef idx="0">
+            <a:schemeClr val="accent1"/>
+          </a:effectRef>
+          <a:fontRef idx="minor">
+            <a:schemeClr val="lt1"/>
+          </a:fontRef>
+        </p:style>
+        <p:txBody>
+          <a:bodyPr lIns="36000" tIns="36000" rIns="36000" bIns="36000" rtlCol="0" anchor="ctr"/>
+          <a:lstStyle/>
+          <a:p>
+            <a:pPr algn="l" rtl="0"/>
+            <a:endParaRPr lang="en-US" sz="1200" b="1">
+              <a:solidFill>
+                <a:schemeClr val="bg1"/>
+              </a:solidFill>
+              <a:latin typeface="Arial" panose="020B0604020202020204" pitchFamily="34" charset="0"/>
+              <a:cs typeface="Arial" panose="020B0604020202020204" pitchFamily="34" charset="0"/>
+            </a:endParaRPr>
+          </a:p>
+        </p:txBody>
+      </p:sp>
+      <p:sp>
+        <p:nvSpPr>
+          <p:cNvPr id="6" name="slot.title"/>
           <p:cNvSpPr txBox="1"/>
           <p:nvPr/>
         </p:nvSpPr>
@@ -26368,7 +27106,7 @@
             <a:r>
               <a:rPr sz="2200" b="1">
                 <a:solidFill>
-                  <a:schemeClr val="dk1"/>
+                  <a:schemeClr val="accent2"/>
                 </a:solidFill>
                 <a:latin typeface="Futura Medium"/>
               </a:rPr>
@@ -26379,7 +27117,7 @@
       </p:sp>
       <p:sp>
         <p:nvSpPr>
-          <p:cNvPr id="5" name="slot.kpi.1.value"/>
+          <p:cNvPr id="7" name="slot.kpi.1.value"/>
           <p:cNvSpPr txBox="1"/>
           <p:nvPr/>
         </p:nvSpPr>
@@ -26405,7 +27143,7 @@
                 <a:solidFill>
                   <a:schemeClr val="accent2"/>
                 </a:solidFill>
-                <a:latin typeface="Futura Medium"/>
+                <a:latin typeface="Arial"/>
               </a:rPr>
               <a:t>42%</a:t>
             </a:r>
@@ -26414,7 +27152,7 @@
       </p:sp>
       <p:sp>
         <p:nvSpPr>
-          <p:cNvPr id="6" name="slot.kpi.1.label"/>
+          <p:cNvPr id="8" name="slot.kpi.1.label"/>
           <p:cNvSpPr txBox="1"/>
           <p:nvPr/>
         </p:nvSpPr>
@@ -26440,7 +27178,7 @@
                 <a:solidFill>
                   <a:schemeClr val="dk1"/>
                 </a:solidFill>
-                <a:latin typeface="Futura Medium"/>
+                <a:latin typeface="Arial"/>
               </a:rPr>
               <a:t>Metric label</a:t>
             </a:r>
@@ -26449,7 +27187,7 @@
       </p:sp>
       <p:sp>
         <p:nvSpPr>
-          <p:cNvPr id="7" name="slot.kpi.1.body"/>
+          <p:cNvPr id="9" name="slot.kpi.1.body"/>
           <p:cNvSpPr txBox="1"/>
           <p:nvPr/>
         </p:nvSpPr>
@@ -26484,7 +27222,7 @@
       </p:sp>
       <p:sp>
         <p:nvSpPr>
-          <p:cNvPr id="8" name="decor"/>
+          <p:cNvPr id="10" name="decor"/>
           <p:cNvSpPr/>
           <p:nvPr/>
         </p:nvSpPr>
@@ -26527,7 +27265,7 @@
                 <a:solidFill>
                   <a:schemeClr val="lt1"/>
                 </a:solidFill>
-                <a:latin typeface="Futura Medium"/>
+                <a:latin typeface="Arial"/>
               </a:rPr>
               <a:t/>
             </a:r>
@@ -26536,7 +27274,7 @@
       </p:sp>
       <p:sp>
         <p:nvSpPr>
-          <p:cNvPr id="9" name="slot.kpi.2.value"/>
+          <p:cNvPr id="11" name="slot.kpi.2.value"/>
           <p:cNvSpPr txBox="1"/>
           <p:nvPr/>
         </p:nvSpPr>
@@ -26562,7 +27300,7 @@
                 <a:solidFill>
                   <a:schemeClr val="accent2"/>
                 </a:solidFill>
-                <a:latin typeface="Futura Medium"/>
+                <a:latin typeface="Arial"/>
               </a:rPr>
               <a:t>42%</a:t>
             </a:r>
@@ -26571,7 +27309,7 @@
       </p:sp>
       <p:sp>
         <p:nvSpPr>
-          <p:cNvPr id="10" name="slot.kpi.2.label"/>
+          <p:cNvPr id="12" name="slot.kpi.2.label"/>
           <p:cNvSpPr txBox="1"/>
           <p:nvPr/>
         </p:nvSpPr>
@@ -26597,7 +27335,7 @@
                 <a:solidFill>
                   <a:schemeClr val="dk1"/>
                 </a:solidFill>
-                <a:latin typeface="Futura Medium"/>
+                <a:latin typeface="Arial"/>
               </a:rPr>
               <a:t>Metric label</a:t>
             </a:r>
@@ -26606,7 +27344,7 @@
       </p:sp>
       <p:sp>
         <p:nvSpPr>
-          <p:cNvPr id="11" name="slot.kpi.2.body"/>
+          <p:cNvPr id="13" name="slot.kpi.2.body"/>
           <p:cNvSpPr txBox="1"/>
           <p:nvPr/>
         </p:nvSpPr>
@@ -26641,7 +27379,7 @@
       </p:sp>
       <p:sp>
         <p:nvSpPr>
-          <p:cNvPr id="12" name="decor"/>
+          <p:cNvPr id="14" name="decor"/>
           <p:cNvSpPr/>
           <p:nvPr/>
         </p:nvSpPr>
@@ -26684,7 +27422,7 @@
                 <a:solidFill>
                   <a:schemeClr val="lt1"/>
                 </a:solidFill>
-                <a:latin typeface="Futura Medium"/>
+                <a:latin typeface="Arial"/>
               </a:rPr>
               <a:t/>
             </a:r>
@@ -26693,7 +27431,7 @@
       </p:sp>
       <p:sp>
         <p:nvSpPr>
-          <p:cNvPr id="13" name="slot.kpi.3.value"/>
+          <p:cNvPr id="15" name="slot.kpi.3.value"/>
           <p:cNvSpPr txBox="1"/>
           <p:nvPr/>
         </p:nvSpPr>
@@ -26719,7 +27457,7 @@
                 <a:solidFill>
                   <a:schemeClr val="accent2"/>
                 </a:solidFill>
-                <a:latin typeface="Futura Medium"/>
+                <a:latin typeface="Arial"/>
               </a:rPr>
               <a:t>42%</a:t>
             </a:r>
@@ -26728,7 +27466,7 @@
       </p:sp>
       <p:sp>
         <p:nvSpPr>
-          <p:cNvPr id="14" name="slot.kpi.3.label"/>
+          <p:cNvPr id="16" name="slot.kpi.3.label"/>
           <p:cNvSpPr txBox="1"/>
           <p:nvPr/>
         </p:nvSpPr>
@@ -26754,7 +27492,7 @@
                 <a:solidFill>
                   <a:schemeClr val="dk1"/>
                 </a:solidFill>
-                <a:latin typeface="Futura Medium"/>
+                <a:latin typeface="Arial"/>
               </a:rPr>
               <a:t>Metric label</a:t>
             </a:r>
@@ -26763,7 +27501,7 @@
       </p:sp>
       <p:sp>
         <p:nvSpPr>
-          <p:cNvPr id="15" name="slot.kpi.3.body"/>
+          <p:cNvPr id="17" name="slot.kpi.3.body"/>
           <p:cNvSpPr txBox="1"/>
           <p:nvPr/>
         </p:nvSpPr>
@@ -26798,7 +27536,7 @@
       </p:sp>
       <p:sp>
         <p:nvSpPr>
-          <p:cNvPr id="16" name="decor"/>
+          <p:cNvPr id="18" name="decor"/>
           <p:cNvSpPr/>
           <p:nvPr/>
         </p:nvSpPr>
@@ -26841,7 +27579,7 @@
                 <a:solidFill>
                   <a:schemeClr val="lt1"/>
                 </a:solidFill>
-                <a:latin typeface="Futura Medium"/>
+                <a:latin typeface="Arial"/>
               </a:rPr>
               <a:t/>
             </a:r>
@@ -26850,7 +27588,7 @@
       </p:sp>
       <p:sp>
         <p:nvSpPr>
-          <p:cNvPr id="17" name="slot.kpi.4.value"/>
+          <p:cNvPr id="19" name="slot.kpi.4.value"/>
           <p:cNvSpPr txBox="1"/>
           <p:nvPr/>
         </p:nvSpPr>
@@ -26876,7 +27614,7 @@
                 <a:solidFill>
                   <a:schemeClr val="accent2"/>
                 </a:solidFill>
-                <a:latin typeface="Futura Medium"/>
+                <a:latin typeface="Arial"/>
               </a:rPr>
               <a:t>42%</a:t>
             </a:r>
@@ -26885,7 +27623,7 @@
       </p:sp>
       <p:sp>
         <p:nvSpPr>
-          <p:cNvPr id="18" name="slot.kpi.4.label"/>
+          <p:cNvPr id="20" name="slot.kpi.4.label"/>
           <p:cNvSpPr txBox="1"/>
           <p:nvPr/>
         </p:nvSpPr>
@@ -26911,7 +27649,7 @@
                 <a:solidFill>
                   <a:schemeClr val="dk1"/>
                 </a:solidFill>
-                <a:latin typeface="Futura Medium"/>
+                <a:latin typeface="Arial"/>
               </a:rPr>
               <a:t>Metric label</a:t>
             </a:r>
@@ -26920,7 +27658,7 @@
       </p:sp>
       <p:sp>
         <p:nvSpPr>
-          <p:cNvPr id="19" name="slot.kpi.4.body"/>
+          <p:cNvPr id="21" name="slot.kpi.4.body"/>
           <p:cNvSpPr txBox="1"/>
           <p:nvPr/>
         </p:nvSpPr>
@@ -27027,7 +27765,130 @@
       </p:sp>
       <p:sp>
         <p:nvSpPr>
-          <p:cNvPr id="4" name="slot.title"/>
+          <p:cNvPr id="4" name="decor">
+            <a:extLst>
+              <a:ext uri="{FF2B5EF4-FFF2-40B4-BE49-F238E27FC236}">
+                <a16:creationId xmlns:a16="http://schemas.microsoft.com/office/drawing/2014/main" id="{9BCA9FA9-DC4A-F7F9-6F98-04EFCF05B790}"/>
+              </a:ext>
+            </a:extLst>
+          </p:cNvPr>
+          <p:cNvSpPr/>
+          <p:nvPr userDrawn="1"/>
+        </p:nvSpPr>
+        <p:spPr>
+          <a:xfrm>
+            <a:off x="-64731" y="246322"/>
+            <a:ext cx="512150" cy="423265"/>
+          </a:xfrm>
+          <a:prstGeom prst="pie">
+            <a:avLst>
+              <a:gd name="adj1" fmla="val 16190032"/>
+              <a:gd name="adj2" fmla="val 5400005"/>
+            </a:avLst>
+          </a:prstGeom>
+          <a:solidFill>
+            <a:schemeClr val="tx2"/>
+          </a:solidFill>
+          <a:ln>
+            <a:solidFill>
+              <a:schemeClr val="tx2"/>
+            </a:solidFill>
+          </a:ln>
+        </p:spPr>
+        <p:style>
+          <a:lnRef idx="2">
+            <a:schemeClr val="accent1">
+              <a:shade val="50000"/>
+            </a:schemeClr>
+          </a:lnRef>
+          <a:fillRef idx="1">
+            <a:schemeClr val="accent1"/>
+          </a:fillRef>
+          <a:effectRef idx="0">
+            <a:schemeClr val="accent1"/>
+          </a:effectRef>
+          <a:fontRef idx="minor">
+            <a:schemeClr val="lt1"/>
+          </a:fontRef>
+        </p:style>
+        <p:txBody>
+          <a:bodyPr lIns="36000" tIns="36000" rIns="36000" bIns="36000" rtlCol="0" anchor="ctr"/>
+          <a:lstStyle/>
+          <a:p>
+            <a:pPr algn="l" rtl="0"/>
+            <a:endParaRPr lang="en-US" sz="1200" b="1">
+              <a:solidFill>
+                <a:schemeClr val="bg1"/>
+              </a:solidFill>
+              <a:latin typeface="Arial" panose="020B0604020202020204" pitchFamily="34" charset="0"/>
+              <a:cs typeface="Arial" panose="020B0604020202020204" pitchFamily="34" charset="0"/>
+            </a:endParaRPr>
+          </a:p>
+        </p:txBody>
+      </p:sp>
+      <p:sp>
+        <p:nvSpPr>
+          <p:cNvPr id="5" name="decor">
+            <a:extLst>
+              <a:ext uri="{FF2B5EF4-FFF2-40B4-BE49-F238E27FC236}">
+                <a16:creationId xmlns:a16="http://schemas.microsoft.com/office/drawing/2014/main" id="{5D3B6E37-9E51-E62C-A843-852BEEBE5F2B}"/>
+              </a:ext>
+            </a:extLst>
+          </p:cNvPr>
+          <p:cNvSpPr/>
+          <p:nvPr userDrawn="1"/>
+        </p:nvSpPr>
+        <p:spPr>
+          <a:xfrm>
+            <a:off x="0" y="247761"/>
+            <a:ext cx="191344" cy="423265"/>
+          </a:xfrm>
+          <a:prstGeom prst="rect">
+            <a:avLst/>
+          </a:prstGeom>
+          <a:solidFill>
+            <a:schemeClr val="tx2"/>
+          </a:solidFill>
+          <a:ln>
+            <a:solidFill>
+              <a:schemeClr val="tx2"/>
+            </a:solidFill>
+          </a:ln>
+        </p:spPr>
+        <p:style>
+          <a:lnRef idx="2">
+            <a:schemeClr val="accent1">
+              <a:shade val="50000"/>
+            </a:schemeClr>
+          </a:lnRef>
+          <a:fillRef idx="1">
+            <a:schemeClr val="accent1"/>
+          </a:fillRef>
+          <a:effectRef idx="0">
+            <a:schemeClr val="accent1"/>
+          </a:effectRef>
+          <a:fontRef idx="minor">
+            <a:schemeClr val="lt1"/>
+          </a:fontRef>
+        </p:style>
+        <p:txBody>
+          <a:bodyPr lIns="36000" tIns="36000" rIns="36000" bIns="36000" rtlCol="0" anchor="ctr"/>
+          <a:lstStyle/>
+          <a:p>
+            <a:pPr algn="l" rtl="0"/>
+            <a:endParaRPr lang="en-US" sz="1200" b="1">
+              <a:solidFill>
+                <a:schemeClr val="bg1"/>
+              </a:solidFill>
+              <a:latin typeface="Arial" panose="020B0604020202020204" pitchFamily="34" charset="0"/>
+              <a:cs typeface="Arial" panose="020B0604020202020204" pitchFamily="34" charset="0"/>
+            </a:endParaRPr>
+          </a:p>
+        </p:txBody>
+      </p:sp>
+      <p:sp>
+        <p:nvSpPr>
+          <p:cNvPr id="6" name="slot.title"/>
           <p:cNvSpPr txBox="1"/>
           <p:nvPr/>
         </p:nvSpPr>
@@ -27051,7 +27912,7 @@
             <a:r>
               <a:rPr sz="2200" b="1">
                 <a:solidFill>
-                  <a:schemeClr val="dk1"/>
+                  <a:schemeClr val="accent2"/>
                 </a:solidFill>
                 <a:latin typeface="Futura Medium"/>
               </a:rPr>
@@ -27062,7 +27923,7 @@
       </p:sp>
       <p:sp>
         <p:nvSpPr>
-          <p:cNvPr id="5" name="slot.kpi.1.value"/>
+          <p:cNvPr id="7" name="slot.kpi.1.value"/>
           <p:cNvSpPr txBox="1"/>
           <p:nvPr/>
         </p:nvSpPr>
@@ -27088,7 +27949,7 @@
                 <a:solidFill>
                   <a:schemeClr val="accent2"/>
                 </a:solidFill>
-                <a:latin typeface="Futura Medium"/>
+                <a:latin typeface="Arial"/>
               </a:rPr>
               <a:t>42%</a:t>
             </a:r>
@@ -27097,7 +27958,7 @@
       </p:sp>
       <p:sp>
         <p:nvSpPr>
-          <p:cNvPr id="6" name="slot.kpi.1.label"/>
+          <p:cNvPr id="8" name="slot.kpi.1.label"/>
           <p:cNvSpPr txBox="1"/>
           <p:nvPr/>
         </p:nvSpPr>
@@ -27123,7 +27984,7 @@
                 <a:solidFill>
                   <a:schemeClr val="dk1"/>
                 </a:solidFill>
-                <a:latin typeface="Futura Medium"/>
+                <a:latin typeface="Arial"/>
               </a:rPr>
               <a:t>Metric label</a:t>
             </a:r>
@@ -27132,7 +27993,7 @@
       </p:sp>
       <p:sp>
         <p:nvSpPr>
-          <p:cNvPr id="7" name="slot.kpi.1.body"/>
+          <p:cNvPr id="9" name="slot.kpi.1.body"/>
           <p:cNvSpPr txBox="1"/>
           <p:nvPr/>
         </p:nvSpPr>
@@ -27167,7 +28028,7 @@
       </p:sp>
       <p:sp>
         <p:nvSpPr>
-          <p:cNvPr id="8" name="decor"/>
+          <p:cNvPr id="10" name="decor"/>
           <p:cNvSpPr/>
           <p:nvPr/>
         </p:nvSpPr>
@@ -27210,7 +28071,7 @@
                 <a:solidFill>
                   <a:schemeClr val="lt1"/>
                 </a:solidFill>
-                <a:latin typeface="Futura Medium"/>
+                <a:latin typeface="Arial"/>
               </a:rPr>
               <a:t/>
             </a:r>
@@ -27219,7 +28080,7 @@
       </p:sp>
       <p:sp>
         <p:nvSpPr>
-          <p:cNvPr id="9" name="slot.kpi.2.value"/>
+          <p:cNvPr id="11" name="slot.kpi.2.value"/>
           <p:cNvSpPr txBox="1"/>
           <p:nvPr/>
         </p:nvSpPr>
@@ -27245,7 +28106,7 @@
                 <a:solidFill>
                   <a:schemeClr val="accent2"/>
                 </a:solidFill>
-                <a:latin typeface="Futura Medium"/>
+                <a:latin typeface="Arial"/>
               </a:rPr>
               <a:t>42%</a:t>
             </a:r>
@@ -27254,7 +28115,7 @@
       </p:sp>
       <p:sp>
         <p:nvSpPr>
-          <p:cNvPr id="10" name="slot.kpi.2.label"/>
+          <p:cNvPr id="12" name="slot.kpi.2.label"/>
           <p:cNvSpPr txBox="1"/>
           <p:nvPr/>
         </p:nvSpPr>
@@ -27280,7 +28141,7 @@
                 <a:solidFill>
                   <a:schemeClr val="dk1"/>
                 </a:solidFill>
-                <a:latin typeface="Futura Medium"/>
+                <a:latin typeface="Arial"/>
               </a:rPr>
               <a:t>Metric label</a:t>
             </a:r>
@@ -27289,7 +28150,7 @@
       </p:sp>
       <p:sp>
         <p:nvSpPr>
-          <p:cNvPr id="11" name="slot.kpi.2.body"/>
+          <p:cNvPr id="13" name="slot.kpi.2.body"/>
           <p:cNvSpPr txBox="1"/>
           <p:nvPr/>
         </p:nvSpPr>
@@ -27324,7 +28185,7 @@
       </p:sp>
       <p:sp>
         <p:nvSpPr>
-          <p:cNvPr id="12" name="decor"/>
+          <p:cNvPr id="14" name="decor"/>
           <p:cNvSpPr/>
           <p:nvPr/>
         </p:nvSpPr>
@@ -27367,7 +28228,7 @@
                 <a:solidFill>
                   <a:schemeClr val="lt1"/>
                 </a:solidFill>
-                <a:latin typeface="Futura Medium"/>
+                <a:latin typeface="Arial"/>
               </a:rPr>
               <a:t/>
             </a:r>
@@ -27376,7 +28237,7 @@
       </p:sp>
       <p:sp>
         <p:nvSpPr>
-          <p:cNvPr id="13" name="slot.kpi.3.value"/>
+          <p:cNvPr id="15" name="slot.kpi.3.value"/>
           <p:cNvSpPr txBox="1"/>
           <p:nvPr/>
         </p:nvSpPr>
@@ -27402,7 +28263,7 @@
                 <a:solidFill>
                   <a:schemeClr val="accent2"/>
                 </a:solidFill>
-                <a:latin typeface="Futura Medium"/>
+                <a:latin typeface="Arial"/>
               </a:rPr>
               <a:t>42%</a:t>
             </a:r>
@@ -27411,7 +28272,7 @@
       </p:sp>
       <p:sp>
         <p:nvSpPr>
-          <p:cNvPr id="14" name="slot.kpi.3.label"/>
+          <p:cNvPr id="16" name="slot.kpi.3.label"/>
           <p:cNvSpPr txBox="1"/>
           <p:nvPr/>
         </p:nvSpPr>
@@ -27437,7 +28298,7 @@
                 <a:solidFill>
                   <a:schemeClr val="dk1"/>
                 </a:solidFill>
-                <a:latin typeface="Futura Medium"/>
+                <a:latin typeface="Arial"/>
               </a:rPr>
               <a:t>Metric label</a:t>
             </a:r>
@@ -27446,7 +28307,7 @@
       </p:sp>
       <p:sp>
         <p:nvSpPr>
-          <p:cNvPr id="15" name="slot.kpi.3.body"/>
+          <p:cNvPr id="17" name="slot.kpi.3.body"/>
           <p:cNvSpPr txBox="1"/>
           <p:nvPr/>
         </p:nvSpPr>
@@ -27481,7 +28342,7 @@
       </p:sp>
       <p:sp>
         <p:nvSpPr>
-          <p:cNvPr id="16" name="decor"/>
+          <p:cNvPr id="18" name="decor"/>
           <p:cNvSpPr/>
           <p:nvPr/>
         </p:nvSpPr>
@@ -27524,7 +28385,7 @@
                 <a:solidFill>
                   <a:schemeClr val="lt1"/>
                 </a:solidFill>
-                <a:latin typeface="Futura Medium"/>
+                <a:latin typeface="Arial"/>
               </a:rPr>
               <a:t/>
             </a:r>
@@ -27533,7 +28394,7 @@
       </p:sp>
       <p:sp>
         <p:nvSpPr>
-          <p:cNvPr id="17" name="slot.kpi.4.value"/>
+          <p:cNvPr id="19" name="slot.kpi.4.value"/>
           <p:cNvSpPr txBox="1"/>
           <p:nvPr/>
         </p:nvSpPr>
@@ -27559,7 +28420,7 @@
                 <a:solidFill>
                   <a:schemeClr val="accent2"/>
                 </a:solidFill>
-                <a:latin typeface="Futura Medium"/>
+                <a:latin typeface="Arial"/>
               </a:rPr>
               <a:t>42%</a:t>
             </a:r>
@@ -27568,7 +28429,7 @@
       </p:sp>
       <p:sp>
         <p:nvSpPr>
-          <p:cNvPr id="18" name="slot.kpi.4.label"/>
+          <p:cNvPr id="20" name="slot.kpi.4.label"/>
           <p:cNvSpPr txBox="1"/>
           <p:nvPr/>
         </p:nvSpPr>
@@ -27594,7 +28455,7 @@
                 <a:solidFill>
                   <a:schemeClr val="dk1"/>
                 </a:solidFill>
-                <a:latin typeface="Futura Medium"/>
+                <a:latin typeface="Arial"/>
               </a:rPr>
               <a:t>Metric label</a:t>
             </a:r>
@@ -27603,7 +28464,7 @@
       </p:sp>
       <p:sp>
         <p:nvSpPr>
-          <p:cNvPr id="19" name="slot.kpi.4.body"/>
+          <p:cNvPr id="21" name="slot.kpi.4.body"/>
           <p:cNvSpPr txBox="1"/>
           <p:nvPr/>
         </p:nvSpPr>
@@ -27638,7 +28499,7 @@
       </p:sp>
       <p:sp>
         <p:nvSpPr>
-          <p:cNvPr id="20" name="decor"/>
+          <p:cNvPr id="22" name="decor"/>
           <p:cNvSpPr/>
           <p:nvPr/>
         </p:nvSpPr>
@@ -27681,7 +28542,7 @@
                 <a:solidFill>
                   <a:schemeClr val="lt1"/>
                 </a:solidFill>
-                <a:latin typeface="Futura Medium"/>
+                <a:latin typeface="Arial"/>
               </a:rPr>
               <a:t/>
             </a:r>
@@ -27690,7 +28551,7 @@
       </p:sp>
       <p:sp>
         <p:nvSpPr>
-          <p:cNvPr id="21" name="slot.kpi.5.value"/>
+          <p:cNvPr id="23" name="slot.kpi.5.value"/>
           <p:cNvSpPr txBox="1"/>
           <p:nvPr/>
         </p:nvSpPr>
@@ -27716,7 +28577,7 @@
                 <a:solidFill>
                   <a:schemeClr val="accent2"/>
                 </a:solidFill>
-                <a:latin typeface="Futura Medium"/>
+                <a:latin typeface="Arial"/>
               </a:rPr>
               <a:t>42%</a:t>
             </a:r>
@@ -27725,7 +28586,7 @@
       </p:sp>
       <p:sp>
         <p:nvSpPr>
-          <p:cNvPr id="22" name="slot.kpi.5.label"/>
+          <p:cNvPr id="24" name="slot.kpi.5.label"/>
           <p:cNvSpPr txBox="1"/>
           <p:nvPr/>
         </p:nvSpPr>
@@ -27751,7 +28612,7 @@
                 <a:solidFill>
                   <a:schemeClr val="dk1"/>
                 </a:solidFill>
-                <a:latin typeface="Futura Medium"/>
+                <a:latin typeface="Arial"/>
               </a:rPr>
               <a:t>Metric label</a:t>
             </a:r>
@@ -27760,7 +28621,7 @@
       </p:sp>
       <p:sp>
         <p:nvSpPr>
-          <p:cNvPr id="23" name="slot.kpi.5.body"/>
+          <p:cNvPr id="25" name="slot.kpi.5.body"/>
           <p:cNvSpPr txBox="1"/>
           <p:nvPr/>
         </p:nvSpPr>
@@ -27867,7 +28728,130 @@
       </p:sp>
       <p:sp>
         <p:nvSpPr>
-          <p:cNvPr id="4" name="slot.title"/>
+          <p:cNvPr id="4" name="decor">
+            <a:extLst>
+              <a:ext uri="{FF2B5EF4-FFF2-40B4-BE49-F238E27FC236}">
+                <a16:creationId xmlns:a16="http://schemas.microsoft.com/office/drawing/2014/main" id="{9BCA9FA9-DC4A-F7F9-6F98-04EFCF05B790}"/>
+              </a:ext>
+            </a:extLst>
+          </p:cNvPr>
+          <p:cNvSpPr/>
+          <p:nvPr userDrawn="1"/>
+        </p:nvSpPr>
+        <p:spPr>
+          <a:xfrm>
+            <a:off x="-64731" y="246322"/>
+            <a:ext cx="512150" cy="423265"/>
+          </a:xfrm>
+          <a:prstGeom prst="pie">
+            <a:avLst>
+              <a:gd name="adj1" fmla="val 16190032"/>
+              <a:gd name="adj2" fmla="val 5400005"/>
+            </a:avLst>
+          </a:prstGeom>
+          <a:solidFill>
+            <a:schemeClr val="tx2"/>
+          </a:solidFill>
+          <a:ln>
+            <a:solidFill>
+              <a:schemeClr val="tx2"/>
+            </a:solidFill>
+          </a:ln>
+        </p:spPr>
+        <p:style>
+          <a:lnRef idx="2">
+            <a:schemeClr val="accent1">
+              <a:shade val="50000"/>
+            </a:schemeClr>
+          </a:lnRef>
+          <a:fillRef idx="1">
+            <a:schemeClr val="accent1"/>
+          </a:fillRef>
+          <a:effectRef idx="0">
+            <a:schemeClr val="accent1"/>
+          </a:effectRef>
+          <a:fontRef idx="minor">
+            <a:schemeClr val="lt1"/>
+          </a:fontRef>
+        </p:style>
+        <p:txBody>
+          <a:bodyPr lIns="36000" tIns="36000" rIns="36000" bIns="36000" rtlCol="0" anchor="ctr"/>
+          <a:lstStyle/>
+          <a:p>
+            <a:pPr algn="l" rtl="0"/>
+            <a:endParaRPr lang="en-US" sz="1200" b="1">
+              <a:solidFill>
+                <a:schemeClr val="bg1"/>
+              </a:solidFill>
+              <a:latin typeface="Arial" panose="020B0604020202020204" pitchFamily="34" charset="0"/>
+              <a:cs typeface="Arial" panose="020B0604020202020204" pitchFamily="34" charset="0"/>
+            </a:endParaRPr>
+          </a:p>
+        </p:txBody>
+      </p:sp>
+      <p:sp>
+        <p:nvSpPr>
+          <p:cNvPr id="5" name="decor">
+            <a:extLst>
+              <a:ext uri="{FF2B5EF4-FFF2-40B4-BE49-F238E27FC236}">
+                <a16:creationId xmlns:a16="http://schemas.microsoft.com/office/drawing/2014/main" id="{5D3B6E37-9E51-E62C-A843-852BEEBE5F2B}"/>
+              </a:ext>
+            </a:extLst>
+          </p:cNvPr>
+          <p:cNvSpPr/>
+          <p:nvPr userDrawn="1"/>
+        </p:nvSpPr>
+        <p:spPr>
+          <a:xfrm>
+            <a:off x="0" y="247761"/>
+            <a:ext cx="191344" cy="423265"/>
+          </a:xfrm>
+          <a:prstGeom prst="rect">
+            <a:avLst/>
+          </a:prstGeom>
+          <a:solidFill>
+            <a:schemeClr val="tx2"/>
+          </a:solidFill>
+          <a:ln>
+            <a:solidFill>
+              <a:schemeClr val="tx2"/>
+            </a:solidFill>
+          </a:ln>
+        </p:spPr>
+        <p:style>
+          <a:lnRef idx="2">
+            <a:schemeClr val="accent1">
+              <a:shade val="50000"/>
+            </a:schemeClr>
+          </a:lnRef>
+          <a:fillRef idx="1">
+            <a:schemeClr val="accent1"/>
+          </a:fillRef>
+          <a:effectRef idx="0">
+            <a:schemeClr val="accent1"/>
+          </a:effectRef>
+          <a:fontRef idx="minor">
+            <a:schemeClr val="lt1"/>
+          </a:fontRef>
+        </p:style>
+        <p:txBody>
+          <a:bodyPr lIns="36000" tIns="36000" rIns="36000" bIns="36000" rtlCol="0" anchor="ctr"/>
+          <a:lstStyle/>
+          <a:p>
+            <a:pPr algn="l" rtl="0"/>
+            <a:endParaRPr lang="en-US" sz="1200" b="1">
+              <a:solidFill>
+                <a:schemeClr val="bg1"/>
+              </a:solidFill>
+              <a:latin typeface="Arial" panose="020B0604020202020204" pitchFamily="34" charset="0"/>
+              <a:cs typeface="Arial" panose="020B0604020202020204" pitchFamily="34" charset="0"/>
+            </a:endParaRPr>
+          </a:p>
+        </p:txBody>
+      </p:sp>
+      <p:sp>
+        <p:nvSpPr>
+          <p:cNvPr id="6" name="slot.title"/>
           <p:cNvSpPr txBox="1"/>
           <p:nvPr/>
         </p:nvSpPr>
@@ -27891,7 +28875,7 @@
             <a:r>
               <a:rPr sz="2200" b="1">
                 <a:solidFill>
-                  <a:schemeClr val="dk1"/>
+                  <a:schemeClr val="accent2"/>
                 </a:solidFill>
                 <a:latin typeface="Futura Medium"/>
               </a:rPr>
@@ -27902,7 +28886,7 @@
       </p:sp>
       <p:sp>
         <p:nvSpPr>
-          <p:cNvPr id="5" name="slot.funnel-stage.1.title"/>
+          <p:cNvPr id="7" name="slot.funnel-stage.1.title"/>
           <p:cNvSpPr/>
           <p:nvPr/>
         </p:nvSpPr>
@@ -27945,7 +28929,7 @@
                 <a:solidFill>
                   <a:schemeClr val="lt1"/>
                 </a:solidFill>
-                <a:latin typeface="Futura Medium"/>
+                <a:latin typeface="Arial"/>
               </a:rPr>
               <a:t>Stage 1</a:t>
             </a:r>
@@ -27954,7 +28938,7 @@
       </p:sp>
       <p:sp>
         <p:nvSpPr>
-          <p:cNvPr id="6" name="slot.funnel-stage.1.body"/>
+          <p:cNvPr id="8" name="slot.funnel-stage.1.body"/>
           <p:cNvSpPr txBox="1"/>
           <p:nvPr/>
         </p:nvSpPr>
@@ -27989,7 +28973,7 @@
       </p:sp>
       <p:sp>
         <p:nvSpPr>
-          <p:cNvPr id="7" name="slot.funnel-stage.2.title"/>
+          <p:cNvPr id="9" name="slot.funnel-stage.2.title"/>
           <p:cNvSpPr/>
           <p:nvPr/>
         </p:nvSpPr>
@@ -28032,7 +29016,7 @@
                 <a:solidFill>
                   <a:schemeClr val="lt1"/>
                 </a:solidFill>
-                <a:latin typeface="Futura Medium"/>
+                <a:latin typeface="Arial"/>
               </a:rPr>
               <a:t>Stage 2</a:t>
             </a:r>
@@ -28041,7 +29025,7 @@
       </p:sp>
       <p:sp>
         <p:nvSpPr>
-          <p:cNvPr id="8" name="slot.funnel-stage.2.body"/>
+          <p:cNvPr id="10" name="slot.funnel-stage.2.body"/>
           <p:cNvSpPr txBox="1"/>
           <p:nvPr/>
         </p:nvSpPr>
@@ -28076,7 +29060,7 @@
       </p:sp>
       <p:sp>
         <p:nvSpPr>
-          <p:cNvPr id="9" name="slot.funnel-stage.3.title"/>
+          <p:cNvPr id="11" name="slot.funnel-stage.3.title"/>
           <p:cNvSpPr/>
           <p:nvPr/>
         </p:nvSpPr>
@@ -28119,7 +29103,7 @@
                 <a:solidFill>
                   <a:schemeClr val="lt1"/>
                 </a:solidFill>
-                <a:latin typeface="Futura Medium"/>
+                <a:latin typeface="Arial"/>
               </a:rPr>
               <a:t>Stage 3</a:t>
             </a:r>
@@ -28128,7 +29112,7 @@
       </p:sp>
       <p:sp>
         <p:nvSpPr>
-          <p:cNvPr id="10" name="slot.funnel-stage.3.body"/>
+          <p:cNvPr id="12" name="slot.funnel-stage.3.body"/>
           <p:cNvSpPr txBox="1"/>
           <p:nvPr/>
         </p:nvSpPr>
@@ -28235,7 +29219,130 @@
       </p:sp>
       <p:sp>
         <p:nvSpPr>
-          <p:cNvPr id="4" name="slot.title"/>
+          <p:cNvPr id="4" name="decor">
+            <a:extLst>
+              <a:ext uri="{FF2B5EF4-FFF2-40B4-BE49-F238E27FC236}">
+                <a16:creationId xmlns:a16="http://schemas.microsoft.com/office/drawing/2014/main" id="{9BCA9FA9-DC4A-F7F9-6F98-04EFCF05B790}"/>
+              </a:ext>
+            </a:extLst>
+          </p:cNvPr>
+          <p:cNvSpPr/>
+          <p:nvPr userDrawn="1"/>
+        </p:nvSpPr>
+        <p:spPr>
+          <a:xfrm>
+            <a:off x="-64731" y="246322"/>
+            <a:ext cx="512150" cy="423265"/>
+          </a:xfrm>
+          <a:prstGeom prst="pie">
+            <a:avLst>
+              <a:gd name="adj1" fmla="val 16190032"/>
+              <a:gd name="adj2" fmla="val 5400005"/>
+            </a:avLst>
+          </a:prstGeom>
+          <a:solidFill>
+            <a:schemeClr val="tx2"/>
+          </a:solidFill>
+          <a:ln>
+            <a:solidFill>
+              <a:schemeClr val="tx2"/>
+            </a:solidFill>
+          </a:ln>
+        </p:spPr>
+        <p:style>
+          <a:lnRef idx="2">
+            <a:schemeClr val="accent1">
+              <a:shade val="50000"/>
+            </a:schemeClr>
+          </a:lnRef>
+          <a:fillRef idx="1">
+            <a:schemeClr val="accent1"/>
+          </a:fillRef>
+          <a:effectRef idx="0">
+            <a:schemeClr val="accent1"/>
+          </a:effectRef>
+          <a:fontRef idx="minor">
+            <a:schemeClr val="lt1"/>
+          </a:fontRef>
+        </p:style>
+        <p:txBody>
+          <a:bodyPr lIns="36000" tIns="36000" rIns="36000" bIns="36000" rtlCol="0" anchor="ctr"/>
+          <a:lstStyle/>
+          <a:p>
+            <a:pPr algn="l" rtl="0"/>
+            <a:endParaRPr lang="en-US" sz="1200" b="1">
+              <a:solidFill>
+                <a:schemeClr val="bg1"/>
+              </a:solidFill>
+              <a:latin typeface="Arial" panose="020B0604020202020204" pitchFamily="34" charset="0"/>
+              <a:cs typeface="Arial" panose="020B0604020202020204" pitchFamily="34" charset="0"/>
+            </a:endParaRPr>
+          </a:p>
+        </p:txBody>
+      </p:sp>
+      <p:sp>
+        <p:nvSpPr>
+          <p:cNvPr id="5" name="decor">
+            <a:extLst>
+              <a:ext uri="{FF2B5EF4-FFF2-40B4-BE49-F238E27FC236}">
+                <a16:creationId xmlns:a16="http://schemas.microsoft.com/office/drawing/2014/main" id="{5D3B6E37-9E51-E62C-A843-852BEEBE5F2B}"/>
+              </a:ext>
+            </a:extLst>
+          </p:cNvPr>
+          <p:cNvSpPr/>
+          <p:nvPr userDrawn="1"/>
+        </p:nvSpPr>
+        <p:spPr>
+          <a:xfrm>
+            <a:off x="0" y="247761"/>
+            <a:ext cx="191344" cy="423265"/>
+          </a:xfrm>
+          <a:prstGeom prst="rect">
+            <a:avLst/>
+          </a:prstGeom>
+          <a:solidFill>
+            <a:schemeClr val="tx2"/>
+          </a:solidFill>
+          <a:ln>
+            <a:solidFill>
+              <a:schemeClr val="tx2"/>
+            </a:solidFill>
+          </a:ln>
+        </p:spPr>
+        <p:style>
+          <a:lnRef idx="2">
+            <a:schemeClr val="accent1">
+              <a:shade val="50000"/>
+            </a:schemeClr>
+          </a:lnRef>
+          <a:fillRef idx="1">
+            <a:schemeClr val="accent1"/>
+          </a:fillRef>
+          <a:effectRef idx="0">
+            <a:schemeClr val="accent1"/>
+          </a:effectRef>
+          <a:fontRef idx="minor">
+            <a:schemeClr val="lt1"/>
+          </a:fontRef>
+        </p:style>
+        <p:txBody>
+          <a:bodyPr lIns="36000" tIns="36000" rIns="36000" bIns="36000" rtlCol="0" anchor="ctr"/>
+          <a:lstStyle/>
+          <a:p>
+            <a:pPr algn="l" rtl="0"/>
+            <a:endParaRPr lang="en-US" sz="1200" b="1">
+              <a:solidFill>
+                <a:schemeClr val="bg1"/>
+              </a:solidFill>
+              <a:latin typeface="Arial" panose="020B0604020202020204" pitchFamily="34" charset="0"/>
+              <a:cs typeface="Arial" panose="020B0604020202020204" pitchFamily="34" charset="0"/>
+            </a:endParaRPr>
+          </a:p>
+        </p:txBody>
+      </p:sp>
+      <p:sp>
+        <p:nvSpPr>
+          <p:cNvPr id="6" name="slot.title"/>
           <p:cNvSpPr txBox="1"/>
           <p:nvPr/>
         </p:nvSpPr>
@@ -28259,7 +29366,7 @@
             <a:r>
               <a:rPr sz="2200" b="1">
                 <a:solidFill>
-                  <a:schemeClr val="dk1"/>
+                  <a:schemeClr val="accent2"/>
                 </a:solidFill>
                 <a:latin typeface="Futura Medium"/>
               </a:rPr>
@@ -28270,7 +29377,7 @@
       </p:sp>
       <p:sp>
         <p:nvSpPr>
-          <p:cNvPr id="5" name="slot.funnel-stage.1.title"/>
+          <p:cNvPr id="7" name="slot.funnel-stage.1.title"/>
           <p:cNvSpPr/>
           <p:nvPr/>
         </p:nvSpPr>
@@ -28313,7 +29420,7 @@
                 <a:solidFill>
                   <a:schemeClr val="lt1"/>
                 </a:solidFill>
-                <a:latin typeface="Futura Medium"/>
+                <a:latin typeface="Arial"/>
               </a:rPr>
               <a:t>Stage 1</a:t>
             </a:r>
@@ -28322,7 +29429,7 @@
       </p:sp>
       <p:sp>
         <p:nvSpPr>
-          <p:cNvPr id="6" name="slot.funnel-stage.1.body"/>
+          <p:cNvPr id="8" name="slot.funnel-stage.1.body"/>
           <p:cNvSpPr txBox="1"/>
           <p:nvPr/>
         </p:nvSpPr>
@@ -28357,7 +29464,7 @@
       </p:sp>
       <p:sp>
         <p:nvSpPr>
-          <p:cNvPr id="7" name="slot.funnel-stage.2.title"/>
+          <p:cNvPr id="9" name="slot.funnel-stage.2.title"/>
           <p:cNvSpPr/>
           <p:nvPr/>
         </p:nvSpPr>
@@ -28400,7 +29507,7 @@
                 <a:solidFill>
                   <a:schemeClr val="lt1"/>
                 </a:solidFill>
-                <a:latin typeface="Futura Medium"/>
+                <a:latin typeface="Arial"/>
               </a:rPr>
               <a:t>Stage 2</a:t>
             </a:r>
@@ -28409,7 +29516,7 @@
       </p:sp>
       <p:sp>
         <p:nvSpPr>
-          <p:cNvPr id="8" name="slot.funnel-stage.2.body"/>
+          <p:cNvPr id="10" name="slot.funnel-stage.2.body"/>
           <p:cNvSpPr txBox="1"/>
           <p:nvPr/>
         </p:nvSpPr>
@@ -28444,7 +29551,7 @@
       </p:sp>
       <p:sp>
         <p:nvSpPr>
-          <p:cNvPr id="9" name="slot.funnel-stage.3.title"/>
+          <p:cNvPr id="11" name="slot.funnel-stage.3.title"/>
           <p:cNvSpPr/>
           <p:nvPr/>
         </p:nvSpPr>
@@ -28487,7 +29594,7 @@
                 <a:solidFill>
                   <a:schemeClr val="lt1"/>
                 </a:solidFill>
-                <a:latin typeface="Futura Medium"/>
+                <a:latin typeface="Arial"/>
               </a:rPr>
               <a:t>Stage 3</a:t>
             </a:r>
@@ -28496,7 +29603,7 @@
       </p:sp>
       <p:sp>
         <p:nvSpPr>
-          <p:cNvPr id="10" name="slot.funnel-stage.3.body"/>
+          <p:cNvPr id="12" name="slot.funnel-stage.3.body"/>
           <p:cNvSpPr txBox="1"/>
           <p:nvPr/>
         </p:nvSpPr>
@@ -28531,7 +29638,7 @@
       </p:sp>
       <p:sp>
         <p:nvSpPr>
-          <p:cNvPr id="11" name="slot.funnel-stage.4.title"/>
+          <p:cNvPr id="13" name="slot.funnel-stage.4.title"/>
           <p:cNvSpPr/>
           <p:nvPr/>
         </p:nvSpPr>
@@ -28574,7 +29681,7 @@
                 <a:solidFill>
                   <a:schemeClr val="lt1"/>
                 </a:solidFill>
-                <a:latin typeface="Futura Medium"/>
+                <a:latin typeface="Arial"/>
               </a:rPr>
               <a:t>Stage 4</a:t>
             </a:r>
@@ -28583,7 +29690,7 @@
       </p:sp>
       <p:sp>
         <p:nvSpPr>
-          <p:cNvPr id="12" name="slot.funnel-stage.4.body"/>
+          <p:cNvPr id="14" name="slot.funnel-stage.4.body"/>
           <p:cNvSpPr txBox="1"/>
           <p:nvPr/>
         </p:nvSpPr>
@@ -28690,7 +29797,130 @@
       </p:sp>
       <p:sp>
         <p:nvSpPr>
-          <p:cNvPr id="4" name="slot.title"/>
+          <p:cNvPr id="4" name="decor">
+            <a:extLst>
+              <a:ext uri="{FF2B5EF4-FFF2-40B4-BE49-F238E27FC236}">
+                <a16:creationId xmlns:a16="http://schemas.microsoft.com/office/drawing/2014/main" id="{9BCA9FA9-DC4A-F7F9-6F98-04EFCF05B790}"/>
+              </a:ext>
+            </a:extLst>
+          </p:cNvPr>
+          <p:cNvSpPr/>
+          <p:nvPr userDrawn="1"/>
+        </p:nvSpPr>
+        <p:spPr>
+          <a:xfrm>
+            <a:off x="-64731" y="246322"/>
+            <a:ext cx="512150" cy="423265"/>
+          </a:xfrm>
+          <a:prstGeom prst="pie">
+            <a:avLst>
+              <a:gd name="adj1" fmla="val 16190032"/>
+              <a:gd name="adj2" fmla="val 5400005"/>
+            </a:avLst>
+          </a:prstGeom>
+          <a:solidFill>
+            <a:schemeClr val="tx2"/>
+          </a:solidFill>
+          <a:ln>
+            <a:solidFill>
+              <a:schemeClr val="tx2"/>
+            </a:solidFill>
+          </a:ln>
+        </p:spPr>
+        <p:style>
+          <a:lnRef idx="2">
+            <a:schemeClr val="accent1">
+              <a:shade val="50000"/>
+            </a:schemeClr>
+          </a:lnRef>
+          <a:fillRef idx="1">
+            <a:schemeClr val="accent1"/>
+          </a:fillRef>
+          <a:effectRef idx="0">
+            <a:schemeClr val="accent1"/>
+          </a:effectRef>
+          <a:fontRef idx="minor">
+            <a:schemeClr val="lt1"/>
+          </a:fontRef>
+        </p:style>
+        <p:txBody>
+          <a:bodyPr lIns="36000" tIns="36000" rIns="36000" bIns="36000" rtlCol="0" anchor="ctr"/>
+          <a:lstStyle/>
+          <a:p>
+            <a:pPr algn="l" rtl="0"/>
+            <a:endParaRPr lang="en-US" sz="1200" b="1">
+              <a:solidFill>
+                <a:schemeClr val="bg1"/>
+              </a:solidFill>
+              <a:latin typeface="Arial" panose="020B0604020202020204" pitchFamily="34" charset="0"/>
+              <a:cs typeface="Arial" panose="020B0604020202020204" pitchFamily="34" charset="0"/>
+            </a:endParaRPr>
+          </a:p>
+        </p:txBody>
+      </p:sp>
+      <p:sp>
+        <p:nvSpPr>
+          <p:cNvPr id="5" name="decor">
+            <a:extLst>
+              <a:ext uri="{FF2B5EF4-FFF2-40B4-BE49-F238E27FC236}">
+                <a16:creationId xmlns:a16="http://schemas.microsoft.com/office/drawing/2014/main" id="{5D3B6E37-9E51-E62C-A843-852BEEBE5F2B}"/>
+              </a:ext>
+            </a:extLst>
+          </p:cNvPr>
+          <p:cNvSpPr/>
+          <p:nvPr userDrawn="1"/>
+        </p:nvSpPr>
+        <p:spPr>
+          <a:xfrm>
+            <a:off x="0" y="247761"/>
+            <a:ext cx="191344" cy="423265"/>
+          </a:xfrm>
+          <a:prstGeom prst="rect">
+            <a:avLst/>
+          </a:prstGeom>
+          <a:solidFill>
+            <a:schemeClr val="tx2"/>
+          </a:solidFill>
+          <a:ln>
+            <a:solidFill>
+              <a:schemeClr val="tx2"/>
+            </a:solidFill>
+          </a:ln>
+        </p:spPr>
+        <p:style>
+          <a:lnRef idx="2">
+            <a:schemeClr val="accent1">
+              <a:shade val="50000"/>
+            </a:schemeClr>
+          </a:lnRef>
+          <a:fillRef idx="1">
+            <a:schemeClr val="accent1"/>
+          </a:fillRef>
+          <a:effectRef idx="0">
+            <a:schemeClr val="accent1"/>
+          </a:effectRef>
+          <a:fontRef idx="minor">
+            <a:schemeClr val="lt1"/>
+          </a:fontRef>
+        </p:style>
+        <p:txBody>
+          <a:bodyPr lIns="36000" tIns="36000" rIns="36000" bIns="36000" rtlCol="0" anchor="ctr"/>
+          <a:lstStyle/>
+          <a:p>
+            <a:pPr algn="l" rtl="0"/>
+            <a:endParaRPr lang="en-US" sz="1200" b="1">
+              <a:solidFill>
+                <a:schemeClr val="bg1"/>
+              </a:solidFill>
+              <a:latin typeface="Arial" panose="020B0604020202020204" pitchFamily="34" charset="0"/>
+              <a:cs typeface="Arial" panose="020B0604020202020204" pitchFamily="34" charset="0"/>
+            </a:endParaRPr>
+          </a:p>
+        </p:txBody>
+      </p:sp>
+      <p:sp>
+        <p:nvSpPr>
+          <p:cNvPr id="6" name="slot.title"/>
           <p:cNvSpPr txBox="1"/>
           <p:nvPr/>
         </p:nvSpPr>
@@ -28714,7 +29944,7 @@
             <a:r>
               <a:rPr sz="2200" b="1">
                 <a:solidFill>
-                  <a:schemeClr val="dk1"/>
+                  <a:schemeClr val="accent2"/>
                 </a:solidFill>
                 <a:latin typeface="Futura Medium"/>
               </a:rPr>
@@ -28725,7 +29955,7 @@
       </p:sp>
       <p:sp>
         <p:nvSpPr>
-          <p:cNvPr id="5" name="slot.funnel-stage.1.title"/>
+          <p:cNvPr id="7" name="slot.funnel-stage.1.title"/>
           <p:cNvSpPr/>
           <p:nvPr/>
         </p:nvSpPr>
@@ -28768,7 +29998,7 @@
                 <a:solidFill>
                   <a:schemeClr val="lt1"/>
                 </a:solidFill>
-                <a:latin typeface="Futura Medium"/>
+                <a:latin typeface="Arial"/>
               </a:rPr>
               <a:t>Stage 1</a:t>
             </a:r>
@@ -28777,7 +30007,7 @@
       </p:sp>
       <p:sp>
         <p:nvSpPr>
-          <p:cNvPr id="6" name="slot.funnel-stage.1.body"/>
+          <p:cNvPr id="8" name="slot.funnel-stage.1.body"/>
           <p:cNvSpPr txBox="1"/>
           <p:nvPr/>
         </p:nvSpPr>
@@ -28812,7 +30042,7 @@
       </p:sp>
       <p:sp>
         <p:nvSpPr>
-          <p:cNvPr id="7" name="slot.funnel-stage.2.title"/>
+          <p:cNvPr id="9" name="slot.funnel-stage.2.title"/>
           <p:cNvSpPr/>
           <p:nvPr/>
         </p:nvSpPr>
@@ -28855,7 +30085,7 @@
                 <a:solidFill>
                   <a:schemeClr val="lt1"/>
                 </a:solidFill>
-                <a:latin typeface="Futura Medium"/>
+                <a:latin typeface="Arial"/>
               </a:rPr>
               <a:t>Stage 2</a:t>
             </a:r>
@@ -28864,7 +30094,7 @@
       </p:sp>
       <p:sp>
         <p:nvSpPr>
-          <p:cNvPr id="8" name="slot.funnel-stage.2.body"/>
+          <p:cNvPr id="10" name="slot.funnel-stage.2.body"/>
           <p:cNvSpPr txBox="1"/>
           <p:nvPr/>
         </p:nvSpPr>
@@ -28899,7 +30129,7 @@
       </p:sp>
       <p:sp>
         <p:nvSpPr>
-          <p:cNvPr id="9" name="slot.funnel-stage.3.title"/>
+          <p:cNvPr id="11" name="slot.funnel-stage.3.title"/>
           <p:cNvSpPr/>
           <p:nvPr/>
         </p:nvSpPr>
@@ -28942,7 +30172,7 @@
                 <a:solidFill>
                   <a:schemeClr val="lt1"/>
                 </a:solidFill>
-                <a:latin typeface="Futura Medium"/>
+                <a:latin typeface="Arial"/>
               </a:rPr>
               <a:t>Stage 3</a:t>
             </a:r>
@@ -28951,7 +30181,7 @@
       </p:sp>
       <p:sp>
         <p:nvSpPr>
-          <p:cNvPr id="10" name="slot.funnel-stage.3.body"/>
+          <p:cNvPr id="12" name="slot.funnel-stage.3.body"/>
           <p:cNvSpPr txBox="1"/>
           <p:nvPr/>
         </p:nvSpPr>
@@ -28986,7 +30216,7 @@
       </p:sp>
       <p:sp>
         <p:nvSpPr>
-          <p:cNvPr id="11" name="slot.funnel-stage.4.title"/>
+          <p:cNvPr id="13" name="slot.funnel-stage.4.title"/>
           <p:cNvSpPr/>
           <p:nvPr/>
         </p:nvSpPr>
@@ -29029,7 +30259,7 @@
                 <a:solidFill>
                   <a:schemeClr val="lt1"/>
                 </a:solidFill>
-                <a:latin typeface="Futura Medium"/>
+                <a:latin typeface="Arial"/>
               </a:rPr>
               <a:t>Stage 4</a:t>
             </a:r>
@@ -29038,7 +30268,7 @@
       </p:sp>
       <p:sp>
         <p:nvSpPr>
-          <p:cNvPr id="12" name="slot.funnel-stage.4.body"/>
+          <p:cNvPr id="14" name="slot.funnel-stage.4.body"/>
           <p:cNvSpPr txBox="1"/>
           <p:nvPr/>
         </p:nvSpPr>
@@ -29073,7 +30303,7 @@
       </p:sp>
       <p:sp>
         <p:nvSpPr>
-          <p:cNvPr id="13" name="slot.funnel-stage.5.title"/>
+          <p:cNvPr id="15" name="slot.funnel-stage.5.title"/>
           <p:cNvSpPr/>
           <p:nvPr/>
         </p:nvSpPr>
@@ -29116,7 +30346,7 @@
                 <a:solidFill>
                   <a:schemeClr val="lt1"/>
                 </a:solidFill>
-                <a:latin typeface="Futura Medium"/>
+                <a:latin typeface="Arial"/>
               </a:rPr>
               <a:t>Stage 5</a:t>
             </a:r>
@@ -29125,7 +30355,7 @@
       </p:sp>
       <p:sp>
         <p:nvSpPr>
-          <p:cNvPr id="14" name="slot.funnel-stage.5.body"/>
+          <p:cNvPr id="16" name="slot.funnel-stage.5.body"/>
           <p:cNvSpPr txBox="1"/>
           <p:nvPr/>
         </p:nvSpPr>
@@ -29232,7 +30462,130 @@
       </p:sp>
       <p:sp>
         <p:nvSpPr>
-          <p:cNvPr id="4" name="slot.title"/>
+          <p:cNvPr id="4" name="decor">
+            <a:extLst>
+              <a:ext uri="{FF2B5EF4-FFF2-40B4-BE49-F238E27FC236}">
+                <a16:creationId xmlns:a16="http://schemas.microsoft.com/office/drawing/2014/main" id="{9BCA9FA9-DC4A-F7F9-6F98-04EFCF05B790}"/>
+              </a:ext>
+            </a:extLst>
+          </p:cNvPr>
+          <p:cNvSpPr/>
+          <p:nvPr userDrawn="1"/>
+        </p:nvSpPr>
+        <p:spPr>
+          <a:xfrm>
+            <a:off x="-64731" y="246322"/>
+            <a:ext cx="512150" cy="423265"/>
+          </a:xfrm>
+          <a:prstGeom prst="pie">
+            <a:avLst>
+              <a:gd name="adj1" fmla="val 16190032"/>
+              <a:gd name="adj2" fmla="val 5400005"/>
+            </a:avLst>
+          </a:prstGeom>
+          <a:solidFill>
+            <a:schemeClr val="tx2"/>
+          </a:solidFill>
+          <a:ln>
+            <a:solidFill>
+              <a:schemeClr val="tx2"/>
+            </a:solidFill>
+          </a:ln>
+        </p:spPr>
+        <p:style>
+          <a:lnRef idx="2">
+            <a:schemeClr val="accent1">
+              <a:shade val="50000"/>
+            </a:schemeClr>
+          </a:lnRef>
+          <a:fillRef idx="1">
+            <a:schemeClr val="accent1"/>
+          </a:fillRef>
+          <a:effectRef idx="0">
+            <a:schemeClr val="accent1"/>
+          </a:effectRef>
+          <a:fontRef idx="minor">
+            <a:schemeClr val="lt1"/>
+          </a:fontRef>
+        </p:style>
+        <p:txBody>
+          <a:bodyPr lIns="36000" tIns="36000" rIns="36000" bIns="36000" rtlCol="0" anchor="ctr"/>
+          <a:lstStyle/>
+          <a:p>
+            <a:pPr algn="l" rtl="0"/>
+            <a:endParaRPr lang="en-US" sz="1200" b="1">
+              <a:solidFill>
+                <a:schemeClr val="bg1"/>
+              </a:solidFill>
+              <a:latin typeface="Arial" panose="020B0604020202020204" pitchFamily="34" charset="0"/>
+              <a:cs typeface="Arial" panose="020B0604020202020204" pitchFamily="34" charset="0"/>
+            </a:endParaRPr>
+          </a:p>
+        </p:txBody>
+      </p:sp>
+      <p:sp>
+        <p:nvSpPr>
+          <p:cNvPr id="5" name="decor">
+            <a:extLst>
+              <a:ext uri="{FF2B5EF4-FFF2-40B4-BE49-F238E27FC236}">
+                <a16:creationId xmlns:a16="http://schemas.microsoft.com/office/drawing/2014/main" id="{5D3B6E37-9E51-E62C-A843-852BEEBE5F2B}"/>
+              </a:ext>
+            </a:extLst>
+          </p:cNvPr>
+          <p:cNvSpPr/>
+          <p:nvPr userDrawn="1"/>
+        </p:nvSpPr>
+        <p:spPr>
+          <a:xfrm>
+            <a:off x="0" y="247761"/>
+            <a:ext cx="191344" cy="423265"/>
+          </a:xfrm>
+          <a:prstGeom prst="rect">
+            <a:avLst/>
+          </a:prstGeom>
+          <a:solidFill>
+            <a:schemeClr val="tx2"/>
+          </a:solidFill>
+          <a:ln>
+            <a:solidFill>
+              <a:schemeClr val="tx2"/>
+            </a:solidFill>
+          </a:ln>
+        </p:spPr>
+        <p:style>
+          <a:lnRef idx="2">
+            <a:schemeClr val="accent1">
+              <a:shade val="50000"/>
+            </a:schemeClr>
+          </a:lnRef>
+          <a:fillRef idx="1">
+            <a:schemeClr val="accent1"/>
+          </a:fillRef>
+          <a:effectRef idx="0">
+            <a:schemeClr val="accent1"/>
+          </a:effectRef>
+          <a:fontRef idx="minor">
+            <a:schemeClr val="lt1"/>
+          </a:fontRef>
+        </p:style>
+        <p:txBody>
+          <a:bodyPr lIns="36000" tIns="36000" rIns="36000" bIns="36000" rtlCol="0" anchor="ctr"/>
+          <a:lstStyle/>
+          <a:p>
+            <a:pPr algn="l" rtl="0"/>
+            <a:endParaRPr lang="en-US" sz="1200" b="1">
+              <a:solidFill>
+                <a:schemeClr val="bg1"/>
+              </a:solidFill>
+              <a:latin typeface="Arial" panose="020B0604020202020204" pitchFamily="34" charset="0"/>
+              <a:cs typeface="Arial" panose="020B0604020202020204" pitchFamily="34" charset="0"/>
+            </a:endParaRPr>
+          </a:p>
+        </p:txBody>
+      </p:sp>
+      <p:sp>
+        <p:nvSpPr>
+          <p:cNvPr id="6" name="slot.title"/>
           <p:cNvSpPr txBox="1"/>
           <p:nvPr/>
         </p:nvSpPr>
@@ -29256,7 +30609,7 @@
             <a:r>
               <a:rPr sz="2200" b="1">
                 <a:solidFill>
-                  <a:schemeClr val="dk1"/>
+                  <a:schemeClr val="accent2"/>
                 </a:solidFill>
                 <a:latin typeface="Futura Medium"/>
               </a:rPr>
@@ -29267,7 +30620,7 @@
       </p:sp>
       <p:sp>
         <p:nvSpPr>
-          <p:cNvPr id="5" name="decor"/>
+          <p:cNvPr id="7" name="decor"/>
           <p:cNvSpPr/>
           <p:nvPr/>
         </p:nvSpPr>
@@ -29310,7 +30663,7 @@
                 <a:solidFill>
                   <a:schemeClr val="lt1"/>
                 </a:solidFill>
-                <a:latin typeface="Futura Medium"/>
+                <a:latin typeface="Arial"/>
               </a:rPr>
               <a:t/>
             </a:r>
@@ -29319,7 +30672,7 @@
       </p:sp>
       <p:sp>
         <p:nvSpPr>
-          <p:cNvPr id="6" name="slot.feature.1.title"/>
+          <p:cNvPr id="8" name="slot.feature.1.title"/>
           <p:cNvSpPr/>
           <p:nvPr/>
         </p:nvSpPr>
@@ -29362,7 +30715,7 @@
                 <a:solidFill>
                   <a:schemeClr val="lt1"/>
                 </a:solidFill>
-                <a:latin typeface="Futura Medium"/>
+                <a:latin typeface="Arial"/>
               </a:rPr>
               <a:t>Feature 1</a:t>
             </a:r>
@@ -29371,7 +30724,7 @@
       </p:sp>
       <p:sp>
         <p:nvSpPr>
-          <p:cNvPr id="7" name="slot.feature.1.body"/>
+          <p:cNvPr id="9" name="slot.feature.1.body"/>
           <p:cNvSpPr txBox="1"/>
           <p:nvPr/>
         </p:nvSpPr>
@@ -29406,7 +30759,7 @@
       </p:sp>
       <p:sp>
         <p:nvSpPr>
-          <p:cNvPr id="8" name="decor"/>
+          <p:cNvPr id="10" name="decor"/>
           <p:cNvSpPr/>
           <p:nvPr/>
         </p:nvSpPr>
@@ -29449,7 +30802,7 @@
                 <a:solidFill>
                   <a:schemeClr val="lt1"/>
                 </a:solidFill>
-                <a:latin typeface="Futura Medium"/>
+                <a:latin typeface="Arial"/>
               </a:rPr>
               <a:t/>
             </a:r>
@@ -29458,7 +30811,7 @@
       </p:sp>
       <p:sp>
         <p:nvSpPr>
-          <p:cNvPr id="9" name="slot.feature.2.title"/>
+          <p:cNvPr id="11" name="slot.feature.2.title"/>
           <p:cNvSpPr/>
           <p:nvPr/>
         </p:nvSpPr>
@@ -29501,7 +30854,7 @@
                 <a:solidFill>
                   <a:schemeClr val="lt1"/>
                 </a:solidFill>
-                <a:latin typeface="Futura Medium"/>
+                <a:latin typeface="Arial"/>
               </a:rPr>
               <a:t>Feature 2</a:t>
             </a:r>
@@ -29510,7 +30863,7 @@
       </p:sp>
       <p:sp>
         <p:nvSpPr>
-          <p:cNvPr id="10" name="slot.feature.2.body"/>
+          <p:cNvPr id="12" name="slot.feature.2.body"/>
           <p:cNvSpPr txBox="1"/>
           <p:nvPr/>
         </p:nvSpPr>
@@ -29545,7 +30898,7 @@
       </p:sp>
       <p:sp>
         <p:nvSpPr>
-          <p:cNvPr id="11" name="decor"/>
+          <p:cNvPr id="13" name="decor"/>
           <p:cNvSpPr/>
           <p:nvPr/>
         </p:nvSpPr>
@@ -29588,7 +30941,7 @@
                 <a:solidFill>
                   <a:schemeClr val="lt1"/>
                 </a:solidFill>
-                <a:latin typeface="Futura Medium"/>
+                <a:latin typeface="Arial"/>
               </a:rPr>
               <a:t/>
             </a:r>
@@ -29597,7 +30950,7 @@
       </p:sp>
       <p:sp>
         <p:nvSpPr>
-          <p:cNvPr id="12" name="slot.feature.3.title"/>
+          <p:cNvPr id="14" name="slot.feature.3.title"/>
           <p:cNvSpPr/>
           <p:nvPr/>
         </p:nvSpPr>
@@ -29640,7 +30993,7 @@
                 <a:solidFill>
                   <a:schemeClr val="lt1"/>
                 </a:solidFill>
-                <a:latin typeface="Futura Medium"/>
+                <a:latin typeface="Arial"/>
               </a:rPr>
               <a:t>Feature 3</a:t>
             </a:r>
@@ -29649,7 +31002,7 @@
       </p:sp>
       <p:sp>
         <p:nvSpPr>
-          <p:cNvPr id="13" name="slot.feature.3.body"/>
+          <p:cNvPr id="15" name="slot.feature.3.body"/>
           <p:cNvSpPr txBox="1"/>
           <p:nvPr/>
         </p:nvSpPr>
@@ -29756,7 +31109,130 @@
       </p:sp>
       <p:sp>
         <p:nvSpPr>
-          <p:cNvPr id="4" name="slot.title"/>
+          <p:cNvPr id="4" name="decor">
+            <a:extLst>
+              <a:ext uri="{FF2B5EF4-FFF2-40B4-BE49-F238E27FC236}">
+                <a16:creationId xmlns:a16="http://schemas.microsoft.com/office/drawing/2014/main" id="{9BCA9FA9-DC4A-F7F9-6F98-04EFCF05B790}"/>
+              </a:ext>
+            </a:extLst>
+          </p:cNvPr>
+          <p:cNvSpPr/>
+          <p:nvPr userDrawn="1"/>
+        </p:nvSpPr>
+        <p:spPr>
+          <a:xfrm>
+            <a:off x="-64731" y="246322"/>
+            <a:ext cx="512150" cy="423265"/>
+          </a:xfrm>
+          <a:prstGeom prst="pie">
+            <a:avLst>
+              <a:gd name="adj1" fmla="val 16190032"/>
+              <a:gd name="adj2" fmla="val 5400005"/>
+            </a:avLst>
+          </a:prstGeom>
+          <a:solidFill>
+            <a:schemeClr val="tx2"/>
+          </a:solidFill>
+          <a:ln>
+            <a:solidFill>
+              <a:schemeClr val="tx2"/>
+            </a:solidFill>
+          </a:ln>
+        </p:spPr>
+        <p:style>
+          <a:lnRef idx="2">
+            <a:schemeClr val="accent1">
+              <a:shade val="50000"/>
+            </a:schemeClr>
+          </a:lnRef>
+          <a:fillRef idx="1">
+            <a:schemeClr val="accent1"/>
+          </a:fillRef>
+          <a:effectRef idx="0">
+            <a:schemeClr val="accent1"/>
+          </a:effectRef>
+          <a:fontRef idx="minor">
+            <a:schemeClr val="lt1"/>
+          </a:fontRef>
+        </p:style>
+        <p:txBody>
+          <a:bodyPr lIns="36000" tIns="36000" rIns="36000" bIns="36000" rtlCol="0" anchor="ctr"/>
+          <a:lstStyle/>
+          <a:p>
+            <a:pPr algn="l" rtl="0"/>
+            <a:endParaRPr lang="en-US" sz="1200" b="1">
+              <a:solidFill>
+                <a:schemeClr val="bg1"/>
+              </a:solidFill>
+              <a:latin typeface="Arial" panose="020B0604020202020204" pitchFamily="34" charset="0"/>
+              <a:cs typeface="Arial" panose="020B0604020202020204" pitchFamily="34" charset="0"/>
+            </a:endParaRPr>
+          </a:p>
+        </p:txBody>
+      </p:sp>
+      <p:sp>
+        <p:nvSpPr>
+          <p:cNvPr id="5" name="decor">
+            <a:extLst>
+              <a:ext uri="{FF2B5EF4-FFF2-40B4-BE49-F238E27FC236}">
+                <a16:creationId xmlns:a16="http://schemas.microsoft.com/office/drawing/2014/main" id="{5D3B6E37-9E51-E62C-A843-852BEEBE5F2B}"/>
+              </a:ext>
+            </a:extLst>
+          </p:cNvPr>
+          <p:cNvSpPr/>
+          <p:nvPr userDrawn="1"/>
+        </p:nvSpPr>
+        <p:spPr>
+          <a:xfrm>
+            <a:off x="0" y="247761"/>
+            <a:ext cx="191344" cy="423265"/>
+          </a:xfrm>
+          <a:prstGeom prst="rect">
+            <a:avLst/>
+          </a:prstGeom>
+          <a:solidFill>
+            <a:schemeClr val="tx2"/>
+          </a:solidFill>
+          <a:ln>
+            <a:solidFill>
+              <a:schemeClr val="tx2"/>
+            </a:solidFill>
+          </a:ln>
+        </p:spPr>
+        <p:style>
+          <a:lnRef idx="2">
+            <a:schemeClr val="accent1">
+              <a:shade val="50000"/>
+            </a:schemeClr>
+          </a:lnRef>
+          <a:fillRef idx="1">
+            <a:schemeClr val="accent1"/>
+          </a:fillRef>
+          <a:effectRef idx="0">
+            <a:schemeClr val="accent1"/>
+          </a:effectRef>
+          <a:fontRef idx="minor">
+            <a:schemeClr val="lt1"/>
+          </a:fontRef>
+        </p:style>
+        <p:txBody>
+          <a:bodyPr lIns="36000" tIns="36000" rIns="36000" bIns="36000" rtlCol="0" anchor="ctr"/>
+          <a:lstStyle/>
+          <a:p>
+            <a:pPr algn="l" rtl="0"/>
+            <a:endParaRPr lang="en-US" sz="1200" b="1">
+              <a:solidFill>
+                <a:schemeClr val="bg1"/>
+              </a:solidFill>
+              <a:latin typeface="Arial" panose="020B0604020202020204" pitchFamily="34" charset="0"/>
+              <a:cs typeface="Arial" panose="020B0604020202020204" pitchFamily="34" charset="0"/>
+            </a:endParaRPr>
+          </a:p>
+        </p:txBody>
+      </p:sp>
+      <p:sp>
+        <p:nvSpPr>
+          <p:cNvPr id="6" name="slot.title"/>
           <p:cNvSpPr txBox="1"/>
           <p:nvPr/>
         </p:nvSpPr>
@@ -29780,7 +31256,7 @@
             <a:r>
               <a:rPr sz="2200" b="1">
                 <a:solidFill>
-                  <a:schemeClr val="dk1"/>
+                  <a:schemeClr val="accent2"/>
                 </a:solidFill>
                 <a:latin typeface="Futura Medium"/>
               </a:rPr>
@@ -29791,7 +31267,7 @@
       </p:sp>
       <p:sp>
         <p:nvSpPr>
-          <p:cNvPr id="5" name="decor"/>
+          <p:cNvPr id="7" name="decor"/>
           <p:cNvSpPr/>
           <p:nvPr/>
         </p:nvSpPr>
@@ -29834,7 +31310,7 @@
                 <a:solidFill>
                   <a:schemeClr val="lt1"/>
                 </a:solidFill>
-                <a:latin typeface="Futura Medium"/>
+                <a:latin typeface="Arial"/>
               </a:rPr>
               <a:t/>
             </a:r>
@@ -29843,7 +31319,7 @@
       </p:sp>
       <p:sp>
         <p:nvSpPr>
-          <p:cNvPr id="6" name="slot.feature.1.title"/>
+          <p:cNvPr id="8" name="slot.feature.1.title"/>
           <p:cNvSpPr/>
           <p:nvPr/>
         </p:nvSpPr>
@@ -29886,7 +31362,7 @@
                 <a:solidFill>
                   <a:schemeClr val="lt1"/>
                 </a:solidFill>
-                <a:latin typeface="Futura Medium"/>
+                <a:latin typeface="Arial"/>
               </a:rPr>
               <a:t>Feature 1</a:t>
             </a:r>
@@ -29895,7 +31371,7 @@
       </p:sp>
       <p:sp>
         <p:nvSpPr>
-          <p:cNvPr id="7" name="slot.feature.1.body"/>
+          <p:cNvPr id="9" name="slot.feature.1.body"/>
           <p:cNvSpPr txBox="1"/>
           <p:nvPr/>
         </p:nvSpPr>
@@ -29930,7 +31406,7 @@
       </p:sp>
       <p:sp>
         <p:nvSpPr>
-          <p:cNvPr id="8" name="decor"/>
+          <p:cNvPr id="10" name="decor"/>
           <p:cNvSpPr/>
           <p:nvPr/>
         </p:nvSpPr>
@@ -29973,7 +31449,7 @@
                 <a:solidFill>
                   <a:schemeClr val="lt1"/>
                 </a:solidFill>
-                <a:latin typeface="Futura Medium"/>
+                <a:latin typeface="Arial"/>
               </a:rPr>
               <a:t/>
             </a:r>
@@ -29982,7 +31458,7 @@
       </p:sp>
       <p:sp>
         <p:nvSpPr>
-          <p:cNvPr id="9" name="slot.feature.2.title"/>
+          <p:cNvPr id="11" name="slot.feature.2.title"/>
           <p:cNvSpPr/>
           <p:nvPr/>
         </p:nvSpPr>
@@ -30025,7 +31501,7 @@
                 <a:solidFill>
                   <a:schemeClr val="lt1"/>
                 </a:solidFill>
-                <a:latin typeface="Futura Medium"/>
+                <a:latin typeface="Arial"/>
               </a:rPr>
               <a:t>Feature 2</a:t>
             </a:r>
@@ -30034,7 +31510,7 @@
       </p:sp>
       <p:sp>
         <p:nvSpPr>
-          <p:cNvPr id="10" name="slot.feature.2.body"/>
+          <p:cNvPr id="12" name="slot.feature.2.body"/>
           <p:cNvSpPr txBox="1"/>
           <p:nvPr/>
         </p:nvSpPr>
@@ -30069,7 +31545,7 @@
       </p:sp>
       <p:sp>
         <p:nvSpPr>
-          <p:cNvPr id="11" name="decor"/>
+          <p:cNvPr id="13" name="decor"/>
           <p:cNvSpPr/>
           <p:nvPr/>
         </p:nvSpPr>
@@ -30112,7 +31588,7 @@
                 <a:solidFill>
                   <a:schemeClr val="lt1"/>
                 </a:solidFill>
-                <a:latin typeface="Futura Medium"/>
+                <a:latin typeface="Arial"/>
               </a:rPr>
               <a:t/>
             </a:r>
@@ -30121,7 +31597,7 @@
       </p:sp>
       <p:sp>
         <p:nvSpPr>
-          <p:cNvPr id="12" name="slot.feature.3.title"/>
+          <p:cNvPr id="14" name="slot.feature.3.title"/>
           <p:cNvSpPr/>
           <p:nvPr/>
         </p:nvSpPr>
@@ -30164,7 +31640,7 @@
                 <a:solidFill>
                   <a:schemeClr val="lt1"/>
                 </a:solidFill>
-                <a:latin typeface="Futura Medium"/>
+                <a:latin typeface="Arial"/>
               </a:rPr>
               <a:t>Feature 3</a:t>
             </a:r>
@@ -30173,7 +31649,7 @@
       </p:sp>
       <p:sp>
         <p:nvSpPr>
-          <p:cNvPr id="13" name="slot.feature.3.body"/>
+          <p:cNvPr id="15" name="slot.feature.3.body"/>
           <p:cNvSpPr txBox="1"/>
           <p:nvPr/>
         </p:nvSpPr>
@@ -30208,7 +31684,7 @@
       </p:sp>
       <p:sp>
         <p:nvSpPr>
-          <p:cNvPr id="14" name="decor"/>
+          <p:cNvPr id="16" name="decor"/>
           <p:cNvSpPr/>
           <p:nvPr/>
         </p:nvSpPr>
@@ -30251,7 +31727,7 @@
                 <a:solidFill>
                   <a:schemeClr val="lt1"/>
                 </a:solidFill>
-                <a:latin typeface="Futura Medium"/>
+                <a:latin typeface="Arial"/>
               </a:rPr>
               <a:t/>
             </a:r>
@@ -30260,7 +31736,7 @@
       </p:sp>
       <p:sp>
         <p:nvSpPr>
-          <p:cNvPr id="15" name="slot.feature.4.title"/>
+          <p:cNvPr id="17" name="slot.feature.4.title"/>
           <p:cNvSpPr/>
           <p:nvPr/>
         </p:nvSpPr>
@@ -30303,7 +31779,7 @@
                 <a:solidFill>
                   <a:schemeClr val="lt1"/>
                 </a:solidFill>
-                <a:latin typeface="Futura Medium"/>
+                <a:latin typeface="Arial"/>
               </a:rPr>
               <a:t>Feature 4</a:t>
             </a:r>
@@ -30312,7 +31788,7 @@
       </p:sp>
       <p:sp>
         <p:nvSpPr>
-          <p:cNvPr id="16" name="slot.feature.4.body"/>
+          <p:cNvPr id="18" name="slot.feature.4.body"/>
           <p:cNvSpPr txBox="1"/>
           <p:nvPr/>
         </p:nvSpPr>
@@ -30419,7 +31895,130 @@
       </p:sp>
       <p:sp>
         <p:nvSpPr>
-          <p:cNvPr id="4" name="slot.title"/>
+          <p:cNvPr id="4" name="decor">
+            <a:extLst>
+              <a:ext uri="{FF2B5EF4-FFF2-40B4-BE49-F238E27FC236}">
+                <a16:creationId xmlns:a16="http://schemas.microsoft.com/office/drawing/2014/main" id="{9BCA9FA9-DC4A-F7F9-6F98-04EFCF05B790}"/>
+              </a:ext>
+            </a:extLst>
+          </p:cNvPr>
+          <p:cNvSpPr/>
+          <p:nvPr userDrawn="1"/>
+        </p:nvSpPr>
+        <p:spPr>
+          <a:xfrm>
+            <a:off x="-64731" y="246322"/>
+            <a:ext cx="512150" cy="423265"/>
+          </a:xfrm>
+          <a:prstGeom prst="pie">
+            <a:avLst>
+              <a:gd name="adj1" fmla="val 16190032"/>
+              <a:gd name="adj2" fmla="val 5400005"/>
+            </a:avLst>
+          </a:prstGeom>
+          <a:solidFill>
+            <a:schemeClr val="tx2"/>
+          </a:solidFill>
+          <a:ln>
+            <a:solidFill>
+              <a:schemeClr val="tx2"/>
+            </a:solidFill>
+          </a:ln>
+        </p:spPr>
+        <p:style>
+          <a:lnRef idx="2">
+            <a:schemeClr val="accent1">
+              <a:shade val="50000"/>
+            </a:schemeClr>
+          </a:lnRef>
+          <a:fillRef idx="1">
+            <a:schemeClr val="accent1"/>
+          </a:fillRef>
+          <a:effectRef idx="0">
+            <a:schemeClr val="accent1"/>
+          </a:effectRef>
+          <a:fontRef idx="minor">
+            <a:schemeClr val="lt1"/>
+          </a:fontRef>
+        </p:style>
+        <p:txBody>
+          <a:bodyPr lIns="36000" tIns="36000" rIns="36000" bIns="36000" rtlCol="0" anchor="ctr"/>
+          <a:lstStyle/>
+          <a:p>
+            <a:pPr algn="l" rtl="0"/>
+            <a:endParaRPr lang="en-US" sz="1200" b="1">
+              <a:solidFill>
+                <a:schemeClr val="bg1"/>
+              </a:solidFill>
+              <a:latin typeface="Arial" panose="020B0604020202020204" pitchFamily="34" charset="0"/>
+              <a:cs typeface="Arial" panose="020B0604020202020204" pitchFamily="34" charset="0"/>
+            </a:endParaRPr>
+          </a:p>
+        </p:txBody>
+      </p:sp>
+      <p:sp>
+        <p:nvSpPr>
+          <p:cNvPr id="5" name="decor">
+            <a:extLst>
+              <a:ext uri="{FF2B5EF4-FFF2-40B4-BE49-F238E27FC236}">
+                <a16:creationId xmlns:a16="http://schemas.microsoft.com/office/drawing/2014/main" id="{5D3B6E37-9E51-E62C-A843-852BEEBE5F2B}"/>
+              </a:ext>
+            </a:extLst>
+          </p:cNvPr>
+          <p:cNvSpPr/>
+          <p:nvPr userDrawn="1"/>
+        </p:nvSpPr>
+        <p:spPr>
+          <a:xfrm>
+            <a:off x="0" y="247761"/>
+            <a:ext cx="191344" cy="423265"/>
+          </a:xfrm>
+          <a:prstGeom prst="rect">
+            <a:avLst/>
+          </a:prstGeom>
+          <a:solidFill>
+            <a:schemeClr val="tx2"/>
+          </a:solidFill>
+          <a:ln>
+            <a:solidFill>
+              <a:schemeClr val="tx2"/>
+            </a:solidFill>
+          </a:ln>
+        </p:spPr>
+        <p:style>
+          <a:lnRef idx="2">
+            <a:schemeClr val="accent1">
+              <a:shade val="50000"/>
+            </a:schemeClr>
+          </a:lnRef>
+          <a:fillRef idx="1">
+            <a:schemeClr val="accent1"/>
+          </a:fillRef>
+          <a:effectRef idx="0">
+            <a:schemeClr val="accent1"/>
+          </a:effectRef>
+          <a:fontRef idx="minor">
+            <a:schemeClr val="lt1"/>
+          </a:fontRef>
+        </p:style>
+        <p:txBody>
+          <a:bodyPr lIns="36000" tIns="36000" rIns="36000" bIns="36000" rtlCol="0" anchor="ctr"/>
+          <a:lstStyle/>
+          <a:p>
+            <a:pPr algn="l" rtl="0"/>
+            <a:endParaRPr lang="en-US" sz="1200" b="1">
+              <a:solidFill>
+                <a:schemeClr val="bg1"/>
+              </a:solidFill>
+              <a:latin typeface="Arial" panose="020B0604020202020204" pitchFamily="34" charset="0"/>
+              <a:cs typeface="Arial" panose="020B0604020202020204" pitchFamily="34" charset="0"/>
+            </a:endParaRPr>
+          </a:p>
+        </p:txBody>
+      </p:sp>
+      <p:sp>
+        <p:nvSpPr>
+          <p:cNvPr id="6" name="slot.title"/>
           <p:cNvSpPr txBox="1"/>
           <p:nvPr/>
         </p:nvSpPr>
@@ -30443,7 +32042,7 @@
             <a:r>
               <a:rPr sz="2200" b="1">
                 <a:solidFill>
-                  <a:schemeClr val="dk1"/>
+                  <a:schemeClr val="accent2"/>
                 </a:solidFill>
                 <a:latin typeface="Futura Medium"/>
               </a:rPr>
@@ -30454,7 +32053,7 @@
       </p:sp>
       <p:sp>
         <p:nvSpPr>
-          <p:cNvPr id="5" name="decor"/>
+          <p:cNvPr id="7" name="decor"/>
           <p:cNvSpPr/>
           <p:nvPr/>
         </p:nvSpPr>
@@ -30497,7 +32096,7 @@
                 <a:solidFill>
                   <a:schemeClr val="lt1"/>
                 </a:solidFill>
-                <a:latin typeface="Futura Medium"/>
+                <a:latin typeface="Arial"/>
               </a:rPr>
               <a:t/>
             </a:r>
@@ -30506,7 +32105,7 @@
       </p:sp>
       <p:sp>
         <p:nvSpPr>
-          <p:cNvPr id="6" name="slot.feature.1.title"/>
+          <p:cNvPr id="8" name="slot.feature.1.title"/>
           <p:cNvSpPr/>
           <p:nvPr/>
         </p:nvSpPr>
@@ -30549,7 +32148,7 @@
                 <a:solidFill>
                   <a:schemeClr val="lt1"/>
                 </a:solidFill>
-                <a:latin typeface="Futura Medium"/>
+                <a:latin typeface="Arial"/>
               </a:rPr>
               <a:t>Feature 1</a:t>
             </a:r>
@@ -30558,7 +32157,7 @@
       </p:sp>
       <p:sp>
         <p:nvSpPr>
-          <p:cNvPr id="7" name="slot.feature.1.body"/>
+          <p:cNvPr id="9" name="slot.feature.1.body"/>
           <p:cNvSpPr txBox="1"/>
           <p:nvPr/>
         </p:nvSpPr>
@@ -30593,7 +32192,7 @@
       </p:sp>
       <p:sp>
         <p:nvSpPr>
-          <p:cNvPr id="8" name="decor"/>
+          <p:cNvPr id="10" name="decor"/>
           <p:cNvSpPr/>
           <p:nvPr/>
         </p:nvSpPr>
@@ -30636,7 +32235,7 @@
                 <a:solidFill>
                   <a:schemeClr val="lt1"/>
                 </a:solidFill>
-                <a:latin typeface="Futura Medium"/>
+                <a:latin typeface="Arial"/>
               </a:rPr>
               <a:t/>
             </a:r>
@@ -30645,7 +32244,7 @@
       </p:sp>
       <p:sp>
         <p:nvSpPr>
-          <p:cNvPr id="9" name="slot.feature.2.title"/>
+          <p:cNvPr id="11" name="slot.feature.2.title"/>
           <p:cNvSpPr/>
           <p:nvPr/>
         </p:nvSpPr>
@@ -30688,7 +32287,7 @@
                 <a:solidFill>
                   <a:schemeClr val="lt1"/>
                 </a:solidFill>
-                <a:latin typeface="Futura Medium"/>
+                <a:latin typeface="Arial"/>
               </a:rPr>
               <a:t>Feature 2</a:t>
             </a:r>
@@ -30697,7 +32296,7 @@
       </p:sp>
       <p:sp>
         <p:nvSpPr>
-          <p:cNvPr id="10" name="slot.feature.2.body"/>
+          <p:cNvPr id="12" name="slot.feature.2.body"/>
           <p:cNvSpPr txBox="1"/>
           <p:nvPr/>
         </p:nvSpPr>
@@ -30732,7 +32331,7 @@
       </p:sp>
       <p:sp>
         <p:nvSpPr>
-          <p:cNvPr id="11" name="decor"/>
+          <p:cNvPr id="13" name="decor"/>
           <p:cNvSpPr/>
           <p:nvPr/>
         </p:nvSpPr>
@@ -30775,7 +32374,7 @@
                 <a:solidFill>
                   <a:schemeClr val="lt1"/>
                 </a:solidFill>
-                <a:latin typeface="Futura Medium"/>
+                <a:latin typeface="Arial"/>
               </a:rPr>
               <a:t/>
             </a:r>
@@ -30784,7 +32383,7 @@
       </p:sp>
       <p:sp>
         <p:nvSpPr>
-          <p:cNvPr id="12" name="slot.feature.3.title"/>
+          <p:cNvPr id="14" name="slot.feature.3.title"/>
           <p:cNvSpPr/>
           <p:nvPr/>
         </p:nvSpPr>
@@ -30827,7 +32426,7 @@
                 <a:solidFill>
                   <a:schemeClr val="lt1"/>
                 </a:solidFill>
-                <a:latin typeface="Futura Medium"/>
+                <a:latin typeface="Arial"/>
               </a:rPr>
               <a:t>Feature 3</a:t>
             </a:r>
@@ -30836,7 +32435,7 @@
       </p:sp>
       <p:sp>
         <p:nvSpPr>
-          <p:cNvPr id="13" name="slot.feature.3.body"/>
+          <p:cNvPr id="15" name="slot.feature.3.body"/>
           <p:cNvSpPr txBox="1"/>
           <p:nvPr/>
         </p:nvSpPr>
@@ -30871,7 +32470,7 @@
       </p:sp>
       <p:sp>
         <p:nvSpPr>
-          <p:cNvPr id="14" name="decor"/>
+          <p:cNvPr id="16" name="decor"/>
           <p:cNvSpPr/>
           <p:nvPr/>
         </p:nvSpPr>
@@ -30914,7 +32513,7 @@
                 <a:solidFill>
                   <a:schemeClr val="lt1"/>
                 </a:solidFill>
-                <a:latin typeface="Futura Medium"/>
+                <a:latin typeface="Arial"/>
               </a:rPr>
               <a:t/>
             </a:r>
@@ -30923,7 +32522,7 @@
       </p:sp>
       <p:sp>
         <p:nvSpPr>
-          <p:cNvPr id="15" name="slot.feature.4.title"/>
+          <p:cNvPr id="17" name="slot.feature.4.title"/>
           <p:cNvSpPr/>
           <p:nvPr/>
         </p:nvSpPr>
@@ -30966,7 +32565,7 @@
                 <a:solidFill>
                   <a:schemeClr val="lt1"/>
                 </a:solidFill>
-                <a:latin typeface="Futura Medium"/>
+                <a:latin typeface="Arial"/>
               </a:rPr>
               <a:t>Feature 4</a:t>
             </a:r>
@@ -30975,7 +32574,7 @@
       </p:sp>
       <p:sp>
         <p:nvSpPr>
-          <p:cNvPr id="16" name="slot.feature.4.body"/>
+          <p:cNvPr id="18" name="slot.feature.4.body"/>
           <p:cNvSpPr txBox="1"/>
           <p:nvPr/>
         </p:nvSpPr>
@@ -31010,7 +32609,7 @@
       </p:sp>
       <p:sp>
         <p:nvSpPr>
-          <p:cNvPr id="17" name="decor"/>
+          <p:cNvPr id="19" name="decor"/>
           <p:cNvSpPr/>
           <p:nvPr/>
         </p:nvSpPr>
@@ -31053,7 +32652,7 @@
                 <a:solidFill>
                   <a:schemeClr val="lt1"/>
                 </a:solidFill>
-                <a:latin typeface="Futura Medium"/>
+                <a:latin typeface="Arial"/>
               </a:rPr>
               <a:t/>
             </a:r>
@@ -31062,7 +32661,7 @@
       </p:sp>
       <p:sp>
         <p:nvSpPr>
-          <p:cNvPr id="18" name="slot.feature.5.title"/>
+          <p:cNvPr id="20" name="slot.feature.5.title"/>
           <p:cNvSpPr/>
           <p:nvPr/>
         </p:nvSpPr>
@@ -31105,7 +32704,7 @@
                 <a:solidFill>
                   <a:schemeClr val="lt1"/>
                 </a:solidFill>
-                <a:latin typeface="Futura Medium"/>
+                <a:latin typeface="Arial"/>
               </a:rPr>
               <a:t>Feature 5</a:t>
             </a:r>
@@ -31114,7 +32713,7 @@
       </p:sp>
       <p:sp>
         <p:nvSpPr>
-          <p:cNvPr id="19" name="slot.feature.5.body"/>
+          <p:cNvPr id="21" name="slot.feature.5.body"/>
           <p:cNvSpPr txBox="1"/>
           <p:nvPr/>
         </p:nvSpPr>
@@ -31355,7 +32954,130 @@
       </p:sp>
       <p:sp>
         <p:nvSpPr>
-          <p:cNvPr id="4" name="slot.title"/>
+          <p:cNvPr id="4" name="decor">
+            <a:extLst>
+              <a:ext uri="{FF2B5EF4-FFF2-40B4-BE49-F238E27FC236}">
+                <a16:creationId xmlns:a16="http://schemas.microsoft.com/office/drawing/2014/main" id="{9BCA9FA9-DC4A-F7F9-6F98-04EFCF05B790}"/>
+              </a:ext>
+            </a:extLst>
+          </p:cNvPr>
+          <p:cNvSpPr/>
+          <p:nvPr userDrawn="1"/>
+        </p:nvSpPr>
+        <p:spPr>
+          <a:xfrm>
+            <a:off x="-64731" y="246322"/>
+            <a:ext cx="512150" cy="423265"/>
+          </a:xfrm>
+          <a:prstGeom prst="pie">
+            <a:avLst>
+              <a:gd name="adj1" fmla="val 16190032"/>
+              <a:gd name="adj2" fmla="val 5400005"/>
+            </a:avLst>
+          </a:prstGeom>
+          <a:solidFill>
+            <a:schemeClr val="tx2"/>
+          </a:solidFill>
+          <a:ln>
+            <a:solidFill>
+              <a:schemeClr val="tx2"/>
+            </a:solidFill>
+          </a:ln>
+        </p:spPr>
+        <p:style>
+          <a:lnRef idx="2">
+            <a:schemeClr val="accent1">
+              <a:shade val="50000"/>
+            </a:schemeClr>
+          </a:lnRef>
+          <a:fillRef idx="1">
+            <a:schemeClr val="accent1"/>
+          </a:fillRef>
+          <a:effectRef idx="0">
+            <a:schemeClr val="accent1"/>
+          </a:effectRef>
+          <a:fontRef idx="minor">
+            <a:schemeClr val="lt1"/>
+          </a:fontRef>
+        </p:style>
+        <p:txBody>
+          <a:bodyPr lIns="36000" tIns="36000" rIns="36000" bIns="36000" rtlCol="0" anchor="ctr"/>
+          <a:lstStyle/>
+          <a:p>
+            <a:pPr algn="l" rtl="0"/>
+            <a:endParaRPr lang="en-US" sz="1200" b="1">
+              <a:solidFill>
+                <a:schemeClr val="bg1"/>
+              </a:solidFill>
+              <a:latin typeface="Arial" panose="020B0604020202020204" pitchFamily="34" charset="0"/>
+              <a:cs typeface="Arial" panose="020B0604020202020204" pitchFamily="34" charset="0"/>
+            </a:endParaRPr>
+          </a:p>
+        </p:txBody>
+      </p:sp>
+      <p:sp>
+        <p:nvSpPr>
+          <p:cNvPr id="5" name="decor">
+            <a:extLst>
+              <a:ext uri="{FF2B5EF4-FFF2-40B4-BE49-F238E27FC236}">
+                <a16:creationId xmlns:a16="http://schemas.microsoft.com/office/drawing/2014/main" id="{5D3B6E37-9E51-E62C-A843-852BEEBE5F2B}"/>
+              </a:ext>
+            </a:extLst>
+          </p:cNvPr>
+          <p:cNvSpPr/>
+          <p:nvPr userDrawn="1"/>
+        </p:nvSpPr>
+        <p:spPr>
+          <a:xfrm>
+            <a:off x="0" y="247761"/>
+            <a:ext cx="191344" cy="423265"/>
+          </a:xfrm>
+          <a:prstGeom prst="rect">
+            <a:avLst/>
+          </a:prstGeom>
+          <a:solidFill>
+            <a:schemeClr val="tx2"/>
+          </a:solidFill>
+          <a:ln>
+            <a:solidFill>
+              <a:schemeClr val="tx2"/>
+            </a:solidFill>
+          </a:ln>
+        </p:spPr>
+        <p:style>
+          <a:lnRef idx="2">
+            <a:schemeClr val="accent1">
+              <a:shade val="50000"/>
+            </a:schemeClr>
+          </a:lnRef>
+          <a:fillRef idx="1">
+            <a:schemeClr val="accent1"/>
+          </a:fillRef>
+          <a:effectRef idx="0">
+            <a:schemeClr val="accent1"/>
+          </a:effectRef>
+          <a:fontRef idx="minor">
+            <a:schemeClr val="lt1"/>
+          </a:fontRef>
+        </p:style>
+        <p:txBody>
+          <a:bodyPr lIns="36000" tIns="36000" rIns="36000" bIns="36000" rtlCol="0" anchor="ctr"/>
+          <a:lstStyle/>
+          <a:p>
+            <a:pPr algn="l" rtl="0"/>
+            <a:endParaRPr lang="en-US" sz="1200" b="1">
+              <a:solidFill>
+                <a:schemeClr val="bg1"/>
+              </a:solidFill>
+              <a:latin typeface="Arial" panose="020B0604020202020204" pitchFamily="34" charset="0"/>
+              <a:cs typeface="Arial" panose="020B0604020202020204" pitchFamily="34" charset="0"/>
+            </a:endParaRPr>
+          </a:p>
+        </p:txBody>
+      </p:sp>
+      <p:sp>
+        <p:nvSpPr>
+          <p:cNvPr id="6" name="slot.title"/>
           <p:cNvSpPr txBox="1"/>
           <p:nvPr/>
         </p:nvSpPr>
@@ -31379,7 +33101,7 @@
             <a:r>
               <a:rPr sz="2200" b="1">
                 <a:solidFill>
-                  <a:schemeClr val="dk1"/>
+                  <a:schemeClr val="accent2"/>
                 </a:solidFill>
                 <a:latin typeface="Futura Medium"/>
               </a:rPr>
@@ -31390,7 +33112,7 @@
       </p:sp>
       <p:sp>
         <p:nvSpPr>
-          <p:cNvPr id="5" name="decor"/>
+          <p:cNvPr id="7" name="decor"/>
           <p:cNvSpPr/>
           <p:nvPr/>
         </p:nvSpPr>
@@ -31433,7 +33155,7 @@
                 <a:solidFill>
                   <a:schemeClr val="lt1"/>
                 </a:solidFill>
-                <a:latin typeface="Futura Medium"/>
+                <a:latin typeface="Arial"/>
               </a:rPr>
               <a:t/>
             </a:r>
@@ -31442,7 +33164,7 @@
       </p:sp>
       <p:sp>
         <p:nvSpPr>
-          <p:cNvPr id="6" name="decor"/>
+          <p:cNvPr id="8" name="decor"/>
           <p:cNvSpPr/>
           <p:nvPr/>
         </p:nvSpPr>
@@ -31485,7 +33207,7 @@
                 <a:solidFill>
                   <a:schemeClr val="lt1"/>
                 </a:solidFill>
-                <a:latin typeface="Futura Medium"/>
+                <a:latin typeface="Arial"/>
               </a:rPr>
               <a:t>1</a:t>
             </a:r>
@@ -31494,7 +33216,7 @@
       </p:sp>
       <p:sp>
         <p:nvSpPr>
-          <p:cNvPr id="7" name="slot.phase.1.caption"/>
+          <p:cNvPr id="9" name="slot.phase.1.caption"/>
           <p:cNvSpPr txBox="1"/>
           <p:nvPr/>
         </p:nvSpPr>
@@ -31520,7 +33242,7 @@
                 <a:solidFill>
                   <a:schemeClr val="accent4"/>
                 </a:solidFill>
-                <a:latin typeface="Futura Medium"/>
+                <a:latin typeface="Arial"/>
               </a:rPr>
               <a:t>Q1 2026</a:t>
             </a:r>
@@ -31529,7 +33251,7 @@
       </p:sp>
       <p:sp>
         <p:nvSpPr>
-          <p:cNvPr id="8" name="slot.phase.1.title"/>
+          <p:cNvPr id="10" name="slot.phase.1.title"/>
           <p:cNvSpPr/>
           <p:nvPr/>
         </p:nvSpPr>
@@ -31572,7 +33294,7 @@
                 <a:solidFill>
                   <a:schemeClr val="accent1"/>
                 </a:solidFill>
-                <a:latin typeface="Futura Medium"/>
+                <a:latin typeface="Arial"/>
               </a:rPr>
               <a:t>Phase 1</a:t>
             </a:r>
@@ -31581,7 +33303,7 @@
       </p:sp>
       <p:sp>
         <p:nvSpPr>
-          <p:cNvPr id="9" name="slot.phase.1.body"/>
+          <p:cNvPr id="11" name="slot.phase.1.body"/>
           <p:cNvSpPr txBox="1"/>
           <p:nvPr/>
         </p:nvSpPr>
@@ -31616,7 +33338,7 @@
       </p:sp>
       <p:sp>
         <p:nvSpPr>
-          <p:cNvPr id="10" name="decor"/>
+          <p:cNvPr id="12" name="decor"/>
           <p:cNvSpPr/>
           <p:nvPr/>
         </p:nvSpPr>
@@ -31659,7 +33381,7 @@
                 <a:solidFill>
                   <a:schemeClr val="lt1"/>
                 </a:solidFill>
-                <a:latin typeface="Futura Medium"/>
+                <a:latin typeface="Arial"/>
               </a:rPr>
               <a:t>2</a:t>
             </a:r>
@@ -31668,7 +33390,7 @@
       </p:sp>
       <p:sp>
         <p:nvSpPr>
-          <p:cNvPr id="11" name="slot.phase.2.caption"/>
+          <p:cNvPr id="13" name="slot.phase.2.caption"/>
           <p:cNvSpPr txBox="1"/>
           <p:nvPr/>
         </p:nvSpPr>
@@ -31694,7 +33416,7 @@
                 <a:solidFill>
                   <a:schemeClr val="accent4"/>
                 </a:solidFill>
-                <a:latin typeface="Futura Medium"/>
+                <a:latin typeface="Arial"/>
               </a:rPr>
               <a:t>Q1 2026</a:t>
             </a:r>
@@ -31703,7 +33425,7 @@
       </p:sp>
       <p:sp>
         <p:nvSpPr>
-          <p:cNvPr id="12" name="slot.phase.2.title"/>
+          <p:cNvPr id="14" name="slot.phase.2.title"/>
           <p:cNvSpPr/>
           <p:nvPr/>
         </p:nvSpPr>
@@ -31746,7 +33468,7 @@
                 <a:solidFill>
                   <a:schemeClr val="accent1"/>
                 </a:solidFill>
-                <a:latin typeface="Futura Medium"/>
+                <a:latin typeface="Arial"/>
               </a:rPr>
               <a:t>Phase 2</a:t>
             </a:r>
@@ -31755,7 +33477,7 @@
       </p:sp>
       <p:sp>
         <p:nvSpPr>
-          <p:cNvPr id="13" name="slot.phase.2.body"/>
+          <p:cNvPr id="15" name="slot.phase.2.body"/>
           <p:cNvSpPr txBox="1"/>
           <p:nvPr/>
         </p:nvSpPr>
@@ -31790,7 +33512,7 @@
       </p:sp>
       <p:sp>
         <p:nvSpPr>
-          <p:cNvPr id="14" name="decor"/>
+          <p:cNvPr id="16" name="decor"/>
           <p:cNvSpPr/>
           <p:nvPr/>
         </p:nvSpPr>
@@ -31833,7 +33555,7 @@
                 <a:solidFill>
                   <a:schemeClr val="lt1"/>
                 </a:solidFill>
-                <a:latin typeface="Futura Medium"/>
+                <a:latin typeface="Arial"/>
               </a:rPr>
               <a:t>3</a:t>
             </a:r>
@@ -31842,7 +33564,7 @@
       </p:sp>
       <p:sp>
         <p:nvSpPr>
-          <p:cNvPr id="15" name="slot.phase.3.caption"/>
+          <p:cNvPr id="17" name="slot.phase.3.caption"/>
           <p:cNvSpPr txBox="1"/>
           <p:nvPr/>
         </p:nvSpPr>
@@ -31868,7 +33590,7 @@
                 <a:solidFill>
                   <a:schemeClr val="accent4"/>
                 </a:solidFill>
-                <a:latin typeface="Futura Medium"/>
+                <a:latin typeface="Arial"/>
               </a:rPr>
               <a:t>Q1 2026</a:t>
             </a:r>
@@ -31877,7 +33599,7 @@
       </p:sp>
       <p:sp>
         <p:nvSpPr>
-          <p:cNvPr id="16" name="slot.phase.3.title"/>
+          <p:cNvPr id="18" name="slot.phase.3.title"/>
           <p:cNvSpPr/>
           <p:nvPr/>
         </p:nvSpPr>
@@ -31920,7 +33642,7 @@
                 <a:solidFill>
                   <a:schemeClr val="accent1"/>
                 </a:solidFill>
-                <a:latin typeface="Futura Medium"/>
+                <a:latin typeface="Arial"/>
               </a:rPr>
               <a:t>Phase 3</a:t>
             </a:r>
@@ -31929,7 +33651,7 @@
       </p:sp>
       <p:sp>
         <p:nvSpPr>
-          <p:cNvPr id="17" name="slot.phase.3.body"/>
+          <p:cNvPr id="19" name="slot.phase.3.body"/>
           <p:cNvSpPr txBox="1"/>
           <p:nvPr/>
         </p:nvSpPr>
@@ -32036,7 +33758,130 @@
       </p:sp>
       <p:sp>
         <p:nvSpPr>
-          <p:cNvPr id="4" name="slot.title"/>
+          <p:cNvPr id="4" name="decor">
+            <a:extLst>
+              <a:ext uri="{FF2B5EF4-FFF2-40B4-BE49-F238E27FC236}">
+                <a16:creationId xmlns:a16="http://schemas.microsoft.com/office/drawing/2014/main" id="{9BCA9FA9-DC4A-F7F9-6F98-04EFCF05B790}"/>
+              </a:ext>
+            </a:extLst>
+          </p:cNvPr>
+          <p:cNvSpPr/>
+          <p:nvPr userDrawn="1"/>
+        </p:nvSpPr>
+        <p:spPr>
+          <a:xfrm>
+            <a:off x="-64731" y="246322"/>
+            <a:ext cx="512150" cy="423265"/>
+          </a:xfrm>
+          <a:prstGeom prst="pie">
+            <a:avLst>
+              <a:gd name="adj1" fmla="val 16190032"/>
+              <a:gd name="adj2" fmla="val 5400005"/>
+            </a:avLst>
+          </a:prstGeom>
+          <a:solidFill>
+            <a:schemeClr val="tx2"/>
+          </a:solidFill>
+          <a:ln>
+            <a:solidFill>
+              <a:schemeClr val="tx2"/>
+            </a:solidFill>
+          </a:ln>
+        </p:spPr>
+        <p:style>
+          <a:lnRef idx="2">
+            <a:schemeClr val="accent1">
+              <a:shade val="50000"/>
+            </a:schemeClr>
+          </a:lnRef>
+          <a:fillRef idx="1">
+            <a:schemeClr val="accent1"/>
+          </a:fillRef>
+          <a:effectRef idx="0">
+            <a:schemeClr val="accent1"/>
+          </a:effectRef>
+          <a:fontRef idx="minor">
+            <a:schemeClr val="lt1"/>
+          </a:fontRef>
+        </p:style>
+        <p:txBody>
+          <a:bodyPr lIns="36000" tIns="36000" rIns="36000" bIns="36000" rtlCol="0" anchor="ctr"/>
+          <a:lstStyle/>
+          <a:p>
+            <a:pPr algn="l" rtl="0"/>
+            <a:endParaRPr lang="en-US" sz="1200" b="1">
+              <a:solidFill>
+                <a:schemeClr val="bg1"/>
+              </a:solidFill>
+              <a:latin typeface="Arial" panose="020B0604020202020204" pitchFamily="34" charset="0"/>
+              <a:cs typeface="Arial" panose="020B0604020202020204" pitchFamily="34" charset="0"/>
+            </a:endParaRPr>
+          </a:p>
+        </p:txBody>
+      </p:sp>
+      <p:sp>
+        <p:nvSpPr>
+          <p:cNvPr id="5" name="decor">
+            <a:extLst>
+              <a:ext uri="{FF2B5EF4-FFF2-40B4-BE49-F238E27FC236}">
+                <a16:creationId xmlns:a16="http://schemas.microsoft.com/office/drawing/2014/main" id="{5D3B6E37-9E51-E62C-A843-852BEEBE5F2B}"/>
+              </a:ext>
+            </a:extLst>
+          </p:cNvPr>
+          <p:cNvSpPr/>
+          <p:nvPr userDrawn="1"/>
+        </p:nvSpPr>
+        <p:spPr>
+          <a:xfrm>
+            <a:off x="0" y="247761"/>
+            <a:ext cx="191344" cy="423265"/>
+          </a:xfrm>
+          <a:prstGeom prst="rect">
+            <a:avLst/>
+          </a:prstGeom>
+          <a:solidFill>
+            <a:schemeClr val="tx2"/>
+          </a:solidFill>
+          <a:ln>
+            <a:solidFill>
+              <a:schemeClr val="tx2"/>
+            </a:solidFill>
+          </a:ln>
+        </p:spPr>
+        <p:style>
+          <a:lnRef idx="2">
+            <a:schemeClr val="accent1">
+              <a:shade val="50000"/>
+            </a:schemeClr>
+          </a:lnRef>
+          <a:fillRef idx="1">
+            <a:schemeClr val="accent1"/>
+          </a:fillRef>
+          <a:effectRef idx="0">
+            <a:schemeClr val="accent1"/>
+          </a:effectRef>
+          <a:fontRef idx="minor">
+            <a:schemeClr val="lt1"/>
+          </a:fontRef>
+        </p:style>
+        <p:txBody>
+          <a:bodyPr lIns="36000" tIns="36000" rIns="36000" bIns="36000" rtlCol="0" anchor="ctr"/>
+          <a:lstStyle/>
+          <a:p>
+            <a:pPr algn="l" rtl="0"/>
+            <a:endParaRPr lang="en-US" sz="1200" b="1">
+              <a:solidFill>
+                <a:schemeClr val="bg1"/>
+              </a:solidFill>
+              <a:latin typeface="Arial" panose="020B0604020202020204" pitchFamily="34" charset="0"/>
+              <a:cs typeface="Arial" panose="020B0604020202020204" pitchFamily="34" charset="0"/>
+            </a:endParaRPr>
+          </a:p>
+        </p:txBody>
+      </p:sp>
+      <p:sp>
+        <p:nvSpPr>
+          <p:cNvPr id="6" name="slot.title"/>
           <p:cNvSpPr txBox="1"/>
           <p:nvPr/>
         </p:nvSpPr>
@@ -32060,7 +33905,7 @@
             <a:r>
               <a:rPr sz="2200" b="1">
                 <a:solidFill>
-                  <a:schemeClr val="dk1"/>
+                  <a:schemeClr val="accent2"/>
                 </a:solidFill>
                 <a:latin typeface="Futura Medium"/>
               </a:rPr>
@@ -32071,7 +33916,7 @@
       </p:sp>
       <p:sp>
         <p:nvSpPr>
-          <p:cNvPr id="5" name="decor"/>
+          <p:cNvPr id="7" name="decor"/>
           <p:cNvSpPr/>
           <p:nvPr/>
         </p:nvSpPr>
@@ -32114,7 +33959,7 @@
                 <a:solidFill>
                   <a:schemeClr val="lt1"/>
                 </a:solidFill>
-                <a:latin typeface="Futura Medium"/>
+                <a:latin typeface="Arial"/>
               </a:rPr>
               <a:t/>
             </a:r>
@@ -32123,7 +33968,7 @@
       </p:sp>
       <p:sp>
         <p:nvSpPr>
-          <p:cNvPr id="6" name="decor"/>
+          <p:cNvPr id="8" name="decor"/>
           <p:cNvSpPr/>
           <p:nvPr/>
         </p:nvSpPr>
@@ -32166,7 +34011,7 @@
                 <a:solidFill>
                   <a:schemeClr val="lt1"/>
                 </a:solidFill>
-                <a:latin typeface="Futura Medium"/>
+                <a:latin typeface="Arial"/>
               </a:rPr>
               <a:t>1</a:t>
             </a:r>
@@ -32175,7 +34020,7 @@
       </p:sp>
       <p:sp>
         <p:nvSpPr>
-          <p:cNvPr id="7" name="slot.phase.1.caption"/>
+          <p:cNvPr id="9" name="slot.phase.1.caption"/>
           <p:cNvSpPr txBox="1"/>
           <p:nvPr/>
         </p:nvSpPr>
@@ -32201,7 +34046,7 @@
                 <a:solidFill>
                   <a:schemeClr val="accent4"/>
                 </a:solidFill>
-                <a:latin typeface="Futura Medium"/>
+                <a:latin typeface="Arial"/>
               </a:rPr>
               <a:t>Q1 2026</a:t>
             </a:r>
@@ -32210,7 +34055,7 @@
       </p:sp>
       <p:sp>
         <p:nvSpPr>
-          <p:cNvPr id="8" name="slot.phase.1.title"/>
+          <p:cNvPr id="10" name="slot.phase.1.title"/>
           <p:cNvSpPr/>
           <p:nvPr/>
         </p:nvSpPr>
@@ -32253,7 +34098,7 @@
                 <a:solidFill>
                   <a:schemeClr val="accent1"/>
                 </a:solidFill>
-                <a:latin typeface="Futura Medium"/>
+                <a:latin typeface="Arial"/>
               </a:rPr>
               <a:t>Phase 1</a:t>
             </a:r>
@@ -32262,7 +34107,7 @@
       </p:sp>
       <p:sp>
         <p:nvSpPr>
-          <p:cNvPr id="9" name="slot.phase.1.body"/>
+          <p:cNvPr id="11" name="slot.phase.1.body"/>
           <p:cNvSpPr txBox="1"/>
           <p:nvPr/>
         </p:nvSpPr>
@@ -32297,7 +34142,7 @@
       </p:sp>
       <p:sp>
         <p:nvSpPr>
-          <p:cNvPr id="10" name="decor"/>
+          <p:cNvPr id="12" name="decor"/>
           <p:cNvSpPr/>
           <p:nvPr/>
         </p:nvSpPr>
@@ -32340,7 +34185,7 @@
                 <a:solidFill>
                   <a:schemeClr val="lt1"/>
                 </a:solidFill>
-                <a:latin typeface="Futura Medium"/>
+                <a:latin typeface="Arial"/>
               </a:rPr>
               <a:t>2</a:t>
             </a:r>
@@ -32349,7 +34194,7 @@
       </p:sp>
       <p:sp>
         <p:nvSpPr>
-          <p:cNvPr id="11" name="slot.phase.2.caption"/>
+          <p:cNvPr id="13" name="slot.phase.2.caption"/>
           <p:cNvSpPr txBox="1"/>
           <p:nvPr/>
         </p:nvSpPr>
@@ -32375,7 +34220,7 @@
                 <a:solidFill>
                   <a:schemeClr val="accent4"/>
                 </a:solidFill>
-                <a:latin typeface="Futura Medium"/>
+                <a:latin typeface="Arial"/>
               </a:rPr>
               <a:t>Q1 2026</a:t>
             </a:r>
@@ -32384,7 +34229,7 @@
       </p:sp>
       <p:sp>
         <p:nvSpPr>
-          <p:cNvPr id="12" name="slot.phase.2.title"/>
+          <p:cNvPr id="14" name="slot.phase.2.title"/>
           <p:cNvSpPr/>
           <p:nvPr/>
         </p:nvSpPr>
@@ -32427,7 +34272,7 @@
                 <a:solidFill>
                   <a:schemeClr val="accent1"/>
                 </a:solidFill>
-                <a:latin typeface="Futura Medium"/>
+                <a:latin typeface="Arial"/>
               </a:rPr>
               <a:t>Phase 2</a:t>
             </a:r>
@@ -32436,7 +34281,7 @@
       </p:sp>
       <p:sp>
         <p:nvSpPr>
-          <p:cNvPr id="13" name="slot.phase.2.body"/>
+          <p:cNvPr id="15" name="slot.phase.2.body"/>
           <p:cNvSpPr txBox="1"/>
           <p:nvPr/>
         </p:nvSpPr>
@@ -32471,7 +34316,7 @@
       </p:sp>
       <p:sp>
         <p:nvSpPr>
-          <p:cNvPr id="14" name="decor"/>
+          <p:cNvPr id="16" name="decor"/>
           <p:cNvSpPr/>
           <p:nvPr/>
         </p:nvSpPr>
@@ -32514,7 +34359,7 @@
                 <a:solidFill>
                   <a:schemeClr val="lt1"/>
                 </a:solidFill>
-                <a:latin typeface="Futura Medium"/>
+                <a:latin typeface="Arial"/>
               </a:rPr>
               <a:t>3</a:t>
             </a:r>
@@ -32523,7 +34368,7 @@
       </p:sp>
       <p:sp>
         <p:nvSpPr>
-          <p:cNvPr id="15" name="slot.phase.3.caption"/>
+          <p:cNvPr id="17" name="slot.phase.3.caption"/>
           <p:cNvSpPr txBox="1"/>
           <p:nvPr/>
         </p:nvSpPr>
@@ -32549,7 +34394,7 @@
                 <a:solidFill>
                   <a:schemeClr val="accent4"/>
                 </a:solidFill>
-                <a:latin typeface="Futura Medium"/>
+                <a:latin typeface="Arial"/>
               </a:rPr>
               <a:t>Q1 2026</a:t>
             </a:r>
@@ -32558,7 +34403,7 @@
       </p:sp>
       <p:sp>
         <p:nvSpPr>
-          <p:cNvPr id="16" name="slot.phase.3.title"/>
+          <p:cNvPr id="18" name="slot.phase.3.title"/>
           <p:cNvSpPr/>
           <p:nvPr/>
         </p:nvSpPr>
@@ -32601,7 +34446,7 @@
                 <a:solidFill>
                   <a:schemeClr val="accent1"/>
                 </a:solidFill>
-                <a:latin typeface="Futura Medium"/>
+                <a:latin typeface="Arial"/>
               </a:rPr>
               <a:t>Phase 3</a:t>
             </a:r>
@@ -32610,7 +34455,7 @@
       </p:sp>
       <p:sp>
         <p:nvSpPr>
-          <p:cNvPr id="17" name="slot.phase.3.body"/>
+          <p:cNvPr id="19" name="slot.phase.3.body"/>
           <p:cNvSpPr txBox="1"/>
           <p:nvPr/>
         </p:nvSpPr>
@@ -32645,7 +34490,7 @@
       </p:sp>
       <p:sp>
         <p:nvSpPr>
-          <p:cNvPr id="18" name="decor"/>
+          <p:cNvPr id="20" name="decor"/>
           <p:cNvSpPr/>
           <p:nvPr/>
         </p:nvSpPr>
@@ -32688,7 +34533,7 @@
                 <a:solidFill>
                   <a:schemeClr val="lt1"/>
                 </a:solidFill>
-                <a:latin typeface="Futura Medium"/>
+                <a:latin typeface="Arial"/>
               </a:rPr>
               <a:t>4</a:t>
             </a:r>
@@ -32697,7 +34542,7 @@
       </p:sp>
       <p:sp>
         <p:nvSpPr>
-          <p:cNvPr id="19" name="slot.phase.4.caption"/>
+          <p:cNvPr id="21" name="slot.phase.4.caption"/>
           <p:cNvSpPr txBox="1"/>
           <p:nvPr/>
         </p:nvSpPr>
@@ -32723,7 +34568,7 @@
                 <a:solidFill>
                   <a:schemeClr val="accent4"/>
                 </a:solidFill>
-                <a:latin typeface="Futura Medium"/>
+                <a:latin typeface="Arial"/>
               </a:rPr>
               <a:t>Q1 2026</a:t>
             </a:r>
@@ -32732,7 +34577,7 @@
       </p:sp>
       <p:sp>
         <p:nvSpPr>
-          <p:cNvPr id="20" name="slot.phase.4.title"/>
+          <p:cNvPr id="22" name="slot.phase.4.title"/>
           <p:cNvSpPr/>
           <p:nvPr/>
         </p:nvSpPr>
@@ -32775,7 +34620,7 @@
                 <a:solidFill>
                   <a:schemeClr val="accent1"/>
                 </a:solidFill>
-                <a:latin typeface="Futura Medium"/>
+                <a:latin typeface="Arial"/>
               </a:rPr>
               <a:t>Phase 4</a:t>
             </a:r>
@@ -32784,7 +34629,7 @@
       </p:sp>
       <p:sp>
         <p:nvSpPr>
-          <p:cNvPr id="21" name="slot.phase.4.body"/>
+          <p:cNvPr id="23" name="slot.phase.4.body"/>
           <p:cNvSpPr txBox="1"/>
           <p:nvPr/>
         </p:nvSpPr>
@@ -32891,7 +34736,130 @@
       </p:sp>
       <p:sp>
         <p:nvSpPr>
-          <p:cNvPr id="4" name="slot.title"/>
+          <p:cNvPr id="4" name="decor">
+            <a:extLst>
+              <a:ext uri="{FF2B5EF4-FFF2-40B4-BE49-F238E27FC236}">
+                <a16:creationId xmlns:a16="http://schemas.microsoft.com/office/drawing/2014/main" id="{9BCA9FA9-DC4A-F7F9-6F98-04EFCF05B790}"/>
+              </a:ext>
+            </a:extLst>
+          </p:cNvPr>
+          <p:cNvSpPr/>
+          <p:nvPr userDrawn="1"/>
+        </p:nvSpPr>
+        <p:spPr>
+          <a:xfrm>
+            <a:off x="-64731" y="246322"/>
+            <a:ext cx="512150" cy="423265"/>
+          </a:xfrm>
+          <a:prstGeom prst="pie">
+            <a:avLst>
+              <a:gd name="adj1" fmla="val 16190032"/>
+              <a:gd name="adj2" fmla="val 5400005"/>
+            </a:avLst>
+          </a:prstGeom>
+          <a:solidFill>
+            <a:schemeClr val="tx2"/>
+          </a:solidFill>
+          <a:ln>
+            <a:solidFill>
+              <a:schemeClr val="tx2"/>
+            </a:solidFill>
+          </a:ln>
+        </p:spPr>
+        <p:style>
+          <a:lnRef idx="2">
+            <a:schemeClr val="accent1">
+              <a:shade val="50000"/>
+            </a:schemeClr>
+          </a:lnRef>
+          <a:fillRef idx="1">
+            <a:schemeClr val="accent1"/>
+          </a:fillRef>
+          <a:effectRef idx="0">
+            <a:schemeClr val="accent1"/>
+          </a:effectRef>
+          <a:fontRef idx="minor">
+            <a:schemeClr val="lt1"/>
+          </a:fontRef>
+        </p:style>
+        <p:txBody>
+          <a:bodyPr lIns="36000" tIns="36000" rIns="36000" bIns="36000" rtlCol="0" anchor="ctr"/>
+          <a:lstStyle/>
+          <a:p>
+            <a:pPr algn="l" rtl="0"/>
+            <a:endParaRPr lang="en-US" sz="1200" b="1">
+              <a:solidFill>
+                <a:schemeClr val="bg1"/>
+              </a:solidFill>
+              <a:latin typeface="Arial" panose="020B0604020202020204" pitchFamily="34" charset="0"/>
+              <a:cs typeface="Arial" panose="020B0604020202020204" pitchFamily="34" charset="0"/>
+            </a:endParaRPr>
+          </a:p>
+        </p:txBody>
+      </p:sp>
+      <p:sp>
+        <p:nvSpPr>
+          <p:cNvPr id="5" name="decor">
+            <a:extLst>
+              <a:ext uri="{FF2B5EF4-FFF2-40B4-BE49-F238E27FC236}">
+                <a16:creationId xmlns:a16="http://schemas.microsoft.com/office/drawing/2014/main" id="{5D3B6E37-9E51-E62C-A843-852BEEBE5F2B}"/>
+              </a:ext>
+            </a:extLst>
+          </p:cNvPr>
+          <p:cNvSpPr/>
+          <p:nvPr userDrawn="1"/>
+        </p:nvSpPr>
+        <p:spPr>
+          <a:xfrm>
+            <a:off x="0" y="247761"/>
+            <a:ext cx="191344" cy="423265"/>
+          </a:xfrm>
+          <a:prstGeom prst="rect">
+            <a:avLst/>
+          </a:prstGeom>
+          <a:solidFill>
+            <a:schemeClr val="tx2"/>
+          </a:solidFill>
+          <a:ln>
+            <a:solidFill>
+              <a:schemeClr val="tx2"/>
+            </a:solidFill>
+          </a:ln>
+        </p:spPr>
+        <p:style>
+          <a:lnRef idx="2">
+            <a:schemeClr val="accent1">
+              <a:shade val="50000"/>
+            </a:schemeClr>
+          </a:lnRef>
+          <a:fillRef idx="1">
+            <a:schemeClr val="accent1"/>
+          </a:fillRef>
+          <a:effectRef idx="0">
+            <a:schemeClr val="accent1"/>
+          </a:effectRef>
+          <a:fontRef idx="minor">
+            <a:schemeClr val="lt1"/>
+          </a:fontRef>
+        </p:style>
+        <p:txBody>
+          <a:bodyPr lIns="36000" tIns="36000" rIns="36000" bIns="36000" rtlCol="0" anchor="ctr"/>
+          <a:lstStyle/>
+          <a:p>
+            <a:pPr algn="l" rtl="0"/>
+            <a:endParaRPr lang="en-US" sz="1200" b="1">
+              <a:solidFill>
+                <a:schemeClr val="bg1"/>
+              </a:solidFill>
+              <a:latin typeface="Arial" panose="020B0604020202020204" pitchFamily="34" charset="0"/>
+              <a:cs typeface="Arial" panose="020B0604020202020204" pitchFamily="34" charset="0"/>
+            </a:endParaRPr>
+          </a:p>
+        </p:txBody>
+      </p:sp>
+      <p:sp>
+        <p:nvSpPr>
+          <p:cNvPr id="6" name="slot.title"/>
           <p:cNvSpPr txBox="1"/>
           <p:nvPr/>
         </p:nvSpPr>
@@ -32915,7 +34883,7 @@
             <a:r>
               <a:rPr sz="2200" b="1">
                 <a:solidFill>
-                  <a:schemeClr val="dk1"/>
+                  <a:schemeClr val="accent2"/>
                 </a:solidFill>
                 <a:latin typeface="Futura Medium"/>
               </a:rPr>
@@ -32926,7 +34894,7 @@
       </p:sp>
       <p:sp>
         <p:nvSpPr>
-          <p:cNvPr id="5" name="decor"/>
+          <p:cNvPr id="7" name="decor"/>
           <p:cNvSpPr/>
           <p:nvPr/>
         </p:nvSpPr>
@@ -32969,7 +34937,7 @@
                 <a:solidFill>
                   <a:schemeClr val="lt1"/>
                 </a:solidFill>
-                <a:latin typeface="Futura Medium"/>
+                <a:latin typeface="Arial"/>
               </a:rPr>
               <a:t/>
             </a:r>
@@ -32978,7 +34946,7 @@
       </p:sp>
       <p:sp>
         <p:nvSpPr>
-          <p:cNvPr id="6" name="decor"/>
+          <p:cNvPr id="8" name="decor"/>
           <p:cNvSpPr/>
           <p:nvPr/>
         </p:nvSpPr>
@@ -33021,7 +34989,7 @@
                 <a:solidFill>
                   <a:schemeClr val="lt1"/>
                 </a:solidFill>
-                <a:latin typeface="Futura Medium"/>
+                <a:latin typeface="Arial"/>
               </a:rPr>
               <a:t>1</a:t>
             </a:r>
@@ -33030,7 +34998,7 @@
       </p:sp>
       <p:sp>
         <p:nvSpPr>
-          <p:cNvPr id="7" name="slot.phase.1.caption"/>
+          <p:cNvPr id="9" name="slot.phase.1.caption"/>
           <p:cNvSpPr txBox="1"/>
           <p:nvPr/>
         </p:nvSpPr>
@@ -33056,7 +35024,7 @@
                 <a:solidFill>
                   <a:schemeClr val="accent4"/>
                 </a:solidFill>
-                <a:latin typeface="Futura Medium"/>
+                <a:latin typeface="Arial"/>
               </a:rPr>
               <a:t>Q1 2026</a:t>
             </a:r>
@@ -33065,7 +35033,7 @@
       </p:sp>
       <p:sp>
         <p:nvSpPr>
-          <p:cNvPr id="8" name="slot.phase.1.title"/>
+          <p:cNvPr id="10" name="slot.phase.1.title"/>
           <p:cNvSpPr/>
           <p:nvPr/>
         </p:nvSpPr>
@@ -33108,7 +35076,7 @@
                 <a:solidFill>
                   <a:schemeClr val="accent1"/>
                 </a:solidFill>
-                <a:latin typeface="Futura Medium"/>
+                <a:latin typeface="Arial"/>
               </a:rPr>
               <a:t>Phase 1</a:t>
             </a:r>
@@ -33117,7 +35085,7 @@
       </p:sp>
       <p:sp>
         <p:nvSpPr>
-          <p:cNvPr id="9" name="slot.phase.1.body"/>
+          <p:cNvPr id="11" name="slot.phase.1.body"/>
           <p:cNvSpPr txBox="1"/>
           <p:nvPr/>
         </p:nvSpPr>
@@ -33152,7 +35120,7 @@
       </p:sp>
       <p:sp>
         <p:nvSpPr>
-          <p:cNvPr id="10" name="decor"/>
+          <p:cNvPr id="12" name="decor"/>
           <p:cNvSpPr/>
           <p:nvPr/>
         </p:nvSpPr>
@@ -33195,7 +35163,7 @@
                 <a:solidFill>
                   <a:schemeClr val="lt1"/>
                 </a:solidFill>
-                <a:latin typeface="Futura Medium"/>
+                <a:latin typeface="Arial"/>
               </a:rPr>
               <a:t>2</a:t>
             </a:r>
@@ -33204,7 +35172,7 @@
       </p:sp>
       <p:sp>
         <p:nvSpPr>
-          <p:cNvPr id="11" name="slot.phase.2.caption"/>
+          <p:cNvPr id="13" name="slot.phase.2.caption"/>
           <p:cNvSpPr txBox="1"/>
           <p:nvPr/>
         </p:nvSpPr>
@@ -33230,7 +35198,7 @@
                 <a:solidFill>
                   <a:schemeClr val="accent4"/>
                 </a:solidFill>
-                <a:latin typeface="Futura Medium"/>
+                <a:latin typeface="Arial"/>
               </a:rPr>
               <a:t>Q1 2026</a:t>
             </a:r>
@@ -33239,7 +35207,7 @@
       </p:sp>
       <p:sp>
         <p:nvSpPr>
-          <p:cNvPr id="12" name="slot.phase.2.title"/>
+          <p:cNvPr id="14" name="slot.phase.2.title"/>
           <p:cNvSpPr/>
           <p:nvPr/>
         </p:nvSpPr>
@@ -33282,7 +35250,7 @@
                 <a:solidFill>
                   <a:schemeClr val="accent1"/>
                 </a:solidFill>
-                <a:latin typeface="Futura Medium"/>
+                <a:latin typeface="Arial"/>
               </a:rPr>
               <a:t>Phase 2</a:t>
             </a:r>
@@ -33291,7 +35259,7 @@
       </p:sp>
       <p:sp>
         <p:nvSpPr>
-          <p:cNvPr id="13" name="slot.phase.2.body"/>
+          <p:cNvPr id="15" name="slot.phase.2.body"/>
           <p:cNvSpPr txBox="1"/>
           <p:nvPr/>
         </p:nvSpPr>
@@ -33326,7 +35294,7 @@
       </p:sp>
       <p:sp>
         <p:nvSpPr>
-          <p:cNvPr id="14" name="decor"/>
+          <p:cNvPr id="16" name="decor"/>
           <p:cNvSpPr/>
           <p:nvPr/>
         </p:nvSpPr>
@@ -33369,7 +35337,7 @@
                 <a:solidFill>
                   <a:schemeClr val="lt1"/>
                 </a:solidFill>
-                <a:latin typeface="Futura Medium"/>
+                <a:latin typeface="Arial"/>
               </a:rPr>
               <a:t>3</a:t>
             </a:r>
@@ -33378,7 +35346,7 @@
       </p:sp>
       <p:sp>
         <p:nvSpPr>
-          <p:cNvPr id="15" name="slot.phase.3.caption"/>
+          <p:cNvPr id="17" name="slot.phase.3.caption"/>
           <p:cNvSpPr txBox="1"/>
           <p:nvPr/>
         </p:nvSpPr>
@@ -33404,7 +35372,7 @@
                 <a:solidFill>
                   <a:schemeClr val="accent4"/>
                 </a:solidFill>
-                <a:latin typeface="Futura Medium"/>
+                <a:latin typeface="Arial"/>
               </a:rPr>
               <a:t>Q1 2026</a:t>
             </a:r>
@@ -33413,7 +35381,7 @@
       </p:sp>
       <p:sp>
         <p:nvSpPr>
-          <p:cNvPr id="16" name="slot.phase.3.title"/>
+          <p:cNvPr id="18" name="slot.phase.3.title"/>
           <p:cNvSpPr/>
           <p:nvPr/>
         </p:nvSpPr>
@@ -33456,7 +35424,7 @@
                 <a:solidFill>
                   <a:schemeClr val="accent1"/>
                 </a:solidFill>
-                <a:latin typeface="Futura Medium"/>
+                <a:latin typeface="Arial"/>
               </a:rPr>
               <a:t>Phase 3</a:t>
             </a:r>
@@ -33465,7 +35433,7 @@
       </p:sp>
       <p:sp>
         <p:nvSpPr>
-          <p:cNvPr id="17" name="slot.phase.3.body"/>
+          <p:cNvPr id="19" name="slot.phase.3.body"/>
           <p:cNvSpPr txBox="1"/>
           <p:nvPr/>
         </p:nvSpPr>
@@ -33500,7 +35468,7 @@
       </p:sp>
       <p:sp>
         <p:nvSpPr>
-          <p:cNvPr id="18" name="decor"/>
+          <p:cNvPr id="20" name="decor"/>
           <p:cNvSpPr/>
           <p:nvPr/>
         </p:nvSpPr>
@@ -33543,7 +35511,7 @@
                 <a:solidFill>
                   <a:schemeClr val="lt1"/>
                 </a:solidFill>
-                <a:latin typeface="Futura Medium"/>
+                <a:latin typeface="Arial"/>
               </a:rPr>
               <a:t>4</a:t>
             </a:r>
@@ -33552,7 +35520,7 @@
       </p:sp>
       <p:sp>
         <p:nvSpPr>
-          <p:cNvPr id="19" name="slot.phase.4.caption"/>
+          <p:cNvPr id="21" name="slot.phase.4.caption"/>
           <p:cNvSpPr txBox="1"/>
           <p:nvPr/>
         </p:nvSpPr>
@@ -33578,7 +35546,7 @@
                 <a:solidFill>
                   <a:schemeClr val="accent4"/>
                 </a:solidFill>
-                <a:latin typeface="Futura Medium"/>
+                <a:latin typeface="Arial"/>
               </a:rPr>
               <a:t>Q1 2026</a:t>
             </a:r>
@@ -33587,7 +35555,7 @@
       </p:sp>
       <p:sp>
         <p:nvSpPr>
-          <p:cNvPr id="20" name="slot.phase.4.title"/>
+          <p:cNvPr id="22" name="slot.phase.4.title"/>
           <p:cNvSpPr/>
           <p:nvPr/>
         </p:nvSpPr>
@@ -33630,7 +35598,7 @@
                 <a:solidFill>
                   <a:schemeClr val="accent1"/>
                 </a:solidFill>
-                <a:latin typeface="Futura Medium"/>
+                <a:latin typeface="Arial"/>
               </a:rPr>
               <a:t>Phase 4</a:t>
             </a:r>
@@ -33639,7 +35607,7 @@
       </p:sp>
       <p:sp>
         <p:nvSpPr>
-          <p:cNvPr id="21" name="slot.phase.4.body"/>
+          <p:cNvPr id="23" name="slot.phase.4.body"/>
           <p:cNvSpPr txBox="1"/>
           <p:nvPr/>
         </p:nvSpPr>
@@ -33674,7 +35642,7 @@
       </p:sp>
       <p:sp>
         <p:nvSpPr>
-          <p:cNvPr id="22" name="decor"/>
+          <p:cNvPr id="24" name="decor"/>
           <p:cNvSpPr/>
           <p:nvPr/>
         </p:nvSpPr>
@@ -33717,7 +35685,7 @@
                 <a:solidFill>
                   <a:schemeClr val="lt1"/>
                 </a:solidFill>
-                <a:latin typeface="Futura Medium"/>
+                <a:latin typeface="Arial"/>
               </a:rPr>
               <a:t>5</a:t>
             </a:r>
@@ -33726,7 +35694,7 @@
       </p:sp>
       <p:sp>
         <p:nvSpPr>
-          <p:cNvPr id="23" name="slot.phase.5.caption"/>
+          <p:cNvPr id="25" name="slot.phase.5.caption"/>
           <p:cNvSpPr txBox="1"/>
           <p:nvPr/>
         </p:nvSpPr>
@@ -33752,7 +35720,7 @@
                 <a:solidFill>
                   <a:schemeClr val="accent4"/>
                 </a:solidFill>
-                <a:latin typeface="Futura Medium"/>
+                <a:latin typeface="Arial"/>
               </a:rPr>
               <a:t>Q1 2026</a:t>
             </a:r>
@@ -33761,7 +35729,7 @@
       </p:sp>
       <p:sp>
         <p:nvSpPr>
-          <p:cNvPr id="24" name="slot.phase.5.title"/>
+          <p:cNvPr id="26" name="slot.phase.5.title"/>
           <p:cNvSpPr/>
           <p:nvPr/>
         </p:nvSpPr>
@@ -33804,7 +35772,7 @@
                 <a:solidFill>
                   <a:schemeClr val="accent1"/>
                 </a:solidFill>
-                <a:latin typeface="Futura Medium"/>
+                <a:latin typeface="Arial"/>
               </a:rPr>
               <a:t>Phase 5</a:t>
             </a:r>
@@ -33813,7 +35781,7 @@
       </p:sp>
       <p:sp>
         <p:nvSpPr>
-          <p:cNvPr id="25" name="slot.phase.5.body"/>
+          <p:cNvPr id="27" name="slot.phase.5.body"/>
           <p:cNvSpPr txBox="1"/>
           <p:nvPr/>
         </p:nvSpPr>
@@ -33920,7 +35888,130 @@
       </p:sp>
       <p:sp>
         <p:nvSpPr>
-          <p:cNvPr id="4" name="slot.title"/>
+          <p:cNvPr id="4" name="decor">
+            <a:extLst>
+              <a:ext uri="{FF2B5EF4-FFF2-40B4-BE49-F238E27FC236}">
+                <a16:creationId xmlns:a16="http://schemas.microsoft.com/office/drawing/2014/main" id="{9BCA9FA9-DC4A-F7F9-6F98-04EFCF05B790}"/>
+              </a:ext>
+            </a:extLst>
+          </p:cNvPr>
+          <p:cNvSpPr/>
+          <p:nvPr userDrawn="1"/>
+        </p:nvSpPr>
+        <p:spPr>
+          <a:xfrm>
+            <a:off x="-64731" y="246322"/>
+            <a:ext cx="512150" cy="423265"/>
+          </a:xfrm>
+          <a:prstGeom prst="pie">
+            <a:avLst>
+              <a:gd name="adj1" fmla="val 16190032"/>
+              <a:gd name="adj2" fmla="val 5400005"/>
+            </a:avLst>
+          </a:prstGeom>
+          <a:solidFill>
+            <a:schemeClr val="tx2"/>
+          </a:solidFill>
+          <a:ln>
+            <a:solidFill>
+              <a:schemeClr val="tx2"/>
+            </a:solidFill>
+          </a:ln>
+        </p:spPr>
+        <p:style>
+          <a:lnRef idx="2">
+            <a:schemeClr val="accent1">
+              <a:shade val="50000"/>
+            </a:schemeClr>
+          </a:lnRef>
+          <a:fillRef idx="1">
+            <a:schemeClr val="accent1"/>
+          </a:fillRef>
+          <a:effectRef idx="0">
+            <a:schemeClr val="accent1"/>
+          </a:effectRef>
+          <a:fontRef idx="minor">
+            <a:schemeClr val="lt1"/>
+          </a:fontRef>
+        </p:style>
+        <p:txBody>
+          <a:bodyPr lIns="36000" tIns="36000" rIns="36000" bIns="36000" rtlCol="0" anchor="ctr"/>
+          <a:lstStyle/>
+          <a:p>
+            <a:pPr algn="l" rtl="0"/>
+            <a:endParaRPr lang="en-US" sz="1200" b="1">
+              <a:solidFill>
+                <a:schemeClr val="bg1"/>
+              </a:solidFill>
+              <a:latin typeface="Arial" panose="020B0604020202020204" pitchFamily="34" charset="0"/>
+              <a:cs typeface="Arial" panose="020B0604020202020204" pitchFamily="34" charset="0"/>
+            </a:endParaRPr>
+          </a:p>
+        </p:txBody>
+      </p:sp>
+      <p:sp>
+        <p:nvSpPr>
+          <p:cNvPr id="5" name="decor">
+            <a:extLst>
+              <a:ext uri="{FF2B5EF4-FFF2-40B4-BE49-F238E27FC236}">
+                <a16:creationId xmlns:a16="http://schemas.microsoft.com/office/drawing/2014/main" id="{5D3B6E37-9E51-E62C-A843-852BEEBE5F2B}"/>
+              </a:ext>
+            </a:extLst>
+          </p:cNvPr>
+          <p:cNvSpPr/>
+          <p:nvPr userDrawn="1"/>
+        </p:nvSpPr>
+        <p:spPr>
+          <a:xfrm>
+            <a:off x="0" y="247761"/>
+            <a:ext cx="191344" cy="423265"/>
+          </a:xfrm>
+          <a:prstGeom prst="rect">
+            <a:avLst/>
+          </a:prstGeom>
+          <a:solidFill>
+            <a:schemeClr val="tx2"/>
+          </a:solidFill>
+          <a:ln>
+            <a:solidFill>
+              <a:schemeClr val="tx2"/>
+            </a:solidFill>
+          </a:ln>
+        </p:spPr>
+        <p:style>
+          <a:lnRef idx="2">
+            <a:schemeClr val="accent1">
+              <a:shade val="50000"/>
+            </a:schemeClr>
+          </a:lnRef>
+          <a:fillRef idx="1">
+            <a:schemeClr val="accent1"/>
+          </a:fillRef>
+          <a:effectRef idx="0">
+            <a:schemeClr val="accent1"/>
+          </a:effectRef>
+          <a:fontRef idx="minor">
+            <a:schemeClr val="lt1"/>
+          </a:fontRef>
+        </p:style>
+        <p:txBody>
+          <a:bodyPr lIns="36000" tIns="36000" rIns="36000" bIns="36000" rtlCol="0" anchor="ctr"/>
+          <a:lstStyle/>
+          <a:p>
+            <a:pPr algn="l" rtl="0"/>
+            <a:endParaRPr lang="en-US" sz="1200" b="1">
+              <a:solidFill>
+                <a:schemeClr val="bg1"/>
+              </a:solidFill>
+              <a:latin typeface="Arial" panose="020B0604020202020204" pitchFamily="34" charset="0"/>
+              <a:cs typeface="Arial" panose="020B0604020202020204" pitchFamily="34" charset="0"/>
+            </a:endParaRPr>
+          </a:p>
+        </p:txBody>
+      </p:sp>
+      <p:sp>
+        <p:nvSpPr>
+          <p:cNvPr id="6" name="slot.title"/>
           <p:cNvSpPr txBox="1"/>
           <p:nvPr/>
         </p:nvSpPr>
@@ -33944,7 +36035,7 @@
             <a:r>
               <a:rPr sz="2200" b="1">
                 <a:solidFill>
-                  <a:schemeClr val="dk1"/>
+                  <a:schemeClr val="accent2"/>
                 </a:solidFill>
                 <a:latin typeface="Futura Medium"/>
               </a:rPr>
@@ -33955,7 +36046,7 @@
       </p:sp>
       <p:sp>
         <p:nvSpPr>
-          <p:cNvPr id="5" name="slot.value-chain.source"/>
+          <p:cNvPr id="7" name="slot.value-chain.source"/>
           <p:cNvSpPr/>
           <p:nvPr/>
         </p:nvSpPr>
@@ -33998,7 +36089,7 @@
                 <a:solidFill>
                   <a:schemeClr val="lt1"/>
                 </a:solidFill>
-                <a:latin typeface="Futura Medium"/>
+                <a:latin typeface="Arial"/>
               </a:rPr>
               <a:t>Source</a:t>
             </a:r>
@@ -34007,7 +36098,7 @@
       </p:sp>
       <p:sp>
         <p:nvSpPr>
-          <p:cNvPr id="6" name="slot.value-chain.stage.1.title"/>
+          <p:cNvPr id="8" name="slot.value-chain.stage.1.title"/>
           <p:cNvSpPr/>
           <p:nvPr/>
         </p:nvSpPr>
@@ -34050,7 +36141,7 @@
                 <a:solidFill>
                   <a:schemeClr val="lt1"/>
                 </a:solidFill>
-                <a:latin typeface="Futura Medium"/>
+                <a:latin typeface="Arial"/>
               </a:rPr>
               <a:t>Stage 1</a:t>
             </a:r>
@@ -34059,7 +36150,7 @@
       </p:sp>
       <p:sp>
         <p:nvSpPr>
-          <p:cNvPr id="7" name="slot.value-chain.stage.2.title"/>
+          <p:cNvPr id="9" name="slot.value-chain.stage.2.title"/>
           <p:cNvSpPr/>
           <p:nvPr/>
         </p:nvSpPr>
@@ -34102,7 +36193,7 @@
                 <a:solidFill>
                   <a:schemeClr val="lt1"/>
                 </a:solidFill>
-                <a:latin typeface="Futura Medium"/>
+                <a:latin typeface="Arial"/>
               </a:rPr>
               <a:t>Stage 2</a:t>
             </a:r>
@@ -34111,7 +36202,7 @@
       </p:sp>
       <p:sp>
         <p:nvSpPr>
-          <p:cNvPr id="8" name="slot.value-chain.stage.3.title"/>
+          <p:cNvPr id="10" name="slot.value-chain.stage.3.title"/>
           <p:cNvSpPr/>
           <p:nvPr/>
         </p:nvSpPr>
@@ -34154,7 +36245,7 @@
                 <a:solidFill>
                   <a:schemeClr val="lt1"/>
                 </a:solidFill>
-                <a:latin typeface="Futura Medium"/>
+                <a:latin typeface="Arial"/>
               </a:rPr>
               <a:t>Stage 3</a:t>
             </a:r>
@@ -34163,7 +36254,7 @@
       </p:sp>
       <p:sp>
         <p:nvSpPr>
-          <p:cNvPr id="9" name="slot.value-chain.stage.4.title"/>
+          <p:cNvPr id="11" name="slot.value-chain.stage.4.title"/>
           <p:cNvSpPr/>
           <p:nvPr/>
         </p:nvSpPr>
@@ -34206,7 +36297,7 @@
                 <a:solidFill>
                   <a:schemeClr val="lt1"/>
                 </a:solidFill>
-                <a:latin typeface="Futura Medium"/>
+                <a:latin typeface="Arial"/>
               </a:rPr>
               <a:t>Stage 4</a:t>
             </a:r>
@@ -34215,7 +36306,7 @@
       </p:sp>
       <p:sp>
         <p:nvSpPr>
-          <p:cNvPr id="10" name="slot.value-chain.stage.5.title"/>
+          <p:cNvPr id="12" name="slot.value-chain.stage.5.title"/>
           <p:cNvSpPr/>
           <p:nvPr/>
         </p:nvSpPr>
@@ -34258,7 +36349,7 @@
                 <a:solidFill>
                   <a:schemeClr val="lt1"/>
                 </a:solidFill>
-                <a:latin typeface="Futura Medium"/>
+                <a:latin typeface="Arial"/>
               </a:rPr>
               <a:t>Stage 5</a:t>
             </a:r>
@@ -34267,7 +36358,7 @@
       </p:sp>
       <p:sp>
         <p:nvSpPr>
-          <p:cNvPr id="11" name="slot.value-chain.customer"/>
+          <p:cNvPr id="13" name="slot.value-chain.customer"/>
           <p:cNvSpPr/>
           <p:nvPr/>
         </p:nvSpPr>
@@ -34310,7 +36401,7 @@
                 <a:solidFill>
                   <a:schemeClr val="lt1"/>
                 </a:solidFill>
-                <a:latin typeface="Futura Medium"/>
+                <a:latin typeface="Arial"/>
               </a:rPr>
               <a:t>Customer</a:t>
             </a:r>
@@ -34319,7 +36410,7 @@
       </p:sp>
       <p:sp>
         <p:nvSpPr>
-          <p:cNvPr id="12" name="slot.value-chain.body"/>
+          <p:cNvPr id="14" name="slot.value-chain.body"/>
           <p:cNvSpPr txBox="1"/>
           <p:nvPr/>
         </p:nvSpPr>
@@ -34426,7 +36517,130 @@
       </p:sp>
       <p:sp>
         <p:nvSpPr>
-          <p:cNvPr id="4" name="slot.title"/>
+          <p:cNvPr id="4" name="decor">
+            <a:extLst>
+              <a:ext uri="{FF2B5EF4-FFF2-40B4-BE49-F238E27FC236}">
+                <a16:creationId xmlns:a16="http://schemas.microsoft.com/office/drawing/2014/main" id="{9BCA9FA9-DC4A-F7F9-6F98-04EFCF05B790}"/>
+              </a:ext>
+            </a:extLst>
+          </p:cNvPr>
+          <p:cNvSpPr/>
+          <p:nvPr userDrawn="1"/>
+        </p:nvSpPr>
+        <p:spPr>
+          <a:xfrm>
+            <a:off x="-64731" y="246322"/>
+            <a:ext cx="512150" cy="423265"/>
+          </a:xfrm>
+          <a:prstGeom prst="pie">
+            <a:avLst>
+              <a:gd name="adj1" fmla="val 16190032"/>
+              <a:gd name="adj2" fmla="val 5400005"/>
+            </a:avLst>
+          </a:prstGeom>
+          <a:solidFill>
+            <a:schemeClr val="tx2"/>
+          </a:solidFill>
+          <a:ln>
+            <a:solidFill>
+              <a:schemeClr val="tx2"/>
+            </a:solidFill>
+          </a:ln>
+        </p:spPr>
+        <p:style>
+          <a:lnRef idx="2">
+            <a:schemeClr val="accent1">
+              <a:shade val="50000"/>
+            </a:schemeClr>
+          </a:lnRef>
+          <a:fillRef idx="1">
+            <a:schemeClr val="accent1"/>
+          </a:fillRef>
+          <a:effectRef idx="0">
+            <a:schemeClr val="accent1"/>
+          </a:effectRef>
+          <a:fontRef idx="minor">
+            <a:schemeClr val="lt1"/>
+          </a:fontRef>
+        </p:style>
+        <p:txBody>
+          <a:bodyPr lIns="36000" tIns="36000" rIns="36000" bIns="36000" rtlCol="0" anchor="ctr"/>
+          <a:lstStyle/>
+          <a:p>
+            <a:pPr algn="l" rtl="0"/>
+            <a:endParaRPr lang="en-US" sz="1200" b="1">
+              <a:solidFill>
+                <a:schemeClr val="bg1"/>
+              </a:solidFill>
+              <a:latin typeface="Arial" panose="020B0604020202020204" pitchFamily="34" charset="0"/>
+              <a:cs typeface="Arial" panose="020B0604020202020204" pitchFamily="34" charset="0"/>
+            </a:endParaRPr>
+          </a:p>
+        </p:txBody>
+      </p:sp>
+      <p:sp>
+        <p:nvSpPr>
+          <p:cNvPr id="5" name="decor">
+            <a:extLst>
+              <a:ext uri="{FF2B5EF4-FFF2-40B4-BE49-F238E27FC236}">
+                <a16:creationId xmlns:a16="http://schemas.microsoft.com/office/drawing/2014/main" id="{5D3B6E37-9E51-E62C-A843-852BEEBE5F2B}"/>
+              </a:ext>
+            </a:extLst>
+          </p:cNvPr>
+          <p:cNvSpPr/>
+          <p:nvPr userDrawn="1"/>
+        </p:nvSpPr>
+        <p:spPr>
+          <a:xfrm>
+            <a:off x="0" y="247761"/>
+            <a:ext cx="191344" cy="423265"/>
+          </a:xfrm>
+          <a:prstGeom prst="rect">
+            <a:avLst/>
+          </a:prstGeom>
+          <a:solidFill>
+            <a:schemeClr val="tx2"/>
+          </a:solidFill>
+          <a:ln>
+            <a:solidFill>
+              <a:schemeClr val="tx2"/>
+            </a:solidFill>
+          </a:ln>
+        </p:spPr>
+        <p:style>
+          <a:lnRef idx="2">
+            <a:schemeClr val="accent1">
+              <a:shade val="50000"/>
+            </a:schemeClr>
+          </a:lnRef>
+          <a:fillRef idx="1">
+            <a:schemeClr val="accent1"/>
+          </a:fillRef>
+          <a:effectRef idx="0">
+            <a:schemeClr val="accent1"/>
+          </a:effectRef>
+          <a:fontRef idx="minor">
+            <a:schemeClr val="lt1"/>
+          </a:fontRef>
+        </p:style>
+        <p:txBody>
+          <a:bodyPr lIns="36000" tIns="36000" rIns="36000" bIns="36000" rtlCol="0" anchor="ctr"/>
+          <a:lstStyle/>
+          <a:p>
+            <a:pPr algn="l" rtl="0"/>
+            <a:endParaRPr lang="en-US" sz="1200" b="1">
+              <a:solidFill>
+                <a:schemeClr val="bg1"/>
+              </a:solidFill>
+              <a:latin typeface="Arial" panose="020B0604020202020204" pitchFamily="34" charset="0"/>
+              <a:cs typeface="Arial" panose="020B0604020202020204" pitchFamily="34" charset="0"/>
+            </a:endParaRPr>
+          </a:p>
+        </p:txBody>
+      </p:sp>
+      <p:sp>
+        <p:nvSpPr>
+          <p:cNvPr id="6" name="slot.title"/>
           <p:cNvSpPr txBox="1"/>
           <p:nvPr/>
         </p:nvSpPr>
@@ -34450,7 +36664,7 @@
             <a:r>
               <a:rPr sz="2200" b="1">
                 <a:solidFill>
-                  <a:schemeClr val="dk1"/>
+                  <a:schemeClr val="accent2"/>
                 </a:solidFill>
                 <a:latin typeface="Futura Medium"/>
               </a:rPr>
@@ -34461,7 +36675,7 @@
       </p:sp>
       <p:sp>
         <p:nvSpPr>
-          <p:cNvPr id="5" name="decor"/>
+          <p:cNvPr id="7" name="decor"/>
           <p:cNvSpPr/>
           <p:nvPr/>
         </p:nvSpPr>
@@ -34504,7 +36718,7 @@
                 <a:solidFill>
                   <a:schemeClr val="accent1"/>
                 </a:solidFill>
-                <a:latin typeface="Futura Medium"/>
+                <a:latin typeface="Arial"/>
               </a:rPr>
               <a:t>H1 2026</a:t>
             </a:r>
@@ -34513,7 +36727,7 @@
       </p:sp>
       <p:sp>
         <p:nvSpPr>
-          <p:cNvPr id="6" name="slot.gantt.lane.1.label"/>
+          <p:cNvPr id="8" name="slot.gantt.lane.1.label"/>
           <p:cNvSpPr/>
           <p:nvPr/>
         </p:nvSpPr>
@@ -34556,7 +36770,7 @@
                 <a:solidFill>
                   <a:schemeClr val="accent1"/>
                 </a:solidFill>
-                <a:latin typeface="Futura Medium"/>
+                <a:latin typeface="Arial"/>
               </a:rPr>
               <a:t>Workstream 1</a:t>
             </a:r>
@@ -34565,7 +36779,7 @@
       </p:sp>
       <p:sp>
         <p:nvSpPr>
-          <p:cNvPr id="7" name="slot.gantt.lane.1.body"/>
+          <p:cNvPr id="9" name="slot.gantt.lane.1.body"/>
           <p:cNvSpPr txBox="1"/>
           <p:nvPr/>
         </p:nvSpPr>
@@ -34600,7 +36814,7 @@
       </p:sp>
       <p:sp>
         <p:nvSpPr>
-          <p:cNvPr id="8" name="decor"/>
+          <p:cNvPr id="10" name="decor"/>
           <p:cNvSpPr/>
           <p:nvPr/>
         </p:nvSpPr>
@@ -34643,7 +36857,7 @@
                 <a:solidFill>
                   <a:schemeClr val="lt1"/>
                 </a:solidFill>
-                <a:latin typeface="Futura Medium"/>
+                <a:latin typeface="Arial"/>
               </a:rPr>
               <a:t/>
             </a:r>
@@ -34652,7 +36866,7 @@
       </p:sp>
       <p:sp>
         <p:nvSpPr>
-          <p:cNvPr id="9" name="slot.gantt.lane.2.label"/>
+          <p:cNvPr id="11" name="slot.gantt.lane.2.label"/>
           <p:cNvSpPr/>
           <p:nvPr/>
         </p:nvSpPr>
@@ -34695,7 +36909,7 @@
                 <a:solidFill>
                   <a:schemeClr val="accent1"/>
                 </a:solidFill>
-                <a:latin typeface="Futura Medium"/>
+                <a:latin typeface="Arial"/>
               </a:rPr>
               <a:t>Workstream 2</a:t>
             </a:r>
@@ -34704,7 +36918,7 @@
       </p:sp>
       <p:sp>
         <p:nvSpPr>
-          <p:cNvPr id="10" name="slot.gantt.lane.2.body"/>
+          <p:cNvPr id="12" name="slot.gantt.lane.2.body"/>
           <p:cNvSpPr txBox="1"/>
           <p:nvPr/>
         </p:nvSpPr>
@@ -34739,7 +36953,7 @@
       </p:sp>
       <p:sp>
         <p:nvSpPr>
-          <p:cNvPr id="11" name="decor"/>
+          <p:cNvPr id="13" name="decor"/>
           <p:cNvSpPr/>
           <p:nvPr/>
         </p:nvSpPr>
@@ -34782,7 +36996,7 @@
                 <a:solidFill>
                   <a:schemeClr val="lt1"/>
                 </a:solidFill>
-                <a:latin typeface="Futura Medium"/>
+                <a:latin typeface="Arial"/>
               </a:rPr>
               <a:t/>
             </a:r>
@@ -34791,7 +37005,7 @@
       </p:sp>
       <p:sp>
         <p:nvSpPr>
-          <p:cNvPr id="12" name="slot.gantt.lane.3.label"/>
+          <p:cNvPr id="14" name="slot.gantt.lane.3.label"/>
           <p:cNvSpPr/>
           <p:nvPr/>
         </p:nvSpPr>
@@ -34834,7 +37048,7 @@
                 <a:solidFill>
                   <a:schemeClr val="accent1"/>
                 </a:solidFill>
-                <a:latin typeface="Futura Medium"/>
+                <a:latin typeface="Arial"/>
               </a:rPr>
               <a:t>Workstream 3</a:t>
             </a:r>
@@ -34843,7 +37057,7 @@
       </p:sp>
       <p:sp>
         <p:nvSpPr>
-          <p:cNvPr id="13" name="slot.gantt.lane.3.body"/>
+          <p:cNvPr id="15" name="slot.gantt.lane.3.body"/>
           <p:cNvSpPr txBox="1"/>
           <p:nvPr/>
         </p:nvSpPr>
@@ -34878,7 +37092,7 @@
       </p:sp>
       <p:sp>
         <p:nvSpPr>
-          <p:cNvPr id="14" name="decor"/>
+          <p:cNvPr id="16" name="decor"/>
           <p:cNvSpPr/>
           <p:nvPr/>
         </p:nvSpPr>
@@ -34921,7 +37135,7 @@
                 <a:solidFill>
                   <a:schemeClr val="lt1"/>
                 </a:solidFill>
-                <a:latin typeface="Futura Medium"/>
+                <a:latin typeface="Arial"/>
               </a:rPr>
               <a:t/>
             </a:r>
@@ -34930,7 +37144,7 @@
       </p:sp>
       <p:sp>
         <p:nvSpPr>
-          <p:cNvPr id="15" name="slot.gantt.lane.4.label"/>
+          <p:cNvPr id="17" name="slot.gantt.lane.4.label"/>
           <p:cNvSpPr/>
           <p:nvPr/>
         </p:nvSpPr>
@@ -34973,7 +37187,7 @@
                 <a:solidFill>
                   <a:schemeClr val="accent1"/>
                 </a:solidFill>
-                <a:latin typeface="Futura Medium"/>
+                <a:latin typeface="Arial"/>
               </a:rPr>
               <a:t>Workstream 4</a:t>
             </a:r>
@@ -34982,7 +37196,7 @@
       </p:sp>
       <p:sp>
         <p:nvSpPr>
-          <p:cNvPr id="16" name="slot.gantt.lane.4.body"/>
+          <p:cNvPr id="18" name="slot.gantt.lane.4.body"/>
           <p:cNvSpPr txBox="1"/>
           <p:nvPr/>
         </p:nvSpPr>
@@ -35017,7 +37231,7 @@
       </p:sp>
       <p:sp>
         <p:nvSpPr>
-          <p:cNvPr id="17" name="decor"/>
+          <p:cNvPr id="19" name="decor"/>
           <p:cNvSpPr/>
           <p:nvPr/>
         </p:nvSpPr>
@@ -35060,7 +37274,7 @@
                 <a:solidFill>
                   <a:schemeClr val="lt1"/>
                 </a:solidFill>
-                <a:latin typeface="Futura Medium"/>
+                <a:latin typeface="Arial"/>
               </a:rPr>
               <a:t/>
             </a:r>
@@ -35141,7 +37355,130 @@
       </p:sp>
       <p:sp>
         <p:nvSpPr>
-          <p:cNvPr id="4" name="slot.title"/>
+          <p:cNvPr id="4" name="decor">
+            <a:extLst>
+              <a:ext uri="{FF2B5EF4-FFF2-40B4-BE49-F238E27FC236}">
+                <a16:creationId xmlns:a16="http://schemas.microsoft.com/office/drawing/2014/main" id="{9BCA9FA9-DC4A-F7F9-6F98-04EFCF05B790}"/>
+              </a:ext>
+            </a:extLst>
+          </p:cNvPr>
+          <p:cNvSpPr/>
+          <p:nvPr userDrawn="1"/>
+        </p:nvSpPr>
+        <p:spPr>
+          <a:xfrm>
+            <a:off x="-64731" y="246322"/>
+            <a:ext cx="512150" cy="423265"/>
+          </a:xfrm>
+          <a:prstGeom prst="pie">
+            <a:avLst>
+              <a:gd name="adj1" fmla="val 16190032"/>
+              <a:gd name="adj2" fmla="val 5400005"/>
+            </a:avLst>
+          </a:prstGeom>
+          <a:solidFill>
+            <a:schemeClr val="tx2"/>
+          </a:solidFill>
+          <a:ln>
+            <a:solidFill>
+              <a:schemeClr val="tx2"/>
+            </a:solidFill>
+          </a:ln>
+        </p:spPr>
+        <p:style>
+          <a:lnRef idx="2">
+            <a:schemeClr val="accent1">
+              <a:shade val="50000"/>
+            </a:schemeClr>
+          </a:lnRef>
+          <a:fillRef idx="1">
+            <a:schemeClr val="accent1"/>
+          </a:fillRef>
+          <a:effectRef idx="0">
+            <a:schemeClr val="accent1"/>
+          </a:effectRef>
+          <a:fontRef idx="minor">
+            <a:schemeClr val="lt1"/>
+          </a:fontRef>
+        </p:style>
+        <p:txBody>
+          <a:bodyPr lIns="36000" tIns="36000" rIns="36000" bIns="36000" rtlCol="0" anchor="ctr"/>
+          <a:lstStyle/>
+          <a:p>
+            <a:pPr algn="l" rtl="0"/>
+            <a:endParaRPr lang="en-US" sz="1200" b="1">
+              <a:solidFill>
+                <a:schemeClr val="bg1"/>
+              </a:solidFill>
+              <a:latin typeface="Arial" panose="020B0604020202020204" pitchFamily="34" charset="0"/>
+              <a:cs typeface="Arial" panose="020B0604020202020204" pitchFamily="34" charset="0"/>
+            </a:endParaRPr>
+          </a:p>
+        </p:txBody>
+      </p:sp>
+      <p:sp>
+        <p:nvSpPr>
+          <p:cNvPr id="5" name="decor">
+            <a:extLst>
+              <a:ext uri="{FF2B5EF4-FFF2-40B4-BE49-F238E27FC236}">
+                <a16:creationId xmlns:a16="http://schemas.microsoft.com/office/drawing/2014/main" id="{5D3B6E37-9E51-E62C-A843-852BEEBE5F2B}"/>
+              </a:ext>
+            </a:extLst>
+          </p:cNvPr>
+          <p:cNvSpPr/>
+          <p:nvPr userDrawn="1"/>
+        </p:nvSpPr>
+        <p:spPr>
+          <a:xfrm>
+            <a:off x="0" y="247761"/>
+            <a:ext cx="191344" cy="423265"/>
+          </a:xfrm>
+          <a:prstGeom prst="rect">
+            <a:avLst/>
+          </a:prstGeom>
+          <a:solidFill>
+            <a:schemeClr val="tx2"/>
+          </a:solidFill>
+          <a:ln>
+            <a:solidFill>
+              <a:schemeClr val="tx2"/>
+            </a:solidFill>
+          </a:ln>
+        </p:spPr>
+        <p:style>
+          <a:lnRef idx="2">
+            <a:schemeClr val="accent1">
+              <a:shade val="50000"/>
+            </a:schemeClr>
+          </a:lnRef>
+          <a:fillRef idx="1">
+            <a:schemeClr val="accent1"/>
+          </a:fillRef>
+          <a:effectRef idx="0">
+            <a:schemeClr val="accent1"/>
+          </a:effectRef>
+          <a:fontRef idx="minor">
+            <a:schemeClr val="lt1"/>
+          </a:fontRef>
+        </p:style>
+        <p:txBody>
+          <a:bodyPr lIns="36000" tIns="36000" rIns="36000" bIns="36000" rtlCol="0" anchor="ctr"/>
+          <a:lstStyle/>
+          <a:p>
+            <a:pPr algn="l" rtl="0"/>
+            <a:endParaRPr lang="en-US" sz="1200" b="1">
+              <a:solidFill>
+                <a:schemeClr val="bg1"/>
+              </a:solidFill>
+              <a:latin typeface="Arial" panose="020B0604020202020204" pitchFamily="34" charset="0"/>
+              <a:cs typeface="Arial" panose="020B0604020202020204" pitchFamily="34" charset="0"/>
+            </a:endParaRPr>
+          </a:p>
+        </p:txBody>
+      </p:sp>
+      <p:sp>
+        <p:nvSpPr>
+          <p:cNvPr id="6" name="slot.title"/>
           <p:cNvSpPr txBox="1"/>
           <p:nvPr/>
         </p:nvSpPr>
@@ -35165,7 +37502,7 @@
             <a:r>
               <a:rPr sz="2200" b="1">
                 <a:solidFill>
-                  <a:schemeClr val="dk1"/>
+                  <a:schemeClr val="accent2"/>
                 </a:solidFill>
                 <a:latin typeface="Futura Medium"/>
               </a:rPr>
@@ -35176,7 +37513,7 @@
       </p:sp>
       <p:sp>
         <p:nvSpPr>
-          <p:cNvPr id="5" name="decor"/>
+          <p:cNvPr id="7" name="decor"/>
           <p:cNvSpPr/>
           <p:nvPr/>
         </p:nvSpPr>
@@ -35219,7 +37556,7 @@
                 <a:solidFill>
                   <a:schemeClr val="lt1"/>
                 </a:solidFill>
-                <a:latin typeface="Futura Medium"/>
+                <a:latin typeface="Arial"/>
               </a:rPr>
               <a:t/>
             </a:r>
@@ -35228,7 +37565,7 @@
       </p:sp>
       <p:sp>
         <p:nvSpPr>
-          <p:cNvPr id="6" name="decor"/>
+          <p:cNvPr id="8" name="decor"/>
           <p:cNvSpPr/>
           <p:nvPr/>
         </p:nvSpPr>
@@ -35271,7 +37608,7 @@
                 <a:solidFill>
                   <a:schemeClr val="lt1"/>
                 </a:solidFill>
-                <a:latin typeface="Futura Medium"/>
+                <a:latin typeface="Arial"/>
               </a:rPr>
               <a:t/>
             </a:r>
@@ -35280,7 +37617,7 @@
       </p:sp>
       <p:sp>
         <p:nvSpPr>
-          <p:cNvPr id="7" name="slot.matrix.axis-y"/>
+          <p:cNvPr id="9" name="slot.matrix.axis-y"/>
           <p:cNvSpPr txBox="1"/>
           <p:nvPr/>
         </p:nvSpPr>
@@ -35306,7 +37643,7 @@
                 <a:solidFill>
                   <a:schemeClr val="accent6"/>
                 </a:solidFill>
-                <a:latin typeface="Futura Medium"/>
+                <a:latin typeface="Arial"/>
               </a:rPr>
               <a:t>Y axis</a:t>
             </a:r>
@@ -35315,7 +37652,7 @@
       </p:sp>
       <p:sp>
         <p:nvSpPr>
-          <p:cNvPr id="8" name="slot.matrix.axis-x"/>
+          <p:cNvPr id="10" name="slot.matrix.axis-x"/>
           <p:cNvSpPr txBox="1"/>
           <p:nvPr/>
         </p:nvSpPr>
@@ -35341,7 +37678,7 @@
                 <a:solidFill>
                   <a:schemeClr val="accent6"/>
                 </a:solidFill>
-                <a:latin typeface="Futura Medium"/>
+                <a:latin typeface="Arial"/>
               </a:rPr>
               <a:t>X axis</a:t>
             </a:r>
@@ -35350,7 +37687,7 @@
       </p:sp>
       <p:sp>
         <p:nvSpPr>
-          <p:cNvPr id="9" name="slot.matrix.quadrant.1.title"/>
+          <p:cNvPr id="11" name="slot.matrix.quadrant.1.title"/>
           <p:cNvSpPr/>
           <p:nvPr/>
         </p:nvSpPr>
@@ -35393,7 +37730,7 @@
                 <a:solidFill>
                   <a:schemeClr val="accent1"/>
                 </a:solidFill>
-                <a:latin typeface="Futura Medium"/>
+                <a:latin typeface="Arial"/>
               </a:rPr>
               <a:t>Quadrant 1</a:t>
             </a:r>
@@ -35402,7 +37739,7 @@
       </p:sp>
       <p:sp>
         <p:nvSpPr>
-          <p:cNvPr id="10" name="slot.matrix.quadrant.1.body"/>
+          <p:cNvPr id="12" name="slot.matrix.quadrant.1.body"/>
           <p:cNvSpPr txBox="1"/>
           <p:nvPr/>
         </p:nvSpPr>
@@ -35437,7 +37774,7 @@
       </p:sp>
       <p:sp>
         <p:nvSpPr>
-          <p:cNvPr id="11" name="slot.matrix.quadrant.2.title"/>
+          <p:cNvPr id="13" name="slot.matrix.quadrant.2.title"/>
           <p:cNvSpPr/>
           <p:nvPr/>
         </p:nvSpPr>
@@ -35480,7 +37817,7 @@
                 <a:solidFill>
                   <a:schemeClr val="accent1"/>
                 </a:solidFill>
-                <a:latin typeface="Futura Medium"/>
+                <a:latin typeface="Arial"/>
               </a:rPr>
               <a:t>Quadrant 2</a:t>
             </a:r>
@@ -35489,7 +37826,7 @@
       </p:sp>
       <p:sp>
         <p:nvSpPr>
-          <p:cNvPr id="12" name="slot.matrix.quadrant.2.body"/>
+          <p:cNvPr id="14" name="slot.matrix.quadrant.2.body"/>
           <p:cNvSpPr txBox="1"/>
           <p:nvPr/>
         </p:nvSpPr>
@@ -35524,7 +37861,7 @@
       </p:sp>
       <p:sp>
         <p:nvSpPr>
-          <p:cNvPr id="13" name="slot.matrix.quadrant.3.title"/>
+          <p:cNvPr id="15" name="slot.matrix.quadrant.3.title"/>
           <p:cNvSpPr/>
           <p:nvPr/>
         </p:nvSpPr>
@@ -35567,7 +37904,7 @@
                 <a:solidFill>
                   <a:schemeClr val="accent1"/>
                 </a:solidFill>
-                <a:latin typeface="Futura Medium"/>
+                <a:latin typeface="Arial"/>
               </a:rPr>
               <a:t>Quadrant 3</a:t>
             </a:r>
@@ -35576,7 +37913,7 @@
       </p:sp>
       <p:sp>
         <p:nvSpPr>
-          <p:cNvPr id="14" name="slot.matrix.quadrant.3.body"/>
+          <p:cNvPr id="16" name="slot.matrix.quadrant.3.body"/>
           <p:cNvSpPr txBox="1"/>
           <p:nvPr/>
         </p:nvSpPr>
@@ -35611,7 +37948,7 @@
       </p:sp>
       <p:sp>
         <p:nvSpPr>
-          <p:cNvPr id="15" name="slot.matrix.quadrant.4.title"/>
+          <p:cNvPr id="17" name="slot.matrix.quadrant.4.title"/>
           <p:cNvSpPr/>
           <p:nvPr/>
         </p:nvSpPr>
@@ -35654,7 +37991,7 @@
                 <a:solidFill>
                   <a:schemeClr val="accent1"/>
                 </a:solidFill>
-                <a:latin typeface="Futura Medium"/>
+                <a:latin typeface="Arial"/>
               </a:rPr>
               <a:t>Quadrant 4</a:t>
             </a:r>
@@ -35663,7 +38000,7 @@
       </p:sp>
       <p:sp>
         <p:nvSpPr>
-          <p:cNvPr id="16" name="slot.matrix.quadrant.4.body"/>
+          <p:cNvPr id="18" name="slot.matrix.quadrant.4.body"/>
           <p:cNvSpPr txBox="1"/>
           <p:nvPr/>
         </p:nvSpPr>
@@ -35770,7 +38107,130 @@
       </p:sp>
       <p:sp>
         <p:nvSpPr>
-          <p:cNvPr id="4" name="slot.title"/>
+          <p:cNvPr id="4" name="decor">
+            <a:extLst>
+              <a:ext uri="{FF2B5EF4-FFF2-40B4-BE49-F238E27FC236}">
+                <a16:creationId xmlns:a16="http://schemas.microsoft.com/office/drawing/2014/main" id="{9BCA9FA9-DC4A-F7F9-6F98-04EFCF05B790}"/>
+              </a:ext>
+            </a:extLst>
+          </p:cNvPr>
+          <p:cNvSpPr/>
+          <p:nvPr userDrawn="1"/>
+        </p:nvSpPr>
+        <p:spPr>
+          <a:xfrm>
+            <a:off x="-64731" y="246322"/>
+            <a:ext cx="512150" cy="423265"/>
+          </a:xfrm>
+          <a:prstGeom prst="pie">
+            <a:avLst>
+              <a:gd name="adj1" fmla="val 16190032"/>
+              <a:gd name="adj2" fmla="val 5400005"/>
+            </a:avLst>
+          </a:prstGeom>
+          <a:solidFill>
+            <a:schemeClr val="tx2"/>
+          </a:solidFill>
+          <a:ln>
+            <a:solidFill>
+              <a:schemeClr val="tx2"/>
+            </a:solidFill>
+          </a:ln>
+        </p:spPr>
+        <p:style>
+          <a:lnRef idx="2">
+            <a:schemeClr val="accent1">
+              <a:shade val="50000"/>
+            </a:schemeClr>
+          </a:lnRef>
+          <a:fillRef idx="1">
+            <a:schemeClr val="accent1"/>
+          </a:fillRef>
+          <a:effectRef idx="0">
+            <a:schemeClr val="accent1"/>
+          </a:effectRef>
+          <a:fontRef idx="minor">
+            <a:schemeClr val="lt1"/>
+          </a:fontRef>
+        </p:style>
+        <p:txBody>
+          <a:bodyPr lIns="36000" tIns="36000" rIns="36000" bIns="36000" rtlCol="0" anchor="ctr"/>
+          <a:lstStyle/>
+          <a:p>
+            <a:pPr algn="l" rtl="0"/>
+            <a:endParaRPr lang="en-US" sz="1200" b="1">
+              <a:solidFill>
+                <a:schemeClr val="bg1"/>
+              </a:solidFill>
+              <a:latin typeface="Arial" panose="020B0604020202020204" pitchFamily="34" charset="0"/>
+              <a:cs typeface="Arial" panose="020B0604020202020204" pitchFamily="34" charset="0"/>
+            </a:endParaRPr>
+          </a:p>
+        </p:txBody>
+      </p:sp>
+      <p:sp>
+        <p:nvSpPr>
+          <p:cNvPr id="5" name="decor">
+            <a:extLst>
+              <a:ext uri="{FF2B5EF4-FFF2-40B4-BE49-F238E27FC236}">
+                <a16:creationId xmlns:a16="http://schemas.microsoft.com/office/drawing/2014/main" id="{5D3B6E37-9E51-E62C-A843-852BEEBE5F2B}"/>
+              </a:ext>
+            </a:extLst>
+          </p:cNvPr>
+          <p:cNvSpPr/>
+          <p:nvPr userDrawn="1"/>
+        </p:nvSpPr>
+        <p:spPr>
+          <a:xfrm>
+            <a:off x="0" y="247761"/>
+            <a:ext cx="191344" cy="423265"/>
+          </a:xfrm>
+          <a:prstGeom prst="rect">
+            <a:avLst/>
+          </a:prstGeom>
+          <a:solidFill>
+            <a:schemeClr val="tx2"/>
+          </a:solidFill>
+          <a:ln>
+            <a:solidFill>
+              <a:schemeClr val="tx2"/>
+            </a:solidFill>
+          </a:ln>
+        </p:spPr>
+        <p:style>
+          <a:lnRef idx="2">
+            <a:schemeClr val="accent1">
+              <a:shade val="50000"/>
+            </a:schemeClr>
+          </a:lnRef>
+          <a:fillRef idx="1">
+            <a:schemeClr val="accent1"/>
+          </a:fillRef>
+          <a:effectRef idx="0">
+            <a:schemeClr val="accent1"/>
+          </a:effectRef>
+          <a:fontRef idx="minor">
+            <a:schemeClr val="lt1"/>
+          </a:fontRef>
+        </p:style>
+        <p:txBody>
+          <a:bodyPr lIns="36000" tIns="36000" rIns="36000" bIns="36000" rtlCol="0" anchor="ctr"/>
+          <a:lstStyle/>
+          <a:p>
+            <a:pPr algn="l" rtl="0"/>
+            <a:endParaRPr lang="en-US" sz="1200" b="1">
+              <a:solidFill>
+                <a:schemeClr val="bg1"/>
+              </a:solidFill>
+              <a:latin typeface="Arial" panose="020B0604020202020204" pitchFamily="34" charset="0"/>
+              <a:cs typeface="Arial" panose="020B0604020202020204" pitchFamily="34" charset="0"/>
+            </a:endParaRPr>
+          </a:p>
+        </p:txBody>
+      </p:sp>
+      <p:sp>
+        <p:nvSpPr>
+          <p:cNvPr id="6" name="slot.title"/>
           <p:cNvSpPr txBox="1"/>
           <p:nvPr/>
         </p:nvSpPr>
@@ -35794,7 +38254,7 @@
             <a:r>
               <a:rPr sz="2200" b="1">
                 <a:solidFill>
-                  <a:schemeClr val="dk1"/>
+                  <a:schemeClr val="accent2"/>
                 </a:solidFill>
                 <a:latin typeface="Futura Medium"/>
               </a:rPr>
@@ -35805,7 +38265,7 @@
       </p:sp>
       <p:sp>
         <p:nvSpPr>
-          <p:cNvPr id="5" name="decor"/>
+          <p:cNvPr id="7" name="decor"/>
           <p:cNvSpPr/>
           <p:nvPr/>
         </p:nvSpPr>
@@ -35848,7 +38308,7 @@
                 <a:solidFill>
                   <a:schemeClr val="lt1"/>
                 </a:solidFill>
-                <a:latin typeface="Futura Medium"/>
+                <a:latin typeface="Arial"/>
               </a:rPr>
               <a:t/>
             </a:r>
@@ -35857,7 +38317,7 @@
       </p:sp>
       <p:sp>
         <p:nvSpPr>
-          <p:cNvPr id="6" name="decor"/>
+          <p:cNvPr id="8" name="decor"/>
           <p:cNvSpPr/>
           <p:nvPr/>
         </p:nvSpPr>
@@ -35900,7 +38360,7 @@
                 <a:solidFill>
                   <a:schemeClr val="lt1"/>
                 </a:solidFill>
-                <a:latin typeface="Futura Medium"/>
+                <a:latin typeface="Arial"/>
               </a:rPr>
               <a:t/>
             </a:r>
@@ -35909,7 +38369,7 @@
       </p:sp>
       <p:sp>
         <p:nvSpPr>
-          <p:cNvPr id="7" name="slot.matrix.axis-y"/>
+          <p:cNvPr id="9" name="slot.matrix.axis-y"/>
           <p:cNvSpPr txBox="1"/>
           <p:nvPr/>
         </p:nvSpPr>
@@ -35935,7 +38395,7 @@
                 <a:solidFill>
                   <a:schemeClr val="accent6"/>
                 </a:solidFill>
-                <a:latin typeface="Futura Medium"/>
+                <a:latin typeface="Arial"/>
               </a:rPr>
               <a:t>Y axis</a:t>
             </a:r>
@@ -35944,7 +38404,7 @@
       </p:sp>
       <p:sp>
         <p:nvSpPr>
-          <p:cNvPr id="8" name="slot.matrix.axis-x"/>
+          <p:cNvPr id="10" name="slot.matrix.axis-x"/>
           <p:cNvSpPr txBox="1"/>
           <p:nvPr/>
         </p:nvSpPr>
@@ -35970,7 +38430,7 @@
                 <a:solidFill>
                   <a:schemeClr val="accent6"/>
                 </a:solidFill>
-                <a:latin typeface="Futura Medium"/>
+                <a:latin typeface="Arial"/>
               </a:rPr>
               <a:t>X axis</a:t>
             </a:r>
@@ -35979,7 +38439,7 @@
       </p:sp>
       <p:sp>
         <p:nvSpPr>
-          <p:cNvPr id="9" name="slot.matrix.cell.1.title"/>
+          <p:cNvPr id="11" name="slot.matrix.cell.1.title"/>
           <p:cNvSpPr/>
           <p:nvPr/>
         </p:nvSpPr>
@@ -36022,7 +38482,7 @@
                 <a:solidFill>
                   <a:schemeClr val="dk1"/>
                 </a:solidFill>
-                <a:latin typeface="Futura Medium"/>
+                <a:latin typeface="Arial"/>
               </a:rPr>
               <a:t>Cell 1</a:t>
             </a:r>
@@ -36031,7 +38491,7 @@
       </p:sp>
       <p:sp>
         <p:nvSpPr>
-          <p:cNvPr id="10" name="slot.matrix.cell.2.title"/>
+          <p:cNvPr id="12" name="slot.matrix.cell.2.title"/>
           <p:cNvSpPr/>
           <p:nvPr/>
         </p:nvSpPr>
@@ -36074,7 +38534,7 @@
                 <a:solidFill>
                   <a:schemeClr val="dk1"/>
                 </a:solidFill>
-                <a:latin typeface="Futura Medium"/>
+                <a:latin typeface="Arial"/>
               </a:rPr>
               <a:t>Cell 2</a:t>
             </a:r>
@@ -36083,7 +38543,7 @@
       </p:sp>
       <p:sp>
         <p:nvSpPr>
-          <p:cNvPr id="11" name="slot.matrix.cell.3.title"/>
+          <p:cNvPr id="13" name="slot.matrix.cell.3.title"/>
           <p:cNvSpPr/>
           <p:nvPr/>
         </p:nvSpPr>
@@ -36126,7 +38586,7 @@
                 <a:solidFill>
                   <a:schemeClr val="dk1"/>
                 </a:solidFill>
-                <a:latin typeface="Futura Medium"/>
+                <a:latin typeface="Arial"/>
               </a:rPr>
               <a:t>Cell 3</a:t>
             </a:r>
@@ -36135,7 +38595,7 @@
       </p:sp>
       <p:sp>
         <p:nvSpPr>
-          <p:cNvPr id="12" name="slot.matrix.cell.4.title"/>
+          <p:cNvPr id="14" name="slot.matrix.cell.4.title"/>
           <p:cNvSpPr/>
           <p:nvPr/>
         </p:nvSpPr>
@@ -36178,7 +38638,7 @@
                 <a:solidFill>
                   <a:schemeClr val="dk1"/>
                 </a:solidFill>
-                <a:latin typeface="Futura Medium"/>
+                <a:latin typeface="Arial"/>
               </a:rPr>
               <a:t>Cell 4</a:t>
             </a:r>
@@ -36187,7 +38647,7 @@
       </p:sp>
       <p:sp>
         <p:nvSpPr>
-          <p:cNvPr id="13" name="slot.matrix.cell.5.title"/>
+          <p:cNvPr id="15" name="slot.matrix.cell.5.title"/>
           <p:cNvSpPr/>
           <p:nvPr/>
         </p:nvSpPr>
@@ -36230,7 +38690,7 @@
                 <a:solidFill>
                   <a:schemeClr val="dk1"/>
                 </a:solidFill>
-                <a:latin typeface="Futura Medium"/>
+                <a:latin typeface="Arial"/>
               </a:rPr>
               <a:t>Cell 5</a:t>
             </a:r>
@@ -36239,7 +38699,7 @@
       </p:sp>
       <p:sp>
         <p:nvSpPr>
-          <p:cNvPr id="14" name="slot.matrix.cell.6.title"/>
+          <p:cNvPr id="16" name="slot.matrix.cell.6.title"/>
           <p:cNvSpPr/>
           <p:nvPr/>
         </p:nvSpPr>
@@ -36282,7 +38742,7 @@
                 <a:solidFill>
                   <a:schemeClr val="dk1"/>
                 </a:solidFill>
-                <a:latin typeface="Futura Medium"/>
+                <a:latin typeface="Arial"/>
               </a:rPr>
               <a:t>Cell 6</a:t>
             </a:r>
@@ -36291,7 +38751,7 @@
       </p:sp>
       <p:sp>
         <p:nvSpPr>
-          <p:cNvPr id="15" name="slot.matrix.cell.7.title"/>
+          <p:cNvPr id="17" name="slot.matrix.cell.7.title"/>
           <p:cNvSpPr/>
           <p:nvPr/>
         </p:nvSpPr>
@@ -36334,7 +38794,7 @@
                 <a:solidFill>
                   <a:schemeClr val="dk1"/>
                 </a:solidFill>
-                <a:latin typeface="Futura Medium"/>
+                <a:latin typeface="Arial"/>
               </a:rPr>
               <a:t>Cell 7</a:t>
             </a:r>
@@ -36343,7 +38803,7 @@
       </p:sp>
       <p:sp>
         <p:nvSpPr>
-          <p:cNvPr id="16" name="slot.matrix.cell.8.title"/>
+          <p:cNvPr id="18" name="slot.matrix.cell.8.title"/>
           <p:cNvSpPr/>
           <p:nvPr/>
         </p:nvSpPr>
@@ -36386,7 +38846,7 @@
                 <a:solidFill>
                   <a:schemeClr val="dk1"/>
                 </a:solidFill>
-                <a:latin typeface="Futura Medium"/>
+                <a:latin typeface="Arial"/>
               </a:rPr>
               <a:t>Cell 8</a:t>
             </a:r>
@@ -36395,7 +38855,7 @@
       </p:sp>
       <p:sp>
         <p:nvSpPr>
-          <p:cNvPr id="17" name="slot.matrix.cell.9.title"/>
+          <p:cNvPr id="19" name="slot.matrix.cell.9.title"/>
           <p:cNvSpPr/>
           <p:nvPr/>
         </p:nvSpPr>
@@ -36438,7 +38898,7 @@
                 <a:solidFill>
                   <a:schemeClr val="dk1"/>
                 </a:solidFill>
-                <a:latin typeface="Futura Medium"/>
+                <a:latin typeface="Arial"/>
               </a:rPr>
               <a:t>Cell 9</a:t>
             </a:r>
@@ -36519,7 +38979,130 @@
       </p:sp>
       <p:sp>
         <p:nvSpPr>
-          <p:cNvPr id="4" name="slot.title"/>
+          <p:cNvPr id="4" name="decor">
+            <a:extLst>
+              <a:ext uri="{FF2B5EF4-FFF2-40B4-BE49-F238E27FC236}">
+                <a16:creationId xmlns:a16="http://schemas.microsoft.com/office/drawing/2014/main" id="{9BCA9FA9-DC4A-F7F9-6F98-04EFCF05B790}"/>
+              </a:ext>
+            </a:extLst>
+          </p:cNvPr>
+          <p:cNvSpPr/>
+          <p:nvPr userDrawn="1"/>
+        </p:nvSpPr>
+        <p:spPr>
+          <a:xfrm>
+            <a:off x="-64731" y="246322"/>
+            <a:ext cx="512150" cy="423265"/>
+          </a:xfrm>
+          <a:prstGeom prst="pie">
+            <a:avLst>
+              <a:gd name="adj1" fmla="val 16190032"/>
+              <a:gd name="adj2" fmla="val 5400005"/>
+            </a:avLst>
+          </a:prstGeom>
+          <a:solidFill>
+            <a:schemeClr val="tx2"/>
+          </a:solidFill>
+          <a:ln>
+            <a:solidFill>
+              <a:schemeClr val="tx2"/>
+            </a:solidFill>
+          </a:ln>
+        </p:spPr>
+        <p:style>
+          <a:lnRef idx="2">
+            <a:schemeClr val="accent1">
+              <a:shade val="50000"/>
+            </a:schemeClr>
+          </a:lnRef>
+          <a:fillRef idx="1">
+            <a:schemeClr val="accent1"/>
+          </a:fillRef>
+          <a:effectRef idx="0">
+            <a:schemeClr val="accent1"/>
+          </a:effectRef>
+          <a:fontRef idx="minor">
+            <a:schemeClr val="lt1"/>
+          </a:fontRef>
+        </p:style>
+        <p:txBody>
+          <a:bodyPr lIns="36000" tIns="36000" rIns="36000" bIns="36000" rtlCol="0" anchor="ctr"/>
+          <a:lstStyle/>
+          <a:p>
+            <a:pPr algn="l" rtl="0"/>
+            <a:endParaRPr lang="en-US" sz="1200" b="1">
+              <a:solidFill>
+                <a:schemeClr val="bg1"/>
+              </a:solidFill>
+              <a:latin typeface="Arial" panose="020B0604020202020204" pitchFamily="34" charset="0"/>
+              <a:cs typeface="Arial" panose="020B0604020202020204" pitchFamily="34" charset="0"/>
+            </a:endParaRPr>
+          </a:p>
+        </p:txBody>
+      </p:sp>
+      <p:sp>
+        <p:nvSpPr>
+          <p:cNvPr id="5" name="decor">
+            <a:extLst>
+              <a:ext uri="{FF2B5EF4-FFF2-40B4-BE49-F238E27FC236}">
+                <a16:creationId xmlns:a16="http://schemas.microsoft.com/office/drawing/2014/main" id="{5D3B6E37-9E51-E62C-A843-852BEEBE5F2B}"/>
+              </a:ext>
+            </a:extLst>
+          </p:cNvPr>
+          <p:cNvSpPr/>
+          <p:nvPr userDrawn="1"/>
+        </p:nvSpPr>
+        <p:spPr>
+          <a:xfrm>
+            <a:off x="0" y="247761"/>
+            <a:ext cx="191344" cy="423265"/>
+          </a:xfrm>
+          <a:prstGeom prst="rect">
+            <a:avLst/>
+          </a:prstGeom>
+          <a:solidFill>
+            <a:schemeClr val="tx2"/>
+          </a:solidFill>
+          <a:ln>
+            <a:solidFill>
+              <a:schemeClr val="tx2"/>
+            </a:solidFill>
+          </a:ln>
+        </p:spPr>
+        <p:style>
+          <a:lnRef idx="2">
+            <a:schemeClr val="accent1">
+              <a:shade val="50000"/>
+            </a:schemeClr>
+          </a:lnRef>
+          <a:fillRef idx="1">
+            <a:schemeClr val="accent1"/>
+          </a:fillRef>
+          <a:effectRef idx="0">
+            <a:schemeClr val="accent1"/>
+          </a:effectRef>
+          <a:fontRef idx="minor">
+            <a:schemeClr val="lt1"/>
+          </a:fontRef>
+        </p:style>
+        <p:txBody>
+          <a:bodyPr lIns="36000" tIns="36000" rIns="36000" bIns="36000" rtlCol="0" anchor="ctr"/>
+          <a:lstStyle/>
+          <a:p>
+            <a:pPr algn="l" rtl="0"/>
+            <a:endParaRPr lang="en-US" sz="1200" b="1">
+              <a:solidFill>
+                <a:schemeClr val="bg1"/>
+              </a:solidFill>
+              <a:latin typeface="Arial" panose="020B0604020202020204" pitchFamily="34" charset="0"/>
+              <a:cs typeface="Arial" panose="020B0604020202020204" pitchFamily="34" charset="0"/>
+            </a:endParaRPr>
+          </a:p>
+        </p:txBody>
+      </p:sp>
+      <p:sp>
+        <p:nvSpPr>
+          <p:cNvPr id="6" name="slot.title"/>
           <p:cNvSpPr txBox="1"/>
           <p:nvPr/>
         </p:nvSpPr>
@@ -36543,7 +39126,7 @@
             <a:r>
               <a:rPr sz="2200" b="1">
                 <a:solidFill>
-                  <a:schemeClr val="dk1"/>
+                  <a:schemeClr val="accent2"/>
                 </a:solidFill>
                 <a:latin typeface="Futura Medium"/>
               </a:rPr>
@@ -36554,7 +39137,7 @@
       </p:sp>
       <p:sp>
         <p:nvSpPr>
-          <p:cNvPr id="5" name="decor"/>
+          <p:cNvPr id="7" name="decor"/>
           <p:cNvSpPr/>
           <p:nvPr/>
         </p:nvSpPr>
@@ -36595,7 +39178,7 @@
                 <a:solidFill>
                   <a:schemeClr val="accent2"/>
                 </a:solidFill>
-                <a:latin typeface="Futura Medium"/>
+                <a:latin typeface="Arial"/>
               </a:rPr>
               <a:t>“</a:t>
             </a:r>
@@ -36604,7 +39187,7 @@
       </p:sp>
       <p:sp>
         <p:nvSpPr>
-          <p:cNvPr id="6" name="slot.quote"/>
+          <p:cNvPr id="8" name="slot.quote"/>
           <p:cNvSpPr txBox="1"/>
           <p:nvPr/>
         </p:nvSpPr>
@@ -36630,7 +39213,7 @@
                 <a:solidFill>
                   <a:schemeClr val="accent1"/>
                 </a:solidFill>
-                <a:latin typeface="Futura Medium"/>
+                <a:latin typeface="Arial"/>
               </a:rPr>
               <a:t>A compelling pull-quote that captures the key insight from the work.</a:t>
             </a:r>
@@ -36639,7 +39222,7 @@
       </p:sp>
       <p:sp>
         <p:nvSpPr>
-          <p:cNvPr id="7" name="slot.attribution"/>
+          <p:cNvPr id="9" name="slot.attribution"/>
           <p:cNvSpPr txBox="1"/>
           <p:nvPr/>
         </p:nvSpPr>
@@ -36746,7 +39329,130 @@
       </p:sp>
       <p:sp>
         <p:nvSpPr>
-          <p:cNvPr id="4" name="slot.title"/>
+          <p:cNvPr id="4" name="decor">
+            <a:extLst>
+              <a:ext uri="{FF2B5EF4-FFF2-40B4-BE49-F238E27FC236}">
+                <a16:creationId xmlns:a16="http://schemas.microsoft.com/office/drawing/2014/main" id="{9BCA9FA9-DC4A-F7F9-6F98-04EFCF05B790}"/>
+              </a:ext>
+            </a:extLst>
+          </p:cNvPr>
+          <p:cNvSpPr/>
+          <p:nvPr userDrawn="1"/>
+        </p:nvSpPr>
+        <p:spPr>
+          <a:xfrm>
+            <a:off x="-64731" y="246322"/>
+            <a:ext cx="512150" cy="423265"/>
+          </a:xfrm>
+          <a:prstGeom prst="pie">
+            <a:avLst>
+              <a:gd name="adj1" fmla="val 16190032"/>
+              <a:gd name="adj2" fmla="val 5400005"/>
+            </a:avLst>
+          </a:prstGeom>
+          <a:solidFill>
+            <a:schemeClr val="tx2"/>
+          </a:solidFill>
+          <a:ln>
+            <a:solidFill>
+              <a:schemeClr val="tx2"/>
+            </a:solidFill>
+          </a:ln>
+        </p:spPr>
+        <p:style>
+          <a:lnRef idx="2">
+            <a:schemeClr val="accent1">
+              <a:shade val="50000"/>
+            </a:schemeClr>
+          </a:lnRef>
+          <a:fillRef idx="1">
+            <a:schemeClr val="accent1"/>
+          </a:fillRef>
+          <a:effectRef idx="0">
+            <a:schemeClr val="accent1"/>
+          </a:effectRef>
+          <a:fontRef idx="minor">
+            <a:schemeClr val="lt1"/>
+          </a:fontRef>
+        </p:style>
+        <p:txBody>
+          <a:bodyPr lIns="36000" tIns="36000" rIns="36000" bIns="36000" rtlCol="0" anchor="ctr"/>
+          <a:lstStyle/>
+          <a:p>
+            <a:pPr algn="l" rtl="0"/>
+            <a:endParaRPr lang="en-US" sz="1200" b="1">
+              <a:solidFill>
+                <a:schemeClr val="bg1"/>
+              </a:solidFill>
+              <a:latin typeface="Arial" panose="020B0604020202020204" pitchFamily="34" charset="0"/>
+              <a:cs typeface="Arial" panose="020B0604020202020204" pitchFamily="34" charset="0"/>
+            </a:endParaRPr>
+          </a:p>
+        </p:txBody>
+      </p:sp>
+      <p:sp>
+        <p:nvSpPr>
+          <p:cNvPr id="5" name="decor">
+            <a:extLst>
+              <a:ext uri="{FF2B5EF4-FFF2-40B4-BE49-F238E27FC236}">
+                <a16:creationId xmlns:a16="http://schemas.microsoft.com/office/drawing/2014/main" id="{5D3B6E37-9E51-E62C-A843-852BEEBE5F2B}"/>
+              </a:ext>
+            </a:extLst>
+          </p:cNvPr>
+          <p:cNvSpPr/>
+          <p:nvPr userDrawn="1"/>
+        </p:nvSpPr>
+        <p:spPr>
+          <a:xfrm>
+            <a:off x="0" y="247761"/>
+            <a:ext cx="191344" cy="423265"/>
+          </a:xfrm>
+          <a:prstGeom prst="rect">
+            <a:avLst/>
+          </a:prstGeom>
+          <a:solidFill>
+            <a:schemeClr val="tx2"/>
+          </a:solidFill>
+          <a:ln>
+            <a:solidFill>
+              <a:schemeClr val="tx2"/>
+            </a:solidFill>
+          </a:ln>
+        </p:spPr>
+        <p:style>
+          <a:lnRef idx="2">
+            <a:schemeClr val="accent1">
+              <a:shade val="50000"/>
+            </a:schemeClr>
+          </a:lnRef>
+          <a:fillRef idx="1">
+            <a:schemeClr val="accent1"/>
+          </a:fillRef>
+          <a:effectRef idx="0">
+            <a:schemeClr val="accent1"/>
+          </a:effectRef>
+          <a:fontRef idx="minor">
+            <a:schemeClr val="lt1"/>
+          </a:fontRef>
+        </p:style>
+        <p:txBody>
+          <a:bodyPr lIns="36000" tIns="36000" rIns="36000" bIns="36000" rtlCol="0" anchor="ctr"/>
+          <a:lstStyle/>
+          <a:p>
+            <a:pPr algn="l" rtl="0"/>
+            <a:endParaRPr lang="en-US" sz="1200" b="1">
+              <a:solidFill>
+                <a:schemeClr val="bg1"/>
+              </a:solidFill>
+              <a:latin typeface="Arial" panose="020B0604020202020204" pitchFamily="34" charset="0"/>
+              <a:cs typeface="Arial" panose="020B0604020202020204" pitchFamily="34" charset="0"/>
+            </a:endParaRPr>
+          </a:p>
+        </p:txBody>
+      </p:sp>
+      <p:sp>
+        <p:nvSpPr>
+          <p:cNvPr id="6" name="slot.title"/>
           <p:cNvSpPr txBox="1"/>
           <p:nvPr/>
         </p:nvSpPr>
@@ -36770,7 +39476,7 @@
             <a:r>
               <a:rPr sz="2200" b="1">
                 <a:solidFill>
-                  <a:schemeClr val="dk1"/>
+                  <a:schemeClr val="accent2"/>
                 </a:solidFill>
                 <a:latin typeface="Futura Medium"/>
               </a:rPr>
@@ -36781,7 +39487,7 @@
       </p:sp>
       <p:graphicFrame>
         <p:nvGraphicFramePr>
-          <p:cNvPr id="5" name="slot.table"/>
+          <p:cNvPr id="7" name="slot.table"/>
           <p:cNvGraphicFramePr>
             <a:graphicFrameLocks noGrp="1"/>
           </p:cNvGraphicFramePr>
@@ -36814,7 +39520,7 @@
                           <a:solidFill>
                             <a:schemeClr val="lt1"/>
                           </a:solidFill>
-                          <a:latin typeface="Futura Medium"/>
+                          <a:latin typeface="Arial"/>
                         </a:rPr>
                         <a:t>Workstream</a:t>
                       </a:r>
@@ -36836,7 +39542,7 @@
                           <a:solidFill>
                             <a:schemeClr val="lt1"/>
                           </a:solidFill>
-                          <a:latin typeface="Futura Medium"/>
+                          <a:latin typeface="Arial"/>
                         </a:rPr>
                         <a:t>Detail</a:t>
                       </a:r>
@@ -36858,7 +39564,7 @@
                           <a:solidFill>
                             <a:schemeClr val="lt1"/>
                           </a:solidFill>
-                          <a:latin typeface="Futura Medium"/>
+                          <a:latin typeface="Arial"/>
                         </a:rPr>
                         <a:t>Owner</a:t>
                       </a:r>
@@ -36880,7 +39586,7 @@
                           <a:solidFill>
                             <a:schemeClr val="lt1"/>
                           </a:solidFill>
-                          <a:latin typeface="Futura Medium"/>
+                          <a:latin typeface="Arial"/>
                         </a:rPr>
                         <a:t>Status</a:t>
                       </a:r>
@@ -37311,7 +40017,130 @@
       </p:sp>
       <p:sp>
         <p:nvSpPr>
-          <p:cNvPr id="4" name="slot.title"/>
+          <p:cNvPr id="4" name="decor">
+            <a:extLst>
+              <a:ext uri="{FF2B5EF4-FFF2-40B4-BE49-F238E27FC236}">
+                <a16:creationId xmlns:a16="http://schemas.microsoft.com/office/drawing/2014/main" id="{9BCA9FA9-DC4A-F7F9-6F98-04EFCF05B790}"/>
+              </a:ext>
+            </a:extLst>
+          </p:cNvPr>
+          <p:cNvSpPr/>
+          <p:nvPr userDrawn="1"/>
+        </p:nvSpPr>
+        <p:spPr>
+          <a:xfrm>
+            <a:off x="-64731" y="246322"/>
+            <a:ext cx="512150" cy="423265"/>
+          </a:xfrm>
+          <a:prstGeom prst="pie">
+            <a:avLst>
+              <a:gd name="adj1" fmla="val 16190032"/>
+              <a:gd name="adj2" fmla="val 5400005"/>
+            </a:avLst>
+          </a:prstGeom>
+          <a:solidFill>
+            <a:schemeClr val="tx2"/>
+          </a:solidFill>
+          <a:ln>
+            <a:solidFill>
+              <a:schemeClr val="tx2"/>
+            </a:solidFill>
+          </a:ln>
+        </p:spPr>
+        <p:style>
+          <a:lnRef idx="2">
+            <a:schemeClr val="accent1">
+              <a:shade val="50000"/>
+            </a:schemeClr>
+          </a:lnRef>
+          <a:fillRef idx="1">
+            <a:schemeClr val="accent1"/>
+          </a:fillRef>
+          <a:effectRef idx="0">
+            <a:schemeClr val="accent1"/>
+          </a:effectRef>
+          <a:fontRef idx="minor">
+            <a:schemeClr val="lt1"/>
+          </a:fontRef>
+        </p:style>
+        <p:txBody>
+          <a:bodyPr lIns="36000" tIns="36000" rIns="36000" bIns="36000" rtlCol="0" anchor="ctr"/>
+          <a:lstStyle/>
+          <a:p>
+            <a:pPr algn="l" rtl="0"/>
+            <a:endParaRPr lang="en-US" sz="1200" b="1">
+              <a:solidFill>
+                <a:schemeClr val="bg1"/>
+              </a:solidFill>
+              <a:latin typeface="Arial" panose="020B0604020202020204" pitchFamily="34" charset="0"/>
+              <a:cs typeface="Arial" panose="020B0604020202020204" pitchFamily="34" charset="0"/>
+            </a:endParaRPr>
+          </a:p>
+        </p:txBody>
+      </p:sp>
+      <p:sp>
+        <p:nvSpPr>
+          <p:cNvPr id="5" name="decor">
+            <a:extLst>
+              <a:ext uri="{FF2B5EF4-FFF2-40B4-BE49-F238E27FC236}">
+                <a16:creationId xmlns:a16="http://schemas.microsoft.com/office/drawing/2014/main" id="{5D3B6E37-9E51-E62C-A843-852BEEBE5F2B}"/>
+              </a:ext>
+            </a:extLst>
+          </p:cNvPr>
+          <p:cNvSpPr/>
+          <p:nvPr userDrawn="1"/>
+        </p:nvSpPr>
+        <p:spPr>
+          <a:xfrm>
+            <a:off x="0" y="247761"/>
+            <a:ext cx="191344" cy="423265"/>
+          </a:xfrm>
+          <a:prstGeom prst="rect">
+            <a:avLst/>
+          </a:prstGeom>
+          <a:solidFill>
+            <a:schemeClr val="tx2"/>
+          </a:solidFill>
+          <a:ln>
+            <a:solidFill>
+              <a:schemeClr val="tx2"/>
+            </a:solidFill>
+          </a:ln>
+        </p:spPr>
+        <p:style>
+          <a:lnRef idx="2">
+            <a:schemeClr val="accent1">
+              <a:shade val="50000"/>
+            </a:schemeClr>
+          </a:lnRef>
+          <a:fillRef idx="1">
+            <a:schemeClr val="accent1"/>
+          </a:fillRef>
+          <a:effectRef idx="0">
+            <a:schemeClr val="accent1"/>
+          </a:effectRef>
+          <a:fontRef idx="minor">
+            <a:schemeClr val="lt1"/>
+          </a:fontRef>
+        </p:style>
+        <p:txBody>
+          <a:bodyPr lIns="36000" tIns="36000" rIns="36000" bIns="36000" rtlCol="0" anchor="ctr"/>
+          <a:lstStyle/>
+          <a:p>
+            <a:pPr algn="l" rtl="0"/>
+            <a:endParaRPr lang="en-US" sz="1200" b="1">
+              <a:solidFill>
+                <a:schemeClr val="bg1"/>
+              </a:solidFill>
+              <a:latin typeface="Arial" panose="020B0604020202020204" pitchFamily="34" charset="0"/>
+              <a:cs typeface="Arial" panose="020B0604020202020204" pitchFamily="34" charset="0"/>
+            </a:endParaRPr>
+          </a:p>
+        </p:txBody>
+      </p:sp>
+      <p:sp>
+        <p:nvSpPr>
+          <p:cNvPr id="6" name="slot.title"/>
           <p:cNvSpPr txBox="1"/>
           <p:nvPr/>
         </p:nvSpPr>
@@ -37335,7 +40164,7 @@
             <a:r>
               <a:rPr sz="2200" b="1">
                 <a:solidFill>
-                  <a:schemeClr val="dk1"/>
+                  <a:schemeClr val="accent2"/>
                 </a:solidFill>
                 <a:latin typeface="Futura Medium"/>
               </a:rPr>
@@ -37346,7 +40175,7 @@
       </p:sp>
       <p:graphicFrame>
         <p:nvGraphicFramePr>
-          <p:cNvPr id="5" name="slot.table"/>
+          <p:cNvPr id="7" name="slot.table"/>
           <p:cNvGraphicFramePr>
             <a:graphicFrameLocks noGrp="1"/>
           </p:cNvGraphicFramePr>
@@ -37379,7 +40208,7 @@
                           <a:solidFill>
                             <a:schemeClr val="lt1"/>
                           </a:solidFill>
-                          <a:latin typeface="Futura Medium"/>
+                          <a:latin typeface="Arial"/>
                         </a:rPr>
                         <a:t>Criterion</a:t>
                       </a:r>
@@ -37401,7 +40230,7 @@
                           <a:solidFill>
                             <a:schemeClr val="lt1"/>
                           </a:solidFill>
-                          <a:latin typeface="Futura Medium"/>
+                          <a:latin typeface="Arial"/>
                         </a:rPr>
                         <a:t>Option A</a:t>
                       </a:r>
@@ -37423,7 +40252,7 @@
                           <a:solidFill>
                             <a:schemeClr val="lt1"/>
                           </a:solidFill>
-                          <a:latin typeface="Futura Medium"/>
+                          <a:latin typeface="Arial"/>
                         </a:rPr>
                         <a:t>Option B</a:t>
                       </a:r>
@@ -37445,7 +40274,7 @@
                           <a:solidFill>
                             <a:schemeClr val="lt1"/>
                           </a:solidFill>
-                          <a:latin typeface="Futura Medium"/>
+                          <a:latin typeface="Arial"/>
                         </a:rPr>
                         <a:t>Option C</a:t>
                       </a:r>
@@ -38015,7 +40844,130 @@
       </p:sp>
       <p:sp>
         <p:nvSpPr>
-          <p:cNvPr id="4" name="slot.title"/>
+          <p:cNvPr id="4" name="decor">
+            <a:extLst>
+              <a:ext uri="{FF2B5EF4-FFF2-40B4-BE49-F238E27FC236}">
+                <a16:creationId xmlns:a16="http://schemas.microsoft.com/office/drawing/2014/main" id="{9BCA9FA9-DC4A-F7F9-6F98-04EFCF05B790}"/>
+              </a:ext>
+            </a:extLst>
+          </p:cNvPr>
+          <p:cNvSpPr/>
+          <p:nvPr userDrawn="1"/>
+        </p:nvSpPr>
+        <p:spPr>
+          <a:xfrm>
+            <a:off x="-64731" y="246322"/>
+            <a:ext cx="512150" cy="423265"/>
+          </a:xfrm>
+          <a:prstGeom prst="pie">
+            <a:avLst>
+              <a:gd name="adj1" fmla="val 16190032"/>
+              <a:gd name="adj2" fmla="val 5400005"/>
+            </a:avLst>
+          </a:prstGeom>
+          <a:solidFill>
+            <a:schemeClr val="tx2"/>
+          </a:solidFill>
+          <a:ln>
+            <a:solidFill>
+              <a:schemeClr val="tx2"/>
+            </a:solidFill>
+          </a:ln>
+        </p:spPr>
+        <p:style>
+          <a:lnRef idx="2">
+            <a:schemeClr val="accent1">
+              <a:shade val="50000"/>
+            </a:schemeClr>
+          </a:lnRef>
+          <a:fillRef idx="1">
+            <a:schemeClr val="accent1"/>
+          </a:fillRef>
+          <a:effectRef idx="0">
+            <a:schemeClr val="accent1"/>
+          </a:effectRef>
+          <a:fontRef idx="minor">
+            <a:schemeClr val="lt1"/>
+          </a:fontRef>
+        </p:style>
+        <p:txBody>
+          <a:bodyPr lIns="36000" tIns="36000" rIns="36000" bIns="36000" rtlCol="0" anchor="ctr"/>
+          <a:lstStyle/>
+          <a:p>
+            <a:pPr algn="l" rtl="0"/>
+            <a:endParaRPr lang="en-US" sz="1200" b="1">
+              <a:solidFill>
+                <a:schemeClr val="bg1"/>
+              </a:solidFill>
+              <a:latin typeface="Arial" panose="020B0604020202020204" pitchFamily="34" charset="0"/>
+              <a:cs typeface="Arial" panose="020B0604020202020204" pitchFamily="34" charset="0"/>
+            </a:endParaRPr>
+          </a:p>
+        </p:txBody>
+      </p:sp>
+      <p:sp>
+        <p:nvSpPr>
+          <p:cNvPr id="5" name="decor">
+            <a:extLst>
+              <a:ext uri="{FF2B5EF4-FFF2-40B4-BE49-F238E27FC236}">
+                <a16:creationId xmlns:a16="http://schemas.microsoft.com/office/drawing/2014/main" id="{5D3B6E37-9E51-E62C-A843-852BEEBE5F2B}"/>
+              </a:ext>
+            </a:extLst>
+          </p:cNvPr>
+          <p:cNvSpPr/>
+          <p:nvPr userDrawn="1"/>
+        </p:nvSpPr>
+        <p:spPr>
+          <a:xfrm>
+            <a:off x="0" y="247761"/>
+            <a:ext cx="191344" cy="423265"/>
+          </a:xfrm>
+          <a:prstGeom prst="rect">
+            <a:avLst/>
+          </a:prstGeom>
+          <a:solidFill>
+            <a:schemeClr val="tx2"/>
+          </a:solidFill>
+          <a:ln>
+            <a:solidFill>
+              <a:schemeClr val="tx2"/>
+            </a:solidFill>
+          </a:ln>
+        </p:spPr>
+        <p:style>
+          <a:lnRef idx="2">
+            <a:schemeClr val="accent1">
+              <a:shade val="50000"/>
+            </a:schemeClr>
+          </a:lnRef>
+          <a:fillRef idx="1">
+            <a:schemeClr val="accent1"/>
+          </a:fillRef>
+          <a:effectRef idx="0">
+            <a:schemeClr val="accent1"/>
+          </a:effectRef>
+          <a:fontRef idx="minor">
+            <a:schemeClr val="lt1"/>
+          </a:fontRef>
+        </p:style>
+        <p:txBody>
+          <a:bodyPr lIns="36000" tIns="36000" rIns="36000" bIns="36000" rtlCol="0" anchor="ctr"/>
+          <a:lstStyle/>
+          <a:p>
+            <a:pPr algn="l" rtl="0"/>
+            <a:endParaRPr lang="en-US" sz="1200" b="1">
+              <a:solidFill>
+                <a:schemeClr val="bg1"/>
+              </a:solidFill>
+              <a:latin typeface="Arial" panose="020B0604020202020204" pitchFamily="34" charset="0"/>
+              <a:cs typeface="Arial" panose="020B0604020202020204" pitchFamily="34" charset="0"/>
+            </a:endParaRPr>
+          </a:p>
+        </p:txBody>
+      </p:sp>
+      <p:sp>
+        <p:nvSpPr>
+          <p:cNvPr id="6" name="slot.title"/>
           <p:cNvSpPr txBox="1"/>
           <p:nvPr/>
         </p:nvSpPr>
@@ -38039,7 +40991,7 @@
             <a:r>
               <a:rPr sz="2200" b="1">
                 <a:solidFill>
-                  <a:schemeClr val="dk1"/>
+                  <a:schemeClr val="accent2"/>
                 </a:solidFill>
                 <a:latin typeface="Futura Medium"/>
               </a:rPr>
@@ -38050,7 +41002,7 @@
       </p:sp>
       <p:graphicFrame>
         <p:nvGraphicFramePr>
-          <p:cNvPr id="5" name="slot.table"/>
+          <p:cNvPr id="7" name="slot.table"/>
           <p:cNvGraphicFramePr>
             <a:graphicFrameLocks noGrp="1"/>
           </p:cNvGraphicFramePr>
@@ -38083,7 +41035,7 @@
                           <a:solidFill>
                             <a:schemeClr val="lt1"/>
                           </a:solidFill>
-                          <a:latin typeface="Futura Medium"/>
+                          <a:latin typeface="Arial"/>
                         </a:rPr>
                         <a:t>Column 1</a:t>
                       </a:r>
@@ -38105,7 +41057,7 @@
                           <a:solidFill>
                             <a:schemeClr val="lt1"/>
                           </a:solidFill>
-                          <a:latin typeface="Futura Medium"/>
+                          <a:latin typeface="Arial"/>
                         </a:rPr>
                         <a:t>Column 2</a:t>
                       </a:r>
@@ -38127,7 +41079,7 @@
                           <a:solidFill>
                             <a:schemeClr val="lt1"/>
                           </a:solidFill>
-                          <a:latin typeface="Futura Medium"/>
+                          <a:latin typeface="Arial"/>
                         </a:rPr>
                         <a:t>Column 3</a:t>
                       </a:r>
@@ -38149,7 +41101,7 @@
                           <a:solidFill>
                             <a:schemeClr val="lt1"/>
                           </a:solidFill>
-                          <a:latin typeface="Futura Medium"/>
+                          <a:latin typeface="Arial"/>
                         </a:rPr>
                         <a:t>Column 4</a:t>
                       </a:r>
